--- a/docs/SoPA.pptx
+++ b/docs/SoPA.pptx
@@ -5,7 +5,7 @@
     <p:sldMasterId id="2147483648" r:id="rId1"/>
   </p:sldMasterIdLst>
   <p:notesMasterIdLst>
-    <p:notesMasterId r:id="rId16"/>
+    <p:notesMasterId r:id="rId22"/>
   </p:notesMasterIdLst>
   <p:sldIdLst>
     <p:sldId id="269" r:id="rId2"/>
@@ -22,6 +22,12 @@
     <p:sldId id="276" r:id="rId13"/>
     <p:sldId id="281" r:id="rId14"/>
     <p:sldId id="279" r:id="rId15"/>
+    <p:sldId id="287" r:id="rId16"/>
+    <p:sldId id="288" r:id="rId17"/>
+    <p:sldId id="282" r:id="rId18"/>
+    <p:sldId id="285" r:id="rId19"/>
+    <p:sldId id="284" r:id="rId20"/>
+    <p:sldId id="286" r:id="rId21"/>
   </p:sldIdLst>
   <p:sldSz cx="12192000" cy="6858000"/>
   <p:notesSz cx="6858000" cy="9144000"/>
@@ -646,6 +652,368 @@
               <a:rPr lang="en-US" altLang="ja"/>
               <a:t>6</a:t>
             </a:fld>
+            <a:endParaRPr/>
+          </a:p>
+        </p:txBody>
+      </p:sp>
+    </p:spTree>
+  </p:cSld>
+  <p:clrMapOvr>
+    <a:masterClrMapping/>
+  </p:clrMapOvr>
+</p:notes>
+</file>
+
+<file path=ppt/notesSlides/notesSlide2.xml><?xml version="1.0" encoding="utf-8"?>
+<p:notes xmlns:a="http://schemas.openxmlformats.org/drawingml/2006/main" xmlns:r="http://schemas.openxmlformats.org/officeDocument/2006/relationships" xmlns:p="http://schemas.openxmlformats.org/presentationml/2006/main" showMasterSp="0" showMasterPhAnim="0">
+  <p:cSld>
+    <p:spTree>
+      <p:nvGrpSpPr>
+        <p:cNvPr id="1" name="Shape 243"/>
+        <p:cNvGrpSpPr/>
+        <p:nvPr/>
+      </p:nvGrpSpPr>
+      <p:grpSpPr>
+        <a:xfrm>
+          <a:off x="0" y="0"/>
+          <a:ext cx="0" cy="0"/>
+          <a:chOff x="0" y="0"/>
+          <a:chExt cx="0" cy="0"/>
+        </a:xfrm>
+      </p:grpSpPr>
+      <p:sp>
+        <p:nvSpPr>
+          <p:cNvPr id="244" name="Google Shape;244;g3fabc81da82_0_21:notes"/>
+          <p:cNvSpPr>
+            <a:spLocks noGrp="1" noRot="1" noChangeAspect="1"/>
+          </p:cNvSpPr>
+          <p:nvPr>
+            <p:ph type="sldImg" idx="2"/>
+          </p:nvPr>
+        </p:nvSpPr>
+        <p:spPr>
+          <a:xfrm>
+            <a:off x="685800" y="1143000"/>
+            <a:ext cx="5486400" cy="3086100"/>
+          </a:xfrm>
+          <a:custGeom>
+            <a:avLst/>
+            <a:gdLst/>
+            <a:ahLst/>
+            <a:cxnLst/>
+            <a:rect l="l" t="t" r="r" b="b"/>
+            <a:pathLst>
+              <a:path w="120000" h="120000" extrusionOk="0">
+                <a:moveTo>
+                  <a:pt x="0" y="0"/>
+                </a:moveTo>
+                <a:lnTo>
+                  <a:pt x="120000" y="0"/>
+                </a:lnTo>
+                <a:lnTo>
+                  <a:pt x="120000" y="120000"/>
+                </a:lnTo>
+                <a:lnTo>
+                  <a:pt x="0" y="120000"/>
+                </a:lnTo>
+                <a:close/>
+              </a:path>
+            </a:pathLst>
+          </a:custGeom>
+        </p:spPr>
+      </p:sp>
+      <p:sp>
+        <p:nvSpPr>
+          <p:cNvPr id="245" name="Google Shape;245;g3fabc81da82_0_21:notes"/>
+          <p:cNvSpPr txBox="1">
+            <a:spLocks noGrp="1"/>
+          </p:cNvSpPr>
+          <p:nvPr>
+            <p:ph type="body" idx="1"/>
+          </p:nvPr>
+        </p:nvSpPr>
+        <p:spPr>
+          <a:xfrm>
+            <a:off x="685800" y="4400550"/>
+            <a:ext cx="5486400" cy="3600600"/>
+          </a:xfrm>
+          <a:prstGeom prst="rect">
+            <a:avLst/>
+          </a:prstGeom>
+        </p:spPr>
+        <p:txBody>
+          <a:bodyPr spcFirstLastPara="1" wrap="square" lIns="91425" tIns="91425" rIns="91425" bIns="91425" anchor="t" anchorCtr="0">
+            <a:noAutofit/>
+          </a:bodyPr>
+          <a:lstStyle/>
+          <a:p>
+            <a:pPr marL="0" lvl="0" indent="0" algn="l" rtl="0">
+              <a:spcBef>
+                <a:spcPts val="0"/>
+              </a:spcBef>
+              <a:spcAft>
+                <a:spcPts val="0"/>
+              </a:spcAft>
+              <a:buNone/>
+            </a:pPr>
+            <a:endParaRPr/>
+          </a:p>
+        </p:txBody>
+      </p:sp>
+      <p:sp>
+        <p:nvSpPr>
+          <p:cNvPr id="246" name="Google Shape;246;g3fabc81da82_0_21:notes"/>
+          <p:cNvSpPr txBox="1">
+            <a:spLocks noGrp="1"/>
+          </p:cNvSpPr>
+          <p:nvPr>
+            <p:ph type="sldNum" idx="12"/>
+          </p:nvPr>
+        </p:nvSpPr>
+        <p:spPr>
+          <a:xfrm>
+            <a:off x="3884613" y="8685213"/>
+            <a:ext cx="2971800" cy="458700"/>
+          </a:xfrm>
+          <a:prstGeom prst="rect">
+            <a:avLst/>
+          </a:prstGeom>
+          <a:noFill/>
+          <a:ln>
+            <a:noFill/>
+          </a:ln>
+        </p:spPr>
+        <p:txBody>
+          <a:bodyPr spcFirstLastPara="1" wrap="square" lIns="91425" tIns="91425" rIns="91425" bIns="91425" anchor="ctr" anchorCtr="0">
+            <a:noAutofit/>
+          </a:bodyPr>
+          <a:lstStyle/>
+          <a:p>
+            <a:pPr marL="0" lvl="0" indent="0" algn="l" rtl="0">
+              <a:spcBef>
+                <a:spcPts val="0"/>
+              </a:spcBef>
+              <a:spcAft>
+                <a:spcPts val="0"/>
+              </a:spcAft>
+              <a:buClr>
+                <a:srgbClr val="000000"/>
+              </a:buClr>
+              <a:buFont typeface="Arial"/>
+              <a:buNone/>
+            </a:pPr>
+            <a:fld id="{00000000-1234-1234-1234-123412341234}" type="slidenum">
+              <a:rPr lang="en-US" altLang="ja"/>
+              <a:t>18</a:t>
+            </a:fld>
+            <a:endParaRPr/>
+          </a:p>
+        </p:txBody>
+      </p:sp>
+    </p:spTree>
+  </p:cSld>
+  <p:clrMapOvr>
+    <a:masterClrMapping/>
+  </p:clrMapOvr>
+</p:notes>
+</file>
+
+<file path=ppt/notesSlides/notesSlide3.xml><?xml version="1.0" encoding="utf-8"?>
+<p:notes xmlns:a="http://schemas.openxmlformats.org/drawingml/2006/main" xmlns:r="http://schemas.openxmlformats.org/officeDocument/2006/relationships" xmlns:p="http://schemas.openxmlformats.org/presentationml/2006/main" showMasterSp="0" showMasterPhAnim="0">
+  <p:cSld>
+    <p:spTree>
+      <p:nvGrpSpPr>
+        <p:cNvPr id="1" name="Shape 279"/>
+        <p:cNvGrpSpPr/>
+        <p:nvPr/>
+      </p:nvGrpSpPr>
+      <p:grpSpPr>
+        <a:xfrm>
+          <a:off x="0" y="0"/>
+          <a:ext cx="0" cy="0"/>
+          <a:chOff x="0" y="0"/>
+          <a:chExt cx="0" cy="0"/>
+        </a:xfrm>
+      </p:grpSpPr>
+      <p:sp>
+        <p:nvSpPr>
+          <p:cNvPr id="280" name="Google Shape;280;g3f754b0405b_0_23:notes"/>
+          <p:cNvSpPr>
+            <a:spLocks noGrp="1" noRot="1" noChangeAspect="1"/>
+          </p:cNvSpPr>
+          <p:nvPr>
+            <p:ph type="sldImg" idx="2"/>
+          </p:nvPr>
+        </p:nvSpPr>
+        <p:spPr>
+          <a:xfrm>
+            <a:off x="381000" y="685800"/>
+            <a:ext cx="6096000" cy="3429000"/>
+          </a:xfrm>
+          <a:custGeom>
+            <a:avLst/>
+            <a:gdLst/>
+            <a:ahLst/>
+            <a:cxnLst/>
+            <a:rect l="l" t="t" r="r" b="b"/>
+            <a:pathLst>
+              <a:path w="120000" h="120000" extrusionOk="0">
+                <a:moveTo>
+                  <a:pt x="0" y="0"/>
+                </a:moveTo>
+                <a:lnTo>
+                  <a:pt x="120000" y="0"/>
+                </a:lnTo>
+                <a:lnTo>
+                  <a:pt x="120000" y="120000"/>
+                </a:lnTo>
+                <a:lnTo>
+                  <a:pt x="0" y="120000"/>
+                </a:lnTo>
+                <a:close/>
+              </a:path>
+            </a:pathLst>
+          </a:custGeom>
+        </p:spPr>
+      </p:sp>
+      <p:sp>
+        <p:nvSpPr>
+          <p:cNvPr id="281" name="Google Shape;281;g3f754b0405b_0_23:notes"/>
+          <p:cNvSpPr txBox="1">
+            <a:spLocks noGrp="1"/>
+          </p:cNvSpPr>
+          <p:nvPr>
+            <p:ph type="body" idx="1"/>
+          </p:nvPr>
+        </p:nvSpPr>
+        <p:spPr>
+          <a:xfrm>
+            <a:off x="685800" y="4343400"/>
+            <a:ext cx="5486400" cy="4114800"/>
+          </a:xfrm>
+          <a:prstGeom prst="rect">
+            <a:avLst/>
+          </a:prstGeom>
+        </p:spPr>
+        <p:txBody>
+          <a:bodyPr spcFirstLastPara="1" wrap="square" lIns="91425" tIns="91425" rIns="91425" bIns="91425" anchor="t" anchorCtr="0">
+            <a:noAutofit/>
+          </a:bodyPr>
+          <a:lstStyle/>
+          <a:p>
+            <a:pPr marL="0" lvl="0" indent="0" algn="l" rtl="0">
+              <a:spcBef>
+                <a:spcPts val="0"/>
+              </a:spcBef>
+              <a:spcAft>
+                <a:spcPts val="0"/>
+              </a:spcAft>
+              <a:buNone/>
+            </a:pPr>
+            <a:endParaRPr/>
+          </a:p>
+        </p:txBody>
+      </p:sp>
+    </p:spTree>
+  </p:cSld>
+  <p:clrMapOvr>
+    <a:masterClrMapping/>
+  </p:clrMapOvr>
+</p:notes>
+</file>
+
+<file path=ppt/notesSlides/notesSlide4.xml><?xml version="1.0" encoding="utf-8"?>
+<p:notes xmlns:a="http://schemas.openxmlformats.org/drawingml/2006/main" xmlns:r="http://schemas.openxmlformats.org/officeDocument/2006/relationships" xmlns:p="http://schemas.openxmlformats.org/presentationml/2006/main" showMasterSp="0" showMasterPhAnim="0">
+  <p:cSld>
+    <p:spTree>
+      <p:nvGrpSpPr>
+        <p:cNvPr id="1" name="Shape 254"/>
+        <p:cNvGrpSpPr/>
+        <p:nvPr/>
+      </p:nvGrpSpPr>
+      <p:grpSpPr>
+        <a:xfrm>
+          <a:off x="0" y="0"/>
+          <a:ext cx="0" cy="0"/>
+          <a:chOff x="0" y="0"/>
+          <a:chExt cx="0" cy="0"/>
+        </a:xfrm>
+      </p:grpSpPr>
+      <p:sp>
+        <p:nvSpPr>
+          <p:cNvPr id="255" name="Google Shape;255;g3f9ca0fcf7d_0_5:notes"/>
+          <p:cNvSpPr>
+            <a:spLocks noGrp="1" noRot="1" noChangeAspect="1"/>
+          </p:cNvSpPr>
+          <p:nvPr>
+            <p:ph type="sldImg" idx="2"/>
+          </p:nvPr>
+        </p:nvSpPr>
+        <p:spPr>
+          <a:xfrm>
+            <a:off x="381000" y="685800"/>
+            <a:ext cx="6096000" cy="3429000"/>
+          </a:xfrm>
+          <a:custGeom>
+            <a:avLst/>
+            <a:gdLst/>
+            <a:ahLst/>
+            <a:cxnLst/>
+            <a:rect l="l" t="t" r="r" b="b"/>
+            <a:pathLst>
+              <a:path w="120000" h="120000" extrusionOk="0">
+                <a:moveTo>
+                  <a:pt x="0" y="0"/>
+                </a:moveTo>
+                <a:lnTo>
+                  <a:pt x="120000" y="0"/>
+                </a:lnTo>
+                <a:lnTo>
+                  <a:pt x="120000" y="120000"/>
+                </a:lnTo>
+                <a:lnTo>
+                  <a:pt x="0" y="120000"/>
+                </a:lnTo>
+                <a:close/>
+              </a:path>
+            </a:pathLst>
+          </a:custGeom>
+        </p:spPr>
+      </p:sp>
+      <p:sp>
+        <p:nvSpPr>
+          <p:cNvPr id="256" name="Google Shape;256;g3f9ca0fcf7d_0_5:notes"/>
+          <p:cNvSpPr txBox="1">
+            <a:spLocks noGrp="1"/>
+          </p:cNvSpPr>
+          <p:nvPr>
+            <p:ph type="body" idx="1"/>
+          </p:nvPr>
+        </p:nvSpPr>
+        <p:spPr>
+          <a:xfrm>
+            <a:off x="685800" y="4343400"/>
+            <a:ext cx="5486400" cy="4114800"/>
+          </a:xfrm>
+          <a:prstGeom prst="rect">
+            <a:avLst/>
+          </a:prstGeom>
+        </p:spPr>
+        <p:txBody>
+          <a:bodyPr spcFirstLastPara="1" wrap="square" lIns="91425" tIns="91425" rIns="91425" bIns="91425" anchor="t" anchorCtr="0">
+            <a:noAutofit/>
+          </a:bodyPr>
+          <a:lstStyle/>
+          <a:p>
+            <a:pPr marL="0" lvl="0" indent="0" algn="l" rtl="0">
+              <a:spcBef>
+                <a:spcPts val="0"/>
+              </a:spcBef>
+              <a:spcAft>
+                <a:spcPts val="0"/>
+              </a:spcAft>
+              <a:buNone/>
+            </a:pPr>
             <a:endParaRPr/>
           </a:p>
         </p:txBody>
@@ -8761,6 +9129,875 @@
 </p:sld>
 </file>
 
+<file path=ppt/slides/slide15.xml><?xml version="1.0" encoding="utf-8"?>
+<p:sld xmlns:a="http://schemas.openxmlformats.org/drawingml/2006/main" xmlns:r="http://schemas.openxmlformats.org/officeDocument/2006/relationships" xmlns:p="http://schemas.openxmlformats.org/presentationml/2006/main">
+  <p:cSld>
+    <p:spTree>
+      <p:nvGrpSpPr>
+        <p:cNvPr id="1" name=""/>
+        <p:cNvGrpSpPr/>
+        <p:nvPr/>
+      </p:nvGrpSpPr>
+      <p:grpSpPr>
+        <a:xfrm>
+          <a:off x="0" y="0"/>
+          <a:ext cx="0" cy="0"/>
+          <a:chOff x="0" y="0"/>
+          <a:chExt cx="0" cy="0"/>
+        </a:xfrm>
+      </p:grpSpPr>
+      <p:sp>
+        <p:nvSpPr>
+          <p:cNvPr id="2" name="タイトル 1">
+            <a:extLst>
+              <a:ext uri="{FF2B5EF4-FFF2-40B4-BE49-F238E27FC236}">
+                <a16:creationId xmlns:a16="http://schemas.microsoft.com/office/drawing/2014/main" id="{C7E1BF66-0631-45F4-AF51-0030CE132663}"/>
+              </a:ext>
+            </a:extLst>
+          </p:cNvPr>
+          <p:cNvSpPr>
+            <a:spLocks noGrp="1"/>
+          </p:cNvSpPr>
+          <p:nvPr>
+            <p:ph type="title"/>
+          </p:nvPr>
+        </p:nvSpPr>
+        <p:spPr/>
+        <p:txBody>
+          <a:bodyPr/>
+          <a:lstStyle/>
+          <a:p>
+            <a:r>
+              <a:rPr kumimoji="1" lang="ja-JP" altLang="en-US" dirty="0"/>
+              <a:t>ネットリスト情報</a:t>
+            </a:r>
+          </a:p>
+        </p:txBody>
+      </p:sp>
+      <p:sp>
+        <p:nvSpPr>
+          <p:cNvPr id="3" name="テキスト プレースホルダー 2">
+            <a:extLst>
+              <a:ext uri="{FF2B5EF4-FFF2-40B4-BE49-F238E27FC236}">
+                <a16:creationId xmlns:a16="http://schemas.microsoft.com/office/drawing/2014/main" id="{8E0FDCA2-1749-48E2-9A35-D37608649CE2}"/>
+              </a:ext>
+            </a:extLst>
+          </p:cNvPr>
+          <p:cNvSpPr>
+            <a:spLocks noGrp="1"/>
+          </p:cNvSpPr>
+          <p:nvPr>
+            <p:ph type="body" idx="1"/>
+          </p:nvPr>
+        </p:nvSpPr>
+        <p:spPr/>
+        <p:txBody>
+          <a:bodyPr/>
+          <a:lstStyle/>
+          <a:p>
+            <a:endParaRPr kumimoji="1" lang="ja-JP" altLang="en-US"/>
+          </a:p>
+        </p:txBody>
+      </p:sp>
+    </p:spTree>
+    <p:extLst>
+      <p:ext uri="{BB962C8B-B14F-4D97-AF65-F5344CB8AC3E}">
+        <p14:creationId xmlns:p14="http://schemas.microsoft.com/office/powerpoint/2010/main" val="3964600009"/>
+      </p:ext>
+    </p:extLst>
+  </p:cSld>
+  <p:clrMapOvr>
+    <a:masterClrMapping/>
+  </p:clrMapOvr>
+</p:sld>
+</file>
+
+<file path=ppt/slides/slide16.xml><?xml version="1.0" encoding="utf-8"?>
+<p:sld xmlns:a="http://schemas.openxmlformats.org/drawingml/2006/main" xmlns:r="http://schemas.openxmlformats.org/officeDocument/2006/relationships" xmlns:p="http://schemas.openxmlformats.org/presentationml/2006/main">
+  <p:cSld>
+    <p:spTree>
+      <p:nvGrpSpPr>
+        <p:cNvPr id="1" name=""/>
+        <p:cNvGrpSpPr/>
+        <p:nvPr/>
+      </p:nvGrpSpPr>
+      <p:grpSpPr>
+        <a:xfrm>
+          <a:off x="0" y="0"/>
+          <a:ext cx="0" cy="0"/>
+          <a:chOff x="0" y="0"/>
+          <a:chExt cx="0" cy="0"/>
+        </a:xfrm>
+      </p:grpSpPr>
+      <p:sp>
+        <p:nvSpPr>
+          <p:cNvPr id="2" name="タイトル 1">
+            <a:extLst>
+              <a:ext uri="{FF2B5EF4-FFF2-40B4-BE49-F238E27FC236}">
+                <a16:creationId xmlns:a16="http://schemas.microsoft.com/office/drawing/2014/main" id="{6FEEA61F-4ED5-4478-93A4-77E75F64F9A4}"/>
+              </a:ext>
+            </a:extLst>
+          </p:cNvPr>
+          <p:cNvSpPr>
+            <a:spLocks noGrp="1"/>
+          </p:cNvSpPr>
+          <p:nvPr>
+            <p:ph type="title"/>
+          </p:nvPr>
+        </p:nvSpPr>
+        <p:spPr/>
+        <p:txBody>
+          <a:bodyPr/>
+          <a:lstStyle/>
+          <a:p>
+            <a:endParaRPr kumimoji="1" lang="ja-JP" altLang="en-US"/>
+          </a:p>
+        </p:txBody>
+      </p:sp>
+      <p:pic>
+        <p:nvPicPr>
+          <p:cNvPr id="4" name="図 3">
+            <a:extLst>
+              <a:ext uri="{FF2B5EF4-FFF2-40B4-BE49-F238E27FC236}">
+                <a16:creationId xmlns:a16="http://schemas.microsoft.com/office/drawing/2014/main" id="{F8B35591-67AD-421A-95A6-EA934FC9C631}"/>
+              </a:ext>
+            </a:extLst>
+          </p:cNvPr>
+          <p:cNvPicPr>
+            <a:picLocks noChangeAspect="1"/>
+          </p:cNvPicPr>
+          <p:nvPr/>
+        </p:nvPicPr>
+        <p:blipFill>
+          <a:blip r:embed="rId2"/>
+          <a:stretch>
+            <a:fillRect/>
+          </a:stretch>
+        </p:blipFill>
+        <p:spPr>
+          <a:xfrm>
+            <a:off x="286247" y="1252227"/>
+            <a:ext cx="11179534" cy="5276700"/>
+          </a:xfrm>
+          <a:prstGeom prst="rect">
+            <a:avLst/>
+          </a:prstGeom>
+        </p:spPr>
+      </p:pic>
+    </p:spTree>
+    <p:extLst>
+      <p:ext uri="{BB962C8B-B14F-4D97-AF65-F5344CB8AC3E}">
+        <p14:creationId xmlns:p14="http://schemas.microsoft.com/office/powerpoint/2010/main" val="1033662271"/>
+      </p:ext>
+    </p:extLst>
+  </p:cSld>
+  <p:clrMapOvr>
+    <a:masterClrMapping/>
+  </p:clrMapOvr>
+</p:sld>
+</file>
+
+<file path=ppt/slides/slide17.xml><?xml version="1.0" encoding="utf-8"?>
+<p:sld xmlns:a="http://schemas.openxmlformats.org/drawingml/2006/main" xmlns:r="http://schemas.openxmlformats.org/officeDocument/2006/relationships" xmlns:p="http://schemas.openxmlformats.org/presentationml/2006/main">
+  <p:cSld>
+    <p:spTree>
+      <p:nvGrpSpPr>
+        <p:cNvPr id="1" name=""/>
+        <p:cNvGrpSpPr/>
+        <p:nvPr/>
+      </p:nvGrpSpPr>
+      <p:grpSpPr>
+        <a:xfrm>
+          <a:off x="0" y="0"/>
+          <a:ext cx="0" cy="0"/>
+          <a:chOff x="0" y="0"/>
+          <a:chExt cx="0" cy="0"/>
+        </a:xfrm>
+      </p:grpSpPr>
+      <p:sp>
+        <p:nvSpPr>
+          <p:cNvPr id="2" name="タイトル 1">
+            <a:extLst>
+              <a:ext uri="{FF2B5EF4-FFF2-40B4-BE49-F238E27FC236}">
+                <a16:creationId xmlns:a16="http://schemas.microsoft.com/office/drawing/2014/main" id="{C4A178BC-81E9-4668-9F79-488C1276F488}"/>
+              </a:ext>
+            </a:extLst>
+          </p:cNvPr>
+          <p:cNvSpPr>
+            <a:spLocks noGrp="1"/>
+          </p:cNvSpPr>
+          <p:nvPr>
+            <p:ph type="title"/>
+          </p:nvPr>
+        </p:nvSpPr>
+        <p:spPr/>
+        <p:txBody>
+          <a:bodyPr/>
+          <a:lstStyle/>
+          <a:p>
+            <a:r>
+              <a:rPr kumimoji="1" lang="ja-JP" altLang="en-US" dirty="0"/>
+              <a:t>配置配線結果</a:t>
+            </a:r>
+          </a:p>
+        </p:txBody>
+      </p:sp>
+      <p:sp>
+        <p:nvSpPr>
+          <p:cNvPr id="3" name="テキスト プレースホルダー 2">
+            <a:extLst>
+              <a:ext uri="{FF2B5EF4-FFF2-40B4-BE49-F238E27FC236}">
+                <a16:creationId xmlns:a16="http://schemas.microsoft.com/office/drawing/2014/main" id="{67BC8974-3204-4D78-A333-ECBFB736A22D}"/>
+              </a:ext>
+            </a:extLst>
+          </p:cNvPr>
+          <p:cNvSpPr>
+            <a:spLocks noGrp="1"/>
+          </p:cNvSpPr>
+          <p:nvPr>
+            <p:ph type="body" idx="1"/>
+          </p:nvPr>
+        </p:nvSpPr>
+        <p:spPr/>
+        <p:txBody>
+          <a:bodyPr/>
+          <a:lstStyle/>
+          <a:p>
+            <a:endParaRPr kumimoji="1" lang="ja-JP" altLang="en-US"/>
+          </a:p>
+        </p:txBody>
+      </p:sp>
+    </p:spTree>
+    <p:extLst>
+      <p:ext uri="{BB962C8B-B14F-4D97-AF65-F5344CB8AC3E}">
+        <p14:creationId xmlns:p14="http://schemas.microsoft.com/office/powerpoint/2010/main" val="2603611837"/>
+      </p:ext>
+    </p:extLst>
+  </p:cSld>
+  <p:clrMapOvr>
+    <a:masterClrMapping/>
+  </p:clrMapOvr>
+</p:sld>
+</file>
+
+<file path=ppt/slides/slide18.xml><?xml version="1.0" encoding="utf-8"?>
+<p:sld xmlns:a="http://schemas.openxmlformats.org/drawingml/2006/main" xmlns:r="http://schemas.openxmlformats.org/officeDocument/2006/relationships" xmlns:p="http://schemas.openxmlformats.org/presentationml/2006/main">
+  <p:cSld>
+    <p:spTree>
+      <p:nvGrpSpPr>
+        <p:cNvPr id="1" name="Shape 247"/>
+        <p:cNvGrpSpPr/>
+        <p:nvPr/>
+      </p:nvGrpSpPr>
+      <p:grpSpPr>
+        <a:xfrm>
+          <a:off x="0" y="0"/>
+          <a:ext cx="0" cy="0"/>
+          <a:chOff x="0" y="0"/>
+          <a:chExt cx="0" cy="0"/>
+        </a:xfrm>
+      </p:grpSpPr>
+      <p:sp>
+        <p:nvSpPr>
+          <p:cNvPr id="248" name="Google Shape;248;p26"/>
+          <p:cNvSpPr txBox="1">
+            <a:spLocks noGrp="1"/>
+          </p:cNvSpPr>
+          <p:nvPr>
+            <p:ph type="title"/>
+          </p:nvPr>
+        </p:nvSpPr>
+        <p:spPr>
+          <a:xfrm>
+            <a:off x="144780" y="167005"/>
+            <a:ext cx="12047220" cy="732400"/>
+          </a:xfrm>
+          <a:prstGeom prst="rect">
+            <a:avLst/>
+          </a:prstGeom>
+        </p:spPr>
+        <p:txBody>
+          <a:bodyPr spcFirstLastPara="1" vert="horz" wrap="square" lIns="91433" tIns="45700" rIns="91433" bIns="45700" rtlCol="0" anchor="ctr" anchorCtr="0">
+            <a:normAutofit/>
+          </a:bodyPr>
+          <a:lstStyle/>
+          <a:p>
+            <a:r>
+              <a:rPr lang="ja" dirty="0"/>
+              <a:t>配線構造を作成</a:t>
+            </a:r>
+            <a:r>
+              <a:rPr lang="en-US" altLang="ja" sz="2800" dirty="0"/>
+              <a:t>(41</a:t>
+            </a:r>
+            <a:r>
+              <a:rPr lang="ja-JP" altLang="en-US" sz="2800" dirty="0"/>
+              <a:t>回路それぞれで最小構造を作成</a:t>
+            </a:r>
+            <a:r>
+              <a:rPr lang="en-US" altLang="ja" sz="2800" dirty="0"/>
+              <a:t>)</a:t>
+            </a:r>
+            <a:endParaRPr dirty="0"/>
+          </a:p>
+        </p:txBody>
+      </p:sp>
+      <p:sp>
+        <p:nvSpPr>
+          <p:cNvPr id="249" name="Google Shape;249;p26"/>
+          <p:cNvSpPr txBox="1">
+            <a:spLocks noGrp="1"/>
+          </p:cNvSpPr>
+          <p:nvPr>
+            <p:ph type="body" idx="1"/>
+          </p:nvPr>
+        </p:nvSpPr>
+        <p:spPr>
+          <a:xfrm>
+            <a:off x="8170467" y="1774367"/>
+            <a:ext cx="3844400" cy="3725600"/>
+          </a:xfrm>
+          <a:prstGeom prst="rect">
+            <a:avLst/>
+          </a:prstGeom>
+        </p:spPr>
+        <p:txBody>
+          <a:bodyPr spcFirstLastPara="1" vert="horz" wrap="square" lIns="91433" tIns="45700" rIns="91433" bIns="45700" rtlCol="0" anchor="t" anchorCtr="0">
+            <a:normAutofit/>
+          </a:bodyPr>
+          <a:lstStyle/>
+          <a:p>
+            <a:pPr marL="0" indent="0">
+              <a:buNone/>
+            </a:pPr>
+            <a:r>
+              <a:rPr lang="ja" altLang="en-US" sz="2400">
+                <a:solidFill>
+                  <a:schemeClr val="dk1"/>
+                </a:solidFill>
+              </a:rPr>
+              <a:t>ネットリストと同じ構成で配線構造を準備</a:t>
+            </a:r>
+            <a:endParaRPr sz="2400">
+              <a:solidFill>
+                <a:schemeClr val="dk1"/>
+              </a:solidFill>
+            </a:endParaRPr>
+          </a:p>
+          <a:p>
+            <a:pPr marL="0" indent="0">
+              <a:spcBef>
+                <a:spcPts val="1600"/>
+              </a:spcBef>
+              <a:buNone/>
+            </a:pPr>
+            <a:endParaRPr sz="2400">
+              <a:solidFill>
+                <a:schemeClr val="dk1"/>
+              </a:solidFill>
+            </a:endParaRPr>
+          </a:p>
+          <a:p>
+            <a:pPr marL="0" indent="0">
+              <a:spcBef>
+                <a:spcPts val="1600"/>
+              </a:spcBef>
+              <a:buNone/>
+            </a:pPr>
+            <a:endParaRPr sz="2400">
+              <a:solidFill>
+                <a:schemeClr val="dk1"/>
+              </a:solidFill>
+            </a:endParaRPr>
+          </a:p>
+          <a:p>
+            <a:pPr marL="0" indent="0">
+              <a:spcBef>
+                <a:spcPts val="1600"/>
+              </a:spcBef>
+              <a:spcAft>
+                <a:spcPts val="1600"/>
+              </a:spcAft>
+              <a:buNone/>
+            </a:pPr>
+            <a:r>
+              <a:rPr lang="ja" altLang="en-US" sz="2400">
+                <a:solidFill>
+                  <a:schemeClr val="dk1"/>
+                </a:solidFill>
+              </a:rPr>
+              <a:t>この構造は配置可能箇所数が最小</a:t>
+            </a:r>
+            <a:endParaRPr sz="2400">
+              <a:solidFill>
+                <a:schemeClr val="dk1"/>
+              </a:solidFill>
+            </a:endParaRPr>
+          </a:p>
+        </p:txBody>
+      </p:sp>
+      <p:pic>
+        <p:nvPicPr>
+          <p:cNvPr id="250" name="Google Shape;250;p26"/>
+          <p:cNvPicPr preferRelativeResize="0"/>
+          <p:nvPr/>
+        </p:nvPicPr>
+        <p:blipFill>
+          <a:blip r:embed="rId3">
+            <a:alphaModFix/>
+          </a:blip>
+          <a:stretch>
+            <a:fillRect/>
+          </a:stretch>
+        </p:blipFill>
+        <p:spPr>
+          <a:xfrm>
+            <a:off x="44301" y="1155075"/>
+            <a:ext cx="4572801" cy="4317304"/>
+          </a:xfrm>
+          <a:prstGeom prst="rect">
+            <a:avLst/>
+          </a:prstGeom>
+          <a:noFill/>
+          <a:ln>
+            <a:noFill/>
+          </a:ln>
+        </p:spPr>
+      </p:pic>
+      <p:sp>
+        <p:nvSpPr>
+          <p:cNvPr id="251" name="Google Shape;251;p26"/>
+          <p:cNvSpPr/>
+          <p:nvPr/>
+        </p:nvSpPr>
+        <p:spPr>
+          <a:xfrm>
+            <a:off x="5115512" y="3004475"/>
+            <a:ext cx="319600" cy="732400"/>
+          </a:xfrm>
+          <a:prstGeom prst="rightArrow">
+            <a:avLst>
+              <a:gd name="adj1" fmla="val 50000"/>
+              <a:gd name="adj2" fmla="val 50000"/>
+            </a:avLst>
+          </a:prstGeom>
+          <a:solidFill>
+            <a:schemeClr val="lt2"/>
+          </a:solidFill>
+          <a:ln w="7150" cap="flat" cmpd="sng">
+            <a:solidFill>
+              <a:schemeClr val="dk2"/>
+            </a:solidFill>
+            <a:prstDash val="solid"/>
+            <a:round/>
+            <a:headEnd type="none" w="sm" len="sm"/>
+            <a:tailEnd type="none" w="sm" len="sm"/>
+          </a:ln>
+        </p:spPr>
+        <p:txBody>
+          <a:bodyPr spcFirstLastPara="1" wrap="square" lIns="91433" tIns="91433" rIns="91433" bIns="91433" anchor="ctr" anchorCtr="0">
+            <a:noAutofit/>
+          </a:bodyPr>
+          <a:lstStyle/>
+          <a:p>
+            <a:pPr algn="ctr"/>
+            <a:endParaRPr sz="1467">
+              <a:latin typeface="Meiryo"/>
+              <a:ea typeface="Meiryo"/>
+              <a:cs typeface="Meiryo"/>
+              <a:sym typeface="Meiryo"/>
+            </a:endParaRPr>
+          </a:p>
+        </p:txBody>
+      </p:sp>
+      <p:sp>
+        <p:nvSpPr>
+          <p:cNvPr id="252" name="Google Shape;252;p26"/>
+          <p:cNvSpPr txBox="1">
+            <a:spLocks noGrp="1"/>
+          </p:cNvSpPr>
+          <p:nvPr>
+            <p:ph type="body" idx="1"/>
+          </p:nvPr>
+        </p:nvSpPr>
+        <p:spPr>
+          <a:xfrm>
+            <a:off x="1268700" y="6058884"/>
+            <a:ext cx="2730400" cy="507200"/>
+          </a:xfrm>
+          <a:prstGeom prst="rect">
+            <a:avLst/>
+          </a:prstGeom>
+        </p:spPr>
+        <p:txBody>
+          <a:bodyPr spcFirstLastPara="1" vert="horz" wrap="square" lIns="91433" tIns="45700" rIns="91433" bIns="45700" rtlCol="0" anchor="t" anchorCtr="0">
+            <a:normAutofit fontScale="25000" lnSpcReduction="20000"/>
+          </a:bodyPr>
+          <a:lstStyle/>
+          <a:p>
+            <a:pPr marL="0" indent="0">
+              <a:spcAft>
+                <a:spcPts val="1600"/>
+              </a:spcAft>
+              <a:buNone/>
+            </a:pPr>
+            <a:r>
+              <a:rPr lang="ja"/>
+              <a:t>回路ネットリスト</a:t>
+            </a:r>
+            <a:endParaRPr/>
+          </a:p>
+        </p:txBody>
+      </p:sp>
+      <p:sp>
+        <p:nvSpPr>
+          <p:cNvPr id="253" name="Google Shape;253;p26"/>
+          <p:cNvSpPr txBox="1">
+            <a:spLocks noGrp="1"/>
+          </p:cNvSpPr>
+          <p:nvPr>
+            <p:ph type="body" idx="1"/>
+          </p:nvPr>
+        </p:nvSpPr>
+        <p:spPr>
+          <a:xfrm>
+            <a:off x="5854225" y="6081084"/>
+            <a:ext cx="1801200" cy="462800"/>
+          </a:xfrm>
+          <a:prstGeom prst="rect">
+            <a:avLst/>
+          </a:prstGeom>
+        </p:spPr>
+        <p:txBody>
+          <a:bodyPr spcFirstLastPara="1" vert="horz" wrap="square" lIns="91433" tIns="45700" rIns="91433" bIns="45700" rtlCol="0" anchor="t" anchorCtr="0">
+            <a:normAutofit fontScale="25000" lnSpcReduction="20000"/>
+          </a:bodyPr>
+          <a:lstStyle/>
+          <a:p>
+            <a:pPr marL="0" indent="0">
+              <a:lnSpc>
+                <a:spcPct val="70000"/>
+              </a:lnSpc>
+              <a:spcAft>
+                <a:spcPts val="1600"/>
+              </a:spcAft>
+              <a:buNone/>
+            </a:pPr>
+            <a:r>
+              <a:rPr lang="ja" altLang="en-US" sz="2400"/>
+              <a:t>配線構造</a:t>
+            </a:r>
+            <a:endParaRPr sz="2400"/>
+          </a:p>
+        </p:txBody>
+      </p:sp>
+      <p:pic>
+        <p:nvPicPr>
+          <p:cNvPr id="254" name="Google Shape;254;p26"/>
+          <p:cNvPicPr preferRelativeResize="0"/>
+          <p:nvPr/>
+        </p:nvPicPr>
+        <p:blipFill>
+          <a:blip r:embed="rId4">
+            <a:alphaModFix/>
+          </a:blip>
+          <a:stretch>
+            <a:fillRect/>
+          </a:stretch>
+        </p:blipFill>
+        <p:spPr>
+          <a:xfrm>
+            <a:off x="5597354" y="1080761"/>
+            <a:ext cx="1801201" cy="4818971"/>
+          </a:xfrm>
+          <a:prstGeom prst="rect">
+            <a:avLst/>
+          </a:prstGeom>
+          <a:noFill/>
+          <a:ln>
+            <a:noFill/>
+          </a:ln>
+        </p:spPr>
+      </p:pic>
+      <p:sp>
+        <p:nvSpPr>
+          <p:cNvPr id="255" name="Google Shape;255;p26"/>
+          <p:cNvSpPr txBox="1">
+            <a:spLocks noGrp="1"/>
+          </p:cNvSpPr>
+          <p:nvPr>
+            <p:ph type="sldNum" idx="12"/>
+          </p:nvPr>
+        </p:nvSpPr>
+        <p:spPr>
+          <a:xfrm>
+            <a:off x="9250680" y="6334760"/>
+            <a:ext cx="2743200" cy="365200"/>
+          </a:xfrm>
+          <a:prstGeom prst="rect">
+            <a:avLst/>
+          </a:prstGeom>
+        </p:spPr>
+        <p:txBody>
+          <a:bodyPr spcFirstLastPara="1" vert="horz" wrap="square" lIns="91433" tIns="45700" rIns="91433" bIns="45700" rtlCol="0" anchor="ctr" anchorCtr="0">
+            <a:normAutofit/>
+          </a:bodyPr>
+          <a:lstStyle/>
+          <a:p>
+            <a:pPr>
+              <a:buClr>
+                <a:srgbClr val="000000"/>
+              </a:buClr>
+            </a:pPr>
+            <a:fld id="{00000000-1234-1234-1234-123412341234}" type="slidenum">
+              <a:rPr lang="en-US" altLang="ja"/>
+              <a:pPr>
+                <a:buClr>
+                  <a:srgbClr val="000000"/>
+                </a:buClr>
+              </a:pPr>
+              <a:t>18</a:t>
+            </a:fld>
+            <a:endParaRPr/>
+          </a:p>
+        </p:txBody>
+      </p:sp>
+    </p:spTree>
+  </p:cSld>
+  <p:clrMapOvr>
+    <a:masterClrMapping/>
+  </p:clrMapOvr>
+</p:sld>
+</file>
+
+<file path=ppt/slides/slide19.xml><?xml version="1.0" encoding="utf-8"?>
+<p:sld xmlns:a="http://schemas.openxmlformats.org/drawingml/2006/main" xmlns:r="http://schemas.openxmlformats.org/officeDocument/2006/relationships" xmlns:p="http://schemas.openxmlformats.org/presentationml/2006/main">
+  <p:cSld>
+    <p:spTree>
+      <p:nvGrpSpPr>
+        <p:cNvPr id="1" name="Shape 282"/>
+        <p:cNvGrpSpPr/>
+        <p:nvPr/>
+      </p:nvGrpSpPr>
+      <p:grpSpPr>
+        <a:xfrm>
+          <a:off x="0" y="0"/>
+          <a:ext cx="0" cy="0"/>
+          <a:chOff x="0" y="0"/>
+          <a:chExt cx="0" cy="0"/>
+        </a:xfrm>
+      </p:grpSpPr>
+      <p:sp>
+        <p:nvSpPr>
+          <p:cNvPr id="283" name="Google Shape;283;p28"/>
+          <p:cNvSpPr txBox="1">
+            <a:spLocks noGrp="1"/>
+          </p:cNvSpPr>
+          <p:nvPr>
+            <p:ph type="title"/>
+          </p:nvPr>
+        </p:nvSpPr>
+        <p:spPr>
+          <a:xfrm>
+            <a:off x="144780" y="167005"/>
+            <a:ext cx="10397600" cy="732400"/>
+          </a:xfrm>
+          <a:prstGeom prst="rect">
+            <a:avLst/>
+          </a:prstGeom>
+        </p:spPr>
+        <p:txBody>
+          <a:bodyPr spcFirstLastPara="1" vert="horz" wrap="square" lIns="91433" tIns="45700" rIns="91433" bIns="45700" rtlCol="0" anchor="ctr" anchorCtr="0">
+            <a:normAutofit/>
+          </a:bodyPr>
+          <a:lstStyle/>
+          <a:p>
+            <a:r>
+              <a:rPr lang="ja" dirty="0"/>
+              <a:t>結果</a:t>
+            </a:r>
+            <a:endParaRPr dirty="0"/>
+          </a:p>
+        </p:txBody>
+      </p:sp>
+      <p:pic>
+        <p:nvPicPr>
+          <p:cNvPr id="284" name="Google Shape;284;p28"/>
+          <p:cNvPicPr preferRelativeResize="0"/>
+          <p:nvPr/>
+        </p:nvPicPr>
+        <p:blipFill rotWithShape="1">
+          <a:blip r:embed="rId3">
+            <a:alphaModFix/>
+          </a:blip>
+          <a:srcRect l="478" t="606"/>
+          <a:stretch/>
+        </p:blipFill>
+        <p:spPr>
+          <a:xfrm>
+            <a:off x="227700" y="1339667"/>
+            <a:ext cx="8146931" cy="5404832"/>
+          </a:xfrm>
+          <a:prstGeom prst="rect">
+            <a:avLst/>
+          </a:prstGeom>
+          <a:noFill/>
+          <a:ln>
+            <a:noFill/>
+          </a:ln>
+        </p:spPr>
+      </p:pic>
+      <p:pic>
+        <p:nvPicPr>
+          <p:cNvPr id="285" name="Google Shape;285;p28"/>
+          <p:cNvPicPr preferRelativeResize="0"/>
+          <p:nvPr/>
+        </p:nvPicPr>
+        <p:blipFill>
+          <a:blip r:embed="rId4">
+            <a:alphaModFix/>
+          </a:blip>
+          <a:stretch>
+            <a:fillRect/>
+          </a:stretch>
+        </p:blipFill>
+        <p:spPr>
+          <a:xfrm>
+            <a:off x="7659667" y="94334"/>
+            <a:ext cx="4421068" cy="2477465"/>
+          </a:xfrm>
+          <a:prstGeom prst="rect">
+            <a:avLst/>
+          </a:prstGeom>
+          <a:noFill/>
+          <a:ln>
+            <a:noFill/>
+          </a:ln>
+        </p:spPr>
+      </p:pic>
+      <p:sp>
+        <p:nvSpPr>
+          <p:cNvPr id="286" name="Google Shape;286;p28"/>
+          <p:cNvSpPr txBox="1"/>
+          <p:nvPr/>
+        </p:nvSpPr>
+        <p:spPr>
+          <a:xfrm>
+            <a:off x="8450567" y="3883567"/>
+            <a:ext cx="3582400" cy="1263200"/>
+          </a:xfrm>
+          <a:prstGeom prst="rect">
+            <a:avLst/>
+          </a:prstGeom>
+          <a:noFill/>
+          <a:ln>
+            <a:noFill/>
+          </a:ln>
+        </p:spPr>
+        <p:txBody>
+          <a:bodyPr spcFirstLastPara="1" wrap="square" lIns="121900" tIns="121900" rIns="121900" bIns="121900" anchor="t" anchorCtr="0">
+            <a:noAutofit/>
+          </a:bodyPr>
+          <a:lstStyle/>
+          <a:p>
+            <a:r>
+              <a:rPr lang="ja" altLang="en-US" sz="2400">
+                <a:solidFill>
+                  <a:schemeClr val="dk1"/>
+                </a:solidFill>
+              </a:rPr>
+              <a:t>回路規模が大きくなるほど</a:t>
+            </a:r>
+            <a:r>
+              <a:rPr lang="en-US" altLang="ja" sz="2400">
+                <a:solidFill>
+                  <a:schemeClr val="dk1"/>
+                </a:solidFill>
+              </a:rPr>
+              <a:t>SoPA</a:t>
+            </a:r>
+            <a:r>
+              <a:rPr lang="ja" altLang="en-US" sz="2400">
+                <a:solidFill>
+                  <a:schemeClr val="dk1"/>
+                </a:solidFill>
+              </a:rPr>
+              <a:t>の優位性は</a:t>
+            </a:r>
+            <a:endParaRPr sz="2400">
+              <a:solidFill>
+                <a:schemeClr val="dk1"/>
+              </a:solidFill>
+            </a:endParaRPr>
+          </a:p>
+          <a:p>
+            <a:r>
+              <a:rPr lang="ja" altLang="en-US" sz="2400">
+                <a:solidFill>
+                  <a:schemeClr val="dk1"/>
+                </a:solidFill>
+              </a:rPr>
+              <a:t>小さくなる</a:t>
+            </a:r>
+            <a:endParaRPr sz="2400">
+              <a:solidFill>
+                <a:schemeClr val="dk1"/>
+              </a:solidFill>
+            </a:endParaRPr>
+          </a:p>
+        </p:txBody>
+      </p:sp>
+      <p:sp>
+        <p:nvSpPr>
+          <p:cNvPr id="287" name="Google Shape;287;p28"/>
+          <p:cNvSpPr txBox="1">
+            <a:spLocks noGrp="1"/>
+          </p:cNvSpPr>
+          <p:nvPr>
+            <p:ph type="sldNum" idx="12"/>
+          </p:nvPr>
+        </p:nvSpPr>
+        <p:spPr>
+          <a:xfrm>
+            <a:off x="9250680" y="6334760"/>
+            <a:ext cx="2743200" cy="365200"/>
+          </a:xfrm>
+          <a:prstGeom prst="rect">
+            <a:avLst/>
+          </a:prstGeom>
+        </p:spPr>
+        <p:txBody>
+          <a:bodyPr spcFirstLastPara="1" vert="horz" wrap="square" lIns="91433" tIns="45700" rIns="91433" bIns="45700" rtlCol="0" anchor="ctr" anchorCtr="0">
+            <a:normAutofit/>
+          </a:bodyPr>
+          <a:lstStyle/>
+          <a:p>
+            <a:pPr>
+              <a:buClr>
+                <a:srgbClr val="000000"/>
+              </a:buClr>
+            </a:pPr>
+            <a:fld id="{00000000-1234-1234-1234-123412341234}" type="slidenum">
+              <a:rPr lang="en-US" altLang="ja"/>
+              <a:pPr>
+                <a:buClr>
+                  <a:srgbClr val="000000"/>
+                </a:buClr>
+              </a:pPr>
+              <a:t>19</a:t>
+            </a:fld>
+            <a:endParaRPr/>
+          </a:p>
+        </p:txBody>
+      </p:sp>
+    </p:spTree>
+  </p:cSld>
+  <p:clrMapOvr>
+    <a:masterClrMapping/>
+  </p:clrMapOvr>
+</p:sld>
+</file>
+
 <file path=ppt/slides/slide2.xml><?xml version="1.0" encoding="utf-8"?>
 <p:sld xmlns:a="http://schemas.openxmlformats.org/drawingml/2006/main" xmlns:r="http://schemas.openxmlformats.org/officeDocument/2006/relationships" xmlns:p="http://schemas.openxmlformats.org/presentationml/2006/main">
   <p:cSld>
@@ -8837,6 +10074,175 @@
         <p14:creationId xmlns:p14="http://schemas.microsoft.com/office/powerpoint/2010/main" val="2524028814"/>
       </p:ext>
     </p:extLst>
+  </p:cSld>
+  <p:clrMapOvr>
+    <a:masterClrMapping/>
+  </p:clrMapOvr>
+</p:sld>
+</file>
+
+<file path=ppt/slides/slide20.xml><?xml version="1.0" encoding="utf-8"?>
+<p:sld xmlns:a="http://schemas.openxmlformats.org/drawingml/2006/main" xmlns:r="http://schemas.openxmlformats.org/officeDocument/2006/relationships" xmlns:p="http://schemas.openxmlformats.org/presentationml/2006/main">
+  <p:cSld>
+    <p:spTree>
+      <p:nvGrpSpPr>
+        <p:cNvPr id="1" name="Shape 257"/>
+        <p:cNvGrpSpPr/>
+        <p:nvPr/>
+      </p:nvGrpSpPr>
+      <p:grpSpPr>
+        <a:xfrm>
+          <a:off x="0" y="0"/>
+          <a:ext cx="0" cy="0"/>
+          <a:chOff x="0" y="0"/>
+          <a:chExt cx="0" cy="0"/>
+        </a:xfrm>
+      </p:grpSpPr>
+      <p:sp>
+        <p:nvSpPr>
+          <p:cNvPr id="258" name="Google Shape;258;p26"/>
+          <p:cNvSpPr txBox="1">
+            <a:spLocks noGrp="1"/>
+          </p:cNvSpPr>
+          <p:nvPr>
+            <p:ph type="title"/>
+          </p:nvPr>
+        </p:nvSpPr>
+        <p:spPr>
+          <a:xfrm>
+            <a:off x="144780" y="167005"/>
+            <a:ext cx="10397600" cy="732400"/>
+          </a:xfrm>
+          <a:prstGeom prst="rect">
+            <a:avLst/>
+          </a:prstGeom>
+        </p:spPr>
+        <p:txBody>
+          <a:bodyPr spcFirstLastPara="1" vert="horz" wrap="square" lIns="91433" tIns="45700" rIns="91433" bIns="45700" rtlCol="0" anchor="ctr" anchorCtr="0">
+            <a:normAutofit/>
+          </a:bodyPr>
+          <a:lstStyle/>
+          <a:p>
+            <a:r>
+              <a:rPr lang="ja-JP" altLang="en-US" dirty="0"/>
+              <a:t>面積比較</a:t>
+            </a:r>
+            <a:r>
+              <a:rPr lang="en-US" altLang="ja-JP" sz="3200" dirty="0"/>
+              <a:t>(</a:t>
+            </a:r>
+            <a:r>
+              <a:rPr lang="ja-JP" altLang="en-US" sz="3200" dirty="0"/>
+              <a:t>面積は規模拡大でも優位性を保つ</a:t>
+            </a:r>
+            <a:r>
+              <a:rPr lang="en-US" altLang="ja-JP" sz="3200" dirty="0"/>
+              <a:t>)</a:t>
+            </a:r>
+            <a:endParaRPr dirty="0"/>
+          </a:p>
+        </p:txBody>
+      </p:sp>
+      <p:sp>
+        <p:nvSpPr>
+          <p:cNvPr id="259" name="Google Shape;259;p26"/>
+          <p:cNvSpPr txBox="1">
+            <a:spLocks noGrp="1"/>
+          </p:cNvSpPr>
+          <p:nvPr>
+            <p:ph type="sldNum" idx="12"/>
+          </p:nvPr>
+        </p:nvSpPr>
+        <p:spPr>
+          <a:xfrm>
+            <a:off x="9250680" y="6334760"/>
+            <a:ext cx="2743200" cy="365200"/>
+          </a:xfrm>
+          <a:prstGeom prst="rect">
+            <a:avLst/>
+          </a:prstGeom>
+        </p:spPr>
+        <p:txBody>
+          <a:bodyPr spcFirstLastPara="1" vert="horz" wrap="square" lIns="91433" tIns="45700" rIns="91433" bIns="45700" rtlCol="0" anchor="ctr" anchorCtr="0">
+            <a:normAutofit/>
+          </a:bodyPr>
+          <a:lstStyle/>
+          <a:p>
+            <a:pPr>
+              <a:buClr>
+                <a:srgbClr val="000000"/>
+              </a:buClr>
+            </a:pPr>
+            <a:fld id="{00000000-1234-1234-1234-123412341234}" type="slidenum">
+              <a:rPr lang="en-US" altLang="ja"/>
+              <a:pPr>
+                <a:buClr>
+                  <a:srgbClr val="000000"/>
+                </a:buClr>
+              </a:pPr>
+              <a:t>20</a:t>
+            </a:fld>
+            <a:endParaRPr/>
+          </a:p>
+        </p:txBody>
+      </p:sp>
+      <p:pic>
+        <p:nvPicPr>
+          <p:cNvPr id="260" name="Google Shape;260;p26"/>
+          <p:cNvPicPr preferRelativeResize="0"/>
+          <p:nvPr/>
+        </p:nvPicPr>
+        <p:blipFill>
+          <a:blip r:embed="rId3">
+            <a:alphaModFix/>
+          </a:blip>
+          <a:stretch>
+            <a:fillRect/>
+          </a:stretch>
+        </p:blipFill>
+        <p:spPr>
+          <a:xfrm>
+            <a:off x="4458500" y="3429001"/>
+            <a:ext cx="5944003" cy="3270967"/>
+          </a:xfrm>
+          <a:prstGeom prst="rect">
+            <a:avLst/>
+          </a:prstGeom>
+          <a:noFill/>
+          <a:ln>
+            <a:noFill/>
+          </a:ln>
+        </p:spPr>
+      </p:pic>
+      <p:pic>
+        <p:nvPicPr>
+          <p:cNvPr id="261" name="Google Shape;261;p26"/>
+          <p:cNvPicPr preferRelativeResize="0"/>
+          <p:nvPr/>
+        </p:nvPicPr>
+        <p:blipFill>
+          <a:blip r:embed="rId4">
+            <a:alphaModFix/>
+          </a:blip>
+          <a:stretch>
+            <a:fillRect/>
+          </a:stretch>
+        </p:blipFill>
+        <p:spPr>
+          <a:xfrm>
+            <a:off x="144768" y="1073201"/>
+            <a:ext cx="12047233" cy="2327828"/>
+          </a:xfrm>
+          <a:prstGeom prst="rect">
+            <a:avLst/>
+          </a:prstGeom>
+          <a:noFill/>
+          <a:ln>
+            <a:noFill/>
+          </a:ln>
+        </p:spPr>
+      </p:pic>
+    </p:spTree>
   </p:cSld>
   <p:clrMapOvr>
     <a:masterClrMapping/>

--- a/docs/SoPA.pptx
+++ b/docs/SoPA.pptx
@@ -9,21 +9,21 @@
   </p:notesMasterIdLst>
   <p:sldIdLst>
     <p:sldId id="269" r:id="rId2"/>
-    <p:sldId id="271" r:id="rId3"/>
-    <p:sldId id="268" r:id="rId4"/>
-    <p:sldId id="272" r:id="rId5"/>
-    <p:sldId id="273" r:id="rId6"/>
-    <p:sldId id="264" r:id="rId7"/>
-    <p:sldId id="274" r:id="rId8"/>
-    <p:sldId id="270" r:id="rId9"/>
-    <p:sldId id="275" r:id="rId10"/>
-    <p:sldId id="277" r:id="rId11"/>
-    <p:sldId id="278" r:id="rId12"/>
-    <p:sldId id="276" r:id="rId13"/>
-    <p:sldId id="281" r:id="rId14"/>
-    <p:sldId id="279" r:id="rId15"/>
-    <p:sldId id="287" r:id="rId16"/>
-    <p:sldId id="288" r:id="rId17"/>
+    <p:sldId id="287" r:id="rId3"/>
+    <p:sldId id="288" r:id="rId4"/>
+    <p:sldId id="271" r:id="rId5"/>
+    <p:sldId id="268" r:id="rId6"/>
+    <p:sldId id="272" r:id="rId7"/>
+    <p:sldId id="273" r:id="rId8"/>
+    <p:sldId id="264" r:id="rId9"/>
+    <p:sldId id="274" r:id="rId10"/>
+    <p:sldId id="270" r:id="rId11"/>
+    <p:sldId id="275" r:id="rId12"/>
+    <p:sldId id="277" r:id="rId13"/>
+    <p:sldId id="278" r:id="rId14"/>
+    <p:sldId id="276" r:id="rId15"/>
+    <p:sldId id="281" r:id="rId16"/>
+    <p:sldId id="279" r:id="rId17"/>
     <p:sldId id="282" r:id="rId18"/>
     <p:sldId id="285" r:id="rId19"/>
     <p:sldId id="284" r:id="rId20"/>
@@ -126,6 +126,11 @@
       </a:defRPr>
     </a:lvl9pPr>
   </p:defaultTextStyle>
+  <p:extLst>
+    <p:ext uri="{EFAFB233-063F-42B5-8137-9DF3F51BA10A}">
+      <p15:sldGuideLst xmlns:p15="http://schemas.microsoft.com/office/powerpoint/2012/main"/>
+    </p:ext>
+  </p:extLst>
 </p:presentation>
 </file>
 
@@ -211,7 +216,7 @@
           <a:p>
             <a:fld id="{6C8C164B-AC0E-4DC6-9A84-FE6798F2FD41}" type="datetimeFigureOut">
               <a:rPr kumimoji="1" lang="ja-JP" altLang="en-US" smtClean="0"/>
-              <a:t>2026/9/9</a:t>
+              <a:t>2026/9/10</a:t>
             </a:fld>
             <a:endParaRPr kumimoji="1" lang="ja-JP" altLang="en-US"/>
           </a:p>
@@ -650,7 +655,7 @@
             </a:pPr>
             <a:fld id="{00000000-1234-1234-1234-123412341234}" type="slidenum">
               <a:rPr lang="en-US" altLang="ja"/>
-              <a:t>6</a:t>
+              <a:t>8</a:t>
             </a:fld>
             <a:endParaRPr/>
           </a:p>
@@ -1173,7 +1178,7 @@
           <a:p>
             <a:fld id="{1AD7F726-AA71-4581-AB64-0E703AE86167}" type="datetimeFigureOut">
               <a:rPr kumimoji="1" lang="ja-JP" altLang="en-US" smtClean="0"/>
-              <a:t>2026/9/9</a:t>
+              <a:t>2026/9/10</a:t>
             </a:fld>
             <a:endParaRPr kumimoji="1" lang="ja-JP" altLang="en-US"/>
           </a:p>
@@ -1403,7 +1408,7 @@
           <a:p>
             <a:fld id="{1AD7F726-AA71-4581-AB64-0E703AE86167}" type="datetimeFigureOut">
               <a:rPr kumimoji="1" lang="ja-JP" altLang="en-US" smtClean="0"/>
-              <a:t>2026/9/9</a:t>
+              <a:t>2026/9/10</a:t>
             </a:fld>
             <a:endParaRPr kumimoji="1" lang="ja-JP" altLang="en-US"/>
           </a:p>
@@ -1643,7 +1648,7 @@
           <a:p>
             <a:fld id="{1AD7F726-AA71-4581-AB64-0E703AE86167}" type="datetimeFigureOut">
               <a:rPr kumimoji="1" lang="ja-JP" altLang="en-US" smtClean="0"/>
-              <a:t>2026/9/9</a:t>
+              <a:t>2026/9/10</a:t>
             </a:fld>
             <a:endParaRPr kumimoji="1" lang="ja-JP" altLang="en-US"/>
           </a:p>
@@ -1797,7 +1802,7 @@
           <a:p>
             <a:fld id="{26E5B6D9-98A4-45A1-B19D-4B2343D7763A}" type="datetime1">
               <a:rPr kumimoji="1" lang="ja-JP" altLang="en-US" smtClean="0"/>
-              <a:t>2026/9/7</a:t>
+              <a:t>2026/9/10</a:t>
             </a:fld>
             <a:endParaRPr kumimoji="1" lang="ja-JP" altLang="en-US"/>
           </a:p>
@@ -3109,7 +3114,7 @@
           <a:p>
             <a:fld id="{1AD7F726-AA71-4581-AB64-0E703AE86167}" type="datetimeFigureOut">
               <a:rPr kumimoji="1" lang="ja-JP" altLang="en-US" smtClean="0"/>
-              <a:t>2026/9/9</a:t>
+              <a:t>2026/9/10</a:t>
             </a:fld>
             <a:endParaRPr kumimoji="1" lang="ja-JP" altLang="en-US"/>
           </a:p>
@@ -3384,7 +3389,7 @@
           <a:p>
             <a:fld id="{1AD7F726-AA71-4581-AB64-0E703AE86167}" type="datetimeFigureOut">
               <a:rPr kumimoji="1" lang="ja-JP" altLang="en-US" smtClean="0"/>
-              <a:t>2026/9/9</a:t>
+              <a:t>2026/9/10</a:t>
             </a:fld>
             <a:endParaRPr kumimoji="1" lang="ja-JP" altLang="en-US"/>
           </a:p>
@@ -3713,7 +3718,7 @@
           <a:p>
             <a:fld id="{1AD7F726-AA71-4581-AB64-0E703AE86167}" type="datetimeFigureOut">
               <a:rPr kumimoji="1" lang="ja-JP" altLang="en-US" smtClean="0"/>
-              <a:t>2026/9/9</a:t>
+              <a:t>2026/9/10</a:t>
             </a:fld>
             <a:endParaRPr kumimoji="1" lang="ja-JP" altLang="en-US"/>
           </a:p>
@@ -4189,7 +4194,7 @@
           <a:p>
             <a:fld id="{1AD7F726-AA71-4581-AB64-0E703AE86167}" type="datetimeFigureOut">
               <a:rPr kumimoji="1" lang="ja-JP" altLang="en-US" smtClean="0"/>
-              <a:t>2026/9/9</a:t>
+              <a:t>2026/9/10</a:t>
             </a:fld>
             <a:endParaRPr kumimoji="1" lang="ja-JP" altLang="en-US"/>
           </a:p>
@@ -4330,7 +4335,7 @@
           <a:p>
             <a:fld id="{1AD7F726-AA71-4581-AB64-0E703AE86167}" type="datetimeFigureOut">
               <a:rPr kumimoji="1" lang="ja-JP" altLang="en-US" smtClean="0"/>
-              <a:t>2026/9/9</a:t>
+              <a:t>2026/9/10</a:t>
             </a:fld>
             <a:endParaRPr kumimoji="1" lang="ja-JP" altLang="en-US"/>
           </a:p>
@@ -4443,7 +4448,7 @@
           <a:p>
             <a:fld id="{1AD7F726-AA71-4581-AB64-0E703AE86167}" type="datetimeFigureOut">
               <a:rPr kumimoji="1" lang="ja-JP" altLang="en-US" smtClean="0"/>
-              <a:t>2026/9/9</a:t>
+              <a:t>2026/9/10</a:t>
             </a:fld>
             <a:endParaRPr kumimoji="1" lang="ja-JP" altLang="en-US"/>
           </a:p>
@@ -4786,7 +4791,7 @@
           <a:p>
             <a:fld id="{1AD7F726-AA71-4581-AB64-0E703AE86167}" type="datetimeFigureOut">
               <a:rPr kumimoji="1" lang="ja-JP" altLang="en-US" smtClean="0"/>
-              <a:t>2026/9/9</a:t>
+              <a:t>2026/9/10</a:t>
             </a:fld>
             <a:endParaRPr kumimoji="1" lang="ja-JP" altLang="en-US"/>
           </a:p>
@@ -5074,7 +5079,7 @@
           <a:p>
             <a:fld id="{1AD7F726-AA71-4581-AB64-0E703AE86167}" type="datetimeFigureOut">
               <a:rPr kumimoji="1" lang="ja-JP" altLang="en-US" smtClean="0"/>
-              <a:t>2026/9/9</a:t>
+              <a:t>2026/9/10</a:t>
             </a:fld>
             <a:endParaRPr kumimoji="1" lang="ja-JP" altLang="en-US"/>
           </a:p>
@@ -5347,7 +5352,7 @@
           <a:p>
             <a:fld id="{1AD7F726-AA71-4581-AB64-0E703AE86167}" type="datetimeFigureOut">
               <a:rPr kumimoji="1" lang="ja-JP" altLang="en-US" smtClean="0"/>
-              <a:t>2026/9/9</a:t>
+              <a:t>2026/9/10</a:t>
             </a:fld>
             <a:endParaRPr kumimoji="1" lang="ja-JP" altLang="en-US"/>
           </a:p>
@@ -5888,6 +5893,2820 @@
           <p:cNvPr id="2" name="タイトル 1">
             <a:extLst>
               <a:ext uri="{FF2B5EF4-FFF2-40B4-BE49-F238E27FC236}">
+                <a16:creationId xmlns:a16="http://schemas.microsoft.com/office/drawing/2014/main" id="{BA3C80F9-39B0-46D8-99D2-4C071AB63B90}"/>
+              </a:ext>
+            </a:extLst>
+          </p:cNvPr>
+          <p:cNvSpPr>
+            <a:spLocks noGrp="1"/>
+          </p:cNvSpPr>
+          <p:nvPr>
+            <p:ph type="title"/>
+          </p:nvPr>
+        </p:nvSpPr>
+        <p:spPr/>
+        <p:txBody>
+          <a:bodyPr/>
+          <a:lstStyle/>
+          <a:p>
+            <a:r>
+              <a:rPr kumimoji="1" lang="ja-JP" altLang="en-US" dirty="0"/>
+              <a:t>元になっている被覆構造の原理</a:t>
+            </a:r>
+          </a:p>
+        </p:txBody>
+      </p:sp>
+      <p:sp>
+        <p:nvSpPr>
+          <p:cNvPr id="5" name="楕円 4">
+            <a:extLst>
+              <a:ext uri="{FF2B5EF4-FFF2-40B4-BE49-F238E27FC236}">
+                <a16:creationId xmlns:a16="http://schemas.microsoft.com/office/drawing/2014/main" id="{CD2CAB2A-3749-4890-9D66-9004CBB17DA8}"/>
+              </a:ext>
+            </a:extLst>
+          </p:cNvPr>
+          <p:cNvSpPr/>
+          <p:nvPr/>
+        </p:nvSpPr>
+        <p:spPr>
+          <a:xfrm>
+            <a:off x="552905" y="3955959"/>
+            <a:ext cx="682171" cy="566057"/>
+          </a:xfrm>
+          <a:prstGeom prst="ellipse">
+            <a:avLst/>
+          </a:prstGeom>
+          <a:solidFill>
+            <a:schemeClr val="bg1"/>
+          </a:solidFill>
+          <a:ln>
+            <a:solidFill>
+              <a:schemeClr val="tx1"/>
+            </a:solidFill>
+          </a:ln>
+        </p:spPr>
+        <p:style>
+          <a:lnRef idx="2">
+            <a:schemeClr val="accent1">
+              <a:shade val="50000"/>
+            </a:schemeClr>
+          </a:lnRef>
+          <a:fillRef idx="1">
+            <a:schemeClr val="accent1"/>
+          </a:fillRef>
+          <a:effectRef idx="0">
+            <a:schemeClr val="accent1"/>
+          </a:effectRef>
+          <a:fontRef idx="minor">
+            <a:schemeClr val="lt1"/>
+          </a:fontRef>
+        </p:style>
+        <p:txBody>
+          <a:bodyPr rtlCol="0" anchor="ctr"/>
+          <a:lstStyle/>
+          <a:p>
+            <a:pPr algn="ctr"/>
+            <a:r>
+              <a:rPr kumimoji="1" lang="en-US" altLang="ja-JP" dirty="0">
+                <a:solidFill>
+                  <a:schemeClr val="tx1"/>
+                </a:solidFill>
+                <a:latin typeface="メイリオ" panose="020B0604030504040204" pitchFamily="50" charset="-128"/>
+                <a:ea typeface="メイリオ" panose="020B0604030504040204" pitchFamily="50" charset="-128"/>
+              </a:rPr>
+              <a:t>PA</a:t>
+            </a:r>
+            <a:endParaRPr kumimoji="1" lang="ja-JP" altLang="en-US" dirty="0">
+              <a:solidFill>
+                <a:schemeClr val="tx1"/>
+              </a:solidFill>
+              <a:latin typeface="メイリオ" panose="020B0604030504040204" pitchFamily="50" charset="-128"/>
+              <a:ea typeface="メイリオ" panose="020B0604030504040204" pitchFamily="50" charset="-128"/>
+            </a:endParaRPr>
+          </a:p>
+        </p:txBody>
+      </p:sp>
+      <p:sp>
+        <p:nvSpPr>
+          <p:cNvPr id="6" name="楕円 5">
+            <a:extLst>
+              <a:ext uri="{FF2B5EF4-FFF2-40B4-BE49-F238E27FC236}">
+                <a16:creationId xmlns:a16="http://schemas.microsoft.com/office/drawing/2014/main" id="{F4412D6F-1044-45A4-8DD4-73A3EAD9C519}"/>
+              </a:ext>
+            </a:extLst>
+          </p:cNvPr>
+          <p:cNvSpPr/>
+          <p:nvPr/>
+        </p:nvSpPr>
+        <p:spPr>
+          <a:xfrm>
+            <a:off x="1416505" y="3955959"/>
+            <a:ext cx="682171" cy="566057"/>
+          </a:xfrm>
+          <a:prstGeom prst="ellipse">
+            <a:avLst/>
+          </a:prstGeom>
+          <a:solidFill>
+            <a:schemeClr val="bg1"/>
+          </a:solidFill>
+          <a:ln>
+            <a:solidFill>
+              <a:schemeClr val="tx1"/>
+            </a:solidFill>
+          </a:ln>
+        </p:spPr>
+        <p:style>
+          <a:lnRef idx="2">
+            <a:schemeClr val="accent1">
+              <a:shade val="50000"/>
+            </a:schemeClr>
+          </a:lnRef>
+          <a:fillRef idx="1">
+            <a:schemeClr val="accent1"/>
+          </a:fillRef>
+          <a:effectRef idx="0">
+            <a:schemeClr val="accent1"/>
+          </a:effectRef>
+          <a:fontRef idx="minor">
+            <a:schemeClr val="lt1"/>
+          </a:fontRef>
+        </p:style>
+        <p:txBody>
+          <a:bodyPr rtlCol="0" anchor="ctr"/>
+          <a:lstStyle/>
+          <a:p>
+            <a:pPr algn="ctr"/>
+            <a:r>
+              <a:rPr kumimoji="1" lang="en-US" altLang="ja-JP" dirty="0">
+                <a:solidFill>
+                  <a:schemeClr val="tx1"/>
+                </a:solidFill>
+                <a:latin typeface="メイリオ" panose="020B0604030504040204" pitchFamily="50" charset="-128"/>
+                <a:ea typeface="メイリオ" panose="020B0604030504040204" pitchFamily="50" charset="-128"/>
+              </a:rPr>
+              <a:t>PA</a:t>
+            </a:r>
+            <a:endParaRPr kumimoji="1" lang="ja-JP" altLang="en-US" dirty="0">
+              <a:solidFill>
+                <a:schemeClr val="tx1"/>
+              </a:solidFill>
+              <a:latin typeface="メイリオ" panose="020B0604030504040204" pitchFamily="50" charset="-128"/>
+              <a:ea typeface="メイリオ" panose="020B0604030504040204" pitchFamily="50" charset="-128"/>
+            </a:endParaRPr>
+          </a:p>
+        </p:txBody>
+      </p:sp>
+      <p:sp>
+        <p:nvSpPr>
+          <p:cNvPr id="7" name="楕円 6">
+            <a:extLst>
+              <a:ext uri="{FF2B5EF4-FFF2-40B4-BE49-F238E27FC236}">
+                <a16:creationId xmlns:a16="http://schemas.microsoft.com/office/drawing/2014/main" id="{3244AA42-335E-42BC-B9BD-1E3AF1D7DA3A}"/>
+              </a:ext>
+            </a:extLst>
+          </p:cNvPr>
+          <p:cNvSpPr/>
+          <p:nvPr/>
+        </p:nvSpPr>
+        <p:spPr>
+          <a:xfrm>
+            <a:off x="3172734" y="3955958"/>
+            <a:ext cx="682171" cy="566057"/>
+          </a:xfrm>
+          <a:prstGeom prst="ellipse">
+            <a:avLst/>
+          </a:prstGeom>
+          <a:solidFill>
+            <a:schemeClr val="bg1"/>
+          </a:solidFill>
+          <a:ln>
+            <a:solidFill>
+              <a:schemeClr val="tx1"/>
+            </a:solidFill>
+          </a:ln>
+        </p:spPr>
+        <p:style>
+          <a:lnRef idx="2">
+            <a:schemeClr val="accent1">
+              <a:shade val="50000"/>
+            </a:schemeClr>
+          </a:lnRef>
+          <a:fillRef idx="1">
+            <a:schemeClr val="accent1"/>
+          </a:fillRef>
+          <a:effectRef idx="0">
+            <a:schemeClr val="accent1"/>
+          </a:effectRef>
+          <a:fontRef idx="minor">
+            <a:schemeClr val="lt1"/>
+          </a:fontRef>
+        </p:style>
+        <p:txBody>
+          <a:bodyPr rtlCol="0" anchor="ctr"/>
+          <a:lstStyle/>
+          <a:p>
+            <a:pPr algn="ctr"/>
+            <a:r>
+              <a:rPr kumimoji="1" lang="en-US" altLang="ja-JP" dirty="0">
+                <a:solidFill>
+                  <a:schemeClr val="tx1"/>
+                </a:solidFill>
+                <a:latin typeface="メイリオ" panose="020B0604030504040204" pitchFamily="50" charset="-128"/>
+                <a:ea typeface="メイリオ" panose="020B0604030504040204" pitchFamily="50" charset="-128"/>
+              </a:rPr>
+              <a:t>PA</a:t>
+            </a:r>
+            <a:endParaRPr kumimoji="1" lang="ja-JP" altLang="en-US" dirty="0">
+              <a:solidFill>
+                <a:schemeClr val="tx1"/>
+              </a:solidFill>
+              <a:latin typeface="メイリオ" panose="020B0604030504040204" pitchFamily="50" charset="-128"/>
+              <a:ea typeface="メイリオ" panose="020B0604030504040204" pitchFamily="50" charset="-128"/>
+            </a:endParaRPr>
+          </a:p>
+        </p:txBody>
+      </p:sp>
+      <p:sp>
+        <p:nvSpPr>
+          <p:cNvPr id="8" name="楕円 7">
+            <a:extLst>
+              <a:ext uri="{FF2B5EF4-FFF2-40B4-BE49-F238E27FC236}">
+                <a16:creationId xmlns:a16="http://schemas.microsoft.com/office/drawing/2014/main" id="{F6B51B56-37D7-4CD5-8A12-56A202E300F0}"/>
+              </a:ext>
+            </a:extLst>
+          </p:cNvPr>
+          <p:cNvSpPr/>
+          <p:nvPr/>
+        </p:nvSpPr>
+        <p:spPr>
+          <a:xfrm>
+            <a:off x="248105" y="2402931"/>
+            <a:ext cx="682171" cy="566057"/>
+          </a:xfrm>
+          <a:prstGeom prst="ellipse">
+            <a:avLst/>
+          </a:prstGeom>
+          <a:solidFill>
+            <a:schemeClr val="bg1"/>
+          </a:solidFill>
+          <a:ln>
+            <a:solidFill>
+              <a:schemeClr val="tx1"/>
+            </a:solidFill>
+          </a:ln>
+        </p:spPr>
+        <p:style>
+          <a:lnRef idx="2">
+            <a:schemeClr val="accent1">
+              <a:shade val="50000"/>
+            </a:schemeClr>
+          </a:lnRef>
+          <a:fillRef idx="1">
+            <a:schemeClr val="accent1"/>
+          </a:fillRef>
+          <a:effectRef idx="0">
+            <a:schemeClr val="accent1"/>
+          </a:effectRef>
+          <a:fontRef idx="minor">
+            <a:schemeClr val="lt1"/>
+          </a:fontRef>
+        </p:style>
+        <p:txBody>
+          <a:bodyPr rtlCol="0" anchor="ctr"/>
+          <a:lstStyle/>
+          <a:p>
+            <a:pPr algn="ctr"/>
+            <a:r>
+              <a:rPr kumimoji="1" lang="en-US" altLang="ja-JP" dirty="0">
+                <a:solidFill>
+                  <a:schemeClr val="tx1"/>
+                </a:solidFill>
+                <a:latin typeface="メイリオ" panose="020B0604030504040204" pitchFamily="50" charset="-128"/>
+                <a:ea typeface="メイリオ" panose="020B0604030504040204" pitchFamily="50" charset="-128"/>
+              </a:rPr>
+              <a:t>PA</a:t>
+            </a:r>
+            <a:endParaRPr kumimoji="1" lang="ja-JP" altLang="en-US" dirty="0">
+              <a:solidFill>
+                <a:schemeClr val="tx1"/>
+              </a:solidFill>
+              <a:latin typeface="メイリオ" panose="020B0604030504040204" pitchFamily="50" charset="-128"/>
+              <a:ea typeface="メイリオ" panose="020B0604030504040204" pitchFamily="50" charset="-128"/>
+            </a:endParaRPr>
+          </a:p>
+        </p:txBody>
+      </p:sp>
+      <p:sp>
+        <p:nvSpPr>
+          <p:cNvPr id="9" name="楕円 8">
+            <a:extLst>
+              <a:ext uri="{FF2B5EF4-FFF2-40B4-BE49-F238E27FC236}">
+                <a16:creationId xmlns:a16="http://schemas.microsoft.com/office/drawing/2014/main" id="{BA4BED2A-7DC9-4FE8-AD5A-3A0207DC8593}"/>
+              </a:ext>
+            </a:extLst>
+          </p:cNvPr>
+          <p:cNvSpPr/>
+          <p:nvPr/>
+        </p:nvSpPr>
+        <p:spPr>
+          <a:xfrm>
+            <a:off x="1042762" y="2402931"/>
+            <a:ext cx="682171" cy="566057"/>
+          </a:xfrm>
+          <a:prstGeom prst="ellipse">
+            <a:avLst/>
+          </a:prstGeom>
+          <a:solidFill>
+            <a:schemeClr val="bg1"/>
+          </a:solidFill>
+          <a:ln>
+            <a:solidFill>
+              <a:schemeClr val="tx1"/>
+            </a:solidFill>
+          </a:ln>
+        </p:spPr>
+        <p:style>
+          <a:lnRef idx="2">
+            <a:schemeClr val="accent1">
+              <a:shade val="50000"/>
+            </a:schemeClr>
+          </a:lnRef>
+          <a:fillRef idx="1">
+            <a:schemeClr val="accent1"/>
+          </a:fillRef>
+          <a:effectRef idx="0">
+            <a:schemeClr val="accent1"/>
+          </a:effectRef>
+          <a:fontRef idx="minor">
+            <a:schemeClr val="lt1"/>
+          </a:fontRef>
+        </p:style>
+        <p:txBody>
+          <a:bodyPr rtlCol="0" anchor="ctr"/>
+          <a:lstStyle/>
+          <a:p>
+            <a:pPr algn="ctr"/>
+            <a:r>
+              <a:rPr kumimoji="1" lang="en-US" altLang="ja-JP" dirty="0">
+                <a:solidFill>
+                  <a:schemeClr val="tx1"/>
+                </a:solidFill>
+                <a:latin typeface="メイリオ" panose="020B0604030504040204" pitchFamily="50" charset="-128"/>
+                <a:ea typeface="メイリオ" panose="020B0604030504040204" pitchFamily="50" charset="-128"/>
+              </a:rPr>
+              <a:t>PA</a:t>
+            </a:r>
+            <a:endParaRPr kumimoji="1" lang="ja-JP" altLang="en-US" dirty="0">
+              <a:solidFill>
+                <a:schemeClr val="tx1"/>
+              </a:solidFill>
+              <a:latin typeface="メイリオ" panose="020B0604030504040204" pitchFamily="50" charset="-128"/>
+              <a:ea typeface="メイリオ" panose="020B0604030504040204" pitchFamily="50" charset="-128"/>
+            </a:endParaRPr>
+          </a:p>
+        </p:txBody>
+      </p:sp>
+      <p:sp>
+        <p:nvSpPr>
+          <p:cNvPr id="10" name="楕円 9">
+            <a:extLst>
+              <a:ext uri="{FF2B5EF4-FFF2-40B4-BE49-F238E27FC236}">
+                <a16:creationId xmlns:a16="http://schemas.microsoft.com/office/drawing/2014/main" id="{23798509-7D2F-41BC-BCAD-EF93C1856717}"/>
+              </a:ext>
+            </a:extLst>
+          </p:cNvPr>
+          <p:cNvSpPr/>
+          <p:nvPr/>
+        </p:nvSpPr>
+        <p:spPr>
+          <a:xfrm>
+            <a:off x="1837419" y="2402931"/>
+            <a:ext cx="682171" cy="566057"/>
+          </a:xfrm>
+          <a:prstGeom prst="ellipse">
+            <a:avLst/>
+          </a:prstGeom>
+          <a:solidFill>
+            <a:schemeClr val="bg1"/>
+          </a:solidFill>
+          <a:ln>
+            <a:solidFill>
+              <a:schemeClr val="tx1"/>
+            </a:solidFill>
+          </a:ln>
+        </p:spPr>
+        <p:style>
+          <a:lnRef idx="2">
+            <a:schemeClr val="accent1">
+              <a:shade val="50000"/>
+            </a:schemeClr>
+          </a:lnRef>
+          <a:fillRef idx="1">
+            <a:schemeClr val="accent1"/>
+          </a:fillRef>
+          <a:effectRef idx="0">
+            <a:schemeClr val="accent1"/>
+          </a:effectRef>
+          <a:fontRef idx="minor">
+            <a:schemeClr val="lt1"/>
+          </a:fontRef>
+        </p:style>
+        <p:txBody>
+          <a:bodyPr rtlCol="0" anchor="ctr"/>
+          <a:lstStyle/>
+          <a:p>
+            <a:pPr algn="ctr"/>
+            <a:r>
+              <a:rPr kumimoji="1" lang="en-US" altLang="ja-JP" dirty="0">
+                <a:solidFill>
+                  <a:schemeClr val="tx1"/>
+                </a:solidFill>
+                <a:latin typeface="メイリオ" panose="020B0604030504040204" pitchFamily="50" charset="-128"/>
+                <a:ea typeface="メイリオ" panose="020B0604030504040204" pitchFamily="50" charset="-128"/>
+              </a:rPr>
+              <a:t>PA</a:t>
+            </a:r>
+            <a:endParaRPr kumimoji="1" lang="ja-JP" altLang="en-US" dirty="0">
+              <a:solidFill>
+                <a:schemeClr val="tx1"/>
+              </a:solidFill>
+              <a:latin typeface="メイリオ" panose="020B0604030504040204" pitchFamily="50" charset="-128"/>
+              <a:ea typeface="メイリオ" panose="020B0604030504040204" pitchFamily="50" charset="-128"/>
+            </a:endParaRPr>
+          </a:p>
+        </p:txBody>
+      </p:sp>
+      <p:sp>
+        <p:nvSpPr>
+          <p:cNvPr id="11" name="テキスト ボックス 10">
+            <a:extLst>
+              <a:ext uri="{FF2B5EF4-FFF2-40B4-BE49-F238E27FC236}">
+                <a16:creationId xmlns:a16="http://schemas.microsoft.com/office/drawing/2014/main" id="{A7667394-06FA-473D-A1FC-055C18F63301}"/>
+              </a:ext>
+            </a:extLst>
+          </p:cNvPr>
+          <p:cNvSpPr txBox="1"/>
+          <p:nvPr/>
+        </p:nvSpPr>
+        <p:spPr>
+          <a:xfrm>
+            <a:off x="2679247" y="2532070"/>
+            <a:ext cx="1045029" cy="307777"/>
+          </a:xfrm>
+          <a:prstGeom prst="rect">
+            <a:avLst/>
+          </a:prstGeom>
+          <a:solidFill>
+            <a:schemeClr val="bg1"/>
+          </a:solidFill>
+          <a:ln>
+            <a:noFill/>
+          </a:ln>
+        </p:spPr>
+        <p:txBody>
+          <a:bodyPr wrap="square" rtlCol="0">
+            <a:spAutoFit/>
+          </a:bodyPr>
+          <a:lstStyle/>
+          <a:p>
+            <a:r>
+              <a:rPr kumimoji="1" lang="ja-JP" altLang="en-US" dirty="0">
+                <a:solidFill>
+                  <a:schemeClr val="tx1"/>
+                </a:solidFill>
+                <a:latin typeface="メイリオ" panose="020B0604030504040204" pitchFamily="50" charset="-128"/>
+                <a:ea typeface="メイリオ" panose="020B0604030504040204" pitchFamily="50" charset="-128"/>
+              </a:rPr>
+              <a:t>・・・</a:t>
+            </a:r>
+          </a:p>
+        </p:txBody>
+      </p:sp>
+      <p:sp>
+        <p:nvSpPr>
+          <p:cNvPr id="12" name="楕円 11">
+            <a:extLst>
+              <a:ext uri="{FF2B5EF4-FFF2-40B4-BE49-F238E27FC236}">
+                <a16:creationId xmlns:a16="http://schemas.microsoft.com/office/drawing/2014/main" id="{F0F1E2A1-B1B2-4837-B542-8AE680BD43A2}"/>
+              </a:ext>
+            </a:extLst>
+          </p:cNvPr>
+          <p:cNvSpPr/>
+          <p:nvPr/>
+        </p:nvSpPr>
+        <p:spPr>
+          <a:xfrm>
+            <a:off x="3542847" y="2402931"/>
+            <a:ext cx="767444" cy="615517"/>
+          </a:xfrm>
+          <a:prstGeom prst="ellipse">
+            <a:avLst/>
+          </a:prstGeom>
+          <a:solidFill>
+            <a:schemeClr val="bg1"/>
+          </a:solidFill>
+          <a:ln>
+            <a:solidFill>
+              <a:schemeClr val="tx1"/>
+            </a:solidFill>
+          </a:ln>
+        </p:spPr>
+        <p:style>
+          <a:lnRef idx="2">
+            <a:schemeClr val="accent1">
+              <a:shade val="50000"/>
+            </a:schemeClr>
+          </a:lnRef>
+          <a:fillRef idx="1">
+            <a:schemeClr val="accent1"/>
+          </a:fillRef>
+          <a:effectRef idx="0">
+            <a:schemeClr val="accent1"/>
+          </a:effectRef>
+          <a:fontRef idx="minor">
+            <a:schemeClr val="lt1"/>
+          </a:fontRef>
+        </p:style>
+        <p:txBody>
+          <a:bodyPr rtlCol="0" anchor="ctr"/>
+          <a:lstStyle/>
+          <a:p>
+            <a:pPr algn="ctr"/>
+            <a:r>
+              <a:rPr kumimoji="1" lang="en-US" altLang="ja-JP" dirty="0">
+                <a:solidFill>
+                  <a:schemeClr val="tx1"/>
+                </a:solidFill>
+                <a:latin typeface="メイリオ" panose="020B0604030504040204" pitchFamily="50" charset="-128"/>
+                <a:ea typeface="メイリオ" panose="020B0604030504040204" pitchFamily="50" charset="-128"/>
+              </a:rPr>
+              <a:t>PA</a:t>
+            </a:r>
+            <a:endParaRPr kumimoji="1" lang="ja-JP" altLang="en-US" dirty="0">
+              <a:solidFill>
+                <a:schemeClr val="tx1"/>
+              </a:solidFill>
+              <a:latin typeface="メイリオ" panose="020B0604030504040204" pitchFamily="50" charset="-128"/>
+              <a:ea typeface="メイリオ" panose="020B0604030504040204" pitchFamily="50" charset="-128"/>
+            </a:endParaRPr>
+          </a:p>
+        </p:txBody>
+      </p:sp>
+      <p:sp>
+        <p:nvSpPr>
+          <p:cNvPr id="13" name="右中かっこ 12">
+            <a:extLst>
+              <a:ext uri="{FF2B5EF4-FFF2-40B4-BE49-F238E27FC236}">
+                <a16:creationId xmlns:a16="http://schemas.microsoft.com/office/drawing/2014/main" id="{8A124A01-9D20-4B69-97FE-98A73D3C9B1A}"/>
+              </a:ext>
+            </a:extLst>
+          </p:cNvPr>
+          <p:cNvSpPr/>
+          <p:nvPr/>
+        </p:nvSpPr>
+        <p:spPr>
+          <a:xfrm rot="5400000">
+            <a:off x="1759586" y="2915087"/>
+            <a:ext cx="1030152" cy="3595914"/>
+          </a:xfrm>
+          <a:prstGeom prst="rightBrace">
+            <a:avLst>
+              <a:gd name="adj1" fmla="val 8333"/>
+              <a:gd name="adj2" fmla="val 49596"/>
+            </a:avLst>
+          </a:prstGeom>
+        </p:spPr>
+        <p:style>
+          <a:lnRef idx="1">
+            <a:schemeClr val="accent1"/>
+          </a:lnRef>
+          <a:fillRef idx="0">
+            <a:schemeClr val="accent1"/>
+          </a:fillRef>
+          <a:effectRef idx="0">
+            <a:schemeClr val="accent1"/>
+          </a:effectRef>
+          <a:fontRef idx="minor">
+            <a:schemeClr val="tx1"/>
+          </a:fontRef>
+        </p:style>
+        <p:txBody>
+          <a:bodyPr rtlCol="0" anchor="ctr"/>
+          <a:lstStyle/>
+          <a:p>
+            <a:pPr algn="ctr"/>
+            <a:endParaRPr kumimoji="1" lang="ja-JP" altLang="en-US">
+              <a:latin typeface="メイリオ" panose="020B0604030504040204" pitchFamily="50" charset="-128"/>
+              <a:ea typeface="メイリオ" panose="020B0604030504040204" pitchFamily="50" charset="-128"/>
+            </a:endParaRPr>
+          </a:p>
+        </p:txBody>
+      </p:sp>
+      <p:sp>
+        <p:nvSpPr>
+          <p:cNvPr id="14" name="テキスト ボックス 13">
+            <a:extLst>
+              <a:ext uri="{FF2B5EF4-FFF2-40B4-BE49-F238E27FC236}">
+                <a16:creationId xmlns:a16="http://schemas.microsoft.com/office/drawing/2014/main" id="{84893D1D-63F0-4877-A926-826385D8BAEE}"/>
+              </a:ext>
+            </a:extLst>
+          </p:cNvPr>
+          <p:cNvSpPr txBox="1"/>
+          <p:nvPr/>
+        </p:nvSpPr>
+        <p:spPr>
+          <a:xfrm>
+            <a:off x="2274662" y="5008464"/>
+            <a:ext cx="631372" cy="461665"/>
+          </a:xfrm>
+          <a:prstGeom prst="rect">
+            <a:avLst/>
+          </a:prstGeom>
+          <a:noFill/>
+        </p:spPr>
+        <p:txBody>
+          <a:bodyPr wrap="square" rtlCol="0">
+            <a:spAutoFit/>
+          </a:bodyPr>
+          <a:lstStyle/>
+          <a:p>
+            <a:r>
+              <a:rPr kumimoji="1" lang="en-US" altLang="ja-JP" sz="2400" dirty="0">
+                <a:latin typeface="メイリオ" panose="020B0604030504040204" pitchFamily="50" charset="-128"/>
+                <a:ea typeface="メイリオ" panose="020B0604030504040204" pitchFamily="50" charset="-128"/>
+              </a:rPr>
+              <a:t>N</a:t>
+            </a:r>
+            <a:endParaRPr kumimoji="1" lang="ja-JP" altLang="en-US" sz="2400" dirty="0">
+              <a:latin typeface="メイリオ" panose="020B0604030504040204" pitchFamily="50" charset="-128"/>
+              <a:ea typeface="メイリオ" panose="020B0604030504040204" pitchFamily="50" charset="-128"/>
+            </a:endParaRPr>
+          </a:p>
+        </p:txBody>
+      </p:sp>
+      <p:sp>
+        <p:nvSpPr>
+          <p:cNvPr id="15" name="テキスト ボックス 14">
+            <a:extLst>
+              <a:ext uri="{FF2B5EF4-FFF2-40B4-BE49-F238E27FC236}">
+                <a16:creationId xmlns:a16="http://schemas.microsoft.com/office/drawing/2014/main" id="{7D02B0B2-DD15-49C5-A9F7-B1471279542E}"/>
+              </a:ext>
+            </a:extLst>
+          </p:cNvPr>
+          <p:cNvSpPr txBox="1"/>
+          <p:nvPr/>
+        </p:nvSpPr>
+        <p:spPr>
+          <a:xfrm>
+            <a:off x="1958976" y="1310456"/>
+            <a:ext cx="631372" cy="461665"/>
+          </a:xfrm>
+          <a:prstGeom prst="rect">
+            <a:avLst/>
+          </a:prstGeom>
+          <a:noFill/>
+        </p:spPr>
+        <p:txBody>
+          <a:bodyPr wrap="square" rtlCol="0">
+            <a:spAutoFit/>
+          </a:bodyPr>
+          <a:lstStyle/>
+          <a:p>
+            <a:r>
+              <a:rPr kumimoji="1" lang="en-US" altLang="ja-JP" sz="2400" dirty="0">
+                <a:latin typeface="メイリオ" panose="020B0604030504040204" pitchFamily="50" charset="-128"/>
+                <a:ea typeface="メイリオ" panose="020B0604030504040204" pitchFamily="50" charset="-128"/>
+              </a:rPr>
+              <a:t>2N</a:t>
+            </a:r>
+            <a:endParaRPr kumimoji="1" lang="ja-JP" altLang="en-US" sz="2400" dirty="0">
+              <a:latin typeface="メイリオ" panose="020B0604030504040204" pitchFamily="50" charset="-128"/>
+              <a:ea typeface="メイリオ" panose="020B0604030504040204" pitchFamily="50" charset="-128"/>
+            </a:endParaRPr>
+          </a:p>
+        </p:txBody>
+      </p:sp>
+      <p:sp>
+        <p:nvSpPr>
+          <p:cNvPr id="16" name="右中かっこ 15">
+            <a:extLst>
+              <a:ext uri="{FF2B5EF4-FFF2-40B4-BE49-F238E27FC236}">
+                <a16:creationId xmlns:a16="http://schemas.microsoft.com/office/drawing/2014/main" id="{1F3BABE9-A5A9-4E66-81AA-955CC7C62572}"/>
+              </a:ext>
+            </a:extLst>
+          </p:cNvPr>
+          <p:cNvSpPr/>
+          <p:nvPr/>
+        </p:nvSpPr>
+        <p:spPr>
+          <a:xfrm rot="16200000">
+            <a:off x="1764122" y="230269"/>
+            <a:ext cx="1030152" cy="4062186"/>
+          </a:xfrm>
+          <a:prstGeom prst="rightBrace">
+            <a:avLst>
+              <a:gd name="adj1" fmla="val 8333"/>
+              <a:gd name="adj2" fmla="val 49798"/>
+            </a:avLst>
+          </a:prstGeom>
+        </p:spPr>
+        <p:style>
+          <a:lnRef idx="1">
+            <a:schemeClr val="accent1"/>
+          </a:lnRef>
+          <a:fillRef idx="0">
+            <a:schemeClr val="accent1"/>
+          </a:fillRef>
+          <a:effectRef idx="0">
+            <a:schemeClr val="accent1"/>
+          </a:effectRef>
+          <a:fontRef idx="minor">
+            <a:schemeClr val="tx1"/>
+          </a:fontRef>
+        </p:style>
+        <p:txBody>
+          <a:bodyPr rtlCol="0" anchor="ctr"/>
+          <a:lstStyle/>
+          <a:p>
+            <a:pPr algn="ctr"/>
+            <a:endParaRPr kumimoji="1" lang="ja-JP" altLang="en-US" dirty="0">
+              <a:latin typeface="メイリオ" panose="020B0604030504040204" pitchFamily="50" charset="-128"/>
+              <a:ea typeface="メイリオ" panose="020B0604030504040204" pitchFamily="50" charset="-128"/>
+            </a:endParaRPr>
+          </a:p>
+        </p:txBody>
+      </p:sp>
+      <p:sp>
+        <p:nvSpPr>
+          <p:cNvPr id="17" name="テキスト ボックス 16">
+            <a:extLst>
+              <a:ext uri="{FF2B5EF4-FFF2-40B4-BE49-F238E27FC236}">
+                <a16:creationId xmlns:a16="http://schemas.microsoft.com/office/drawing/2014/main" id="{73316D00-345F-40AD-90DD-DCED1CCF886E}"/>
+              </a:ext>
+            </a:extLst>
+          </p:cNvPr>
+          <p:cNvSpPr txBox="1"/>
+          <p:nvPr/>
+        </p:nvSpPr>
+        <p:spPr>
+          <a:xfrm>
+            <a:off x="5613401" y="2503154"/>
+            <a:ext cx="6578599" cy="523220"/>
+          </a:xfrm>
+          <a:prstGeom prst="rect">
+            <a:avLst/>
+          </a:prstGeom>
+          <a:noFill/>
+        </p:spPr>
+        <p:txBody>
+          <a:bodyPr wrap="square" rtlCol="0">
+            <a:spAutoFit/>
+          </a:bodyPr>
+          <a:lstStyle/>
+          <a:p>
+            <a:r>
+              <a:rPr kumimoji="1" lang="en-US" altLang="ja-JP" sz="2800" dirty="0"/>
+              <a:t>k</a:t>
+            </a:r>
+            <a:r>
+              <a:rPr kumimoji="1" lang="ja-JP" altLang="en-US" sz="2800" dirty="0"/>
+              <a:t>番目のセルが持つべき接続数</a:t>
+            </a:r>
+            <a:r>
+              <a:rPr kumimoji="1" lang="en-US" altLang="ja-JP" sz="2800" dirty="0"/>
+              <a:t>A</a:t>
+            </a:r>
+            <a:r>
+              <a:rPr kumimoji="1" lang="en-US" altLang="ja-JP" sz="1800" dirty="0"/>
+              <a:t>k</a:t>
+            </a:r>
+            <a:endParaRPr kumimoji="1" lang="ja-JP" altLang="en-US" sz="2800" dirty="0"/>
+          </a:p>
+        </p:txBody>
+      </p:sp>
+      <p:sp>
+        <p:nvSpPr>
+          <p:cNvPr id="18" name="テキスト ボックス 17">
+            <a:extLst>
+              <a:ext uri="{FF2B5EF4-FFF2-40B4-BE49-F238E27FC236}">
+                <a16:creationId xmlns:a16="http://schemas.microsoft.com/office/drawing/2014/main" id="{AAE55B65-E9E0-425B-ACCC-3C9A2BA33E15}"/>
+              </a:ext>
+            </a:extLst>
+          </p:cNvPr>
+          <p:cNvSpPr txBox="1"/>
+          <p:nvPr/>
+        </p:nvSpPr>
+        <p:spPr>
+          <a:xfrm>
+            <a:off x="6594022" y="2976976"/>
+            <a:ext cx="3948248" cy="523220"/>
+          </a:xfrm>
+          <a:prstGeom prst="rect">
+            <a:avLst/>
+          </a:prstGeom>
+          <a:noFill/>
+        </p:spPr>
+        <p:txBody>
+          <a:bodyPr wrap="square" rtlCol="0">
+            <a:spAutoFit/>
+          </a:bodyPr>
+          <a:lstStyle/>
+          <a:p>
+            <a:r>
+              <a:rPr kumimoji="1" lang="en-US" altLang="ja-JP" sz="2800" dirty="0"/>
+              <a:t>A</a:t>
+            </a:r>
+            <a:r>
+              <a:rPr kumimoji="1" lang="en-US" altLang="ja-JP" sz="2000" dirty="0"/>
+              <a:t>k</a:t>
+            </a:r>
+            <a:r>
+              <a:rPr kumimoji="1" lang="en-US" altLang="ja-JP" sz="2800" dirty="0"/>
+              <a:t> = min(N,[2N/k])</a:t>
+            </a:r>
+            <a:endParaRPr kumimoji="1" lang="ja-JP" altLang="en-US" sz="2800" dirty="0"/>
+          </a:p>
+        </p:txBody>
+      </p:sp>
+      <p:sp>
+        <p:nvSpPr>
+          <p:cNvPr id="19" name="テキスト ボックス 18">
+            <a:extLst>
+              <a:ext uri="{FF2B5EF4-FFF2-40B4-BE49-F238E27FC236}">
+                <a16:creationId xmlns:a16="http://schemas.microsoft.com/office/drawing/2014/main" id="{CE87C848-2483-48CC-B729-5159D0AE26CE}"/>
+              </a:ext>
+            </a:extLst>
+          </p:cNvPr>
+          <p:cNvSpPr txBox="1"/>
+          <p:nvPr/>
+        </p:nvSpPr>
+        <p:spPr>
+          <a:xfrm>
+            <a:off x="6174014" y="1549844"/>
+            <a:ext cx="4490357" cy="954107"/>
+          </a:xfrm>
+          <a:prstGeom prst="rect">
+            <a:avLst/>
+          </a:prstGeom>
+          <a:noFill/>
+          <a:ln w="19050">
+            <a:solidFill>
+              <a:schemeClr val="tx1"/>
+            </a:solidFill>
+            <a:prstDash val="dash"/>
+          </a:ln>
+        </p:spPr>
+        <p:txBody>
+          <a:bodyPr wrap="square" rtlCol="0">
+            <a:spAutoFit/>
+          </a:bodyPr>
+          <a:lstStyle/>
+          <a:p>
+            <a:r>
+              <a:rPr kumimoji="1" lang="en-US" altLang="ja-JP" sz="2800" dirty="0"/>
+              <a:t>N:</a:t>
+            </a:r>
+            <a:r>
+              <a:rPr kumimoji="1" lang="ja-JP" altLang="en-US" sz="2800" dirty="0"/>
+              <a:t>下のノード数</a:t>
+            </a:r>
+            <a:endParaRPr kumimoji="1" lang="en-US" altLang="ja-JP" sz="2800" dirty="0"/>
+          </a:p>
+          <a:p>
+            <a:r>
+              <a:rPr kumimoji="1" lang="en-US" altLang="ja-JP" sz="2800" dirty="0"/>
+              <a:t>k:</a:t>
+            </a:r>
+            <a:r>
+              <a:rPr kumimoji="1" lang="ja-JP" altLang="en-US" sz="2800" dirty="0"/>
+              <a:t>上のセルのインデックス</a:t>
+            </a:r>
+          </a:p>
+        </p:txBody>
+      </p:sp>
+      <p:cxnSp>
+        <p:nvCxnSpPr>
+          <p:cNvPr id="20" name="直線コネクタ 19">
+            <a:extLst>
+              <a:ext uri="{FF2B5EF4-FFF2-40B4-BE49-F238E27FC236}">
+                <a16:creationId xmlns:a16="http://schemas.microsoft.com/office/drawing/2014/main" id="{DADB52B6-59F2-48DD-B2D0-AD8C32E4A7D3}"/>
+              </a:ext>
+            </a:extLst>
+          </p:cNvPr>
+          <p:cNvCxnSpPr>
+            <a:cxnSpLocks/>
+          </p:cNvCxnSpPr>
+          <p:nvPr/>
+        </p:nvCxnSpPr>
+        <p:spPr>
+          <a:xfrm>
+            <a:off x="4593771" y="1052286"/>
+            <a:ext cx="0" cy="4761918"/>
+          </a:xfrm>
+          <a:prstGeom prst="line">
+            <a:avLst/>
+          </a:prstGeom>
+        </p:spPr>
+        <p:style>
+          <a:lnRef idx="1">
+            <a:schemeClr val="accent1"/>
+          </a:lnRef>
+          <a:fillRef idx="0">
+            <a:schemeClr val="accent1"/>
+          </a:fillRef>
+          <a:effectRef idx="0">
+            <a:schemeClr val="accent1"/>
+          </a:effectRef>
+          <a:fontRef idx="minor">
+            <a:schemeClr val="tx1"/>
+          </a:fontRef>
+        </p:style>
+      </p:cxnSp>
+      <p:cxnSp>
+        <p:nvCxnSpPr>
+          <p:cNvPr id="21" name="直線コネクタ 20">
+            <a:extLst>
+              <a:ext uri="{FF2B5EF4-FFF2-40B4-BE49-F238E27FC236}">
+                <a16:creationId xmlns:a16="http://schemas.microsoft.com/office/drawing/2014/main" id="{7C43B52B-803F-44B8-BECD-65856187070A}"/>
+              </a:ext>
+            </a:extLst>
+          </p:cNvPr>
+          <p:cNvCxnSpPr>
+            <a:cxnSpLocks/>
+          </p:cNvCxnSpPr>
+          <p:nvPr/>
+        </p:nvCxnSpPr>
+        <p:spPr>
+          <a:xfrm flipH="1">
+            <a:off x="4593771" y="3500196"/>
+            <a:ext cx="7503885" cy="0"/>
+          </a:xfrm>
+          <a:prstGeom prst="line">
+            <a:avLst/>
+          </a:prstGeom>
+        </p:spPr>
+        <p:style>
+          <a:lnRef idx="1">
+            <a:schemeClr val="accent1"/>
+          </a:lnRef>
+          <a:fillRef idx="0">
+            <a:schemeClr val="accent1"/>
+          </a:fillRef>
+          <a:effectRef idx="0">
+            <a:schemeClr val="accent1"/>
+          </a:effectRef>
+          <a:fontRef idx="minor">
+            <a:schemeClr val="tx1"/>
+          </a:fontRef>
+        </p:style>
+      </p:cxnSp>
+      <p:sp>
+        <p:nvSpPr>
+          <p:cNvPr id="22" name="テキスト ボックス 21">
+            <a:extLst>
+              <a:ext uri="{FF2B5EF4-FFF2-40B4-BE49-F238E27FC236}">
+                <a16:creationId xmlns:a16="http://schemas.microsoft.com/office/drawing/2014/main" id="{4F965C52-DD44-42A3-ABE1-EA4A2F19994E}"/>
+              </a:ext>
+            </a:extLst>
+          </p:cNvPr>
+          <p:cNvSpPr txBox="1"/>
+          <p:nvPr/>
+        </p:nvSpPr>
+        <p:spPr>
+          <a:xfrm>
+            <a:off x="7376160" y="1047628"/>
+            <a:ext cx="2418479" cy="523220"/>
+          </a:xfrm>
+          <a:prstGeom prst="rect">
+            <a:avLst/>
+          </a:prstGeom>
+          <a:noFill/>
+        </p:spPr>
+        <p:txBody>
+          <a:bodyPr wrap="square" rtlCol="0">
+            <a:spAutoFit/>
+          </a:bodyPr>
+          <a:lstStyle/>
+          <a:p>
+            <a:r>
+              <a:rPr kumimoji="1" lang="en-US" altLang="ja-JP" sz="2800" dirty="0"/>
+              <a:t>&lt;</a:t>
+            </a:r>
+            <a:r>
+              <a:rPr kumimoji="1" lang="ja-JP" altLang="en-US" sz="2800" dirty="0"/>
+              <a:t>接続本数</a:t>
+            </a:r>
+            <a:r>
+              <a:rPr kumimoji="1" lang="en-US" altLang="ja-JP" sz="2800" dirty="0"/>
+              <a:t>&gt;</a:t>
+            </a:r>
+            <a:endParaRPr kumimoji="1" lang="ja-JP" altLang="en-US" sz="2800" dirty="0"/>
+          </a:p>
+        </p:txBody>
+      </p:sp>
+      <p:sp>
+        <p:nvSpPr>
+          <p:cNvPr id="23" name="テキスト ボックス 22">
+            <a:extLst>
+              <a:ext uri="{FF2B5EF4-FFF2-40B4-BE49-F238E27FC236}">
+                <a16:creationId xmlns:a16="http://schemas.microsoft.com/office/drawing/2014/main" id="{FAECDEED-0D51-48A8-96E5-5C304EC2530D}"/>
+              </a:ext>
+            </a:extLst>
+          </p:cNvPr>
+          <p:cNvSpPr txBox="1"/>
+          <p:nvPr/>
+        </p:nvSpPr>
+        <p:spPr>
+          <a:xfrm>
+            <a:off x="7213599" y="3805011"/>
+            <a:ext cx="2471083" cy="523220"/>
+          </a:xfrm>
+          <a:prstGeom prst="rect">
+            <a:avLst/>
+          </a:prstGeom>
+          <a:noFill/>
+        </p:spPr>
+        <p:txBody>
+          <a:bodyPr wrap="square" rtlCol="0">
+            <a:spAutoFit/>
+          </a:bodyPr>
+          <a:lstStyle/>
+          <a:p>
+            <a:r>
+              <a:rPr kumimoji="1" lang="en-US" altLang="ja-JP" sz="2800" dirty="0"/>
+              <a:t>&lt;</a:t>
+            </a:r>
+            <a:r>
+              <a:rPr kumimoji="1" lang="ja-JP" altLang="en-US" sz="2800" dirty="0"/>
+              <a:t>接続方法</a:t>
+            </a:r>
+            <a:r>
+              <a:rPr kumimoji="1" lang="en-US" altLang="ja-JP" sz="2800" dirty="0"/>
+              <a:t>&gt;</a:t>
+            </a:r>
+            <a:endParaRPr kumimoji="1" lang="ja-JP" altLang="en-US" sz="2800" dirty="0"/>
+          </a:p>
+        </p:txBody>
+      </p:sp>
+      <p:sp>
+        <p:nvSpPr>
+          <p:cNvPr id="24" name="テキスト ボックス 23">
+            <a:extLst>
+              <a:ext uri="{FF2B5EF4-FFF2-40B4-BE49-F238E27FC236}">
+                <a16:creationId xmlns:a16="http://schemas.microsoft.com/office/drawing/2014/main" id="{DD6710E3-0E25-4B96-9A82-BE1D328ED2CD}"/>
+              </a:ext>
+            </a:extLst>
+          </p:cNvPr>
+          <p:cNvSpPr txBox="1"/>
+          <p:nvPr/>
+        </p:nvSpPr>
+        <p:spPr>
+          <a:xfrm>
+            <a:off x="6528709" y="4215065"/>
+            <a:ext cx="4135652" cy="523220"/>
+          </a:xfrm>
+          <a:prstGeom prst="rect">
+            <a:avLst/>
+          </a:prstGeom>
+          <a:noFill/>
+        </p:spPr>
+        <p:txBody>
+          <a:bodyPr wrap="square" rtlCol="0">
+            <a:spAutoFit/>
+          </a:bodyPr>
+          <a:lstStyle/>
+          <a:p>
+            <a:r>
+              <a:rPr kumimoji="1" lang="ja-JP" altLang="en-US" sz="2800" dirty="0"/>
+              <a:t>ラウンドロビン配置</a:t>
+            </a:r>
+          </a:p>
+        </p:txBody>
+      </p:sp>
+      <p:sp>
+        <p:nvSpPr>
+          <p:cNvPr id="25" name="テキスト ボックス 24">
+            <a:extLst>
+              <a:ext uri="{FF2B5EF4-FFF2-40B4-BE49-F238E27FC236}">
+                <a16:creationId xmlns:a16="http://schemas.microsoft.com/office/drawing/2014/main" id="{1ACB7206-E957-48ED-BF44-A490E3B876CF}"/>
+              </a:ext>
+            </a:extLst>
+          </p:cNvPr>
+          <p:cNvSpPr txBox="1"/>
+          <p:nvPr/>
+        </p:nvSpPr>
+        <p:spPr>
+          <a:xfrm>
+            <a:off x="5493204" y="4738285"/>
+            <a:ext cx="6222091" cy="954107"/>
+          </a:xfrm>
+          <a:prstGeom prst="rect">
+            <a:avLst/>
+          </a:prstGeom>
+          <a:noFill/>
+        </p:spPr>
+        <p:txBody>
+          <a:bodyPr wrap="square" rtlCol="0">
+            <a:spAutoFit/>
+          </a:bodyPr>
+          <a:lstStyle/>
+          <a:p>
+            <a:r>
+              <a:rPr kumimoji="1" lang="ja-JP" altLang="en-US" sz="2800" dirty="0"/>
+              <a:t>〇直前の接続の右隣ノードから配線</a:t>
+            </a:r>
+            <a:endParaRPr kumimoji="1" lang="en-US" altLang="ja-JP" sz="2800" dirty="0"/>
+          </a:p>
+          <a:p>
+            <a:r>
+              <a:rPr kumimoji="1" lang="ja-JP" altLang="en-US" sz="2800" dirty="0"/>
+              <a:t>〇右端まで行ったら左端に折り返す</a:t>
+            </a:r>
+          </a:p>
+        </p:txBody>
+      </p:sp>
+      <p:cxnSp>
+        <p:nvCxnSpPr>
+          <p:cNvPr id="26" name="直線コネクタ 25">
+            <a:extLst>
+              <a:ext uri="{FF2B5EF4-FFF2-40B4-BE49-F238E27FC236}">
+                <a16:creationId xmlns:a16="http://schemas.microsoft.com/office/drawing/2014/main" id="{2C444091-B08D-4AC0-A804-661ED5D5B735}"/>
+              </a:ext>
+            </a:extLst>
+          </p:cNvPr>
+          <p:cNvCxnSpPr>
+            <a:cxnSpLocks/>
+          </p:cNvCxnSpPr>
+          <p:nvPr/>
+        </p:nvCxnSpPr>
+        <p:spPr>
+          <a:xfrm flipH="1">
+            <a:off x="2" y="5814204"/>
+            <a:ext cx="12191998" cy="1"/>
+          </a:xfrm>
+          <a:prstGeom prst="line">
+            <a:avLst/>
+          </a:prstGeom>
+        </p:spPr>
+        <p:style>
+          <a:lnRef idx="1">
+            <a:schemeClr val="accent1"/>
+          </a:lnRef>
+          <a:fillRef idx="0">
+            <a:schemeClr val="accent1"/>
+          </a:fillRef>
+          <a:effectRef idx="0">
+            <a:schemeClr val="accent1"/>
+          </a:effectRef>
+          <a:fontRef idx="minor">
+            <a:schemeClr val="tx1"/>
+          </a:fontRef>
+        </p:style>
+      </p:cxnSp>
+      <p:sp>
+        <p:nvSpPr>
+          <p:cNvPr id="27" name="テキスト ボックス 26">
+            <a:extLst>
+              <a:ext uri="{FF2B5EF4-FFF2-40B4-BE49-F238E27FC236}">
+                <a16:creationId xmlns:a16="http://schemas.microsoft.com/office/drawing/2014/main" id="{ABA0A511-77D5-4FDE-B821-FAD50C2C9086}"/>
+              </a:ext>
+            </a:extLst>
+          </p:cNvPr>
+          <p:cNvSpPr txBox="1"/>
+          <p:nvPr/>
+        </p:nvSpPr>
+        <p:spPr>
+          <a:xfrm>
+            <a:off x="94344" y="6295952"/>
+            <a:ext cx="12028645" cy="523220"/>
+          </a:xfrm>
+          <a:prstGeom prst="rect">
+            <a:avLst/>
+          </a:prstGeom>
+          <a:noFill/>
+        </p:spPr>
+        <p:txBody>
+          <a:bodyPr wrap="square" rtlCol="0">
+            <a:spAutoFit/>
+          </a:bodyPr>
+          <a:lstStyle/>
+          <a:p>
+            <a:pPr algn="l"/>
+            <a:r>
+              <a:rPr kumimoji="1" lang="ja-JP" altLang="en-US" sz="2800" dirty="0">
+                <a:latin typeface="メイリオ" panose="020B0604030504040204" pitchFamily="50" charset="-128"/>
+                <a:ea typeface="メイリオ" panose="020B0604030504040204" pitchFamily="50" charset="-128"/>
+              </a:rPr>
+              <a:t>対象</a:t>
+            </a:r>
+            <a:r>
+              <a:rPr kumimoji="1" lang="en-US" altLang="ja-JP" sz="2800" dirty="0">
+                <a:latin typeface="メイリオ" panose="020B0604030504040204" pitchFamily="50" charset="-128"/>
+                <a:ea typeface="メイリオ" panose="020B0604030504040204" pitchFamily="50" charset="-128"/>
+              </a:rPr>
+              <a:t>PA</a:t>
+            </a:r>
+            <a:r>
+              <a:rPr kumimoji="1" lang="ja-JP" altLang="en-US" sz="2800" dirty="0">
+                <a:latin typeface="メイリオ" panose="020B0604030504040204" pitchFamily="50" charset="-128"/>
+                <a:ea typeface="メイリオ" panose="020B0604030504040204" pitchFamily="50" charset="-128"/>
+              </a:rPr>
+              <a:t>の接続を必ず保証できる点</a:t>
+            </a:r>
+          </a:p>
+        </p:txBody>
+      </p:sp>
+      <p:sp>
+        <p:nvSpPr>
+          <p:cNvPr id="28" name="テキスト ボックス 27">
+            <a:extLst>
+              <a:ext uri="{FF2B5EF4-FFF2-40B4-BE49-F238E27FC236}">
+                <a16:creationId xmlns:a16="http://schemas.microsoft.com/office/drawing/2014/main" id="{538244E8-0FDF-488D-86BF-2CFA196EB9B1}"/>
+              </a:ext>
+            </a:extLst>
+          </p:cNvPr>
+          <p:cNvSpPr txBox="1"/>
+          <p:nvPr/>
+        </p:nvSpPr>
+        <p:spPr>
+          <a:xfrm>
+            <a:off x="69011" y="5850249"/>
+            <a:ext cx="12028645" cy="523220"/>
+          </a:xfrm>
+          <a:prstGeom prst="rect">
+            <a:avLst/>
+          </a:prstGeom>
+          <a:noFill/>
+        </p:spPr>
+        <p:txBody>
+          <a:bodyPr wrap="square" rtlCol="0">
+            <a:spAutoFit/>
+          </a:bodyPr>
+          <a:lstStyle/>
+          <a:p>
+            <a:pPr algn="l"/>
+            <a:r>
+              <a:rPr kumimoji="1" lang="ja-JP" altLang="en-US" sz="2800" b="1" dirty="0">
+                <a:latin typeface="メイリオ" panose="020B0604030504040204" pitchFamily="50" charset="-128"/>
+                <a:ea typeface="メイリオ" panose="020B0604030504040204" pitchFamily="50" charset="-128"/>
+              </a:rPr>
+              <a:t>被覆構造の価値</a:t>
+            </a:r>
+          </a:p>
+        </p:txBody>
+      </p:sp>
+      <p:sp>
+        <p:nvSpPr>
+          <p:cNvPr id="29" name="スライド番号プレースホルダー 27">
+            <a:extLst>
+              <a:ext uri="{FF2B5EF4-FFF2-40B4-BE49-F238E27FC236}">
+                <a16:creationId xmlns:a16="http://schemas.microsoft.com/office/drawing/2014/main" id="{C655DDB4-1153-4992-99DB-DB6A3B1B0E3D}"/>
+              </a:ext>
+            </a:extLst>
+          </p:cNvPr>
+          <p:cNvSpPr>
+            <a:spLocks noGrp="1"/>
+          </p:cNvSpPr>
+          <p:nvPr>
+            <p:ph type="sldNum" idx="12"/>
+          </p:nvPr>
+        </p:nvSpPr>
+        <p:spPr>
+          <a:xfrm>
+            <a:off x="9185910" y="6346276"/>
+            <a:ext cx="2743200" cy="365125"/>
+          </a:xfrm>
+        </p:spPr>
+        <p:txBody>
+          <a:bodyPr/>
+          <a:lstStyle/>
+          <a:p>
+            <a:fld id="{00000000-1234-1234-1234-123412341234}" type="slidenum">
+              <a:rPr lang="en-US" altLang="ja-JP" smtClean="0"/>
+              <a:pPr/>
+              <a:t>10</a:t>
+            </a:fld>
+            <a:endParaRPr lang="ja-JP" altLang="en-US" dirty="0"/>
+          </a:p>
+        </p:txBody>
+      </p:sp>
+      <p:sp>
+        <p:nvSpPr>
+          <p:cNvPr id="30" name="吹き出し: 角を丸めた四角形 29">
+            <a:extLst>
+              <a:ext uri="{FF2B5EF4-FFF2-40B4-BE49-F238E27FC236}">
+                <a16:creationId xmlns:a16="http://schemas.microsoft.com/office/drawing/2014/main" id="{6B73A2CA-65E9-4018-996F-867D227BBD41}"/>
+              </a:ext>
+            </a:extLst>
+          </p:cNvPr>
+          <p:cNvSpPr/>
+          <p:nvPr/>
+        </p:nvSpPr>
+        <p:spPr>
+          <a:xfrm>
+            <a:off x="10542270" y="834976"/>
+            <a:ext cx="1555386" cy="1546366"/>
+          </a:xfrm>
+          <a:prstGeom prst="wedgeRoundRectCallout">
+            <a:avLst>
+              <a:gd name="adj1" fmla="val -30956"/>
+              <a:gd name="adj2" fmla="val 62496"/>
+              <a:gd name="adj3" fmla="val 16667"/>
+            </a:avLst>
+          </a:prstGeom>
+          <a:noFill/>
+        </p:spPr>
+        <p:style>
+          <a:lnRef idx="2">
+            <a:schemeClr val="accent1">
+              <a:shade val="50000"/>
+            </a:schemeClr>
+          </a:lnRef>
+          <a:fillRef idx="1">
+            <a:schemeClr val="accent1"/>
+          </a:fillRef>
+          <a:effectRef idx="0">
+            <a:schemeClr val="accent1"/>
+          </a:effectRef>
+          <a:fontRef idx="minor">
+            <a:schemeClr val="lt1"/>
+          </a:fontRef>
+        </p:style>
+        <p:txBody>
+          <a:bodyPr rtlCol="0" anchor="ctr"/>
+          <a:lstStyle/>
+          <a:p>
+            <a:pPr algn="ctr"/>
+            <a:r>
+              <a:rPr kumimoji="1" lang="ja-JP" altLang="en-US" dirty="0">
+                <a:solidFill>
+                  <a:schemeClr val="tx1"/>
+                </a:solidFill>
+              </a:rPr>
+              <a:t>出力側の本数</a:t>
+            </a:r>
+            <a:endParaRPr kumimoji="1" lang="en-US" altLang="ja-JP" dirty="0">
+              <a:solidFill>
+                <a:schemeClr val="tx1"/>
+              </a:solidFill>
+            </a:endParaRPr>
+          </a:p>
+          <a:p>
+            <a:pPr algn="ctr"/>
+            <a:r>
+              <a:rPr lang="ja-JP" altLang="en-US" dirty="0">
+                <a:solidFill>
+                  <a:schemeClr val="tx1"/>
+                </a:solidFill>
+              </a:rPr>
+              <a:t>≒</a:t>
+            </a:r>
+            <a:r>
+              <a:rPr lang="en-US" altLang="ja-JP" dirty="0">
+                <a:solidFill>
+                  <a:schemeClr val="tx1"/>
+                </a:solidFill>
+              </a:rPr>
+              <a:t>mux</a:t>
+            </a:r>
+            <a:r>
+              <a:rPr lang="ja-JP" altLang="en-US" dirty="0">
+                <a:solidFill>
+                  <a:schemeClr val="tx1"/>
+                </a:solidFill>
+              </a:rPr>
+              <a:t>の式</a:t>
+            </a:r>
+            <a:endParaRPr kumimoji="1" lang="ja-JP" altLang="en-US" dirty="0">
+              <a:solidFill>
+                <a:schemeClr val="tx1"/>
+              </a:solidFill>
+            </a:endParaRPr>
+          </a:p>
+        </p:txBody>
+      </p:sp>
+    </p:spTree>
+    <p:extLst>
+      <p:ext uri="{BB962C8B-B14F-4D97-AF65-F5344CB8AC3E}">
+        <p14:creationId xmlns:p14="http://schemas.microsoft.com/office/powerpoint/2010/main" val="1746175547"/>
+      </p:ext>
+    </p:extLst>
+  </p:cSld>
+  <p:clrMapOvr>
+    <a:masterClrMapping/>
+  </p:clrMapOvr>
+</p:sld>
+</file>
+
+<file path=ppt/slides/slide11.xml><?xml version="1.0" encoding="utf-8"?>
+<p:sld xmlns:a="http://schemas.openxmlformats.org/drawingml/2006/main" xmlns:r="http://schemas.openxmlformats.org/officeDocument/2006/relationships" xmlns:p="http://schemas.openxmlformats.org/presentationml/2006/main">
+  <p:cSld>
+    <p:spTree>
+      <p:nvGrpSpPr>
+        <p:cNvPr id="1" name=""/>
+        <p:cNvGrpSpPr/>
+        <p:nvPr/>
+      </p:nvGrpSpPr>
+      <p:grpSpPr>
+        <a:xfrm>
+          <a:off x="0" y="0"/>
+          <a:ext cx="0" cy="0"/>
+          <a:chOff x="0" y="0"/>
+          <a:chExt cx="0" cy="0"/>
+        </a:xfrm>
+      </p:grpSpPr>
+      <p:sp>
+        <p:nvSpPr>
+          <p:cNvPr id="15" name="正方形/長方形 14">
+            <a:extLst>
+              <a:ext uri="{FF2B5EF4-FFF2-40B4-BE49-F238E27FC236}">
+                <a16:creationId xmlns:a16="http://schemas.microsoft.com/office/drawing/2014/main" id="{6C1EFA3E-F928-4237-A749-0248C0F02996}"/>
+              </a:ext>
+            </a:extLst>
+          </p:cNvPr>
+          <p:cNvSpPr/>
+          <p:nvPr/>
+        </p:nvSpPr>
+        <p:spPr>
+          <a:xfrm>
+            <a:off x="211371" y="3411770"/>
+            <a:ext cx="6173525" cy="1296589"/>
+          </a:xfrm>
+          <a:prstGeom prst="rect">
+            <a:avLst/>
+          </a:prstGeom>
+          <a:solidFill>
+            <a:schemeClr val="accent4">
+              <a:lumMod val="20000"/>
+              <a:lumOff val="80000"/>
+            </a:schemeClr>
+          </a:solidFill>
+        </p:spPr>
+        <p:style>
+          <a:lnRef idx="2">
+            <a:schemeClr val="accent1">
+              <a:shade val="50000"/>
+            </a:schemeClr>
+          </a:lnRef>
+          <a:fillRef idx="1">
+            <a:schemeClr val="accent1"/>
+          </a:fillRef>
+          <a:effectRef idx="0">
+            <a:schemeClr val="accent1"/>
+          </a:effectRef>
+          <a:fontRef idx="minor">
+            <a:schemeClr val="lt1"/>
+          </a:fontRef>
+        </p:style>
+        <p:txBody>
+          <a:bodyPr rtlCol="0" anchor="ctr"/>
+          <a:lstStyle/>
+          <a:p>
+            <a:pPr algn="ctr"/>
+            <a:endParaRPr kumimoji="1" lang="ja-JP" altLang="en-US"/>
+          </a:p>
+        </p:txBody>
+      </p:sp>
+      <p:sp>
+        <p:nvSpPr>
+          <p:cNvPr id="14" name="正方形/長方形 13">
+            <a:extLst>
+              <a:ext uri="{FF2B5EF4-FFF2-40B4-BE49-F238E27FC236}">
+                <a16:creationId xmlns:a16="http://schemas.microsoft.com/office/drawing/2014/main" id="{7401D58F-7C9A-4F53-9291-7EAB451D6506}"/>
+              </a:ext>
+            </a:extLst>
+          </p:cNvPr>
+          <p:cNvSpPr/>
+          <p:nvPr/>
+        </p:nvSpPr>
+        <p:spPr>
+          <a:xfrm>
+            <a:off x="1168843" y="2036997"/>
+            <a:ext cx="4158532" cy="1392003"/>
+          </a:xfrm>
+          <a:prstGeom prst="rect">
+            <a:avLst/>
+          </a:prstGeom>
+          <a:solidFill>
+            <a:schemeClr val="accent1">
+              <a:lumMod val="20000"/>
+              <a:lumOff val="80000"/>
+            </a:schemeClr>
+          </a:solidFill>
+        </p:spPr>
+        <p:style>
+          <a:lnRef idx="2">
+            <a:schemeClr val="accent1">
+              <a:shade val="50000"/>
+            </a:schemeClr>
+          </a:lnRef>
+          <a:fillRef idx="1">
+            <a:schemeClr val="accent1"/>
+          </a:fillRef>
+          <a:effectRef idx="0">
+            <a:schemeClr val="accent1"/>
+          </a:effectRef>
+          <a:fontRef idx="minor">
+            <a:schemeClr val="lt1"/>
+          </a:fontRef>
+        </p:style>
+        <p:txBody>
+          <a:bodyPr rtlCol="0" anchor="ctr"/>
+          <a:lstStyle/>
+          <a:p>
+            <a:pPr algn="ctr"/>
+            <a:endParaRPr kumimoji="1" lang="ja-JP" altLang="en-US"/>
+          </a:p>
+        </p:txBody>
+      </p:sp>
+      <p:sp>
+        <p:nvSpPr>
+          <p:cNvPr id="2" name="タイトル 1">
+            <a:extLst>
+              <a:ext uri="{FF2B5EF4-FFF2-40B4-BE49-F238E27FC236}">
+                <a16:creationId xmlns:a16="http://schemas.microsoft.com/office/drawing/2014/main" id="{FE0E71D8-EB1A-4D94-BAE4-93F0FB20C672}"/>
+              </a:ext>
+            </a:extLst>
+          </p:cNvPr>
+          <p:cNvSpPr>
+            <a:spLocks noGrp="1"/>
+          </p:cNvSpPr>
+          <p:nvPr>
+            <p:ph type="title"/>
+          </p:nvPr>
+        </p:nvSpPr>
+        <p:spPr/>
+        <p:txBody>
+          <a:bodyPr/>
+          <a:lstStyle/>
+          <a:p>
+            <a:r>
+              <a:rPr kumimoji="1" lang="en-US" altLang="ja-JP" dirty="0" err="1"/>
+              <a:t>SoPA</a:t>
+            </a:r>
+            <a:r>
+              <a:rPr kumimoji="1" lang="ja-JP" altLang="en-US" dirty="0"/>
+              <a:t>のアイデア</a:t>
+            </a:r>
+          </a:p>
+        </p:txBody>
+      </p:sp>
+      <p:sp>
+        <p:nvSpPr>
+          <p:cNvPr id="3" name="コンテンツ プレースホルダー 2">
+            <a:extLst>
+              <a:ext uri="{FF2B5EF4-FFF2-40B4-BE49-F238E27FC236}">
+                <a16:creationId xmlns:a16="http://schemas.microsoft.com/office/drawing/2014/main" id="{FB16959A-FEED-49BC-875B-5A71F087A2AE}"/>
+              </a:ext>
+            </a:extLst>
+          </p:cNvPr>
+          <p:cNvSpPr>
+            <a:spLocks noGrp="1"/>
+          </p:cNvSpPr>
+          <p:nvPr>
+            <p:ph idx="1"/>
+          </p:nvPr>
+        </p:nvSpPr>
+        <p:spPr>
+          <a:xfrm>
+            <a:off x="144780" y="1155065"/>
+            <a:ext cx="11849100" cy="626028"/>
+          </a:xfrm>
+        </p:spPr>
+        <p:txBody>
+          <a:bodyPr/>
+          <a:lstStyle/>
+          <a:p>
+            <a:pPr marL="0" indent="0">
+              <a:buNone/>
+            </a:pPr>
+            <a:r>
+              <a:rPr lang="ja-JP" altLang="en-US" dirty="0"/>
+              <a:t>被覆構造を上下で重ねていく</a:t>
+            </a:r>
+            <a:endParaRPr kumimoji="1" lang="ja-JP" altLang="en-US" dirty="0"/>
+          </a:p>
+        </p:txBody>
+      </p:sp>
+      <p:sp>
+        <p:nvSpPr>
+          <p:cNvPr id="4" name="正方形/長方形 3">
+            <a:extLst>
+              <a:ext uri="{FF2B5EF4-FFF2-40B4-BE49-F238E27FC236}">
+                <a16:creationId xmlns:a16="http://schemas.microsoft.com/office/drawing/2014/main" id="{34A150F9-583E-4E28-94AB-32FBE5F27BA4}"/>
+              </a:ext>
+            </a:extLst>
+          </p:cNvPr>
+          <p:cNvSpPr/>
+          <p:nvPr/>
+        </p:nvSpPr>
+        <p:spPr>
+          <a:xfrm>
+            <a:off x="2305878" y="1876507"/>
+            <a:ext cx="556592" cy="524786"/>
+          </a:xfrm>
+          <a:prstGeom prst="rect">
+            <a:avLst/>
+          </a:prstGeom>
+          <a:solidFill>
+            <a:schemeClr val="bg1"/>
+          </a:solidFill>
+        </p:spPr>
+        <p:style>
+          <a:lnRef idx="2">
+            <a:schemeClr val="accent1">
+              <a:shade val="50000"/>
+            </a:schemeClr>
+          </a:lnRef>
+          <a:fillRef idx="1">
+            <a:schemeClr val="accent1"/>
+          </a:fillRef>
+          <a:effectRef idx="0">
+            <a:schemeClr val="accent1"/>
+          </a:effectRef>
+          <a:fontRef idx="minor">
+            <a:schemeClr val="lt1"/>
+          </a:fontRef>
+        </p:style>
+        <p:txBody>
+          <a:bodyPr rtlCol="0" anchor="ctr"/>
+          <a:lstStyle/>
+          <a:p>
+            <a:pPr algn="ctr"/>
+            <a:endParaRPr kumimoji="1" lang="ja-JP" altLang="en-US"/>
+          </a:p>
+        </p:txBody>
+      </p:sp>
+      <p:sp>
+        <p:nvSpPr>
+          <p:cNvPr id="5" name="正方形/長方形 4">
+            <a:extLst>
+              <a:ext uri="{FF2B5EF4-FFF2-40B4-BE49-F238E27FC236}">
+                <a16:creationId xmlns:a16="http://schemas.microsoft.com/office/drawing/2014/main" id="{E3F629CD-8A52-44C3-9CF0-A505C6C51A39}"/>
+              </a:ext>
+            </a:extLst>
+          </p:cNvPr>
+          <p:cNvSpPr/>
+          <p:nvPr/>
+        </p:nvSpPr>
+        <p:spPr>
+          <a:xfrm>
+            <a:off x="3658925" y="1876507"/>
+            <a:ext cx="556592" cy="524786"/>
+          </a:xfrm>
+          <a:prstGeom prst="rect">
+            <a:avLst/>
+          </a:prstGeom>
+          <a:solidFill>
+            <a:schemeClr val="bg1"/>
+          </a:solidFill>
+        </p:spPr>
+        <p:style>
+          <a:lnRef idx="2">
+            <a:schemeClr val="accent1">
+              <a:shade val="50000"/>
+            </a:schemeClr>
+          </a:lnRef>
+          <a:fillRef idx="1">
+            <a:schemeClr val="accent1"/>
+          </a:fillRef>
+          <a:effectRef idx="0">
+            <a:schemeClr val="accent1"/>
+          </a:effectRef>
+          <a:fontRef idx="minor">
+            <a:schemeClr val="lt1"/>
+          </a:fontRef>
+        </p:style>
+        <p:txBody>
+          <a:bodyPr rtlCol="0" anchor="ctr"/>
+          <a:lstStyle/>
+          <a:p>
+            <a:pPr algn="ctr"/>
+            <a:endParaRPr kumimoji="1" lang="ja-JP" altLang="en-US"/>
+          </a:p>
+        </p:txBody>
+      </p:sp>
+      <p:sp>
+        <p:nvSpPr>
+          <p:cNvPr id="6" name="正方形/長方形 5">
+            <a:extLst>
+              <a:ext uri="{FF2B5EF4-FFF2-40B4-BE49-F238E27FC236}">
+                <a16:creationId xmlns:a16="http://schemas.microsoft.com/office/drawing/2014/main" id="{01982F06-8F96-49BE-B435-D1B0955399DE}"/>
+              </a:ext>
+            </a:extLst>
+          </p:cNvPr>
+          <p:cNvSpPr/>
+          <p:nvPr/>
+        </p:nvSpPr>
+        <p:spPr>
+          <a:xfrm>
+            <a:off x="1509423" y="3110285"/>
+            <a:ext cx="556592" cy="524786"/>
+          </a:xfrm>
+          <a:prstGeom prst="rect">
+            <a:avLst/>
+          </a:prstGeom>
+          <a:solidFill>
+            <a:schemeClr val="bg1"/>
+          </a:solidFill>
+        </p:spPr>
+        <p:style>
+          <a:lnRef idx="2">
+            <a:schemeClr val="accent1">
+              <a:shade val="50000"/>
+            </a:schemeClr>
+          </a:lnRef>
+          <a:fillRef idx="1">
+            <a:schemeClr val="accent1"/>
+          </a:fillRef>
+          <a:effectRef idx="0">
+            <a:schemeClr val="accent1"/>
+          </a:effectRef>
+          <a:fontRef idx="minor">
+            <a:schemeClr val="lt1"/>
+          </a:fontRef>
+        </p:style>
+        <p:txBody>
+          <a:bodyPr rtlCol="0" anchor="ctr"/>
+          <a:lstStyle/>
+          <a:p>
+            <a:pPr algn="ctr"/>
+            <a:endParaRPr kumimoji="1" lang="ja-JP" altLang="en-US"/>
+          </a:p>
+        </p:txBody>
+      </p:sp>
+      <p:sp>
+        <p:nvSpPr>
+          <p:cNvPr id="7" name="正方形/長方形 6">
+            <a:extLst>
+              <a:ext uri="{FF2B5EF4-FFF2-40B4-BE49-F238E27FC236}">
+                <a16:creationId xmlns:a16="http://schemas.microsoft.com/office/drawing/2014/main" id="{DE568A7E-8D3D-4D49-B4DC-9F6A3A38DF06}"/>
+              </a:ext>
+            </a:extLst>
+          </p:cNvPr>
+          <p:cNvSpPr/>
+          <p:nvPr/>
+        </p:nvSpPr>
+        <p:spPr>
+          <a:xfrm>
+            <a:off x="2981076" y="3110285"/>
+            <a:ext cx="556592" cy="524786"/>
+          </a:xfrm>
+          <a:prstGeom prst="rect">
+            <a:avLst/>
+          </a:prstGeom>
+          <a:solidFill>
+            <a:schemeClr val="bg1"/>
+          </a:solidFill>
+        </p:spPr>
+        <p:style>
+          <a:lnRef idx="2">
+            <a:schemeClr val="accent1">
+              <a:shade val="50000"/>
+            </a:schemeClr>
+          </a:lnRef>
+          <a:fillRef idx="1">
+            <a:schemeClr val="accent1"/>
+          </a:fillRef>
+          <a:effectRef idx="0">
+            <a:schemeClr val="accent1"/>
+          </a:effectRef>
+          <a:fontRef idx="minor">
+            <a:schemeClr val="lt1"/>
+          </a:fontRef>
+        </p:style>
+        <p:txBody>
+          <a:bodyPr rtlCol="0" anchor="ctr"/>
+          <a:lstStyle/>
+          <a:p>
+            <a:pPr algn="ctr"/>
+            <a:endParaRPr kumimoji="1" lang="ja-JP" altLang="en-US"/>
+          </a:p>
+        </p:txBody>
+      </p:sp>
+      <p:sp>
+        <p:nvSpPr>
+          <p:cNvPr id="8" name="正方形/長方形 7">
+            <a:extLst>
+              <a:ext uri="{FF2B5EF4-FFF2-40B4-BE49-F238E27FC236}">
+                <a16:creationId xmlns:a16="http://schemas.microsoft.com/office/drawing/2014/main" id="{FC20C732-B9B1-4C81-9F32-15CD1D56C1A3}"/>
+              </a:ext>
+            </a:extLst>
+          </p:cNvPr>
+          <p:cNvSpPr/>
+          <p:nvPr/>
+        </p:nvSpPr>
+        <p:spPr>
+          <a:xfrm>
+            <a:off x="4452730" y="3110285"/>
+            <a:ext cx="556592" cy="524786"/>
+          </a:xfrm>
+          <a:prstGeom prst="rect">
+            <a:avLst/>
+          </a:prstGeom>
+          <a:solidFill>
+            <a:schemeClr val="bg1"/>
+          </a:solidFill>
+        </p:spPr>
+        <p:style>
+          <a:lnRef idx="2">
+            <a:schemeClr val="accent1">
+              <a:shade val="50000"/>
+            </a:schemeClr>
+          </a:lnRef>
+          <a:fillRef idx="1">
+            <a:schemeClr val="accent1"/>
+          </a:fillRef>
+          <a:effectRef idx="0">
+            <a:schemeClr val="accent1"/>
+          </a:effectRef>
+          <a:fontRef idx="minor">
+            <a:schemeClr val="lt1"/>
+          </a:fontRef>
+        </p:style>
+        <p:txBody>
+          <a:bodyPr rtlCol="0" anchor="ctr"/>
+          <a:lstStyle/>
+          <a:p>
+            <a:pPr algn="ctr"/>
+            <a:endParaRPr kumimoji="1" lang="ja-JP" altLang="en-US"/>
+          </a:p>
+        </p:txBody>
+      </p:sp>
+      <p:sp>
+        <p:nvSpPr>
+          <p:cNvPr id="10" name="正方形/長方形 9">
+            <a:extLst>
+              <a:ext uri="{FF2B5EF4-FFF2-40B4-BE49-F238E27FC236}">
+                <a16:creationId xmlns:a16="http://schemas.microsoft.com/office/drawing/2014/main" id="{E0E1CA8D-3213-4655-9623-2FEF50A5EC6E}"/>
+              </a:ext>
+            </a:extLst>
+          </p:cNvPr>
+          <p:cNvSpPr/>
+          <p:nvPr/>
+        </p:nvSpPr>
+        <p:spPr>
+          <a:xfrm>
+            <a:off x="715618" y="4439477"/>
+            <a:ext cx="556592" cy="524786"/>
+          </a:xfrm>
+          <a:prstGeom prst="rect">
+            <a:avLst/>
+          </a:prstGeom>
+          <a:solidFill>
+            <a:schemeClr val="bg1"/>
+          </a:solidFill>
+        </p:spPr>
+        <p:style>
+          <a:lnRef idx="2">
+            <a:schemeClr val="accent1">
+              <a:shade val="50000"/>
+            </a:schemeClr>
+          </a:lnRef>
+          <a:fillRef idx="1">
+            <a:schemeClr val="accent1"/>
+          </a:fillRef>
+          <a:effectRef idx="0">
+            <a:schemeClr val="accent1"/>
+          </a:effectRef>
+          <a:fontRef idx="minor">
+            <a:schemeClr val="lt1"/>
+          </a:fontRef>
+        </p:style>
+        <p:txBody>
+          <a:bodyPr rtlCol="0" anchor="ctr"/>
+          <a:lstStyle/>
+          <a:p>
+            <a:pPr algn="ctr"/>
+            <a:endParaRPr kumimoji="1" lang="ja-JP" altLang="en-US"/>
+          </a:p>
+        </p:txBody>
+      </p:sp>
+      <p:sp>
+        <p:nvSpPr>
+          <p:cNvPr id="11" name="正方形/長方形 10">
+            <a:extLst>
+              <a:ext uri="{FF2B5EF4-FFF2-40B4-BE49-F238E27FC236}">
+                <a16:creationId xmlns:a16="http://schemas.microsoft.com/office/drawing/2014/main" id="{5090F0B9-23FA-477B-86F1-A9935B577960}"/>
+              </a:ext>
+            </a:extLst>
+          </p:cNvPr>
+          <p:cNvSpPr/>
+          <p:nvPr/>
+        </p:nvSpPr>
+        <p:spPr>
+          <a:xfrm>
+            <a:off x="2187271" y="4439477"/>
+            <a:ext cx="556592" cy="524786"/>
+          </a:xfrm>
+          <a:prstGeom prst="rect">
+            <a:avLst/>
+          </a:prstGeom>
+          <a:solidFill>
+            <a:schemeClr val="bg1"/>
+          </a:solidFill>
+        </p:spPr>
+        <p:style>
+          <a:lnRef idx="2">
+            <a:schemeClr val="accent1">
+              <a:shade val="50000"/>
+            </a:schemeClr>
+          </a:lnRef>
+          <a:fillRef idx="1">
+            <a:schemeClr val="accent1"/>
+          </a:fillRef>
+          <a:effectRef idx="0">
+            <a:schemeClr val="accent1"/>
+          </a:effectRef>
+          <a:fontRef idx="minor">
+            <a:schemeClr val="lt1"/>
+          </a:fontRef>
+        </p:style>
+        <p:txBody>
+          <a:bodyPr rtlCol="0" anchor="ctr"/>
+          <a:lstStyle/>
+          <a:p>
+            <a:pPr algn="ctr"/>
+            <a:endParaRPr kumimoji="1" lang="ja-JP" altLang="en-US"/>
+          </a:p>
+        </p:txBody>
+      </p:sp>
+      <p:sp>
+        <p:nvSpPr>
+          <p:cNvPr id="12" name="正方形/長方形 11">
+            <a:extLst>
+              <a:ext uri="{FF2B5EF4-FFF2-40B4-BE49-F238E27FC236}">
+                <a16:creationId xmlns:a16="http://schemas.microsoft.com/office/drawing/2014/main" id="{66F1F133-0327-4B35-A328-3BB0C1E82DA8}"/>
+              </a:ext>
+            </a:extLst>
+          </p:cNvPr>
+          <p:cNvSpPr/>
+          <p:nvPr/>
+        </p:nvSpPr>
+        <p:spPr>
+          <a:xfrm>
+            <a:off x="3658925" y="4439477"/>
+            <a:ext cx="556592" cy="524786"/>
+          </a:xfrm>
+          <a:prstGeom prst="rect">
+            <a:avLst/>
+          </a:prstGeom>
+          <a:solidFill>
+            <a:schemeClr val="bg1"/>
+          </a:solidFill>
+        </p:spPr>
+        <p:style>
+          <a:lnRef idx="2">
+            <a:schemeClr val="accent1">
+              <a:shade val="50000"/>
+            </a:schemeClr>
+          </a:lnRef>
+          <a:fillRef idx="1">
+            <a:schemeClr val="accent1"/>
+          </a:fillRef>
+          <a:effectRef idx="0">
+            <a:schemeClr val="accent1"/>
+          </a:effectRef>
+          <a:fontRef idx="minor">
+            <a:schemeClr val="lt1"/>
+          </a:fontRef>
+        </p:style>
+        <p:txBody>
+          <a:bodyPr rtlCol="0" anchor="ctr"/>
+          <a:lstStyle/>
+          <a:p>
+            <a:pPr algn="ctr"/>
+            <a:endParaRPr kumimoji="1" lang="ja-JP" altLang="en-US"/>
+          </a:p>
+        </p:txBody>
+      </p:sp>
+      <p:sp>
+        <p:nvSpPr>
+          <p:cNvPr id="13" name="正方形/長方形 12">
+            <a:extLst>
+              <a:ext uri="{FF2B5EF4-FFF2-40B4-BE49-F238E27FC236}">
+                <a16:creationId xmlns:a16="http://schemas.microsoft.com/office/drawing/2014/main" id="{A41593F4-686D-4574-8720-A7517EFAD40D}"/>
+              </a:ext>
+            </a:extLst>
+          </p:cNvPr>
+          <p:cNvSpPr/>
+          <p:nvPr/>
+        </p:nvSpPr>
+        <p:spPr>
+          <a:xfrm>
+            <a:off x="5130579" y="4439477"/>
+            <a:ext cx="556592" cy="524786"/>
+          </a:xfrm>
+          <a:prstGeom prst="rect">
+            <a:avLst/>
+          </a:prstGeom>
+          <a:solidFill>
+            <a:schemeClr val="bg1"/>
+          </a:solidFill>
+        </p:spPr>
+        <p:style>
+          <a:lnRef idx="2">
+            <a:schemeClr val="accent1">
+              <a:shade val="50000"/>
+            </a:schemeClr>
+          </a:lnRef>
+          <a:fillRef idx="1">
+            <a:schemeClr val="accent1"/>
+          </a:fillRef>
+          <a:effectRef idx="0">
+            <a:schemeClr val="accent1"/>
+          </a:effectRef>
+          <a:fontRef idx="minor">
+            <a:schemeClr val="lt1"/>
+          </a:fontRef>
+        </p:style>
+        <p:txBody>
+          <a:bodyPr rtlCol="0" anchor="ctr"/>
+          <a:lstStyle/>
+          <a:p>
+            <a:pPr algn="ctr"/>
+            <a:endParaRPr kumimoji="1" lang="ja-JP" altLang="en-US"/>
+          </a:p>
+        </p:txBody>
+      </p:sp>
+      <p:sp>
+        <p:nvSpPr>
+          <p:cNvPr id="16" name="テキスト ボックス 15">
+            <a:extLst>
+              <a:ext uri="{FF2B5EF4-FFF2-40B4-BE49-F238E27FC236}">
+                <a16:creationId xmlns:a16="http://schemas.microsoft.com/office/drawing/2014/main" id="{00692E82-3678-442E-B8B5-A0D5A58F9422}"/>
+              </a:ext>
+            </a:extLst>
+          </p:cNvPr>
+          <p:cNvSpPr txBox="1"/>
+          <p:nvPr/>
+        </p:nvSpPr>
+        <p:spPr>
+          <a:xfrm>
+            <a:off x="3076003" y="5390985"/>
+            <a:ext cx="461665" cy="948052"/>
+          </a:xfrm>
+          <a:prstGeom prst="rect">
+            <a:avLst/>
+          </a:prstGeom>
+          <a:noFill/>
+        </p:spPr>
+        <p:txBody>
+          <a:bodyPr vert="eaVert" wrap="square" rtlCol="0">
+            <a:spAutoFit/>
+          </a:bodyPr>
+          <a:lstStyle/>
+          <a:p>
+            <a:r>
+              <a:rPr kumimoji="1" lang="ja-JP" altLang="en-US" dirty="0"/>
+              <a:t>・・・</a:t>
+            </a:r>
+          </a:p>
+        </p:txBody>
+      </p:sp>
+      <p:cxnSp>
+        <p:nvCxnSpPr>
+          <p:cNvPr id="18" name="直線コネクタ 17">
+            <a:extLst>
+              <a:ext uri="{FF2B5EF4-FFF2-40B4-BE49-F238E27FC236}">
+                <a16:creationId xmlns:a16="http://schemas.microsoft.com/office/drawing/2014/main" id="{CEC13C25-F71F-4052-B9FC-92EBDE6F1A0D}"/>
+              </a:ext>
+            </a:extLst>
+          </p:cNvPr>
+          <p:cNvCxnSpPr>
+            <a:endCxn id="6" idx="0"/>
+          </p:cNvCxnSpPr>
+          <p:nvPr/>
+        </p:nvCxnSpPr>
+        <p:spPr>
+          <a:xfrm flipH="1">
+            <a:off x="1787719" y="2401293"/>
+            <a:ext cx="804406" cy="708992"/>
+          </a:xfrm>
+          <a:prstGeom prst="line">
+            <a:avLst/>
+          </a:prstGeom>
+        </p:spPr>
+        <p:style>
+          <a:lnRef idx="1">
+            <a:schemeClr val="accent1"/>
+          </a:lnRef>
+          <a:fillRef idx="0">
+            <a:schemeClr val="accent1"/>
+          </a:fillRef>
+          <a:effectRef idx="0">
+            <a:schemeClr val="accent1"/>
+          </a:effectRef>
+          <a:fontRef idx="minor">
+            <a:schemeClr val="tx1"/>
+          </a:fontRef>
+        </p:style>
+      </p:cxnSp>
+      <p:cxnSp>
+        <p:nvCxnSpPr>
+          <p:cNvPr id="20" name="直線コネクタ 19">
+            <a:extLst>
+              <a:ext uri="{FF2B5EF4-FFF2-40B4-BE49-F238E27FC236}">
+                <a16:creationId xmlns:a16="http://schemas.microsoft.com/office/drawing/2014/main" id="{00002174-0908-491F-B924-3A02FEF79B1D}"/>
+              </a:ext>
+            </a:extLst>
+          </p:cNvPr>
+          <p:cNvCxnSpPr>
+            <a:endCxn id="7" idx="0"/>
+          </p:cNvCxnSpPr>
+          <p:nvPr/>
+        </p:nvCxnSpPr>
+        <p:spPr>
+          <a:xfrm>
+            <a:off x="2608028" y="2401293"/>
+            <a:ext cx="651344" cy="708992"/>
+          </a:xfrm>
+          <a:prstGeom prst="line">
+            <a:avLst/>
+          </a:prstGeom>
+        </p:spPr>
+        <p:style>
+          <a:lnRef idx="1">
+            <a:schemeClr val="accent1"/>
+          </a:lnRef>
+          <a:fillRef idx="0">
+            <a:schemeClr val="accent1"/>
+          </a:fillRef>
+          <a:effectRef idx="0">
+            <a:schemeClr val="accent1"/>
+          </a:effectRef>
+          <a:fontRef idx="minor">
+            <a:schemeClr val="tx1"/>
+          </a:fontRef>
+        </p:style>
+      </p:cxnSp>
+      <p:cxnSp>
+        <p:nvCxnSpPr>
+          <p:cNvPr id="22" name="直線コネクタ 21">
+            <a:extLst>
+              <a:ext uri="{FF2B5EF4-FFF2-40B4-BE49-F238E27FC236}">
+                <a16:creationId xmlns:a16="http://schemas.microsoft.com/office/drawing/2014/main" id="{69701F18-9840-47CE-95C0-C50D478130B7}"/>
+              </a:ext>
+            </a:extLst>
+          </p:cNvPr>
+          <p:cNvCxnSpPr>
+            <a:stCxn id="4" idx="2"/>
+          </p:cNvCxnSpPr>
+          <p:nvPr/>
+        </p:nvCxnSpPr>
+        <p:spPr>
+          <a:xfrm>
+            <a:off x="2584174" y="2401293"/>
+            <a:ext cx="2170706" cy="682626"/>
+          </a:xfrm>
+          <a:prstGeom prst="line">
+            <a:avLst/>
+          </a:prstGeom>
+        </p:spPr>
+        <p:style>
+          <a:lnRef idx="1">
+            <a:schemeClr val="accent1"/>
+          </a:lnRef>
+          <a:fillRef idx="0">
+            <a:schemeClr val="accent1"/>
+          </a:fillRef>
+          <a:effectRef idx="0">
+            <a:schemeClr val="accent1"/>
+          </a:effectRef>
+          <a:fontRef idx="minor">
+            <a:schemeClr val="tx1"/>
+          </a:fontRef>
+        </p:style>
+      </p:cxnSp>
+      <p:cxnSp>
+        <p:nvCxnSpPr>
+          <p:cNvPr id="24" name="直線コネクタ 23">
+            <a:extLst>
+              <a:ext uri="{FF2B5EF4-FFF2-40B4-BE49-F238E27FC236}">
+                <a16:creationId xmlns:a16="http://schemas.microsoft.com/office/drawing/2014/main" id="{191F19FA-D66D-44B5-84B3-4DCE7F794F50}"/>
+              </a:ext>
+            </a:extLst>
+          </p:cNvPr>
+          <p:cNvCxnSpPr>
+            <a:cxnSpLocks/>
+            <a:stCxn id="5" idx="2"/>
+            <a:endCxn id="6" idx="0"/>
+          </p:cNvCxnSpPr>
+          <p:nvPr/>
+        </p:nvCxnSpPr>
+        <p:spPr>
+          <a:xfrm flipH="1">
+            <a:off x="1787719" y="2401293"/>
+            <a:ext cx="2149502" cy="708992"/>
+          </a:xfrm>
+          <a:prstGeom prst="line">
+            <a:avLst/>
+          </a:prstGeom>
+        </p:spPr>
+        <p:style>
+          <a:lnRef idx="1">
+            <a:schemeClr val="accent1"/>
+          </a:lnRef>
+          <a:fillRef idx="0">
+            <a:schemeClr val="accent1"/>
+          </a:fillRef>
+          <a:effectRef idx="0">
+            <a:schemeClr val="accent1"/>
+          </a:effectRef>
+          <a:fontRef idx="minor">
+            <a:schemeClr val="tx1"/>
+          </a:fontRef>
+        </p:style>
+      </p:cxnSp>
+      <p:cxnSp>
+        <p:nvCxnSpPr>
+          <p:cNvPr id="27" name="直線コネクタ 26">
+            <a:extLst>
+              <a:ext uri="{FF2B5EF4-FFF2-40B4-BE49-F238E27FC236}">
+                <a16:creationId xmlns:a16="http://schemas.microsoft.com/office/drawing/2014/main" id="{BC8509E3-626E-45C8-9C55-E851D89C76C2}"/>
+              </a:ext>
+            </a:extLst>
+          </p:cNvPr>
+          <p:cNvCxnSpPr>
+            <a:stCxn id="5" idx="2"/>
+          </p:cNvCxnSpPr>
+          <p:nvPr/>
+        </p:nvCxnSpPr>
+        <p:spPr>
+          <a:xfrm flipH="1">
+            <a:off x="3259372" y="2401293"/>
+            <a:ext cx="677849" cy="682626"/>
+          </a:xfrm>
+          <a:prstGeom prst="line">
+            <a:avLst/>
+          </a:prstGeom>
+        </p:spPr>
+        <p:style>
+          <a:lnRef idx="1">
+            <a:schemeClr val="accent1"/>
+          </a:lnRef>
+          <a:fillRef idx="0">
+            <a:schemeClr val="accent1"/>
+          </a:fillRef>
+          <a:effectRef idx="0">
+            <a:schemeClr val="accent1"/>
+          </a:effectRef>
+          <a:fontRef idx="minor">
+            <a:schemeClr val="tx1"/>
+          </a:fontRef>
+        </p:style>
+      </p:cxnSp>
+      <p:cxnSp>
+        <p:nvCxnSpPr>
+          <p:cNvPr id="29" name="直線コネクタ 28">
+            <a:extLst>
+              <a:ext uri="{FF2B5EF4-FFF2-40B4-BE49-F238E27FC236}">
+                <a16:creationId xmlns:a16="http://schemas.microsoft.com/office/drawing/2014/main" id="{39CE0193-5986-4374-A104-0653674ED7C1}"/>
+              </a:ext>
+            </a:extLst>
+          </p:cNvPr>
+          <p:cNvCxnSpPr/>
+          <p:nvPr/>
+        </p:nvCxnSpPr>
+        <p:spPr>
+          <a:xfrm>
+            <a:off x="3910716" y="2401293"/>
+            <a:ext cx="844164" cy="682626"/>
+          </a:xfrm>
+          <a:prstGeom prst="line">
+            <a:avLst/>
+          </a:prstGeom>
+        </p:spPr>
+        <p:style>
+          <a:lnRef idx="1">
+            <a:schemeClr val="accent1"/>
+          </a:lnRef>
+          <a:fillRef idx="0">
+            <a:schemeClr val="accent1"/>
+          </a:fillRef>
+          <a:effectRef idx="0">
+            <a:schemeClr val="accent1"/>
+          </a:effectRef>
+          <a:fontRef idx="minor">
+            <a:schemeClr val="tx1"/>
+          </a:fontRef>
+        </p:style>
+      </p:cxnSp>
+      <p:cxnSp>
+        <p:nvCxnSpPr>
+          <p:cNvPr id="31" name="直線コネクタ 30">
+            <a:extLst>
+              <a:ext uri="{FF2B5EF4-FFF2-40B4-BE49-F238E27FC236}">
+                <a16:creationId xmlns:a16="http://schemas.microsoft.com/office/drawing/2014/main" id="{B4E3BE8D-BB31-4503-826E-80D8337E042C}"/>
+              </a:ext>
+            </a:extLst>
+          </p:cNvPr>
+          <p:cNvCxnSpPr>
+            <a:stCxn id="6" idx="2"/>
+            <a:endCxn id="10" idx="0"/>
+          </p:cNvCxnSpPr>
+          <p:nvPr/>
+        </p:nvCxnSpPr>
+        <p:spPr>
+          <a:xfrm flipH="1">
+            <a:off x="993914" y="3635071"/>
+            <a:ext cx="793805" cy="804406"/>
+          </a:xfrm>
+          <a:prstGeom prst="line">
+            <a:avLst/>
+          </a:prstGeom>
+        </p:spPr>
+        <p:style>
+          <a:lnRef idx="1">
+            <a:schemeClr val="accent1"/>
+          </a:lnRef>
+          <a:fillRef idx="0">
+            <a:schemeClr val="accent1"/>
+          </a:fillRef>
+          <a:effectRef idx="0">
+            <a:schemeClr val="accent1"/>
+          </a:effectRef>
+          <a:fontRef idx="minor">
+            <a:schemeClr val="tx1"/>
+          </a:fontRef>
+        </p:style>
+      </p:cxnSp>
+      <p:cxnSp>
+        <p:nvCxnSpPr>
+          <p:cNvPr id="33" name="直線コネクタ 32">
+            <a:extLst>
+              <a:ext uri="{FF2B5EF4-FFF2-40B4-BE49-F238E27FC236}">
+                <a16:creationId xmlns:a16="http://schemas.microsoft.com/office/drawing/2014/main" id="{0D91A185-411C-4C88-85CC-37417C8CA6CA}"/>
+              </a:ext>
+            </a:extLst>
+          </p:cNvPr>
+          <p:cNvCxnSpPr>
+            <a:endCxn id="11" idx="0"/>
+          </p:cNvCxnSpPr>
+          <p:nvPr/>
+        </p:nvCxnSpPr>
+        <p:spPr>
+          <a:xfrm>
+            <a:off x="1787719" y="3635071"/>
+            <a:ext cx="677848" cy="804406"/>
+          </a:xfrm>
+          <a:prstGeom prst="line">
+            <a:avLst/>
+          </a:prstGeom>
+        </p:spPr>
+        <p:style>
+          <a:lnRef idx="1">
+            <a:schemeClr val="accent1"/>
+          </a:lnRef>
+          <a:fillRef idx="0">
+            <a:schemeClr val="accent1"/>
+          </a:fillRef>
+          <a:effectRef idx="0">
+            <a:schemeClr val="accent1"/>
+          </a:effectRef>
+          <a:fontRef idx="minor">
+            <a:schemeClr val="tx1"/>
+          </a:fontRef>
+        </p:style>
+      </p:cxnSp>
+      <p:cxnSp>
+        <p:nvCxnSpPr>
+          <p:cNvPr id="35" name="直線コネクタ 34">
+            <a:extLst>
+              <a:ext uri="{FF2B5EF4-FFF2-40B4-BE49-F238E27FC236}">
+                <a16:creationId xmlns:a16="http://schemas.microsoft.com/office/drawing/2014/main" id="{6673F9CD-7419-49BA-923F-67D775B42382}"/>
+              </a:ext>
+            </a:extLst>
+          </p:cNvPr>
+          <p:cNvCxnSpPr>
+            <a:cxnSpLocks/>
+            <a:endCxn id="12" idx="0"/>
+          </p:cNvCxnSpPr>
+          <p:nvPr/>
+        </p:nvCxnSpPr>
+        <p:spPr>
+          <a:xfrm>
+            <a:off x="1787718" y="3635071"/>
+            <a:ext cx="2149503" cy="804406"/>
+          </a:xfrm>
+          <a:prstGeom prst="line">
+            <a:avLst/>
+          </a:prstGeom>
+        </p:spPr>
+        <p:style>
+          <a:lnRef idx="1">
+            <a:schemeClr val="accent1"/>
+          </a:lnRef>
+          <a:fillRef idx="0">
+            <a:schemeClr val="accent1"/>
+          </a:fillRef>
+          <a:effectRef idx="0">
+            <a:schemeClr val="accent1"/>
+          </a:effectRef>
+          <a:fontRef idx="minor">
+            <a:schemeClr val="tx1"/>
+          </a:fontRef>
+        </p:style>
+      </p:cxnSp>
+      <p:cxnSp>
+        <p:nvCxnSpPr>
+          <p:cNvPr id="38" name="直線コネクタ 37">
+            <a:extLst>
+              <a:ext uri="{FF2B5EF4-FFF2-40B4-BE49-F238E27FC236}">
+                <a16:creationId xmlns:a16="http://schemas.microsoft.com/office/drawing/2014/main" id="{E1000655-A155-4DAA-BF41-9BF96E220661}"/>
+              </a:ext>
+            </a:extLst>
+          </p:cNvPr>
+          <p:cNvCxnSpPr>
+            <a:cxnSpLocks/>
+            <a:endCxn id="13" idx="0"/>
+          </p:cNvCxnSpPr>
+          <p:nvPr/>
+        </p:nvCxnSpPr>
+        <p:spPr>
+          <a:xfrm>
+            <a:off x="1787719" y="3635071"/>
+            <a:ext cx="3621156" cy="804406"/>
+          </a:xfrm>
+          <a:prstGeom prst="line">
+            <a:avLst/>
+          </a:prstGeom>
+        </p:spPr>
+        <p:style>
+          <a:lnRef idx="1">
+            <a:schemeClr val="accent1"/>
+          </a:lnRef>
+          <a:fillRef idx="0">
+            <a:schemeClr val="accent1"/>
+          </a:fillRef>
+          <a:effectRef idx="0">
+            <a:schemeClr val="accent1"/>
+          </a:effectRef>
+          <a:fontRef idx="minor">
+            <a:schemeClr val="tx1"/>
+          </a:fontRef>
+        </p:style>
+      </p:cxnSp>
+      <p:cxnSp>
+        <p:nvCxnSpPr>
+          <p:cNvPr id="42" name="直線コネクタ 41">
+            <a:extLst>
+              <a:ext uri="{FF2B5EF4-FFF2-40B4-BE49-F238E27FC236}">
+                <a16:creationId xmlns:a16="http://schemas.microsoft.com/office/drawing/2014/main" id="{3DE9CE51-EB1F-4FA2-8A54-1AADD284862F}"/>
+              </a:ext>
+            </a:extLst>
+          </p:cNvPr>
+          <p:cNvCxnSpPr>
+            <a:stCxn id="7" idx="2"/>
+            <a:endCxn id="11" idx="0"/>
+          </p:cNvCxnSpPr>
+          <p:nvPr/>
+        </p:nvCxnSpPr>
+        <p:spPr>
+          <a:xfrm flipH="1">
+            <a:off x="2465567" y="3635071"/>
+            <a:ext cx="793805" cy="804406"/>
+          </a:xfrm>
+          <a:prstGeom prst="line">
+            <a:avLst/>
+          </a:prstGeom>
+        </p:spPr>
+        <p:style>
+          <a:lnRef idx="1">
+            <a:schemeClr val="accent1"/>
+          </a:lnRef>
+          <a:fillRef idx="0">
+            <a:schemeClr val="accent1"/>
+          </a:fillRef>
+          <a:effectRef idx="0">
+            <a:schemeClr val="accent1"/>
+          </a:effectRef>
+          <a:fontRef idx="minor">
+            <a:schemeClr val="tx1"/>
+          </a:fontRef>
+        </p:style>
+      </p:cxnSp>
+      <p:cxnSp>
+        <p:nvCxnSpPr>
+          <p:cNvPr id="44" name="直線コネクタ 43">
+            <a:extLst>
+              <a:ext uri="{FF2B5EF4-FFF2-40B4-BE49-F238E27FC236}">
+                <a16:creationId xmlns:a16="http://schemas.microsoft.com/office/drawing/2014/main" id="{417FB06D-4ED4-4F93-B5A5-E5392291904F}"/>
+              </a:ext>
+            </a:extLst>
+          </p:cNvPr>
+          <p:cNvCxnSpPr/>
+          <p:nvPr/>
+        </p:nvCxnSpPr>
+        <p:spPr>
+          <a:xfrm flipH="1">
+            <a:off x="993914" y="3661437"/>
+            <a:ext cx="2265458" cy="751674"/>
+          </a:xfrm>
+          <a:prstGeom prst="line">
+            <a:avLst/>
+          </a:prstGeom>
+        </p:spPr>
+        <p:style>
+          <a:lnRef idx="1">
+            <a:schemeClr val="accent1"/>
+          </a:lnRef>
+          <a:fillRef idx="0">
+            <a:schemeClr val="accent1"/>
+          </a:fillRef>
+          <a:effectRef idx="0">
+            <a:schemeClr val="accent1"/>
+          </a:effectRef>
+          <a:fontRef idx="minor">
+            <a:schemeClr val="tx1"/>
+          </a:fontRef>
+        </p:style>
+      </p:cxnSp>
+      <p:cxnSp>
+        <p:nvCxnSpPr>
+          <p:cNvPr id="46" name="直線コネクタ 45">
+            <a:extLst>
+              <a:ext uri="{FF2B5EF4-FFF2-40B4-BE49-F238E27FC236}">
+                <a16:creationId xmlns:a16="http://schemas.microsoft.com/office/drawing/2014/main" id="{2305D643-DFDC-492E-8346-6D126EC14AAE}"/>
+              </a:ext>
+            </a:extLst>
+          </p:cNvPr>
+          <p:cNvCxnSpPr>
+            <a:stCxn id="7" idx="2"/>
+            <a:endCxn id="12" idx="0"/>
+          </p:cNvCxnSpPr>
+          <p:nvPr/>
+        </p:nvCxnSpPr>
+        <p:spPr>
+          <a:xfrm>
+            <a:off x="3259372" y="3635071"/>
+            <a:ext cx="677849" cy="804406"/>
+          </a:xfrm>
+          <a:prstGeom prst="line">
+            <a:avLst/>
+          </a:prstGeom>
+        </p:spPr>
+        <p:style>
+          <a:lnRef idx="1">
+            <a:schemeClr val="accent1"/>
+          </a:lnRef>
+          <a:fillRef idx="0">
+            <a:schemeClr val="accent1"/>
+          </a:fillRef>
+          <a:effectRef idx="0">
+            <a:schemeClr val="accent1"/>
+          </a:effectRef>
+          <a:fontRef idx="minor">
+            <a:schemeClr val="tx1"/>
+          </a:fontRef>
+        </p:style>
+      </p:cxnSp>
+      <p:cxnSp>
+        <p:nvCxnSpPr>
+          <p:cNvPr id="48" name="直線コネクタ 47">
+            <a:extLst>
+              <a:ext uri="{FF2B5EF4-FFF2-40B4-BE49-F238E27FC236}">
+                <a16:creationId xmlns:a16="http://schemas.microsoft.com/office/drawing/2014/main" id="{B7956FB6-8EEE-4AE3-8639-69C4DA3F15D5}"/>
+              </a:ext>
+            </a:extLst>
+          </p:cNvPr>
+          <p:cNvCxnSpPr>
+            <a:stCxn id="7" idx="2"/>
+            <a:endCxn id="13" idx="0"/>
+          </p:cNvCxnSpPr>
+          <p:nvPr/>
+        </p:nvCxnSpPr>
+        <p:spPr>
+          <a:xfrm>
+            <a:off x="3259372" y="3635071"/>
+            <a:ext cx="2149503" cy="804406"/>
+          </a:xfrm>
+          <a:prstGeom prst="line">
+            <a:avLst/>
+          </a:prstGeom>
+        </p:spPr>
+        <p:style>
+          <a:lnRef idx="1">
+            <a:schemeClr val="accent1"/>
+          </a:lnRef>
+          <a:fillRef idx="0">
+            <a:schemeClr val="accent1"/>
+          </a:fillRef>
+          <a:effectRef idx="0">
+            <a:schemeClr val="accent1"/>
+          </a:effectRef>
+          <a:fontRef idx="minor">
+            <a:schemeClr val="tx1"/>
+          </a:fontRef>
+        </p:style>
+      </p:cxnSp>
+      <p:cxnSp>
+        <p:nvCxnSpPr>
+          <p:cNvPr id="51" name="直線コネクタ 50">
+            <a:extLst>
+              <a:ext uri="{FF2B5EF4-FFF2-40B4-BE49-F238E27FC236}">
+                <a16:creationId xmlns:a16="http://schemas.microsoft.com/office/drawing/2014/main" id="{97C86CA6-516D-4065-879B-BE38D880B96E}"/>
+              </a:ext>
+            </a:extLst>
+          </p:cNvPr>
+          <p:cNvCxnSpPr>
+            <a:stCxn id="8" idx="2"/>
+            <a:endCxn id="11" idx="0"/>
+          </p:cNvCxnSpPr>
+          <p:nvPr/>
+        </p:nvCxnSpPr>
+        <p:spPr>
+          <a:xfrm flipH="1">
+            <a:off x="2465567" y="3635071"/>
+            <a:ext cx="2265459" cy="804406"/>
+          </a:xfrm>
+          <a:prstGeom prst="line">
+            <a:avLst/>
+          </a:prstGeom>
+        </p:spPr>
+        <p:style>
+          <a:lnRef idx="1">
+            <a:schemeClr val="accent1"/>
+          </a:lnRef>
+          <a:fillRef idx="0">
+            <a:schemeClr val="accent1"/>
+          </a:fillRef>
+          <a:effectRef idx="0">
+            <a:schemeClr val="accent1"/>
+          </a:effectRef>
+          <a:fontRef idx="minor">
+            <a:schemeClr val="tx1"/>
+          </a:fontRef>
+        </p:style>
+      </p:cxnSp>
+      <p:cxnSp>
+        <p:nvCxnSpPr>
+          <p:cNvPr id="53" name="直線コネクタ 52">
+            <a:extLst>
+              <a:ext uri="{FF2B5EF4-FFF2-40B4-BE49-F238E27FC236}">
+                <a16:creationId xmlns:a16="http://schemas.microsoft.com/office/drawing/2014/main" id="{5D4EBD54-3F29-45CD-B1EA-9BB85F9CB78A}"/>
+              </a:ext>
+            </a:extLst>
+          </p:cNvPr>
+          <p:cNvCxnSpPr>
+            <a:stCxn id="8" idx="2"/>
+            <a:endCxn id="10" idx="0"/>
+          </p:cNvCxnSpPr>
+          <p:nvPr/>
+        </p:nvCxnSpPr>
+        <p:spPr>
+          <a:xfrm flipH="1">
+            <a:off x="993914" y="3635071"/>
+            <a:ext cx="3737112" cy="804406"/>
+          </a:xfrm>
+          <a:prstGeom prst="line">
+            <a:avLst/>
+          </a:prstGeom>
+        </p:spPr>
+        <p:style>
+          <a:lnRef idx="1">
+            <a:schemeClr val="accent1"/>
+          </a:lnRef>
+          <a:fillRef idx="0">
+            <a:schemeClr val="accent1"/>
+          </a:fillRef>
+          <a:effectRef idx="0">
+            <a:schemeClr val="accent1"/>
+          </a:effectRef>
+          <a:fontRef idx="minor">
+            <a:schemeClr val="tx1"/>
+          </a:fontRef>
+        </p:style>
+      </p:cxnSp>
+      <p:sp>
+        <p:nvSpPr>
+          <p:cNvPr id="54" name="テキスト ボックス 53">
+            <a:extLst>
+              <a:ext uri="{FF2B5EF4-FFF2-40B4-BE49-F238E27FC236}">
+                <a16:creationId xmlns:a16="http://schemas.microsoft.com/office/drawing/2014/main" id="{B594D67B-7D33-467A-8261-BC43129870C3}"/>
+              </a:ext>
+            </a:extLst>
+          </p:cNvPr>
+          <p:cNvSpPr txBox="1"/>
+          <p:nvPr/>
+        </p:nvSpPr>
+        <p:spPr>
+          <a:xfrm>
+            <a:off x="6384896" y="2451521"/>
+            <a:ext cx="4071067" cy="369332"/>
+          </a:xfrm>
+          <a:prstGeom prst="rect">
+            <a:avLst/>
+          </a:prstGeom>
+          <a:noFill/>
+        </p:spPr>
+        <p:txBody>
+          <a:bodyPr wrap="square" rtlCol="0">
+            <a:spAutoFit/>
+          </a:bodyPr>
+          <a:lstStyle/>
+          <a:p>
+            <a:r>
+              <a:rPr kumimoji="1" lang="en-US" altLang="ja-JP" dirty="0"/>
+              <a:t>1</a:t>
+            </a:r>
+            <a:r>
+              <a:rPr kumimoji="1" lang="ja-JP" altLang="en-US" dirty="0"/>
+              <a:t>段目と</a:t>
+            </a:r>
+            <a:r>
+              <a:rPr kumimoji="1" lang="en-US" altLang="ja-JP" dirty="0"/>
+              <a:t>2</a:t>
+            </a:r>
+            <a:r>
+              <a:rPr kumimoji="1" lang="ja-JP" altLang="en-US" dirty="0"/>
+              <a:t>段目の間で被覆構造で配線</a:t>
+            </a:r>
+          </a:p>
+        </p:txBody>
+      </p:sp>
+      <p:sp>
+        <p:nvSpPr>
+          <p:cNvPr id="55" name="テキスト ボックス 54">
+            <a:extLst>
+              <a:ext uri="{FF2B5EF4-FFF2-40B4-BE49-F238E27FC236}">
+                <a16:creationId xmlns:a16="http://schemas.microsoft.com/office/drawing/2014/main" id="{6EF93462-9BD2-40EB-94C1-EEE10E4F27E5}"/>
+              </a:ext>
+            </a:extLst>
+          </p:cNvPr>
+          <p:cNvSpPr txBox="1"/>
+          <p:nvPr/>
+        </p:nvSpPr>
+        <p:spPr>
+          <a:xfrm>
+            <a:off x="7284718" y="3852482"/>
+            <a:ext cx="4071067" cy="369332"/>
+          </a:xfrm>
+          <a:prstGeom prst="rect">
+            <a:avLst/>
+          </a:prstGeom>
+          <a:noFill/>
+        </p:spPr>
+        <p:txBody>
+          <a:bodyPr wrap="square" rtlCol="0">
+            <a:spAutoFit/>
+          </a:bodyPr>
+          <a:lstStyle/>
+          <a:p>
+            <a:r>
+              <a:rPr kumimoji="1" lang="en-US" altLang="ja-JP" dirty="0"/>
+              <a:t>2</a:t>
+            </a:r>
+            <a:r>
+              <a:rPr kumimoji="1" lang="ja-JP" altLang="en-US" dirty="0"/>
+              <a:t>段目と</a:t>
+            </a:r>
+            <a:r>
+              <a:rPr lang="en-US" altLang="ja-JP" dirty="0"/>
+              <a:t>3</a:t>
+            </a:r>
+            <a:r>
+              <a:rPr kumimoji="1" lang="ja-JP" altLang="en-US" dirty="0"/>
+              <a:t>段目の間で被覆構造で配線</a:t>
+            </a:r>
+          </a:p>
+        </p:txBody>
+      </p:sp>
+    </p:spTree>
+    <p:extLst>
+      <p:ext uri="{BB962C8B-B14F-4D97-AF65-F5344CB8AC3E}">
+        <p14:creationId xmlns:p14="http://schemas.microsoft.com/office/powerpoint/2010/main" val="805764399"/>
+      </p:ext>
+    </p:extLst>
+  </p:cSld>
+  <p:clrMapOvr>
+    <a:masterClrMapping/>
+  </p:clrMapOvr>
+</p:sld>
+</file>
+
+<file path=ppt/slides/slide12.xml><?xml version="1.0" encoding="utf-8"?>
+<p:sld xmlns:a="http://schemas.openxmlformats.org/drawingml/2006/main" xmlns:r="http://schemas.openxmlformats.org/officeDocument/2006/relationships" xmlns:p="http://schemas.openxmlformats.org/presentationml/2006/main">
+  <p:cSld>
+    <p:spTree>
+      <p:nvGrpSpPr>
+        <p:cNvPr id="1" name=""/>
+        <p:cNvGrpSpPr/>
+        <p:nvPr/>
+      </p:nvGrpSpPr>
+      <p:grpSpPr>
+        <a:xfrm>
+          <a:off x="0" y="0"/>
+          <a:ext cx="0" cy="0"/>
+          <a:chOff x="0" y="0"/>
+          <a:chExt cx="0" cy="0"/>
+        </a:xfrm>
+      </p:grpSpPr>
+      <p:sp>
+        <p:nvSpPr>
+          <p:cNvPr id="2" name="タイトル 1">
+            <a:extLst>
+              <a:ext uri="{FF2B5EF4-FFF2-40B4-BE49-F238E27FC236}">
                 <a16:creationId xmlns:a16="http://schemas.microsoft.com/office/drawing/2014/main" id="{6C9371C0-9F9F-4665-9741-803062C7F20E}"/>
               </a:ext>
             </a:extLst>
@@ -6001,7 +8820,7 @@
 </p:sld>
 </file>
 
-<file path=ppt/slides/slide11.xml><?xml version="1.0" encoding="utf-8"?>
+<file path=ppt/slides/slide13.xml><?xml version="1.0" encoding="utf-8"?>
 <p:sld xmlns:a="http://schemas.openxmlformats.org/drawingml/2006/main" xmlns:r="http://schemas.openxmlformats.org/officeDocument/2006/relationships" xmlns:p="http://schemas.openxmlformats.org/presentationml/2006/main">
   <p:cSld>
     <p:spTree>
@@ -7270,7 +10089,7 @@
 </p:sld>
 </file>
 
-<file path=ppt/slides/slide12.xml><?xml version="1.0" encoding="utf-8"?>
+<file path=ppt/slides/slide14.xml><?xml version="1.0" encoding="utf-8"?>
 <p:sld xmlns:a="http://schemas.openxmlformats.org/drawingml/2006/main" xmlns:r="http://schemas.openxmlformats.org/officeDocument/2006/relationships" xmlns:p="http://schemas.openxmlformats.org/presentationml/2006/main">
   <p:cSld>
     <p:spTree>
@@ -8528,607 +11347,6 @@
 </p:sld>
 </file>
 
-<file path=ppt/slides/slide13.xml><?xml version="1.0" encoding="utf-8"?>
-<p:sld xmlns:a="http://schemas.openxmlformats.org/drawingml/2006/main" xmlns:r="http://schemas.openxmlformats.org/officeDocument/2006/relationships" xmlns:p="http://schemas.openxmlformats.org/presentationml/2006/main">
-  <p:cSld>
-    <p:spTree>
-      <p:nvGrpSpPr>
-        <p:cNvPr id="1" name=""/>
-        <p:cNvGrpSpPr/>
-        <p:nvPr/>
-      </p:nvGrpSpPr>
-      <p:grpSpPr>
-        <a:xfrm>
-          <a:off x="0" y="0"/>
-          <a:ext cx="0" cy="0"/>
-          <a:chOff x="0" y="0"/>
-          <a:chExt cx="0" cy="0"/>
-        </a:xfrm>
-      </p:grpSpPr>
-      <p:sp>
-        <p:nvSpPr>
-          <p:cNvPr id="2" name="タイトル 1">
-            <a:extLst>
-              <a:ext uri="{FF2B5EF4-FFF2-40B4-BE49-F238E27FC236}">
-                <a16:creationId xmlns:a16="http://schemas.microsoft.com/office/drawing/2014/main" id="{250E420B-7345-4C7F-99F4-4EEF20A0F02B}"/>
-              </a:ext>
-            </a:extLst>
-          </p:cNvPr>
-          <p:cNvSpPr>
-            <a:spLocks noGrp="1"/>
-          </p:cNvSpPr>
-          <p:nvPr>
-            <p:ph type="title"/>
-          </p:nvPr>
-        </p:nvSpPr>
-        <p:spPr/>
-        <p:txBody>
-          <a:bodyPr/>
-          <a:lstStyle/>
-          <a:p>
-            <a:r>
-              <a:rPr kumimoji="1" lang="ja-JP" altLang="en-US" dirty="0"/>
-              <a:t>総</a:t>
-            </a:r>
-            <a:r>
-              <a:rPr kumimoji="1" lang="en-US" altLang="ja-JP" dirty="0"/>
-              <a:t>MUX</a:t>
-            </a:r>
-            <a:r>
-              <a:rPr kumimoji="1" lang="ja-JP" altLang="en-US" dirty="0"/>
-              <a:t>数</a:t>
-            </a:r>
-          </a:p>
-        </p:txBody>
-      </p:sp>
-      <p:pic>
-        <p:nvPicPr>
-          <p:cNvPr id="4" name="図 3">
-            <a:extLst>
-              <a:ext uri="{FF2B5EF4-FFF2-40B4-BE49-F238E27FC236}">
-                <a16:creationId xmlns:a16="http://schemas.microsoft.com/office/drawing/2014/main" id="{B9870EBE-1E66-4BDD-B5CE-98B984847029}"/>
-              </a:ext>
-            </a:extLst>
-          </p:cNvPr>
-          <p:cNvPicPr>
-            <a:picLocks noChangeAspect="1"/>
-          </p:cNvPicPr>
-          <p:nvPr/>
-        </p:nvPicPr>
-        <p:blipFill>
-          <a:blip r:embed="rId2"/>
-          <a:stretch>
-            <a:fillRect/>
-          </a:stretch>
-        </p:blipFill>
-        <p:spPr>
-          <a:xfrm>
-            <a:off x="336522" y="2048136"/>
-            <a:ext cx="11089585" cy="2761727"/>
-          </a:xfrm>
-          <a:prstGeom prst="rect">
-            <a:avLst/>
-          </a:prstGeom>
-        </p:spPr>
-      </p:pic>
-    </p:spTree>
-    <p:extLst>
-      <p:ext uri="{BB962C8B-B14F-4D97-AF65-F5344CB8AC3E}">
-        <p14:creationId xmlns:p14="http://schemas.microsoft.com/office/powerpoint/2010/main" val="640183041"/>
-      </p:ext>
-    </p:extLst>
-  </p:cSld>
-  <p:clrMapOvr>
-    <a:masterClrMapping/>
-  </p:clrMapOvr>
-</p:sld>
-</file>
-
-<file path=ppt/slides/slide14.xml><?xml version="1.0" encoding="utf-8"?>
-<p:sld xmlns:a="http://schemas.openxmlformats.org/drawingml/2006/main" xmlns:r="http://schemas.openxmlformats.org/officeDocument/2006/relationships" xmlns:p="http://schemas.openxmlformats.org/presentationml/2006/main">
-  <p:cSld>
-    <p:spTree>
-      <p:nvGrpSpPr>
-        <p:cNvPr id="1" name=""/>
-        <p:cNvGrpSpPr/>
-        <p:nvPr/>
-      </p:nvGrpSpPr>
-      <p:grpSpPr>
-        <a:xfrm>
-          <a:off x="0" y="0"/>
-          <a:ext cx="0" cy="0"/>
-          <a:chOff x="0" y="0"/>
-          <a:chExt cx="0" cy="0"/>
-        </a:xfrm>
-      </p:grpSpPr>
-      <p:sp>
-        <p:nvSpPr>
-          <p:cNvPr id="2" name="タイトル 1">
-            <a:extLst>
-              <a:ext uri="{FF2B5EF4-FFF2-40B4-BE49-F238E27FC236}">
-                <a16:creationId xmlns:a16="http://schemas.microsoft.com/office/drawing/2014/main" id="{14E3091B-786F-4ED2-9311-B765C4873D3D}"/>
-              </a:ext>
-            </a:extLst>
-          </p:cNvPr>
-          <p:cNvSpPr>
-            <a:spLocks noGrp="1"/>
-          </p:cNvSpPr>
-          <p:nvPr>
-            <p:ph type="title"/>
-          </p:nvPr>
-        </p:nvSpPr>
-        <p:spPr/>
-        <p:txBody>
-          <a:bodyPr/>
-          <a:lstStyle/>
-          <a:p>
-            <a:endParaRPr kumimoji="1" lang="ja-JP" altLang="en-US"/>
-          </a:p>
-        </p:txBody>
-      </p:sp>
-      <p:sp>
-        <p:nvSpPr>
-          <p:cNvPr id="5" name="矢印: 左右 4">
-            <a:extLst>
-              <a:ext uri="{FF2B5EF4-FFF2-40B4-BE49-F238E27FC236}">
-                <a16:creationId xmlns:a16="http://schemas.microsoft.com/office/drawing/2014/main" id="{F0D367DC-292A-41F2-8E44-20B4C4F90AAA}"/>
-              </a:ext>
-            </a:extLst>
-          </p:cNvPr>
-          <p:cNvSpPr/>
-          <p:nvPr/>
-        </p:nvSpPr>
-        <p:spPr>
-          <a:xfrm>
-            <a:off x="2428598" y="2684105"/>
-            <a:ext cx="7095859" cy="451313"/>
-          </a:xfrm>
-          <a:prstGeom prst="leftRightArrow">
-            <a:avLst/>
-          </a:prstGeom>
-          <a:solidFill>
-            <a:schemeClr val="bg2">
-              <a:lumMod val="75000"/>
-            </a:schemeClr>
-          </a:solidFill>
-          <a:ln>
-            <a:solidFill>
-              <a:schemeClr val="tx1">
-                <a:lumMod val="85000"/>
-                <a:lumOff val="15000"/>
-              </a:schemeClr>
-            </a:solidFill>
-          </a:ln>
-        </p:spPr>
-        <p:style>
-          <a:lnRef idx="2">
-            <a:schemeClr val="accent1">
-              <a:shade val="50000"/>
-            </a:schemeClr>
-          </a:lnRef>
-          <a:fillRef idx="1">
-            <a:schemeClr val="accent1"/>
-          </a:fillRef>
-          <a:effectRef idx="0">
-            <a:schemeClr val="accent1"/>
-          </a:effectRef>
-          <a:fontRef idx="minor">
-            <a:schemeClr val="lt1"/>
-          </a:fontRef>
-        </p:style>
-        <p:txBody>
-          <a:bodyPr rtlCol="0" anchor="ctr"/>
-          <a:lstStyle/>
-          <a:p>
-            <a:pPr algn="ctr"/>
-            <a:endParaRPr kumimoji="1" lang="ja-JP" altLang="en-US"/>
-          </a:p>
-        </p:txBody>
-      </p:sp>
-      <p:sp>
-        <p:nvSpPr>
-          <p:cNvPr id="6" name="テキスト ボックス 5">
-            <a:extLst>
-              <a:ext uri="{FF2B5EF4-FFF2-40B4-BE49-F238E27FC236}">
-                <a16:creationId xmlns:a16="http://schemas.microsoft.com/office/drawing/2014/main" id="{622562B3-478D-45FF-B35F-073EDFB3BFB2}"/>
-              </a:ext>
-            </a:extLst>
-          </p:cNvPr>
-          <p:cNvSpPr txBox="1"/>
-          <p:nvPr/>
-        </p:nvSpPr>
-        <p:spPr>
-          <a:xfrm>
-            <a:off x="1301578" y="1468467"/>
-            <a:ext cx="1495167" cy="646331"/>
-          </a:xfrm>
-          <a:prstGeom prst="rect">
-            <a:avLst/>
-          </a:prstGeom>
-          <a:solidFill>
-            <a:schemeClr val="accent2">
-              <a:lumMod val="20000"/>
-              <a:lumOff val="80000"/>
-            </a:schemeClr>
-          </a:solidFill>
-          <a:ln>
-            <a:solidFill>
-              <a:schemeClr val="tx1"/>
-            </a:solidFill>
-          </a:ln>
-        </p:spPr>
-        <p:txBody>
-          <a:bodyPr wrap="square" rtlCol="0">
-            <a:spAutoFit/>
-          </a:bodyPr>
-          <a:lstStyle/>
-          <a:p>
-            <a:r>
-              <a:rPr lang="ja-JP" altLang="en-US" dirty="0"/>
-              <a:t>段飛び配線</a:t>
-            </a:r>
-            <a:endParaRPr lang="en-US" altLang="ja-JP" dirty="0"/>
-          </a:p>
-          <a:p>
-            <a:r>
-              <a:rPr kumimoji="1" lang="ja-JP" altLang="en-US" dirty="0">
-                <a:solidFill>
-                  <a:srgbClr val="FF0000"/>
-                </a:solidFill>
-              </a:rPr>
-              <a:t>すべて</a:t>
-            </a:r>
-            <a:r>
-              <a:rPr kumimoji="1" lang="en-US" altLang="ja-JP" dirty="0">
-                <a:solidFill>
-                  <a:srgbClr val="FF0000"/>
-                </a:solidFill>
-              </a:rPr>
-              <a:t>skip</a:t>
-            </a:r>
-            <a:endParaRPr kumimoji="1" lang="ja-JP" altLang="en-US" dirty="0">
-              <a:solidFill>
-                <a:srgbClr val="FF0000"/>
-              </a:solidFill>
-            </a:endParaRPr>
-          </a:p>
-        </p:txBody>
-      </p:sp>
-      <p:sp>
-        <p:nvSpPr>
-          <p:cNvPr id="7" name="テキスト ボックス 6">
-            <a:extLst>
-              <a:ext uri="{FF2B5EF4-FFF2-40B4-BE49-F238E27FC236}">
-                <a16:creationId xmlns:a16="http://schemas.microsoft.com/office/drawing/2014/main" id="{B8A7A41F-F293-4C8F-9F80-2442542805F4}"/>
-              </a:ext>
-            </a:extLst>
-          </p:cNvPr>
-          <p:cNvSpPr txBox="1"/>
-          <p:nvPr/>
-        </p:nvSpPr>
-        <p:spPr>
-          <a:xfrm>
-            <a:off x="8912927" y="1527162"/>
-            <a:ext cx="2477942" cy="646331"/>
-          </a:xfrm>
-          <a:prstGeom prst="rect">
-            <a:avLst/>
-          </a:prstGeom>
-          <a:solidFill>
-            <a:schemeClr val="accent1">
-              <a:lumMod val="20000"/>
-              <a:lumOff val="80000"/>
-            </a:schemeClr>
-          </a:solidFill>
-          <a:ln>
-            <a:solidFill>
-              <a:schemeClr val="tx1"/>
-            </a:solidFill>
-          </a:ln>
-        </p:spPr>
-        <p:txBody>
-          <a:bodyPr wrap="square" rtlCol="0">
-            <a:spAutoFit/>
-          </a:bodyPr>
-          <a:lstStyle/>
-          <a:p>
-            <a:r>
-              <a:rPr lang="ja-JP" altLang="en-US" dirty="0"/>
-              <a:t>段飛び配線</a:t>
-            </a:r>
-            <a:endParaRPr lang="en-US" altLang="ja-JP" dirty="0"/>
-          </a:p>
-          <a:p>
-            <a:r>
-              <a:rPr kumimoji="1" lang="ja-JP" altLang="en-US" dirty="0">
-                <a:solidFill>
-                  <a:schemeClr val="accent1"/>
-                </a:solidFill>
-              </a:rPr>
-              <a:t>すべてフィードスルー</a:t>
-            </a:r>
-          </a:p>
-        </p:txBody>
-      </p:sp>
-      <p:pic>
-        <p:nvPicPr>
-          <p:cNvPr id="8" name="図 7">
-            <a:extLst>
-              <a:ext uri="{FF2B5EF4-FFF2-40B4-BE49-F238E27FC236}">
-                <a16:creationId xmlns:a16="http://schemas.microsoft.com/office/drawing/2014/main" id="{08518A44-84C9-4888-9867-2AA03E45D043}"/>
-              </a:ext>
-            </a:extLst>
-          </p:cNvPr>
-          <p:cNvPicPr>
-            <a:picLocks noChangeAspect="1"/>
-          </p:cNvPicPr>
-          <p:nvPr/>
-        </p:nvPicPr>
-        <p:blipFill>
-          <a:blip r:embed="rId2"/>
-          <a:stretch>
-            <a:fillRect/>
-          </a:stretch>
-        </p:blipFill>
-        <p:spPr>
-          <a:xfrm>
-            <a:off x="618834" y="2246677"/>
-            <a:ext cx="1244977" cy="1329314"/>
-          </a:xfrm>
-          <a:prstGeom prst="rect">
-            <a:avLst/>
-          </a:prstGeom>
-        </p:spPr>
-      </p:pic>
-      <p:pic>
-        <p:nvPicPr>
-          <p:cNvPr id="9" name="図 8">
-            <a:extLst>
-              <a:ext uri="{FF2B5EF4-FFF2-40B4-BE49-F238E27FC236}">
-                <a16:creationId xmlns:a16="http://schemas.microsoft.com/office/drawing/2014/main" id="{12E31F3E-F7B3-4EF6-912D-1C68C1A85ED3}"/>
-              </a:ext>
-            </a:extLst>
-          </p:cNvPr>
-          <p:cNvPicPr>
-            <a:picLocks noChangeAspect="1"/>
-          </p:cNvPicPr>
-          <p:nvPr/>
-        </p:nvPicPr>
-        <p:blipFill>
-          <a:blip r:embed="rId3"/>
-          <a:stretch>
-            <a:fillRect/>
-          </a:stretch>
-        </p:blipFill>
-        <p:spPr>
-          <a:xfrm>
-            <a:off x="10089244" y="2236381"/>
-            <a:ext cx="1822257" cy="1587031"/>
-          </a:xfrm>
-          <a:prstGeom prst="rect">
-            <a:avLst/>
-          </a:prstGeom>
-        </p:spPr>
-      </p:pic>
-      <p:sp>
-        <p:nvSpPr>
-          <p:cNvPr id="10" name="テキスト ボックス 9">
-            <a:extLst>
-              <a:ext uri="{FF2B5EF4-FFF2-40B4-BE49-F238E27FC236}">
-                <a16:creationId xmlns:a16="http://schemas.microsoft.com/office/drawing/2014/main" id="{CAA157E2-E296-4149-842F-B5AEAD934576}"/>
-              </a:ext>
-            </a:extLst>
-          </p:cNvPr>
-          <p:cNvSpPr txBox="1"/>
-          <p:nvPr/>
-        </p:nvSpPr>
-        <p:spPr>
-          <a:xfrm>
-            <a:off x="256978" y="3913646"/>
-            <a:ext cx="3584366" cy="646331"/>
-          </a:xfrm>
-          <a:prstGeom prst="rect">
-            <a:avLst/>
-          </a:prstGeom>
-          <a:noFill/>
-        </p:spPr>
-        <p:txBody>
-          <a:bodyPr wrap="square" rtlCol="0">
-            <a:spAutoFit/>
-          </a:bodyPr>
-          <a:lstStyle/>
-          <a:p>
-            <a:r>
-              <a:rPr kumimoji="1" lang="ja-JP" altLang="en-US" dirty="0"/>
-              <a:t>構成メモリ</a:t>
-            </a:r>
-            <a:r>
-              <a:rPr kumimoji="1" lang="en-US" altLang="ja-JP" dirty="0"/>
-              <a:t>:	   10,350</a:t>
-            </a:r>
-            <a:r>
-              <a:rPr kumimoji="1" lang="en-US" altLang="ja-JP" sz="1600" dirty="0"/>
-              <a:t>bit</a:t>
-            </a:r>
-          </a:p>
-          <a:p>
-            <a:r>
-              <a:rPr kumimoji="1" lang="ja-JP" altLang="en-US" dirty="0"/>
-              <a:t>面積</a:t>
-            </a:r>
-            <a:r>
-              <a:rPr kumimoji="1" lang="en-US" altLang="ja-JP" dirty="0"/>
-              <a:t>	   :         586,318</a:t>
-            </a:r>
-            <a:r>
-              <a:rPr lang="el-GR" altLang="ja-JP" sz="1600" dirty="0"/>
-              <a:t>μ</a:t>
-            </a:r>
-            <a:r>
-              <a:rPr lang="en-US" altLang="ja-JP" sz="1600" dirty="0"/>
-              <a:t>m²</a:t>
-            </a:r>
-            <a:endParaRPr kumimoji="1" lang="ja-JP" altLang="en-US" dirty="0"/>
-          </a:p>
-        </p:txBody>
-      </p:sp>
-      <p:sp>
-        <p:nvSpPr>
-          <p:cNvPr id="11" name="テキスト ボックス 10">
-            <a:extLst>
-              <a:ext uri="{FF2B5EF4-FFF2-40B4-BE49-F238E27FC236}">
-                <a16:creationId xmlns:a16="http://schemas.microsoft.com/office/drawing/2014/main" id="{39D421F4-413E-48EF-9E3B-232ADCEEAD64}"/>
-              </a:ext>
-            </a:extLst>
-          </p:cNvPr>
-          <p:cNvSpPr txBox="1"/>
-          <p:nvPr/>
-        </p:nvSpPr>
-        <p:spPr>
-          <a:xfrm>
-            <a:off x="8053639" y="3905236"/>
-            <a:ext cx="3584366" cy="646331"/>
-          </a:xfrm>
-          <a:prstGeom prst="rect">
-            <a:avLst/>
-          </a:prstGeom>
-          <a:noFill/>
-        </p:spPr>
-        <p:txBody>
-          <a:bodyPr wrap="square" rtlCol="0">
-            <a:spAutoFit/>
-          </a:bodyPr>
-          <a:lstStyle/>
-          <a:p>
-            <a:r>
-              <a:rPr kumimoji="1" lang="ja-JP" altLang="en-US" dirty="0"/>
-              <a:t>構成メモリ</a:t>
-            </a:r>
-            <a:r>
-              <a:rPr kumimoji="1" lang="en-US" altLang="ja-JP" dirty="0"/>
-              <a:t>:	   11,083</a:t>
-            </a:r>
-            <a:r>
-              <a:rPr kumimoji="1" lang="en-US" altLang="ja-JP" sz="1600" dirty="0"/>
-              <a:t>bit</a:t>
-            </a:r>
-          </a:p>
-          <a:p>
-            <a:r>
-              <a:rPr kumimoji="1" lang="ja-JP" altLang="en-US" dirty="0"/>
-              <a:t>面積</a:t>
-            </a:r>
-            <a:r>
-              <a:rPr kumimoji="1" lang="en-US" altLang="ja-JP" dirty="0"/>
-              <a:t>	   :         543,682</a:t>
-            </a:r>
-            <a:r>
-              <a:rPr lang="el-GR" altLang="ja-JP" sz="1600" dirty="0"/>
-              <a:t>μ</a:t>
-            </a:r>
-            <a:r>
-              <a:rPr lang="en-US" altLang="ja-JP" sz="1600" dirty="0"/>
-              <a:t>m²</a:t>
-            </a:r>
-            <a:endParaRPr kumimoji="1" lang="ja-JP" altLang="en-US" dirty="0"/>
-          </a:p>
-        </p:txBody>
-      </p:sp>
-      <p:sp>
-        <p:nvSpPr>
-          <p:cNvPr id="12" name="テキスト ボックス 11">
-            <a:extLst>
-              <a:ext uri="{FF2B5EF4-FFF2-40B4-BE49-F238E27FC236}">
-                <a16:creationId xmlns:a16="http://schemas.microsoft.com/office/drawing/2014/main" id="{88BFE445-D607-4F2C-B25C-98047EE6538A}"/>
-              </a:ext>
-            </a:extLst>
-          </p:cNvPr>
-          <p:cNvSpPr txBox="1"/>
-          <p:nvPr/>
-        </p:nvSpPr>
-        <p:spPr>
-          <a:xfrm>
-            <a:off x="176659" y="4819640"/>
-            <a:ext cx="3584366" cy="369332"/>
-          </a:xfrm>
-          <a:prstGeom prst="rect">
-            <a:avLst/>
-          </a:prstGeom>
-          <a:noFill/>
-        </p:spPr>
-        <p:txBody>
-          <a:bodyPr wrap="square" rtlCol="0">
-            <a:spAutoFit/>
-          </a:bodyPr>
-          <a:lstStyle/>
-          <a:p>
-            <a:r>
-              <a:rPr lang="ja-JP" altLang="en-US" dirty="0"/>
-              <a:t>未知の回路が載る保証がない</a:t>
-            </a:r>
-            <a:endParaRPr kumimoji="1" lang="ja-JP" altLang="en-US" dirty="0"/>
-          </a:p>
-        </p:txBody>
-      </p:sp>
-      <p:sp>
-        <p:nvSpPr>
-          <p:cNvPr id="13" name="テキスト ボックス 12">
-            <a:extLst>
-              <a:ext uri="{FF2B5EF4-FFF2-40B4-BE49-F238E27FC236}">
-                <a16:creationId xmlns:a16="http://schemas.microsoft.com/office/drawing/2014/main" id="{EAC35A22-83A9-4463-9564-16F960E5AE03}"/>
-              </a:ext>
-            </a:extLst>
-          </p:cNvPr>
-          <p:cNvSpPr txBox="1"/>
-          <p:nvPr/>
-        </p:nvSpPr>
-        <p:spPr>
-          <a:xfrm>
-            <a:off x="8103519" y="4819640"/>
-            <a:ext cx="3584366" cy="646331"/>
-          </a:xfrm>
-          <a:prstGeom prst="rect">
-            <a:avLst/>
-          </a:prstGeom>
-          <a:noFill/>
-        </p:spPr>
-        <p:txBody>
-          <a:bodyPr wrap="square" rtlCol="0">
-            <a:spAutoFit/>
-          </a:bodyPr>
-          <a:lstStyle/>
-          <a:p>
-            <a:r>
-              <a:rPr kumimoji="1" lang="ja-JP" altLang="en-US" dirty="0"/>
-              <a:t>余った枠をそのまま</a:t>
-            </a:r>
-            <a:r>
-              <a:rPr lang="ja-JP" altLang="en-US" dirty="0"/>
-              <a:t>使う</a:t>
-            </a:r>
-            <a:endParaRPr lang="en-US" altLang="ja-JP" dirty="0"/>
-          </a:p>
-          <a:p>
-            <a:r>
-              <a:rPr kumimoji="1" lang="ja-JP" altLang="en-US" dirty="0"/>
-              <a:t>応用力がある</a:t>
-            </a:r>
-          </a:p>
-        </p:txBody>
-      </p:sp>
-    </p:spTree>
-    <p:extLst>
-      <p:ext uri="{BB962C8B-B14F-4D97-AF65-F5344CB8AC3E}">
-        <p14:creationId xmlns:p14="http://schemas.microsoft.com/office/powerpoint/2010/main" val="49235958"/>
-      </p:ext>
-    </p:extLst>
-  </p:cSld>
-  <p:clrMapOvr>
-    <a:masterClrMapping/>
-  </p:clrMapOvr>
-</p:sld>
-</file>
-
 <file path=ppt/slides/slide15.xml><?xml version="1.0" encoding="utf-8"?>
 <p:sld xmlns:a="http://schemas.openxmlformats.org/drawingml/2006/main" xmlns:r="http://schemas.openxmlformats.org/officeDocument/2006/relationships" xmlns:p="http://schemas.openxmlformats.org/presentationml/2006/main">
   <p:cSld>
@@ -9151,7 +11369,7 @@
           <p:cNvPr id="2" name="タイトル 1">
             <a:extLst>
               <a:ext uri="{FF2B5EF4-FFF2-40B4-BE49-F238E27FC236}">
-                <a16:creationId xmlns:a16="http://schemas.microsoft.com/office/drawing/2014/main" id="{C7E1BF66-0631-45F4-AF51-0030CE132663}"/>
+                <a16:creationId xmlns:a16="http://schemas.microsoft.com/office/drawing/2014/main" id="{250E420B-7345-4C7F-99F4-4EEF20A0F02B}"/>
               </a:ext>
             </a:extLst>
           </p:cNvPr>
@@ -9169,40 +11387,53 @@
           <a:p>
             <a:r>
               <a:rPr kumimoji="1" lang="ja-JP" altLang="en-US" dirty="0"/>
-              <a:t>ネットリスト情報</a:t>
-            </a:r>
-          </a:p>
-        </p:txBody>
-      </p:sp>
-      <p:sp>
-        <p:nvSpPr>
-          <p:cNvPr id="3" name="テキスト プレースホルダー 2">
-            <a:extLst>
-              <a:ext uri="{FF2B5EF4-FFF2-40B4-BE49-F238E27FC236}">
-                <a16:creationId xmlns:a16="http://schemas.microsoft.com/office/drawing/2014/main" id="{8E0FDCA2-1749-48E2-9A35-D37608649CE2}"/>
-              </a:ext>
-            </a:extLst>
-          </p:cNvPr>
-          <p:cNvSpPr>
-            <a:spLocks noGrp="1"/>
-          </p:cNvSpPr>
-          <p:nvPr>
-            <p:ph type="body" idx="1"/>
-          </p:nvPr>
-        </p:nvSpPr>
-        <p:spPr/>
-        <p:txBody>
-          <a:bodyPr/>
-          <a:lstStyle/>
-          <a:p>
-            <a:endParaRPr kumimoji="1" lang="ja-JP" altLang="en-US"/>
-          </a:p>
-        </p:txBody>
-      </p:sp>
+              <a:t>総</a:t>
+            </a:r>
+            <a:r>
+              <a:rPr kumimoji="1" lang="en-US" altLang="ja-JP" dirty="0"/>
+              <a:t>MUX</a:t>
+            </a:r>
+            <a:r>
+              <a:rPr kumimoji="1" lang="ja-JP" altLang="en-US" dirty="0"/>
+              <a:t>数</a:t>
+            </a:r>
+          </a:p>
+        </p:txBody>
+      </p:sp>
+      <p:pic>
+        <p:nvPicPr>
+          <p:cNvPr id="4" name="図 3">
+            <a:extLst>
+              <a:ext uri="{FF2B5EF4-FFF2-40B4-BE49-F238E27FC236}">
+                <a16:creationId xmlns:a16="http://schemas.microsoft.com/office/drawing/2014/main" id="{B9870EBE-1E66-4BDD-B5CE-98B984847029}"/>
+              </a:ext>
+            </a:extLst>
+          </p:cNvPr>
+          <p:cNvPicPr>
+            <a:picLocks noChangeAspect="1"/>
+          </p:cNvPicPr>
+          <p:nvPr/>
+        </p:nvPicPr>
+        <p:blipFill>
+          <a:blip r:embed="rId2"/>
+          <a:stretch>
+            <a:fillRect/>
+          </a:stretch>
+        </p:blipFill>
+        <p:spPr>
+          <a:xfrm>
+            <a:off x="336522" y="1840872"/>
+            <a:ext cx="11089585" cy="2761727"/>
+          </a:xfrm>
+          <a:prstGeom prst="rect">
+            <a:avLst/>
+          </a:prstGeom>
+        </p:spPr>
+      </p:pic>
     </p:spTree>
     <p:extLst>
       <p:ext uri="{BB962C8B-B14F-4D97-AF65-F5344CB8AC3E}">
-        <p14:creationId xmlns:p14="http://schemas.microsoft.com/office/powerpoint/2010/main" val="3964600009"/>
+        <p14:creationId xmlns:p14="http://schemas.microsoft.com/office/powerpoint/2010/main" val="640183041"/>
       </p:ext>
     </p:extLst>
   </p:cSld>
@@ -9234,7 +11465,7 @@
           <p:cNvPr id="2" name="タイトル 1">
             <a:extLst>
               <a:ext uri="{FF2B5EF4-FFF2-40B4-BE49-F238E27FC236}">
-                <a16:creationId xmlns:a16="http://schemas.microsoft.com/office/drawing/2014/main" id="{6FEEA61F-4ED5-4478-93A4-77E75F64F9A4}"/>
+                <a16:creationId xmlns:a16="http://schemas.microsoft.com/office/drawing/2014/main" id="{14E3091B-786F-4ED2-9311-B765C4873D3D}"/>
               </a:ext>
             </a:extLst>
           </p:cNvPr>
@@ -9254,12 +11485,196 @@
           </a:p>
         </p:txBody>
       </p:sp>
+      <p:sp>
+        <p:nvSpPr>
+          <p:cNvPr id="5" name="矢印: 左右 4">
+            <a:extLst>
+              <a:ext uri="{FF2B5EF4-FFF2-40B4-BE49-F238E27FC236}">
+                <a16:creationId xmlns:a16="http://schemas.microsoft.com/office/drawing/2014/main" id="{F0D367DC-292A-41F2-8E44-20B4C4F90AAA}"/>
+              </a:ext>
+            </a:extLst>
+          </p:cNvPr>
+          <p:cNvSpPr/>
+          <p:nvPr/>
+        </p:nvSpPr>
+        <p:spPr>
+          <a:xfrm>
+            <a:off x="3001623" y="2688317"/>
+            <a:ext cx="4386730" cy="451313"/>
+          </a:xfrm>
+          <a:prstGeom prst="leftRightArrow">
+            <a:avLst/>
+          </a:prstGeom>
+          <a:solidFill>
+            <a:schemeClr val="bg2">
+              <a:lumMod val="75000"/>
+            </a:schemeClr>
+          </a:solidFill>
+          <a:ln>
+            <a:solidFill>
+              <a:schemeClr val="tx1">
+                <a:lumMod val="85000"/>
+                <a:lumOff val="15000"/>
+              </a:schemeClr>
+            </a:solidFill>
+          </a:ln>
+        </p:spPr>
+        <p:style>
+          <a:lnRef idx="2">
+            <a:schemeClr val="accent1">
+              <a:shade val="50000"/>
+            </a:schemeClr>
+          </a:lnRef>
+          <a:fillRef idx="1">
+            <a:schemeClr val="accent1"/>
+          </a:fillRef>
+          <a:effectRef idx="0">
+            <a:schemeClr val="accent1"/>
+          </a:effectRef>
+          <a:fontRef idx="minor">
+            <a:schemeClr val="lt1"/>
+          </a:fontRef>
+        </p:style>
+        <p:txBody>
+          <a:bodyPr rtlCol="0" anchor="ctr"/>
+          <a:lstStyle/>
+          <a:p>
+            <a:pPr algn="ctr"/>
+            <a:endParaRPr kumimoji="1" lang="ja-JP" altLang="en-US"/>
+          </a:p>
+        </p:txBody>
+      </p:sp>
+      <p:sp>
+        <p:nvSpPr>
+          <p:cNvPr id="6" name="テキスト ボックス 5">
+            <a:extLst>
+              <a:ext uri="{FF2B5EF4-FFF2-40B4-BE49-F238E27FC236}">
+                <a16:creationId xmlns:a16="http://schemas.microsoft.com/office/drawing/2014/main" id="{622562B3-478D-45FF-B35F-073EDFB3BFB2}"/>
+              </a:ext>
+            </a:extLst>
+          </p:cNvPr>
+          <p:cNvSpPr txBox="1"/>
+          <p:nvPr/>
+        </p:nvSpPr>
+        <p:spPr>
+          <a:xfrm>
+            <a:off x="1874602" y="1472679"/>
+            <a:ext cx="1495167" cy="646331"/>
+          </a:xfrm>
+          <a:prstGeom prst="rect">
+            <a:avLst/>
+          </a:prstGeom>
+          <a:solidFill>
+            <a:schemeClr val="accent2">
+              <a:lumMod val="20000"/>
+              <a:lumOff val="80000"/>
+            </a:schemeClr>
+          </a:solidFill>
+          <a:ln>
+            <a:solidFill>
+              <a:schemeClr val="tx1"/>
+            </a:solidFill>
+          </a:ln>
+        </p:spPr>
+        <p:txBody>
+          <a:bodyPr wrap="square" rtlCol="0">
+            <a:spAutoFit/>
+          </a:bodyPr>
+          <a:lstStyle/>
+          <a:p>
+            <a:r>
+              <a:rPr lang="ja-JP" altLang="en-US" dirty="0"/>
+              <a:t>段飛び配線</a:t>
+            </a:r>
+            <a:endParaRPr lang="en-US" altLang="ja-JP" dirty="0"/>
+          </a:p>
+          <a:p>
+            <a:r>
+              <a:rPr kumimoji="1" lang="ja-JP" altLang="en-US" dirty="0">
+                <a:solidFill>
+                  <a:srgbClr val="FF0000"/>
+                </a:solidFill>
+              </a:rPr>
+              <a:t>すべて</a:t>
+            </a:r>
+            <a:r>
+              <a:rPr kumimoji="1" lang="en-US" altLang="ja-JP" dirty="0">
+                <a:solidFill>
+                  <a:srgbClr val="FF0000"/>
+                </a:solidFill>
+              </a:rPr>
+              <a:t>skip</a:t>
+            </a:r>
+            <a:endParaRPr kumimoji="1" lang="ja-JP" altLang="en-US" dirty="0">
+              <a:solidFill>
+                <a:srgbClr val="FF0000"/>
+              </a:solidFill>
+            </a:endParaRPr>
+          </a:p>
+        </p:txBody>
+      </p:sp>
+      <p:sp>
+        <p:nvSpPr>
+          <p:cNvPr id="7" name="テキスト ボックス 6">
+            <a:extLst>
+              <a:ext uri="{FF2B5EF4-FFF2-40B4-BE49-F238E27FC236}">
+                <a16:creationId xmlns:a16="http://schemas.microsoft.com/office/drawing/2014/main" id="{B8A7A41F-F293-4C8F-9F80-2442542805F4}"/>
+              </a:ext>
+            </a:extLst>
+          </p:cNvPr>
+          <p:cNvSpPr txBox="1"/>
+          <p:nvPr/>
+        </p:nvSpPr>
+        <p:spPr>
+          <a:xfrm>
+            <a:off x="7669343" y="1527162"/>
+            <a:ext cx="2477942" cy="646331"/>
+          </a:xfrm>
+          <a:prstGeom prst="rect">
+            <a:avLst/>
+          </a:prstGeom>
+          <a:solidFill>
+            <a:schemeClr val="accent1">
+              <a:lumMod val="20000"/>
+              <a:lumOff val="80000"/>
+            </a:schemeClr>
+          </a:solidFill>
+          <a:ln>
+            <a:solidFill>
+              <a:schemeClr val="tx1"/>
+            </a:solidFill>
+          </a:ln>
+        </p:spPr>
+        <p:txBody>
+          <a:bodyPr wrap="square" rtlCol="0">
+            <a:spAutoFit/>
+          </a:bodyPr>
+          <a:lstStyle/>
+          <a:p>
+            <a:r>
+              <a:rPr lang="ja-JP" altLang="en-US" dirty="0"/>
+              <a:t>段飛び配線</a:t>
+            </a:r>
+            <a:endParaRPr lang="en-US" altLang="ja-JP" dirty="0"/>
+          </a:p>
+          <a:p>
+            <a:r>
+              <a:rPr kumimoji="1" lang="ja-JP" altLang="en-US" dirty="0">
+                <a:solidFill>
+                  <a:schemeClr val="accent1"/>
+                </a:solidFill>
+              </a:rPr>
+              <a:t>すべてフィードスルー</a:t>
+            </a:r>
+          </a:p>
+        </p:txBody>
+      </p:sp>
       <p:pic>
         <p:nvPicPr>
-          <p:cNvPr id="4" name="図 3">
-            <a:extLst>
-              <a:ext uri="{FF2B5EF4-FFF2-40B4-BE49-F238E27FC236}">
-                <a16:creationId xmlns:a16="http://schemas.microsoft.com/office/drawing/2014/main" id="{F8B35591-67AD-421A-95A6-EA934FC9C631}"/>
+          <p:cNvPr id="8" name="図 7">
+            <a:extLst>
+              <a:ext uri="{FF2B5EF4-FFF2-40B4-BE49-F238E27FC236}">
+                <a16:creationId xmlns:a16="http://schemas.microsoft.com/office/drawing/2014/main" id="{08518A44-84C9-4888-9867-2AA03E45D043}"/>
               </a:ext>
             </a:extLst>
           </p:cNvPr>
@@ -9276,18 +11691,254 @@
         </p:blipFill>
         <p:spPr>
           <a:xfrm>
-            <a:off x="286247" y="1252227"/>
-            <a:ext cx="11179534" cy="5276700"/>
+            <a:off x="1191858" y="2250889"/>
+            <a:ext cx="1244977" cy="1329314"/>
           </a:xfrm>
           <a:prstGeom prst="rect">
             <a:avLst/>
           </a:prstGeom>
         </p:spPr>
       </p:pic>
+      <p:pic>
+        <p:nvPicPr>
+          <p:cNvPr id="9" name="図 8">
+            <a:extLst>
+              <a:ext uri="{FF2B5EF4-FFF2-40B4-BE49-F238E27FC236}">
+                <a16:creationId xmlns:a16="http://schemas.microsoft.com/office/drawing/2014/main" id="{12E31F3E-F7B3-4EF6-912D-1C68C1A85ED3}"/>
+              </a:ext>
+            </a:extLst>
+          </p:cNvPr>
+          <p:cNvPicPr>
+            <a:picLocks noChangeAspect="1"/>
+          </p:cNvPicPr>
+          <p:nvPr/>
+        </p:nvPicPr>
+        <p:blipFill>
+          <a:blip r:embed="rId3"/>
+          <a:stretch>
+            <a:fillRect/>
+          </a:stretch>
+        </p:blipFill>
+        <p:spPr>
+          <a:xfrm>
+            <a:off x="8845660" y="2236381"/>
+            <a:ext cx="1822257" cy="1587031"/>
+          </a:xfrm>
+          <a:prstGeom prst="rect">
+            <a:avLst/>
+          </a:prstGeom>
+        </p:spPr>
+      </p:pic>
+      <p:sp>
+        <p:nvSpPr>
+          <p:cNvPr id="10" name="テキスト ボックス 9">
+            <a:extLst>
+              <a:ext uri="{FF2B5EF4-FFF2-40B4-BE49-F238E27FC236}">
+                <a16:creationId xmlns:a16="http://schemas.microsoft.com/office/drawing/2014/main" id="{CAA157E2-E296-4149-842F-B5AEAD934576}"/>
+              </a:ext>
+            </a:extLst>
+          </p:cNvPr>
+          <p:cNvSpPr txBox="1"/>
+          <p:nvPr/>
+        </p:nvSpPr>
+        <p:spPr>
+          <a:xfrm>
+            <a:off x="830002" y="3917858"/>
+            <a:ext cx="3584366" cy="646331"/>
+          </a:xfrm>
+          <a:prstGeom prst="rect">
+            <a:avLst/>
+          </a:prstGeom>
+          <a:noFill/>
+        </p:spPr>
+        <p:txBody>
+          <a:bodyPr wrap="square" rtlCol="0">
+            <a:spAutoFit/>
+          </a:bodyPr>
+          <a:lstStyle/>
+          <a:p>
+            <a:r>
+              <a:rPr kumimoji="1" lang="ja-JP" altLang="en-US" dirty="0"/>
+              <a:t>構成メモリ</a:t>
+            </a:r>
+            <a:r>
+              <a:rPr kumimoji="1" lang="en-US" altLang="ja-JP" dirty="0"/>
+              <a:t>:	   10,350</a:t>
+            </a:r>
+            <a:r>
+              <a:rPr kumimoji="1" lang="en-US" altLang="ja-JP" sz="1600" dirty="0"/>
+              <a:t>bit</a:t>
+            </a:r>
+          </a:p>
+          <a:p>
+            <a:r>
+              <a:rPr kumimoji="1" lang="ja-JP" altLang="en-US" dirty="0"/>
+              <a:t>面積</a:t>
+            </a:r>
+            <a:r>
+              <a:rPr kumimoji="1" lang="en-US" altLang="ja-JP" dirty="0"/>
+              <a:t>	   :         586,318</a:t>
+            </a:r>
+            <a:r>
+              <a:rPr lang="el-GR" altLang="ja-JP" sz="1600" dirty="0"/>
+              <a:t>μ</a:t>
+            </a:r>
+            <a:r>
+              <a:rPr lang="en-US" altLang="ja-JP" sz="1600" dirty="0"/>
+              <a:t>m²</a:t>
+            </a:r>
+            <a:endParaRPr kumimoji="1" lang="ja-JP" altLang="en-US" dirty="0"/>
+          </a:p>
+        </p:txBody>
+      </p:sp>
+      <p:sp>
+        <p:nvSpPr>
+          <p:cNvPr id="11" name="テキスト ボックス 10">
+            <a:extLst>
+              <a:ext uri="{FF2B5EF4-FFF2-40B4-BE49-F238E27FC236}">
+                <a16:creationId xmlns:a16="http://schemas.microsoft.com/office/drawing/2014/main" id="{39D421F4-413E-48EF-9E3B-232ADCEEAD64}"/>
+              </a:ext>
+            </a:extLst>
+          </p:cNvPr>
+          <p:cNvSpPr txBox="1"/>
+          <p:nvPr/>
+        </p:nvSpPr>
+        <p:spPr>
+          <a:xfrm>
+            <a:off x="6810055" y="3905236"/>
+            <a:ext cx="3584366" cy="646331"/>
+          </a:xfrm>
+          <a:prstGeom prst="rect">
+            <a:avLst/>
+          </a:prstGeom>
+          <a:noFill/>
+        </p:spPr>
+        <p:txBody>
+          <a:bodyPr wrap="square" rtlCol="0">
+            <a:spAutoFit/>
+          </a:bodyPr>
+          <a:lstStyle/>
+          <a:p>
+            <a:r>
+              <a:rPr kumimoji="1" lang="ja-JP" altLang="en-US" dirty="0"/>
+              <a:t>構成メモリ</a:t>
+            </a:r>
+            <a:r>
+              <a:rPr kumimoji="1" lang="en-US" altLang="ja-JP" dirty="0"/>
+              <a:t>:	   11,083</a:t>
+            </a:r>
+            <a:r>
+              <a:rPr kumimoji="1" lang="en-US" altLang="ja-JP" sz="1600" dirty="0"/>
+              <a:t>bit</a:t>
+            </a:r>
+          </a:p>
+          <a:p>
+            <a:r>
+              <a:rPr kumimoji="1" lang="ja-JP" altLang="en-US" dirty="0"/>
+              <a:t>面積</a:t>
+            </a:r>
+            <a:r>
+              <a:rPr kumimoji="1" lang="en-US" altLang="ja-JP" dirty="0"/>
+              <a:t>	   :         543,682</a:t>
+            </a:r>
+            <a:r>
+              <a:rPr lang="el-GR" altLang="ja-JP" sz="1600" dirty="0"/>
+              <a:t>μ</a:t>
+            </a:r>
+            <a:r>
+              <a:rPr lang="en-US" altLang="ja-JP" sz="1600" dirty="0"/>
+              <a:t>m²</a:t>
+            </a:r>
+            <a:endParaRPr kumimoji="1" lang="ja-JP" altLang="en-US" dirty="0"/>
+          </a:p>
+        </p:txBody>
+      </p:sp>
+      <p:sp>
+        <p:nvSpPr>
+          <p:cNvPr id="12" name="テキスト ボックス 11">
+            <a:extLst>
+              <a:ext uri="{FF2B5EF4-FFF2-40B4-BE49-F238E27FC236}">
+                <a16:creationId xmlns:a16="http://schemas.microsoft.com/office/drawing/2014/main" id="{88BFE445-D607-4F2C-B25C-98047EE6538A}"/>
+              </a:ext>
+            </a:extLst>
+          </p:cNvPr>
+          <p:cNvSpPr txBox="1"/>
+          <p:nvPr/>
+        </p:nvSpPr>
+        <p:spPr>
+          <a:xfrm>
+            <a:off x="749683" y="4823852"/>
+            <a:ext cx="3584366" cy="369332"/>
+          </a:xfrm>
+          <a:prstGeom prst="rect">
+            <a:avLst/>
+          </a:prstGeom>
+          <a:noFill/>
+        </p:spPr>
+        <p:txBody>
+          <a:bodyPr wrap="square" rtlCol="0">
+            <a:spAutoFit/>
+          </a:bodyPr>
+          <a:lstStyle/>
+          <a:p>
+            <a:r>
+              <a:rPr lang="ja-JP" altLang="en-US" dirty="0"/>
+              <a:t>未知の回路が載る保証がない</a:t>
+            </a:r>
+            <a:endParaRPr kumimoji="1" lang="ja-JP" altLang="en-US" dirty="0"/>
+          </a:p>
+        </p:txBody>
+      </p:sp>
+      <p:sp>
+        <p:nvSpPr>
+          <p:cNvPr id="13" name="テキスト ボックス 12">
+            <a:extLst>
+              <a:ext uri="{FF2B5EF4-FFF2-40B4-BE49-F238E27FC236}">
+                <a16:creationId xmlns:a16="http://schemas.microsoft.com/office/drawing/2014/main" id="{EAC35A22-83A9-4463-9564-16F960E5AE03}"/>
+              </a:ext>
+            </a:extLst>
+          </p:cNvPr>
+          <p:cNvSpPr txBox="1"/>
+          <p:nvPr/>
+        </p:nvSpPr>
+        <p:spPr>
+          <a:xfrm>
+            <a:off x="6859935" y="4819640"/>
+            <a:ext cx="3584366" cy="646331"/>
+          </a:xfrm>
+          <a:prstGeom prst="rect">
+            <a:avLst/>
+          </a:prstGeom>
+          <a:noFill/>
+        </p:spPr>
+        <p:txBody>
+          <a:bodyPr wrap="square" rtlCol="0">
+            <a:spAutoFit/>
+          </a:bodyPr>
+          <a:lstStyle/>
+          <a:p>
+            <a:r>
+              <a:rPr kumimoji="1" lang="ja-JP" altLang="en-US" dirty="0"/>
+              <a:t>余った枠をそのまま</a:t>
+            </a:r>
+            <a:r>
+              <a:rPr lang="ja-JP" altLang="en-US" dirty="0"/>
+              <a:t>使う</a:t>
+            </a:r>
+            <a:endParaRPr lang="en-US" altLang="ja-JP" dirty="0"/>
+          </a:p>
+          <a:p>
+            <a:r>
+              <a:rPr kumimoji="1" lang="ja-JP" altLang="en-US" dirty="0"/>
+              <a:t>応用力がある</a:t>
+            </a:r>
+          </a:p>
+        </p:txBody>
+      </p:sp>
     </p:spTree>
     <p:extLst>
       <p:ext uri="{BB962C8B-B14F-4D97-AF65-F5344CB8AC3E}">
-        <p14:creationId xmlns:p14="http://schemas.microsoft.com/office/powerpoint/2010/main" val="1033662271"/>
+        <p14:creationId xmlns:p14="http://schemas.microsoft.com/office/powerpoint/2010/main" val="49235958"/>
       </p:ext>
     </p:extLst>
   </p:cSld>
@@ -10020,7 +12671,7 @@
           <p:cNvPr id="2" name="タイトル 1">
             <a:extLst>
               <a:ext uri="{FF2B5EF4-FFF2-40B4-BE49-F238E27FC236}">
-                <a16:creationId xmlns:a16="http://schemas.microsoft.com/office/drawing/2014/main" id="{41C70D69-89E9-4063-977A-943456949739}"/>
+                <a16:creationId xmlns:a16="http://schemas.microsoft.com/office/drawing/2014/main" id="{C7E1BF66-0631-45F4-AF51-0030CE132663}"/>
               </a:ext>
             </a:extLst>
           </p:cNvPr>
@@ -10038,7 +12689,7 @@
           <a:p>
             <a:r>
               <a:rPr kumimoji="1" lang="ja-JP" altLang="en-US" dirty="0"/>
-              <a:t>ネットリストの調査</a:t>
+              <a:t>ネットリスト情報</a:t>
             </a:r>
           </a:p>
         </p:txBody>
@@ -10048,7 +12699,7 @@
           <p:cNvPr id="3" name="テキスト プレースホルダー 2">
             <a:extLst>
               <a:ext uri="{FF2B5EF4-FFF2-40B4-BE49-F238E27FC236}">
-                <a16:creationId xmlns:a16="http://schemas.microsoft.com/office/drawing/2014/main" id="{5583F86D-0630-48A7-82BC-5F49E5B34F5E}"/>
+                <a16:creationId xmlns:a16="http://schemas.microsoft.com/office/drawing/2014/main" id="{8E0FDCA2-1749-48E2-9A35-D37608649CE2}"/>
               </a:ext>
             </a:extLst>
           </p:cNvPr>
@@ -10071,7 +12722,7 @@
     </p:spTree>
     <p:extLst>
       <p:ext uri="{BB962C8B-B14F-4D97-AF65-F5344CB8AC3E}">
-        <p14:creationId xmlns:p14="http://schemas.microsoft.com/office/powerpoint/2010/main" val="2524028814"/>
+        <p14:creationId xmlns:p14="http://schemas.microsoft.com/office/powerpoint/2010/main" val="3964600009"/>
       </p:ext>
     </p:extLst>
   </p:cSld>
@@ -10272,7 +12923,7 @@
           <p:cNvPr id="2" name="タイトル 1">
             <a:extLst>
               <a:ext uri="{FF2B5EF4-FFF2-40B4-BE49-F238E27FC236}">
-                <a16:creationId xmlns:a16="http://schemas.microsoft.com/office/drawing/2014/main" id="{444F5119-154B-4D84-A148-8F8512A25733}"/>
+                <a16:creationId xmlns:a16="http://schemas.microsoft.com/office/drawing/2014/main" id="{6FEEA61F-4ED5-4478-93A4-77E75F64F9A4}"/>
               </a:ext>
             </a:extLst>
           </p:cNvPr>
@@ -10288,6 +12939,174 @@
           <a:bodyPr/>
           <a:lstStyle/>
           <a:p>
+            <a:endParaRPr kumimoji="1" lang="ja-JP" altLang="en-US"/>
+          </a:p>
+        </p:txBody>
+      </p:sp>
+      <p:pic>
+        <p:nvPicPr>
+          <p:cNvPr id="4" name="図 3">
+            <a:extLst>
+              <a:ext uri="{FF2B5EF4-FFF2-40B4-BE49-F238E27FC236}">
+                <a16:creationId xmlns:a16="http://schemas.microsoft.com/office/drawing/2014/main" id="{F8B35591-67AD-421A-95A6-EA934FC9C631}"/>
+              </a:ext>
+            </a:extLst>
+          </p:cNvPr>
+          <p:cNvPicPr>
+            <a:picLocks noChangeAspect="1"/>
+          </p:cNvPicPr>
+          <p:nvPr/>
+        </p:nvPicPr>
+        <p:blipFill>
+          <a:blip r:embed="rId2"/>
+          <a:stretch>
+            <a:fillRect/>
+          </a:stretch>
+        </p:blipFill>
+        <p:spPr>
+          <a:xfrm>
+            <a:off x="286247" y="1252227"/>
+            <a:ext cx="11179534" cy="5276700"/>
+          </a:xfrm>
+          <a:prstGeom prst="rect">
+            <a:avLst/>
+          </a:prstGeom>
+        </p:spPr>
+      </p:pic>
+    </p:spTree>
+    <p:extLst>
+      <p:ext uri="{BB962C8B-B14F-4D97-AF65-F5344CB8AC3E}">
+        <p14:creationId xmlns:p14="http://schemas.microsoft.com/office/powerpoint/2010/main" val="1033662271"/>
+      </p:ext>
+    </p:extLst>
+  </p:cSld>
+  <p:clrMapOvr>
+    <a:masterClrMapping/>
+  </p:clrMapOvr>
+</p:sld>
+</file>
+
+<file path=ppt/slides/slide4.xml><?xml version="1.0" encoding="utf-8"?>
+<p:sld xmlns:a="http://schemas.openxmlformats.org/drawingml/2006/main" xmlns:r="http://schemas.openxmlformats.org/officeDocument/2006/relationships" xmlns:p="http://schemas.openxmlformats.org/presentationml/2006/main">
+  <p:cSld>
+    <p:spTree>
+      <p:nvGrpSpPr>
+        <p:cNvPr id="1" name=""/>
+        <p:cNvGrpSpPr/>
+        <p:nvPr/>
+      </p:nvGrpSpPr>
+      <p:grpSpPr>
+        <a:xfrm>
+          <a:off x="0" y="0"/>
+          <a:ext cx="0" cy="0"/>
+          <a:chOff x="0" y="0"/>
+          <a:chExt cx="0" cy="0"/>
+        </a:xfrm>
+      </p:grpSpPr>
+      <p:sp>
+        <p:nvSpPr>
+          <p:cNvPr id="2" name="タイトル 1">
+            <a:extLst>
+              <a:ext uri="{FF2B5EF4-FFF2-40B4-BE49-F238E27FC236}">
+                <a16:creationId xmlns:a16="http://schemas.microsoft.com/office/drawing/2014/main" id="{41C70D69-89E9-4063-977A-943456949739}"/>
+              </a:ext>
+            </a:extLst>
+          </p:cNvPr>
+          <p:cNvSpPr>
+            <a:spLocks noGrp="1"/>
+          </p:cNvSpPr>
+          <p:nvPr>
+            <p:ph type="title"/>
+          </p:nvPr>
+        </p:nvSpPr>
+        <p:spPr/>
+        <p:txBody>
+          <a:bodyPr/>
+          <a:lstStyle/>
+          <a:p>
+            <a:r>
+              <a:rPr kumimoji="1" lang="ja-JP" altLang="en-US" dirty="0"/>
+              <a:t>ネットリストの調査</a:t>
+            </a:r>
+          </a:p>
+        </p:txBody>
+      </p:sp>
+      <p:sp>
+        <p:nvSpPr>
+          <p:cNvPr id="3" name="テキスト プレースホルダー 2">
+            <a:extLst>
+              <a:ext uri="{FF2B5EF4-FFF2-40B4-BE49-F238E27FC236}">
+                <a16:creationId xmlns:a16="http://schemas.microsoft.com/office/drawing/2014/main" id="{5583F86D-0630-48A7-82BC-5F49E5B34F5E}"/>
+              </a:ext>
+            </a:extLst>
+          </p:cNvPr>
+          <p:cNvSpPr>
+            <a:spLocks noGrp="1"/>
+          </p:cNvSpPr>
+          <p:nvPr>
+            <p:ph type="body" idx="1"/>
+          </p:nvPr>
+        </p:nvSpPr>
+        <p:spPr/>
+        <p:txBody>
+          <a:bodyPr/>
+          <a:lstStyle/>
+          <a:p>
+            <a:endParaRPr kumimoji="1" lang="ja-JP" altLang="en-US"/>
+          </a:p>
+        </p:txBody>
+      </p:sp>
+    </p:spTree>
+    <p:extLst>
+      <p:ext uri="{BB962C8B-B14F-4D97-AF65-F5344CB8AC3E}">
+        <p14:creationId xmlns:p14="http://schemas.microsoft.com/office/powerpoint/2010/main" val="2524028814"/>
+      </p:ext>
+    </p:extLst>
+  </p:cSld>
+  <p:clrMapOvr>
+    <a:masterClrMapping/>
+  </p:clrMapOvr>
+</p:sld>
+</file>
+
+<file path=ppt/slides/slide5.xml><?xml version="1.0" encoding="utf-8"?>
+<p:sld xmlns:a="http://schemas.openxmlformats.org/drawingml/2006/main" xmlns:r="http://schemas.openxmlformats.org/officeDocument/2006/relationships" xmlns:p="http://schemas.openxmlformats.org/presentationml/2006/main">
+  <p:cSld>
+    <p:spTree>
+      <p:nvGrpSpPr>
+        <p:cNvPr id="1" name=""/>
+        <p:cNvGrpSpPr/>
+        <p:nvPr/>
+      </p:nvGrpSpPr>
+      <p:grpSpPr>
+        <a:xfrm>
+          <a:off x="0" y="0"/>
+          <a:ext cx="0" cy="0"/>
+          <a:chOff x="0" y="0"/>
+          <a:chExt cx="0" cy="0"/>
+        </a:xfrm>
+      </p:grpSpPr>
+      <p:sp>
+        <p:nvSpPr>
+          <p:cNvPr id="2" name="タイトル 1">
+            <a:extLst>
+              <a:ext uri="{FF2B5EF4-FFF2-40B4-BE49-F238E27FC236}">
+                <a16:creationId xmlns:a16="http://schemas.microsoft.com/office/drawing/2014/main" id="{444F5119-154B-4D84-A148-8F8512A25733}"/>
+              </a:ext>
+            </a:extLst>
+          </p:cNvPr>
+          <p:cNvSpPr>
+            <a:spLocks noGrp="1"/>
+          </p:cNvSpPr>
+          <p:nvPr>
+            <p:ph type="title"/>
+          </p:nvPr>
+        </p:nvSpPr>
+        <p:spPr/>
+        <p:txBody>
+          <a:bodyPr/>
+          <a:lstStyle/>
+          <a:p>
             <a:r>
               <a:rPr lang="ja-JP" altLang="en-US" dirty="0"/>
               <a:t>ネットリスト傾向 </a:t>
@@ -10331,7 +13150,7 @@
           <a:p>
             <a:fld id="{01824BCA-F6B2-485C-B485-242B91B41BF4}" type="slidenum">
               <a:rPr kumimoji="1" lang="ja-JP" altLang="en-US" smtClean="0"/>
-              <a:t>3</a:t>
+              <a:t>5</a:t>
             </a:fld>
             <a:endParaRPr kumimoji="1" lang="ja-JP" altLang="en-US"/>
           </a:p>
@@ -10762,7 +13581,7 @@
 </p:sld>
 </file>
 
-<file path=ppt/slides/slide4.xml><?xml version="1.0" encoding="utf-8"?>
+<file path=ppt/slides/slide6.xml><?xml version="1.0" encoding="utf-8"?>
 <p:sld xmlns:a="http://schemas.openxmlformats.org/drawingml/2006/main" xmlns:r="http://schemas.openxmlformats.org/officeDocument/2006/relationships" xmlns:p="http://schemas.openxmlformats.org/presentationml/2006/main">
   <p:cSld>
     <p:spTree>
@@ -11118,1051 +13937,6 @@
         <p14:creationId xmlns:p14="http://schemas.microsoft.com/office/powerpoint/2010/main" val="787085312"/>
       </p:ext>
     </p:extLst>
-  </p:cSld>
-  <p:clrMapOvr>
-    <a:masterClrMapping/>
-  </p:clrMapOvr>
-</p:sld>
-</file>
-
-<file path=ppt/slides/slide5.xml><?xml version="1.0" encoding="utf-8"?>
-<p:sld xmlns:a="http://schemas.openxmlformats.org/drawingml/2006/main" xmlns:r="http://schemas.openxmlformats.org/officeDocument/2006/relationships" xmlns:p="http://schemas.openxmlformats.org/presentationml/2006/main">
-  <p:cSld>
-    <p:spTree>
-      <p:nvGrpSpPr>
-        <p:cNvPr id="1" name=""/>
-        <p:cNvGrpSpPr/>
-        <p:nvPr/>
-      </p:nvGrpSpPr>
-      <p:grpSpPr>
-        <a:xfrm>
-          <a:off x="0" y="0"/>
-          <a:ext cx="0" cy="0"/>
-          <a:chOff x="0" y="0"/>
-          <a:chExt cx="0" cy="0"/>
-        </a:xfrm>
-      </p:grpSpPr>
-      <p:sp>
-        <p:nvSpPr>
-          <p:cNvPr id="2" name="タイトル 1">
-            <a:extLst>
-              <a:ext uri="{FF2B5EF4-FFF2-40B4-BE49-F238E27FC236}">
-                <a16:creationId xmlns:a16="http://schemas.microsoft.com/office/drawing/2014/main" id="{41C70D69-89E9-4063-977A-943456949739}"/>
-              </a:ext>
-            </a:extLst>
-          </p:cNvPr>
-          <p:cNvSpPr>
-            <a:spLocks noGrp="1"/>
-          </p:cNvSpPr>
-          <p:nvPr>
-            <p:ph type="title"/>
-          </p:nvPr>
-        </p:nvSpPr>
-        <p:spPr/>
-        <p:txBody>
-          <a:bodyPr/>
-          <a:lstStyle/>
-          <a:p>
-            <a:r>
-              <a:rPr lang="ja-JP" altLang="en-US" dirty="0"/>
-              <a:t>配置配線手法</a:t>
-            </a:r>
-            <a:endParaRPr kumimoji="1" lang="ja-JP" altLang="en-US" dirty="0"/>
-          </a:p>
-        </p:txBody>
-      </p:sp>
-      <p:sp>
-        <p:nvSpPr>
-          <p:cNvPr id="3" name="テキスト プレースホルダー 2">
-            <a:extLst>
-              <a:ext uri="{FF2B5EF4-FFF2-40B4-BE49-F238E27FC236}">
-                <a16:creationId xmlns:a16="http://schemas.microsoft.com/office/drawing/2014/main" id="{5583F86D-0630-48A7-82BC-5F49E5B34F5E}"/>
-              </a:ext>
-            </a:extLst>
-          </p:cNvPr>
-          <p:cNvSpPr>
-            <a:spLocks noGrp="1"/>
-          </p:cNvSpPr>
-          <p:nvPr>
-            <p:ph type="body" idx="1"/>
-          </p:nvPr>
-        </p:nvSpPr>
-        <p:spPr/>
-        <p:txBody>
-          <a:bodyPr/>
-          <a:lstStyle/>
-          <a:p>
-            <a:endParaRPr kumimoji="1" lang="ja-JP" altLang="en-US"/>
-          </a:p>
-        </p:txBody>
-      </p:sp>
-    </p:spTree>
-    <p:extLst>
-      <p:ext uri="{BB962C8B-B14F-4D97-AF65-F5344CB8AC3E}">
-        <p14:creationId xmlns:p14="http://schemas.microsoft.com/office/powerpoint/2010/main" val="84845357"/>
-      </p:ext>
-    </p:extLst>
-  </p:cSld>
-  <p:clrMapOvr>
-    <a:masterClrMapping/>
-  </p:clrMapOvr>
-</p:sld>
-</file>
-
-<file path=ppt/slides/slide6.xml><?xml version="1.0" encoding="utf-8"?>
-<p:sld xmlns:a="http://schemas.openxmlformats.org/drawingml/2006/main" xmlns:r="http://schemas.openxmlformats.org/officeDocument/2006/relationships" xmlns:p="http://schemas.openxmlformats.org/presentationml/2006/main">
-  <p:cSld>
-    <p:spTree>
-      <p:nvGrpSpPr>
-        <p:cNvPr id="1" name="Shape 263"/>
-        <p:cNvGrpSpPr/>
-        <p:nvPr/>
-      </p:nvGrpSpPr>
-      <p:grpSpPr>
-        <a:xfrm>
-          <a:off x="0" y="0"/>
-          <a:ext cx="0" cy="0"/>
-          <a:chOff x="0" y="0"/>
-          <a:chExt cx="0" cy="0"/>
-        </a:xfrm>
-      </p:grpSpPr>
-      <p:sp>
-        <p:nvSpPr>
-          <p:cNvPr id="264" name="Google Shape;264;p38"/>
-          <p:cNvSpPr txBox="1">
-            <a:spLocks noGrp="1"/>
-          </p:cNvSpPr>
-          <p:nvPr>
-            <p:ph type="title"/>
-          </p:nvPr>
-        </p:nvSpPr>
-        <p:spPr>
-          <a:xfrm>
-            <a:off x="144780" y="167005"/>
-            <a:ext cx="10397600" cy="732400"/>
-          </a:xfrm>
-          <a:prstGeom prst="rect">
-            <a:avLst/>
-          </a:prstGeom>
-        </p:spPr>
-        <p:txBody>
-          <a:bodyPr spcFirstLastPara="1" vert="horz" wrap="square" lIns="91433" tIns="45700" rIns="91433" bIns="45700" rtlCol="0" anchor="ctr" anchorCtr="0">
-            <a:normAutofit/>
-          </a:bodyPr>
-          <a:lstStyle/>
-          <a:p>
-            <a:r>
-              <a:rPr lang="ja"/>
-              <a:t>配置配線手法</a:t>
-            </a:r>
-            <a:endParaRPr/>
-          </a:p>
-        </p:txBody>
-      </p:sp>
-      <p:sp>
-        <p:nvSpPr>
-          <p:cNvPr id="265" name="Google Shape;265;p38"/>
-          <p:cNvSpPr txBox="1">
-            <a:spLocks noGrp="1"/>
-          </p:cNvSpPr>
-          <p:nvPr>
-            <p:ph type="body" idx="1"/>
-          </p:nvPr>
-        </p:nvSpPr>
-        <p:spPr>
-          <a:xfrm>
-            <a:off x="144780" y="1018672"/>
-            <a:ext cx="3540400" cy="413600"/>
-          </a:xfrm>
-          <a:prstGeom prst="rect">
-            <a:avLst/>
-          </a:prstGeom>
-        </p:spPr>
-        <p:txBody>
-          <a:bodyPr spcFirstLastPara="1" vert="horz" wrap="square" lIns="91433" tIns="45700" rIns="91433" bIns="45700" rtlCol="0" anchor="t" anchorCtr="0">
-            <a:noAutofit/>
-          </a:bodyPr>
-          <a:lstStyle/>
-          <a:p>
-            <a:pPr marL="0" indent="0">
-              <a:spcAft>
-                <a:spcPts val="1600"/>
-              </a:spcAft>
-              <a:buNone/>
-            </a:pPr>
-            <a:r>
-              <a:rPr lang="ja" altLang="en-US" sz="1400" b="1" dirty="0">
-                <a:solidFill>
-                  <a:schemeClr val="dk1"/>
-                </a:solidFill>
-              </a:rPr>
-              <a:t>列位置のみ</a:t>
-            </a:r>
-            <a:r>
-              <a:rPr lang="en-US" altLang="ja" sz="1400" b="1" dirty="0">
-                <a:solidFill>
-                  <a:schemeClr val="dk1"/>
-                </a:solidFill>
-              </a:rPr>
-              <a:t>SAT</a:t>
-            </a:r>
-            <a:r>
-              <a:rPr lang="ja" altLang="en-US" sz="1400" b="1" dirty="0">
-                <a:solidFill>
-                  <a:schemeClr val="dk1"/>
-                </a:solidFill>
-              </a:rPr>
-              <a:t>での配置配線</a:t>
-            </a:r>
-            <a:endParaRPr sz="1400" b="1" dirty="0">
-              <a:solidFill>
-                <a:schemeClr val="dk1"/>
-              </a:solidFill>
-            </a:endParaRPr>
-          </a:p>
-        </p:txBody>
-      </p:sp>
-      <p:sp>
-        <p:nvSpPr>
-          <p:cNvPr id="266" name="Google Shape;266;p38"/>
-          <p:cNvSpPr txBox="1">
-            <a:spLocks noGrp="1"/>
-          </p:cNvSpPr>
-          <p:nvPr>
-            <p:ph type="body" idx="1"/>
-          </p:nvPr>
-        </p:nvSpPr>
-        <p:spPr>
-          <a:xfrm>
-            <a:off x="321274" y="4779099"/>
-            <a:ext cx="5300297" cy="1533657"/>
-          </a:xfrm>
-          <a:prstGeom prst="rect">
-            <a:avLst/>
-          </a:prstGeom>
-        </p:spPr>
-        <p:txBody>
-          <a:bodyPr spcFirstLastPara="1" vert="horz" wrap="square" lIns="91433" tIns="45700" rIns="91433" bIns="45700" rtlCol="0" anchor="t" anchorCtr="0">
-            <a:normAutofit/>
-          </a:bodyPr>
-          <a:lstStyle/>
-          <a:p>
-            <a:pPr marL="0" indent="0">
-              <a:buNone/>
-            </a:pPr>
-            <a:r>
-              <a:rPr lang="ja" altLang="en-US" sz="1600" dirty="0">
-                <a:solidFill>
-                  <a:schemeClr val="dk1"/>
-                </a:solidFill>
-              </a:rPr>
-              <a:t>〇</a:t>
-            </a:r>
-            <a:r>
-              <a:rPr lang="en-US" altLang="ja" sz="1600" dirty="0">
-                <a:solidFill>
-                  <a:schemeClr val="dk1"/>
-                </a:solidFill>
-              </a:rPr>
-              <a:t>PA</a:t>
-            </a:r>
-            <a:r>
-              <a:rPr lang="ja" altLang="en-US" sz="1600" dirty="0">
-                <a:solidFill>
-                  <a:schemeClr val="dk1"/>
-                </a:solidFill>
-              </a:rPr>
-              <a:t>と配線構造の行</a:t>
-            </a:r>
-            <a:r>
-              <a:rPr lang="en-US" altLang="ja" sz="1600" dirty="0">
-                <a:solidFill>
-                  <a:schemeClr val="dk1"/>
-                </a:solidFill>
-              </a:rPr>
-              <a:t>(</a:t>
-            </a:r>
-            <a:r>
-              <a:rPr lang="ja" altLang="en-US" sz="1600" dirty="0">
-                <a:solidFill>
-                  <a:schemeClr val="dk1"/>
-                </a:solidFill>
-              </a:rPr>
-              <a:t>段</a:t>
-            </a:r>
-            <a:r>
-              <a:rPr lang="en-US" altLang="ja" sz="1600" dirty="0">
-                <a:solidFill>
-                  <a:schemeClr val="dk1"/>
-                </a:solidFill>
-              </a:rPr>
-              <a:t>)</a:t>
-            </a:r>
-            <a:r>
-              <a:rPr lang="ja" altLang="en-US" sz="1600" dirty="0">
-                <a:solidFill>
-                  <a:schemeClr val="dk1"/>
-                </a:solidFill>
-              </a:rPr>
-              <a:t>を一致</a:t>
-            </a:r>
-            <a:endParaRPr sz="1600" dirty="0">
-              <a:solidFill>
-                <a:schemeClr val="dk1"/>
-              </a:solidFill>
-            </a:endParaRPr>
-          </a:p>
-          <a:p>
-            <a:pPr marL="0" indent="0">
-              <a:spcBef>
-                <a:spcPts val="1600"/>
-              </a:spcBef>
-              <a:spcAft>
-                <a:spcPts val="1600"/>
-              </a:spcAft>
-              <a:buNone/>
-            </a:pPr>
-            <a:r>
-              <a:rPr lang="ja" altLang="en-US" sz="1600" dirty="0">
-                <a:solidFill>
-                  <a:schemeClr val="dk1"/>
-                </a:solidFill>
-              </a:rPr>
-              <a:t>〇列の決定のみで</a:t>
-            </a:r>
-            <a:r>
-              <a:rPr lang="en-US" altLang="ja" sz="1600" dirty="0">
-                <a:solidFill>
-                  <a:schemeClr val="dk1"/>
-                </a:solidFill>
-              </a:rPr>
-              <a:t>SAT</a:t>
-            </a:r>
-            <a:r>
-              <a:rPr lang="ja" altLang="en-US" sz="1600" dirty="0">
-                <a:solidFill>
-                  <a:schemeClr val="dk1"/>
-                </a:solidFill>
-              </a:rPr>
-              <a:t>を使用</a:t>
-            </a:r>
-            <a:endParaRPr sz="1600" dirty="0">
-              <a:solidFill>
-                <a:schemeClr val="dk1"/>
-              </a:solidFill>
-            </a:endParaRPr>
-          </a:p>
-        </p:txBody>
-      </p:sp>
-      <p:sp>
-        <p:nvSpPr>
-          <p:cNvPr id="267" name="Google Shape;267;p38"/>
-          <p:cNvSpPr/>
-          <p:nvPr/>
-        </p:nvSpPr>
-        <p:spPr>
-          <a:xfrm rot="10800000">
-            <a:off x="2891775" y="1466988"/>
-            <a:ext cx="169600" cy="2744400"/>
-          </a:xfrm>
-          <a:prstGeom prst="rightBrace">
-            <a:avLst>
-              <a:gd name="adj1" fmla="val 50000"/>
-              <a:gd name="adj2" fmla="val 50000"/>
-            </a:avLst>
-          </a:prstGeom>
-          <a:noFill/>
-          <a:ln w="7150" cap="flat" cmpd="sng">
-            <a:solidFill>
-              <a:schemeClr val="dk2"/>
-            </a:solidFill>
-            <a:prstDash val="solid"/>
-            <a:round/>
-            <a:headEnd type="none" w="sm" len="sm"/>
-            <a:tailEnd type="none" w="sm" len="sm"/>
-          </a:ln>
-        </p:spPr>
-        <p:txBody>
-          <a:bodyPr spcFirstLastPara="1" wrap="square" lIns="91433" tIns="91433" rIns="91433" bIns="91433" anchor="ctr" anchorCtr="0">
-            <a:noAutofit/>
-          </a:bodyPr>
-          <a:lstStyle/>
-          <a:p>
-            <a:pPr algn="ctr"/>
-            <a:endParaRPr sz="1467">
-              <a:latin typeface="Meiryo"/>
-              <a:ea typeface="Meiryo"/>
-              <a:cs typeface="Meiryo"/>
-              <a:sym typeface="Meiryo"/>
-            </a:endParaRPr>
-          </a:p>
-        </p:txBody>
-      </p:sp>
-      <p:sp>
-        <p:nvSpPr>
-          <p:cNvPr id="268" name="Google Shape;268;p38"/>
-          <p:cNvSpPr txBox="1"/>
-          <p:nvPr/>
-        </p:nvSpPr>
-        <p:spPr>
-          <a:xfrm>
-            <a:off x="2376875" y="2568612"/>
-            <a:ext cx="417200" cy="534800"/>
-          </a:xfrm>
-          <a:prstGeom prst="rect">
-            <a:avLst/>
-          </a:prstGeom>
-          <a:noFill/>
-          <a:ln>
-            <a:noFill/>
-          </a:ln>
-        </p:spPr>
-        <p:txBody>
-          <a:bodyPr spcFirstLastPara="1" wrap="square" lIns="91433" tIns="91433" rIns="91433" bIns="91433" anchor="t" anchorCtr="0">
-            <a:noAutofit/>
-          </a:bodyPr>
-          <a:lstStyle/>
-          <a:p>
-            <a:r>
-              <a:rPr lang="ja" altLang="en-US" sz="2800">
-                <a:solidFill>
-                  <a:schemeClr val="dk1"/>
-                </a:solidFill>
-                <a:latin typeface="Meiryo"/>
-                <a:ea typeface="Meiryo"/>
-                <a:cs typeface="Meiryo"/>
-                <a:sym typeface="Meiryo"/>
-              </a:rPr>
-              <a:t>行</a:t>
-            </a:r>
-            <a:endParaRPr sz="2800">
-              <a:solidFill>
-                <a:schemeClr val="dk1"/>
-              </a:solidFill>
-              <a:latin typeface="Meiryo"/>
-              <a:ea typeface="Meiryo"/>
-              <a:cs typeface="Meiryo"/>
-              <a:sym typeface="Meiryo"/>
-            </a:endParaRPr>
-          </a:p>
-        </p:txBody>
-      </p:sp>
-      <p:sp>
-        <p:nvSpPr>
-          <p:cNvPr id="269" name="Google Shape;269;p38"/>
-          <p:cNvSpPr/>
-          <p:nvPr/>
-        </p:nvSpPr>
-        <p:spPr>
-          <a:xfrm rot="5400000">
-            <a:off x="4484451" y="2642537"/>
-            <a:ext cx="180400" cy="3114800"/>
-          </a:xfrm>
-          <a:prstGeom prst="rightBrace">
-            <a:avLst>
-              <a:gd name="adj1" fmla="val 50000"/>
-              <a:gd name="adj2" fmla="val 50000"/>
-            </a:avLst>
-          </a:prstGeom>
-          <a:noFill/>
-          <a:ln w="7150" cap="flat" cmpd="sng">
-            <a:solidFill>
-              <a:schemeClr val="dk2"/>
-            </a:solidFill>
-            <a:prstDash val="solid"/>
-            <a:round/>
-            <a:headEnd type="none" w="sm" len="sm"/>
-            <a:tailEnd type="none" w="sm" len="sm"/>
-          </a:ln>
-        </p:spPr>
-        <p:txBody>
-          <a:bodyPr spcFirstLastPara="1" wrap="square" lIns="91433" tIns="91433" rIns="91433" bIns="91433" anchor="ctr" anchorCtr="0">
-            <a:noAutofit/>
-          </a:bodyPr>
-          <a:lstStyle/>
-          <a:p>
-            <a:pPr algn="ctr"/>
-            <a:endParaRPr sz="1467">
-              <a:latin typeface="Meiryo"/>
-              <a:ea typeface="Meiryo"/>
-              <a:cs typeface="Meiryo"/>
-              <a:sym typeface="Meiryo"/>
-            </a:endParaRPr>
-          </a:p>
-        </p:txBody>
-      </p:sp>
-      <p:sp>
-        <p:nvSpPr>
-          <p:cNvPr id="270" name="Google Shape;270;p38"/>
-          <p:cNvSpPr txBox="1"/>
-          <p:nvPr/>
-        </p:nvSpPr>
-        <p:spPr>
-          <a:xfrm>
-            <a:off x="4366100" y="4352463"/>
-            <a:ext cx="417200" cy="534800"/>
-          </a:xfrm>
-          <a:prstGeom prst="rect">
-            <a:avLst/>
-          </a:prstGeom>
-          <a:noFill/>
-          <a:ln>
-            <a:noFill/>
-          </a:ln>
-        </p:spPr>
-        <p:txBody>
-          <a:bodyPr spcFirstLastPara="1" wrap="square" lIns="91433" tIns="91433" rIns="91433" bIns="91433" anchor="t" anchorCtr="0">
-            <a:noAutofit/>
-          </a:bodyPr>
-          <a:lstStyle/>
-          <a:p>
-            <a:r>
-              <a:rPr lang="ja" altLang="en-US" sz="2800">
-                <a:solidFill>
-                  <a:schemeClr val="dk1"/>
-                </a:solidFill>
-                <a:latin typeface="Meiryo"/>
-                <a:ea typeface="Meiryo"/>
-                <a:cs typeface="Meiryo"/>
-                <a:sym typeface="Meiryo"/>
-              </a:rPr>
-              <a:t>列</a:t>
-            </a:r>
-            <a:endParaRPr sz="2800">
-              <a:solidFill>
-                <a:schemeClr val="dk1"/>
-              </a:solidFill>
-              <a:latin typeface="Meiryo"/>
-              <a:ea typeface="Meiryo"/>
-              <a:cs typeface="Meiryo"/>
-              <a:sym typeface="Meiryo"/>
-            </a:endParaRPr>
-          </a:p>
-        </p:txBody>
-      </p:sp>
-      <p:sp>
-        <p:nvSpPr>
-          <p:cNvPr id="271" name="Google Shape;271;p38"/>
-          <p:cNvSpPr/>
-          <p:nvPr/>
-        </p:nvSpPr>
-        <p:spPr>
-          <a:xfrm>
-            <a:off x="6382300" y="1277800"/>
-            <a:ext cx="5810000" cy="4273200"/>
-          </a:xfrm>
-          <a:prstGeom prst="roundRect">
-            <a:avLst>
-              <a:gd name="adj" fmla="val 16667"/>
-            </a:avLst>
-          </a:prstGeom>
-          <a:solidFill>
-            <a:schemeClr val="lt1"/>
-          </a:solidFill>
-          <a:ln w="28575" cap="flat" cmpd="sng">
-            <a:solidFill>
-              <a:srgbClr val="00B050"/>
-            </a:solidFill>
-            <a:prstDash val="solid"/>
-            <a:round/>
-            <a:headEnd type="none" w="sm" len="sm"/>
-            <a:tailEnd type="none" w="sm" len="sm"/>
-          </a:ln>
-        </p:spPr>
-        <p:txBody>
-          <a:bodyPr spcFirstLastPara="1" wrap="square" lIns="91433" tIns="91433" rIns="91433" bIns="91433" anchor="t" anchorCtr="0">
-            <a:noAutofit/>
-          </a:bodyPr>
-          <a:lstStyle/>
-          <a:p>
-            <a:r>
-              <a:rPr lang="ja" altLang="en-US" sz="2533" b="1">
-                <a:latin typeface="Meiryo"/>
-                <a:ea typeface="Meiryo"/>
-                <a:cs typeface="Meiryo"/>
-                <a:sym typeface="Meiryo"/>
-              </a:rPr>
-              <a:t>載せたい回路と配線構造の行</a:t>
-            </a:r>
-            <a:r>
-              <a:rPr lang="en-US" altLang="ja" sz="2533" b="1">
-                <a:latin typeface="Meiryo"/>
-                <a:ea typeface="Meiryo"/>
-                <a:cs typeface="Meiryo"/>
-                <a:sym typeface="Meiryo"/>
-              </a:rPr>
-              <a:t>(</a:t>
-            </a:r>
-            <a:r>
-              <a:rPr lang="ja" altLang="en-US" sz="2533" b="1">
-                <a:latin typeface="Meiryo"/>
-                <a:ea typeface="Meiryo"/>
-                <a:cs typeface="Meiryo"/>
-                <a:sym typeface="Meiryo"/>
-              </a:rPr>
-              <a:t>段</a:t>
-            </a:r>
-            <a:r>
-              <a:rPr lang="en-US" altLang="ja" sz="2533" b="1">
-                <a:latin typeface="Meiryo"/>
-                <a:ea typeface="Meiryo"/>
-                <a:cs typeface="Meiryo"/>
-                <a:sym typeface="Meiryo"/>
-              </a:rPr>
-              <a:t>)</a:t>
-            </a:r>
-            <a:endParaRPr sz="2533" b="1">
-              <a:latin typeface="Meiryo"/>
-              <a:ea typeface="Meiryo"/>
-              <a:cs typeface="Meiryo"/>
-              <a:sym typeface="Meiryo"/>
-            </a:endParaRPr>
-          </a:p>
-          <a:p>
-            <a:r>
-              <a:rPr lang="ja" altLang="en-US" sz="2533" b="1">
-                <a:latin typeface="Meiryo"/>
-                <a:ea typeface="Meiryo"/>
-                <a:cs typeface="Meiryo"/>
-                <a:sym typeface="Meiryo"/>
-              </a:rPr>
-              <a:t>固定する理由</a:t>
-            </a:r>
-            <a:endParaRPr sz="2533" b="1">
-              <a:latin typeface="Meiryo"/>
-              <a:ea typeface="Meiryo"/>
-              <a:cs typeface="Meiryo"/>
-              <a:sym typeface="Meiryo"/>
-            </a:endParaRPr>
-          </a:p>
-          <a:p>
-            <a:endParaRPr sz="1333">
-              <a:latin typeface="Meiryo"/>
-              <a:ea typeface="Meiryo"/>
-              <a:cs typeface="Meiryo"/>
-              <a:sym typeface="Meiryo"/>
-            </a:endParaRPr>
-          </a:p>
-          <a:p>
-            <a:r>
-              <a:rPr lang="ja" altLang="en-US" sz="2000">
-                <a:latin typeface="Meiryo"/>
-                <a:ea typeface="Meiryo"/>
-                <a:cs typeface="Meiryo"/>
-                <a:sym typeface="Meiryo"/>
-              </a:rPr>
-              <a:t>配線構造はネットリストの形状をもとに作成</a:t>
-            </a:r>
-            <a:endParaRPr sz="2000">
-              <a:latin typeface="Meiryo"/>
-              <a:ea typeface="Meiryo"/>
-              <a:cs typeface="Meiryo"/>
-              <a:sym typeface="Meiryo"/>
-            </a:endParaRPr>
-          </a:p>
-          <a:p>
-            <a:endParaRPr sz="667">
-              <a:latin typeface="Meiryo"/>
-              <a:ea typeface="Meiryo"/>
-              <a:cs typeface="Meiryo"/>
-              <a:sym typeface="Meiryo"/>
-            </a:endParaRPr>
-          </a:p>
-          <a:p>
-            <a:r>
-              <a:rPr lang="ja" altLang="en-US" sz="2000">
-                <a:latin typeface="Meiryo"/>
-                <a:ea typeface="Meiryo"/>
-                <a:cs typeface="Meiryo"/>
-                <a:sym typeface="Meiryo"/>
-              </a:rPr>
-              <a:t>→行固定により，ネットリストの形状に合わせた配置配線を行いたい</a:t>
-            </a:r>
-            <a:endParaRPr sz="2000">
-              <a:latin typeface="Meiryo"/>
-              <a:ea typeface="Meiryo"/>
-              <a:cs typeface="Meiryo"/>
-              <a:sym typeface="Meiryo"/>
-            </a:endParaRPr>
-          </a:p>
-          <a:p>
-            <a:endParaRPr sz="800">
-              <a:latin typeface="Meiryo"/>
-              <a:ea typeface="Meiryo"/>
-              <a:cs typeface="Meiryo"/>
-              <a:sym typeface="Meiryo"/>
-            </a:endParaRPr>
-          </a:p>
-          <a:p>
-            <a:r>
-              <a:rPr lang="ja" altLang="en-US" sz="2000">
-                <a:latin typeface="Meiryo"/>
-                <a:ea typeface="Meiryo"/>
-                <a:cs typeface="Meiryo"/>
-                <a:sym typeface="Meiryo"/>
-              </a:rPr>
-              <a:t>⇔段数無視では，統計をとって設計した構造の意図を無視することになるため</a:t>
-            </a:r>
-            <a:endParaRPr sz="2000">
-              <a:latin typeface="Meiryo"/>
-              <a:ea typeface="Meiryo"/>
-              <a:cs typeface="Meiryo"/>
-              <a:sym typeface="Meiryo"/>
-            </a:endParaRPr>
-          </a:p>
-          <a:p>
-            <a:endParaRPr sz="2000">
-              <a:latin typeface="Meiryo"/>
-              <a:ea typeface="Meiryo"/>
-              <a:cs typeface="Meiryo"/>
-              <a:sym typeface="Meiryo"/>
-            </a:endParaRPr>
-          </a:p>
-          <a:p>
-            <a:r>
-              <a:rPr lang="ja" altLang="en-US" sz="2000">
-                <a:latin typeface="Meiryo"/>
-                <a:ea typeface="Meiryo"/>
-                <a:cs typeface="Meiryo"/>
-                <a:sym typeface="Meiryo"/>
-              </a:rPr>
-              <a:t>・計算量の軽量化</a:t>
-            </a:r>
-            <a:endParaRPr sz="2000">
-              <a:latin typeface="Meiryo"/>
-              <a:ea typeface="Meiryo"/>
-              <a:cs typeface="Meiryo"/>
-              <a:sym typeface="Meiryo"/>
-            </a:endParaRPr>
-          </a:p>
-          <a:p>
-            <a:endParaRPr sz="2000">
-              <a:latin typeface="Meiryo"/>
-              <a:ea typeface="Meiryo"/>
-              <a:cs typeface="Meiryo"/>
-              <a:sym typeface="Meiryo"/>
-            </a:endParaRPr>
-          </a:p>
-          <a:p>
-            <a:endParaRPr sz="2000">
-              <a:latin typeface="Meiryo"/>
-              <a:ea typeface="Meiryo"/>
-              <a:cs typeface="Meiryo"/>
-              <a:sym typeface="Meiryo"/>
-            </a:endParaRPr>
-          </a:p>
-        </p:txBody>
-      </p:sp>
-      <p:pic>
-        <p:nvPicPr>
-          <p:cNvPr id="272" name="Google Shape;272;p38"/>
-          <p:cNvPicPr preferRelativeResize="0"/>
-          <p:nvPr/>
-        </p:nvPicPr>
-        <p:blipFill>
-          <a:blip r:embed="rId3">
-            <a:alphaModFix/>
-          </a:blip>
-          <a:stretch>
-            <a:fillRect/>
-          </a:stretch>
-        </p:blipFill>
-        <p:spPr>
-          <a:xfrm>
-            <a:off x="3061375" y="1544288"/>
-            <a:ext cx="2979711" cy="2540075"/>
-          </a:xfrm>
-          <a:prstGeom prst="rect">
-            <a:avLst/>
-          </a:prstGeom>
-          <a:noFill/>
-          <a:ln>
-            <a:noFill/>
-          </a:ln>
-        </p:spPr>
-      </p:pic>
-      <p:pic>
-        <p:nvPicPr>
-          <p:cNvPr id="273" name="Google Shape;273;p38"/>
-          <p:cNvPicPr preferRelativeResize="0"/>
-          <p:nvPr/>
-        </p:nvPicPr>
-        <p:blipFill>
-          <a:blip r:embed="rId4">
-            <a:alphaModFix/>
-          </a:blip>
-          <a:stretch>
-            <a:fillRect/>
-          </a:stretch>
-        </p:blipFill>
-        <p:spPr>
-          <a:xfrm>
-            <a:off x="0" y="1542600"/>
-            <a:ext cx="2250688" cy="2540051"/>
-          </a:xfrm>
-          <a:prstGeom prst="rect">
-            <a:avLst/>
-          </a:prstGeom>
-          <a:noFill/>
-          <a:ln>
-            <a:noFill/>
-          </a:ln>
-        </p:spPr>
-      </p:pic>
-      <p:cxnSp>
-        <p:nvCxnSpPr>
-          <p:cNvPr id="274" name="Google Shape;274;p38"/>
-          <p:cNvCxnSpPr/>
-          <p:nvPr/>
-        </p:nvCxnSpPr>
-        <p:spPr>
-          <a:xfrm>
-            <a:off x="703425" y="2104100"/>
-            <a:ext cx="2954400" cy="0"/>
-          </a:xfrm>
-          <a:prstGeom prst="straightConnector1">
-            <a:avLst/>
-          </a:prstGeom>
-          <a:noFill/>
-          <a:ln w="21425" cap="flat" cmpd="sng">
-            <a:solidFill>
-              <a:srgbClr val="FF0000"/>
-            </a:solidFill>
-            <a:prstDash val="dash"/>
-            <a:round/>
-            <a:headEnd type="none" w="med" len="med"/>
-            <a:tailEnd type="none" w="med" len="med"/>
-          </a:ln>
-        </p:spPr>
-      </p:cxnSp>
-      <p:cxnSp>
-        <p:nvCxnSpPr>
-          <p:cNvPr id="275" name="Google Shape;275;p38"/>
-          <p:cNvCxnSpPr/>
-          <p:nvPr/>
-        </p:nvCxnSpPr>
-        <p:spPr>
-          <a:xfrm rot="10800000" flipH="1">
-            <a:off x="715725" y="1542800"/>
-            <a:ext cx="2930000" cy="12400"/>
-          </a:xfrm>
-          <a:prstGeom prst="straightConnector1">
-            <a:avLst/>
-          </a:prstGeom>
-          <a:noFill/>
-          <a:ln w="21425" cap="flat" cmpd="sng">
-            <a:solidFill>
-              <a:srgbClr val="FF0000"/>
-            </a:solidFill>
-            <a:prstDash val="dash"/>
-            <a:round/>
-            <a:headEnd type="none" w="med" len="med"/>
-            <a:tailEnd type="none" w="med" len="med"/>
-          </a:ln>
-        </p:spPr>
-      </p:cxnSp>
-      <p:cxnSp>
-        <p:nvCxnSpPr>
-          <p:cNvPr id="276" name="Google Shape;276;p38"/>
-          <p:cNvCxnSpPr/>
-          <p:nvPr/>
-        </p:nvCxnSpPr>
-        <p:spPr>
-          <a:xfrm>
-            <a:off x="304051" y="2564225"/>
-            <a:ext cx="2757200" cy="4400"/>
-          </a:xfrm>
-          <a:prstGeom prst="straightConnector1">
-            <a:avLst/>
-          </a:prstGeom>
-          <a:noFill/>
-          <a:ln w="21425" cap="flat" cmpd="sng">
-            <a:solidFill>
-              <a:srgbClr val="FF00FF"/>
-            </a:solidFill>
-            <a:prstDash val="lgDash"/>
-            <a:round/>
-            <a:headEnd type="none" w="med" len="med"/>
-            <a:tailEnd type="none" w="med" len="med"/>
-          </a:ln>
-        </p:spPr>
-      </p:cxnSp>
-      <p:cxnSp>
-        <p:nvCxnSpPr>
-          <p:cNvPr id="277" name="Google Shape;277;p38"/>
-          <p:cNvCxnSpPr/>
-          <p:nvPr/>
-        </p:nvCxnSpPr>
-        <p:spPr>
-          <a:xfrm rot="10800000" flipH="1">
-            <a:off x="260151" y="3096825"/>
-            <a:ext cx="2861200" cy="6400"/>
-          </a:xfrm>
-          <a:prstGeom prst="straightConnector1">
-            <a:avLst/>
-          </a:prstGeom>
-          <a:noFill/>
-          <a:ln w="21425" cap="flat" cmpd="sng">
-            <a:solidFill>
-              <a:srgbClr val="FF00FF"/>
-            </a:solidFill>
-            <a:prstDash val="lgDash"/>
-            <a:round/>
-            <a:headEnd type="none" w="med" len="med"/>
-            <a:tailEnd type="none" w="med" len="med"/>
-          </a:ln>
-        </p:spPr>
-      </p:cxnSp>
-      <p:cxnSp>
-        <p:nvCxnSpPr>
-          <p:cNvPr id="278" name="Google Shape;278;p38"/>
-          <p:cNvCxnSpPr/>
-          <p:nvPr/>
-        </p:nvCxnSpPr>
-        <p:spPr>
-          <a:xfrm>
-            <a:off x="682475" y="3543651"/>
-            <a:ext cx="2922800" cy="13600"/>
-          </a:xfrm>
-          <a:prstGeom prst="straightConnector1">
-            <a:avLst/>
-          </a:prstGeom>
-          <a:noFill/>
-          <a:ln w="21425" cap="flat" cmpd="sng">
-            <a:solidFill>
-              <a:srgbClr val="00FF00"/>
-            </a:solidFill>
-            <a:prstDash val="lgDash"/>
-            <a:round/>
-            <a:headEnd type="none" w="med" len="med"/>
-            <a:tailEnd type="none" w="med" len="med"/>
-          </a:ln>
-        </p:spPr>
-      </p:cxnSp>
-      <p:cxnSp>
-        <p:nvCxnSpPr>
-          <p:cNvPr id="279" name="Google Shape;279;p38"/>
-          <p:cNvCxnSpPr/>
-          <p:nvPr/>
-        </p:nvCxnSpPr>
-        <p:spPr>
-          <a:xfrm rot="10800000" flipH="1">
-            <a:off x="638575" y="4081851"/>
-            <a:ext cx="2926400" cy="800"/>
-          </a:xfrm>
-          <a:prstGeom prst="straightConnector1">
-            <a:avLst/>
-          </a:prstGeom>
-          <a:noFill/>
-          <a:ln w="21425" cap="flat" cmpd="sng">
-            <a:solidFill>
-              <a:srgbClr val="00FF00"/>
-            </a:solidFill>
-            <a:prstDash val="lgDash"/>
-            <a:round/>
-            <a:headEnd type="none" w="med" len="med"/>
-            <a:tailEnd type="none" w="med" len="med"/>
-          </a:ln>
-        </p:spPr>
-      </p:cxnSp>
-      <p:sp>
-        <p:nvSpPr>
-          <p:cNvPr id="280" name="Google Shape;280;p38"/>
-          <p:cNvSpPr txBox="1"/>
-          <p:nvPr/>
-        </p:nvSpPr>
-        <p:spPr>
-          <a:xfrm>
-            <a:off x="260151" y="6089583"/>
-            <a:ext cx="4472000" cy="678000"/>
-          </a:xfrm>
-          <a:prstGeom prst="rect">
-            <a:avLst/>
-          </a:prstGeom>
-          <a:noFill/>
-          <a:ln>
-            <a:noFill/>
-          </a:ln>
-        </p:spPr>
-        <p:txBody>
-          <a:bodyPr spcFirstLastPara="1" wrap="square" lIns="91433" tIns="91433" rIns="91433" bIns="91433" anchor="t" anchorCtr="0">
-            <a:noAutofit/>
-          </a:bodyPr>
-          <a:lstStyle/>
-          <a:p>
-            <a:r>
-              <a:rPr lang="ja" altLang="en-US" sz="2400" b="1" dirty="0">
-                <a:solidFill>
-                  <a:schemeClr val="dk1"/>
-                </a:solidFill>
-                <a:latin typeface="Meiryo"/>
-                <a:ea typeface="Meiryo"/>
-                <a:cs typeface="Meiryo"/>
-                <a:sym typeface="Meiryo"/>
-              </a:rPr>
-              <a:t>深さの定義 </a:t>
-            </a:r>
-            <a:r>
-              <a:rPr lang="en-US" altLang="ja" sz="2400" dirty="0">
-                <a:solidFill>
-                  <a:schemeClr val="dk1"/>
-                </a:solidFill>
-                <a:latin typeface="Meiryo"/>
-                <a:ea typeface="Meiryo"/>
-                <a:cs typeface="Meiryo"/>
-                <a:sym typeface="Meiryo"/>
-              </a:rPr>
-              <a:t>-</a:t>
-            </a:r>
-            <a:r>
-              <a:rPr lang="ja" altLang="en-US" sz="2000" dirty="0">
-                <a:solidFill>
-                  <a:schemeClr val="dk1"/>
-                </a:solidFill>
-                <a:latin typeface="Meiryo"/>
-                <a:ea typeface="Meiryo"/>
-                <a:cs typeface="Meiryo"/>
-                <a:sym typeface="Meiryo"/>
-              </a:rPr>
-              <a:t>最長の</a:t>
-            </a:r>
-            <a:r>
-              <a:rPr lang="en-US" altLang="ja" sz="2000" dirty="0">
-                <a:solidFill>
-                  <a:schemeClr val="dk1"/>
-                </a:solidFill>
-                <a:latin typeface="Meiryo"/>
-                <a:ea typeface="Meiryo"/>
-                <a:cs typeface="Meiryo"/>
-                <a:sym typeface="Meiryo"/>
-              </a:rPr>
-              <a:t>FF</a:t>
-            </a:r>
-            <a:r>
-              <a:rPr lang="ja" altLang="en-US" sz="2000" dirty="0">
-                <a:solidFill>
-                  <a:schemeClr val="dk1"/>
-                </a:solidFill>
-                <a:latin typeface="Meiryo"/>
-                <a:ea typeface="Meiryo"/>
-                <a:cs typeface="Meiryo"/>
-                <a:sym typeface="Meiryo"/>
-              </a:rPr>
-              <a:t>距離</a:t>
-            </a:r>
-            <a:endParaRPr sz="2000" dirty="0">
-              <a:solidFill>
-                <a:schemeClr val="dk1"/>
-              </a:solidFill>
-              <a:latin typeface="Meiryo"/>
-              <a:ea typeface="Meiryo"/>
-              <a:cs typeface="Meiryo"/>
-              <a:sym typeface="Meiryo"/>
-            </a:endParaRPr>
-          </a:p>
-        </p:txBody>
-      </p:sp>
-    </p:spTree>
   </p:cSld>
   <p:clrMapOvr>
     <a:masterClrMapping/>
@@ -12209,9 +13983,10 @@
           <a:lstStyle/>
           <a:p>
             <a:r>
-              <a:rPr kumimoji="1" lang="ja-JP" altLang="en-US" dirty="0"/>
-              <a:t>構造</a:t>
-            </a:r>
+              <a:rPr lang="ja-JP" altLang="en-US" dirty="0"/>
+              <a:t>配置配線手法</a:t>
+            </a:r>
+            <a:endParaRPr kumimoji="1" lang="ja-JP" altLang="en-US" dirty="0"/>
           </a:p>
         </p:txBody>
       </p:sp>
@@ -12243,7 +14018,7 @@
     </p:spTree>
     <p:extLst>
       <p:ext uri="{BB962C8B-B14F-4D97-AF65-F5344CB8AC3E}">
-        <p14:creationId xmlns:p14="http://schemas.microsoft.com/office/powerpoint/2010/main" val="1318545586"/>
+        <p14:creationId xmlns:p14="http://schemas.microsoft.com/office/powerpoint/2010/main" val="84845357"/>
       </p:ext>
     </p:extLst>
   </p:cSld>
@@ -12258,7 +14033,7 @@
   <p:cSld>
     <p:spTree>
       <p:nvGrpSpPr>
-        <p:cNvPr id="1" name=""/>
+        <p:cNvPr id="1" name="Shape 263"/>
         <p:cNvGrpSpPr/>
         <p:nvPr/>
       </p:nvGrpSpPr>
@@ -12272,1407 +14047,941 @@
       </p:grpSpPr>
       <p:sp>
         <p:nvSpPr>
-          <p:cNvPr id="2" name="タイトル 1">
-            <a:extLst>
-              <a:ext uri="{FF2B5EF4-FFF2-40B4-BE49-F238E27FC236}">
-                <a16:creationId xmlns:a16="http://schemas.microsoft.com/office/drawing/2014/main" id="{BA3C80F9-39B0-46D8-99D2-4C071AB63B90}"/>
-              </a:ext>
-            </a:extLst>
-          </p:cNvPr>
-          <p:cNvSpPr>
+          <p:cNvPr id="264" name="Google Shape;264;p38"/>
+          <p:cNvSpPr txBox="1">
             <a:spLocks noGrp="1"/>
           </p:cNvSpPr>
           <p:nvPr>
             <p:ph type="title"/>
           </p:nvPr>
         </p:nvSpPr>
-        <p:spPr/>
-        <p:txBody>
-          <a:bodyPr/>
-          <a:lstStyle/>
-          <a:p>
-            <a:r>
-              <a:rPr kumimoji="1" lang="ja-JP" altLang="en-US" dirty="0"/>
-              <a:t>元になっている被覆構造の原理</a:t>
-            </a:r>
-          </a:p>
-        </p:txBody>
-      </p:sp>
-      <p:sp>
-        <p:nvSpPr>
-          <p:cNvPr id="5" name="楕円 4">
-            <a:extLst>
-              <a:ext uri="{FF2B5EF4-FFF2-40B4-BE49-F238E27FC236}">
-                <a16:creationId xmlns:a16="http://schemas.microsoft.com/office/drawing/2014/main" id="{CD2CAB2A-3749-4890-9D66-9004CBB17DA8}"/>
-              </a:ext>
-            </a:extLst>
-          </p:cNvPr>
-          <p:cNvSpPr/>
-          <p:nvPr/>
-        </p:nvSpPr>
-        <p:spPr>
-          <a:xfrm>
-            <a:off x="552905" y="3955959"/>
-            <a:ext cx="682171" cy="566057"/>
-          </a:xfrm>
-          <a:prstGeom prst="ellipse">
-            <a:avLst/>
-          </a:prstGeom>
-          <a:solidFill>
-            <a:schemeClr val="bg1"/>
-          </a:solidFill>
-          <a:ln>
-            <a:solidFill>
-              <a:schemeClr val="tx1"/>
-            </a:solidFill>
-          </a:ln>
-        </p:spPr>
-        <p:style>
-          <a:lnRef idx="2">
-            <a:schemeClr val="accent1">
-              <a:shade val="50000"/>
-            </a:schemeClr>
-          </a:lnRef>
-          <a:fillRef idx="1">
-            <a:schemeClr val="accent1"/>
-          </a:fillRef>
-          <a:effectRef idx="0">
-            <a:schemeClr val="accent1"/>
-          </a:effectRef>
-          <a:fontRef idx="minor">
-            <a:schemeClr val="lt1"/>
-          </a:fontRef>
-        </p:style>
-        <p:txBody>
-          <a:bodyPr rtlCol="0" anchor="ctr"/>
-          <a:lstStyle/>
-          <a:p>
-            <a:pPr algn="ctr"/>
-            <a:r>
-              <a:rPr kumimoji="1" lang="en-US" altLang="ja-JP" dirty="0">
-                <a:solidFill>
-                  <a:schemeClr val="tx1"/>
-                </a:solidFill>
-                <a:latin typeface="メイリオ" panose="020B0604030504040204" pitchFamily="50" charset="-128"/>
-                <a:ea typeface="メイリオ" panose="020B0604030504040204" pitchFamily="50" charset="-128"/>
-              </a:rPr>
-              <a:t>PA</a:t>
-            </a:r>
-            <a:endParaRPr kumimoji="1" lang="ja-JP" altLang="en-US" dirty="0">
-              <a:solidFill>
-                <a:schemeClr val="tx1"/>
-              </a:solidFill>
-              <a:latin typeface="メイリオ" panose="020B0604030504040204" pitchFamily="50" charset="-128"/>
-              <a:ea typeface="メイリオ" panose="020B0604030504040204" pitchFamily="50" charset="-128"/>
-            </a:endParaRPr>
-          </a:p>
-        </p:txBody>
-      </p:sp>
-      <p:sp>
-        <p:nvSpPr>
-          <p:cNvPr id="6" name="楕円 5">
-            <a:extLst>
-              <a:ext uri="{FF2B5EF4-FFF2-40B4-BE49-F238E27FC236}">
-                <a16:creationId xmlns:a16="http://schemas.microsoft.com/office/drawing/2014/main" id="{F4412D6F-1044-45A4-8DD4-73A3EAD9C519}"/>
-              </a:ext>
-            </a:extLst>
-          </p:cNvPr>
-          <p:cNvSpPr/>
-          <p:nvPr/>
-        </p:nvSpPr>
-        <p:spPr>
-          <a:xfrm>
-            <a:off x="1416505" y="3955959"/>
-            <a:ext cx="682171" cy="566057"/>
-          </a:xfrm>
-          <a:prstGeom prst="ellipse">
-            <a:avLst/>
-          </a:prstGeom>
-          <a:solidFill>
-            <a:schemeClr val="bg1"/>
-          </a:solidFill>
-          <a:ln>
-            <a:solidFill>
-              <a:schemeClr val="tx1"/>
-            </a:solidFill>
-          </a:ln>
-        </p:spPr>
-        <p:style>
-          <a:lnRef idx="2">
-            <a:schemeClr val="accent1">
-              <a:shade val="50000"/>
-            </a:schemeClr>
-          </a:lnRef>
-          <a:fillRef idx="1">
-            <a:schemeClr val="accent1"/>
-          </a:fillRef>
-          <a:effectRef idx="0">
-            <a:schemeClr val="accent1"/>
-          </a:effectRef>
-          <a:fontRef idx="minor">
-            <a:schemeClr val="lt1"/>
-          </a:fontRef>
-        </p:style>
-        <p:txBody>
-          <a:bodyPr rtlCol="0" anchor="ctr"/>
-          <a:lstStyle/>
-          <a:p>
-            <a:pPr algn="ctr"/>
-            <a:r>
-              <a:rPr kumimoji="1" lang="en-US" altLang="ja-JP" dirty="0">
-                <a:solidFill>
-                  <a:schemeClr val="tx1"/>
-                </a:solidFill>
-                <a:latin typeface="メイリオ" panose="020B0604030504040204" pitchFamily="50" charset="-128"/>
-                <a:ea typeface="メイリオ" panose="020B0604030504040204" pitchFamily="50" charset="-128"/>
-              </a:rPr>
-              <a:t>PA</a:t>
-            </a:r>
-            <a:endParaRPr kumimoji="1" lang="ja-JP" altLang="en-US" dirty="0">
-              <a:solidFill>
-                <a:schemeClr val="tx1"/>
-              </a:solidFill>
-              <a:latin typeface="メイリオ" panose="020B0604030504040204" pitchFamily="50" charset="-128"/>
-              <a:ea typeface="メイリオ" panose="020B0604030504040204" pitchFamily="50" charset="-128"/>
-            </a:endParaRPr>
-          </a:p>
-        </p:txBody>
-      </p:sp>
-      <p:sp>
-        <p:nvSpPr>
-          <p:cNvPr id="7" name="楕円 6">
-            <a:extLst>
-              <a:ext uri="{FF2B5EF4-FFF2-40B4-BE49-F238E27FC236}">
-                <a16:creationId xmlns:a16="http://schemas.microsoft.com/office/drawing/2014/main" id="{3244AA42-335E-42BC-B9BD-1E3AF1D7DA3A}"/>
-              </a:ext>
-            </a:extLst>
-          </p:cNvPr>
-          <p:cNvSpPr/>
-          <p:nvPr/>
-        </p:nvSpPr>
-        <p:spPr>
-          <a:xfrm>
-            <a:off x="3172734" y="3955958"/>
-            <a:ext cx="682171" cy="566057"/>
-          </a:xfrm>
-          <a:prstGeom prst="ellipse">
-            <a:avLst/>
-          </a:prstGeom>
-          <a:solidFill>
-            <a:schemeClr val="bg1"/>
-          </a:solidFill>
-          <a:ln>
-            <a:solidFill>
-              <a:schemeClr val="tx1"/>
-            </a:solidFill>
-          </a:ln>
-        </p:spPr>
-        <p:style>
-          <a:lnRef idx="2">
-            <a:schemeClr val="accent1">
-              <a:shade val="50000"/>
-            </a:schemeClr>
-          </a:lnRef>
-          <a:fillRef idx="1">
-            <a:schemeClr val="accent1"/>
-          </a:fillRef>
-          <a:effectRef idx="0">
-            <a:schemeClr val="accent1"/>
-          </a:effectRef>
-          <a:fontRef idx="minor">
-            <a:schemeClr val="lt1"/>
-          </a:fontRef>
-        </p:style>
-        <p:txBody>
-          <a:bodyPr rtlCol="0" anchor="ctr"/>
-          <a:lstStyle/>
-          <a:p>
-            <a:pPr algn="ctr"/>
-            <a:r>
-              <a:rPr kumimoji="1" lang="en-US" altLang="ja-JP" dirty="0">
-                <a:solidFill>
-                  <a:schemeClr val="tx1"/>
-                </a:solidFill>
-                <a:latin typeface="メイリオ" panose="020B0604030504040204" pitchFamily="50" charset="-128"/>
-                <a:ea typeface="メイリオ" panose="020B0604030504040204" pitchFamily="50" charset="-128"/>
-              </a:rPr>
-              <a:t>PA</a:t>
-            </a:r>
-            <a:endParaRPr kumimoji="1" lang="ja-JP" altLang="en-US" dirty="0">
-              <a:solidFill>
-                <a:schemeClr val="tx1"/>
-              </a:solidFill>
-              <a:latin typeface="メイリオ" panose="020B0604030504040204" pitchFamily="50" charset="-128"/>
-              <a:ea typeface="メイリオ" panose="020B0604030504040204" pitchFamily="50" charset="-128"/>
-            </a:endParaRPr>
-          </a:p>
-        </p:txBody>
-      </p:sp>
-      <p:sp>
-        <p:nvSpPr>
-          <p:cNvPr id="8" name="楕円 7">
-            <a:extLst>
-              <a:ext uri="{FF2B5EF4-FFF2-40B4-BE49-F238E27FC236}">
-                <a16:creationId xmlns:a16="http://schemas.microsoft.com/office/drawing/2014/main" id="{F6B51B56-37D7-4CD5-8A12-56A202E300F0}"/>
-              </a:ext>
-            </a:extLst>
-          </p:cNvPr>
-          <p:cNvSpPr/>
-          <p:nvPr/>
-        </p:nvSpPr>
-        <p:spPr>
-          <a:xfrm>
-            <a:off x="248105" y="2402931"/>
-            <a:ext cx="682171" cy="566057"/>
-          </a:xfrm>
-          <a:prstGeom prst="ellipse">
-            <a:avLst/>
-          </a:prstGeom>
-          <a:solidFill>
-            <a:schemeClr val="bg1"/>
-          </a:solidFill>
-          <a:ln>
-            <a:solidFill>
-              <a:schemeClr val="tx1"/>
-            </a:solidFill>
-          </a:ln>
-        </p:spPr>
-        <p:style>
-          <a:lnRef idx="2">
-            <a:schemeClr val="accent1">
-              <a:shade val="50000"/>
-            </a:schemeClr>
-          </a:lnRef>
-          <a:fillRef idx="1">
-            <a:schemeClr val="accent1"/>
-          </a:fillRef>
-          <a:effectRef idx="0">
-            <a:schemeClr val="accent1"/>
-          </a:effectRef>
-          <a:fontRef idx="minor">
-            <a:schemeClr val="lt1"/>
-          </a:fontRef>
-        </p:style>
-        <p:txBody>
-          <a:bodyPr rtlCol="0" anchor="ctr"/>
-          <a:lstStyle/>
-          <a:p>
-            <a:pPr algn="ctr"/>
-            <a:r>
-              <a:rPr kumimoji="1" lang="en-US" altLang="ja-JP" dirty="0">
-                <a:solidFill>
-                  <a:schemeClr val="tx1"/>
-                </a:solidFill>
-                <a:latin typeface="メイリオ" panose="020B0604030504040204" pitchFamily="50" charset="-128"/>
-                <a:ea typeface="メイリオ" panose="020B0604030504040204" pitchFamily="50" charset="-128"/>
-              </a:rPr>
-              <a:t>PA</a:t>
-            </a:r>
-            <a:endParaRPr kumimoji="1" lang="ja-JP" altLang="en-US" dirty="0">
-              <a:solidFill>
-                <a:schemeClr val="tx1"/>
-              </a:solidFill>
-              <a:latin typeface="メイリオ" panose="020B0604030504040204" pitchFamily="50" charset="-128"/>
-              <a:ea typeface="メイリオ" panose="020B0604030504040204" pitchFamily="50" charset="-128"/>
-            </a:endParaRPr>
-          </a:p>
-        </p:txBody>
-      </p:sp>
-      <p:sp>
-        <p:nvSpPr>
-          <p:cNvPr id="9" name="楕円 8">
-            <a:extLst>
-              <a:ext uri="{FF2B5EF4-FFF2-40B4-BE49-F238E27FC236}">
-                <a16:creationId xmlns:a16="http://schemas.microsoft.com/office/drawing/2014/main" id="{BA4BED2A-7DC9-4FE8-AD5A-3A0207DC8593}"/>
-              </a:ext>
-            </a:extLst>
-          </p:cNvPr>
-          <p:cNvSpPr/>
-          <p:nvPr/>
-        </p:nvSpPr>
-        <p:spPr>
-          <a:xfrm>
-            <a:off x="1042762" y="2402931"/>
-            <a:ext cx="682171" cy="566057"/>
-          </a:xfrm>
-          <a:prstGeom prst="ellipse">
-            <a:avLst/>
-          </a:prstGeom>
-          <a:solidFill>
-            <a:schemeClr val="bg1"/>
-          </a:solidFill>
-          <a:ln>
-            <a:solidFill>
-              <a:schemeClr val="tx1"/>
-            </a:solidFill>
-          </a:ln>
-        </p:spPr>
-        <p:style>
-          <a:lnRef idx="2">
-            <a:schemeClr val="accent1">
-              <a:shade val="50000"/>
-            </a:schemeClr>
-          </a:lnRef>
-          <a:fillRef idx="1">
-            <a:schemeClr val="accent1"/>
-          </a:fillRef>
-          <a:effectRef idx="0">
-            <a:schemeClr val="accent1"/>
-          </a:effectRef>
-          <a:fontRef idx="minor">
-            <a:schemeClr val="lt1"/>
-          </a:fontRef>
-        </p:style>
-        <p:txBody>
-          <a:bodyPr rtlCol="0" anchor="ctr"/>
-          <a:lstStyle/>
-          <a:p>
-            <a:pPr algn="ctr"/>
-            <a:r>
-              <a:rPr kumimoji="1" lang="en-US" altLang="ja-JP" dirty="0">
-                <a:solidFill>
-                  <a:schemeClr val="tx1"/>
-                </a:solidFill>
-                <a:latin typeface="メイリオ" panose="020B0604030504040204" pitchFamily="50" charset="-128"/>
-                <a:ea typeface="メイリオ" panose="020B0604030504040204" pitchFamily="50" charset="-128"/>
-              </a:rPr>
-              <a:t>PA</a:t>
-            </a:r>
-            <a:endParaRPr kumimoji="1" lang="ja-JP" altLang="en-US" dirty="0">
-              <a:solidFill>
-                <a:schemeClr val="tx1"/>
-              </a:solidFill>
-              <a:latin typeface="メイリオ" panose="020B0604030504040204" pitchFamily="50" charset="-128"/>
-              <a:ea typeface="メイリオ" panose="020B0604030504040204" pitchFamily="50" charset="-128"/>
-            </a:endParaRPr>
-          </a:p>
-        </p:txBody>
-      </p:sp>
-      <p:sp>
-        <p:nvSpPr>
-          <p:cNvPr id="10" name="楕円 9">
-            <a:extLst>
-              <a:ext uri="{FF2B5EF4-FFF2-40B4-BE49-F238E27FC236}">
-                <a16:creationId xmlns:a16="http://schemas.microsoft.com/office/drawing/2014/main" id="{23798509-7D2F-41BC-BCAD-EF93C1856717}"/>
-              </a:ext>
-            </a:extLst>
-          </p:cNvPr>
-          <p:cNvSpPr/>
-          <p:nvPr/>
-        </p:nvSpPr>
-        <p:spPr>
-          <a:xfrm>
-            <a:off x="1837419" y="2402931"/>
-            <a:ext cx="682171" cy="566057"/>
-          </a:xfrm>
-          <a:prstGeom prst="ellipse">
-            <a:avLst/>
-          </a:prstGeom>
-          <a:solidFill>
-            <a:schemeClr val="bg1"/>
-          </a:solidFill>
-          <a:ln>
-            <a:solidFill>
-              <a:schemeClr val="tx1"/>
-            </a:solidFill>
-          </a:ln>
-        </p:spPr>
-        <p:style>
-          <a:lnRef idx="2">
-            <a:schemeClr val="accent1">
-              <a:shade val="50000"/>
-            </a:schemeClr>
-          </a:lnRef>
-          <a:fillRef idx="1">
-            <a:schemeClr val="accent1"/>
-          </a:fillRef>
-          <a:effectRef idx="0">
-            <a:schemeClr val="accent1"/>
-          </a:effectRef>
-          <a:fontRef idx="minor">
-            <a:schemeClr val="lt1"/>
-          </a:fontRef>
-        </p:style>
-        <p:txBody>
-          <a:bodyPr rtlCol="0" anchor="ctr"/>
-          <a:lstStyle/>
-          <a:p>
-            <a:pPr algn="ctr"/>
-            <a:r>
-              <a:rPr kumimoji="1" lang="en-US" altLang="ja-JP" dirty="0">
-                <a:solidFill>
-                  <a:schemeClr val="tx1"/>
-                </a:solidFill>
-                <a:latin typeface="メイリオ" panose="020B0604030504040204" pitchFamily="50" charset="-128"/>
-                <a:ea typeface="メイリオ" panose="020B0604030504040204" pitchFamily="50" charset="-128"/>
-              </a:rPr>
-              <a:t>PA</a:t>
-            </a:r>
-            <a:endParaRPr kumimoji="1" lang="ja-JP" altLang="en-US" dirty="0">
-              <a:solidFill>
-                <a:schemeClr val="tx1"/>
-              </a:solidFill>
-              <a:latin typeface="メイリオ" panose="020B0604030504040204" pitchFamily="50" charset="-128"/>
-              <a:ea typeface="メイリオ" panose="020B0604030504040204" pitchFamily="50" charset="-128"/>
-            </a:endParaRPr>
-          </a:p>
-        </p:txBody>
-      </p:sp>
-      <p:sp>
-        <p:nvSpPr>
-          <p:cNvPr id="11" name="テキスト ボックス 10">
-            <a:extLst>
-              <a:ext uri="{FF2B5EF4-FFF2-40B4-BE49-F238E27FC236}">
-                <a16:creationId xmlns:a16="http://schemas.microsoft.com/office/drawing/2014/main" id="{A7667394-06FA-473D-A1FC-055C18F63301}"/>
-              </a:ext>
-            </a:extLst>
-          </p:cNvPr>
-          <p:cNvSpPr txBox="1"/>
-          <p:nvPr/>
-        </p:nvSpPr>
-        <p:spPr>
-          <a:xfrm>
-            <a:off x="2679247" y="2532070"/>
-            <a:ext cx="1045029" cy="307777"/>
+        <p:spPr>
+          <a:xfrm>
+            <a:off x="144780" y="167005"/>
+            <a:ext cx="10397600" cy="732400"/>
           </a:xfrm>
           <a:prstGeom prst="rect">
             <a:avLst/>
           </a:prstGeom>
-          <a:solidFill>
-            <a:schemeClr val="bg1"/>
-          </a:solidFill>
-          <a:ln>
-            <a:noFill/>
-          </a:ln>
-        </p:spPr>
-        <p:txBody>
-          <a:bodyPr wrap="square" rtlCol="0">
-            <a:spAutoFit/>
+        </p:spPr>
+        <p:txBody>
+          <a:bodyPr spcFirstLastPara="1" vert="horz" wrap="square" lIns="91433" tIns="45700" rIns="91433" bIns="45700" rtlCol="0" anchor="ctr" anchorCtr="0">
+            <a:normAutofit/>
           </a:bodyPr>
           <a:lstStyle/>
           <a:p>
             <a:r>
-              <a:rPr kumimoji="1" lang="ja-JP" altLang="en-US" dirty="0">
+              <a:rPr lang="ja"/>
+              <a:t>配置配線手法</a:t>
+            </a:r>
+            <a:endParaRPr/>
+          </a:p>
+        </p:txBody>
+      </p:sp>
+      <p:sp>
+        <p:nvSpPr>
+          <p:cNvPr id="265" name="Google Shape;265;p38"/>
+          <p:cNvSpPr txBox="1">
+            <a:spLocks noGrp="1"/>
+          </p:cNvSpPr>
+          <p:nvPr>
+            <p:ph type="body" idx="1"/>
+          </p:nvPr>
+        </p:nvSpPr>
+        <p:spPr>
+          <a:xfrm>
+            <a:off x="144780" y="1018672"/>
+            <a:ext cx="3540400" cy="413600"/>
+          </a:xfrm>
+          <a:prstGeom prst="rect">
+            <a:avLst/>
+          </a:prstGeom>
+        </p:spPr>
+        <p:txBody>
+          <a:bodyPr spcFirstLastPara="1" vert="horz" wrap="square" lIns="91433" tIns="45700" rIns="91433" bIns="45700" rtlCol="0" anchor="t" anchorCtr="0">
+            <a:noAutofit/>
+          </a:bodyPr>
+          <a:lstStyle/>
+          <a:p>
+            <a:pPr marL="0" indent="0">
+              <a:spcAft>
+                <a:spcPts val="1600"/>
+              </a:spcAft>
+              <a:buNone/>
+            </a:pPr>
+            <a:r>
+              <a:rPr lang="ja" altLang="en-US" sz="1400" b="1" dirty="0">
                 <a:solidFill>
-                  <a:schemeClr val="tx1"/>
+                  <a:schemeClr val="dk1"/>
                 </a:solidFill>
-                <a:latin typeface="メイリオ" panose="020B0604030504040204" pitchFamily="50" charset="-128"/>
-                <a:ea typeface="メイリオ" panose="020B0604030504040204" pitchFamily="50" charset="-128"/>
               </a:rPr>
-              <a:t>・・・</a:t>
-            </a:r>
-          </a:p>
-        </p:txBody>
-      </p:sp>
-      <p:sp>
-        <p:nvSpPr>
-          <p:cNvPr id="12" name="楕円 11">
-            <a:extLst>
-              <a:ext uri="{FF2B5EF4-FFF2-40B4-BE49-F238E27FC236}">
-                <a16:creationId xmlns:a16="http://schemas.microsoft.com/office/drawing/2014/main" id="{F0F1E2A1-B1B2-4837-B542-8AE680BD43A2}"/>
-              </a:ext>
-            </a:extLst>
-          </p:cNvPr>
+              <a:t>列位置のみ</a:t>
+            </a:r>
+            <a:r>
+              <a:rPr lang="en-US" altLang="ja" sz="1400" b="1" dirty="0">
+                <a:solidFill>
+                  <a:schemeClr val="dk1"/>
+                </a:solidFill>
+              </a:rPr>
+              <a:t>SAT</a:t>
+            </a:r>
+            <a:r>
+              <a:rPr lang="ja" altLang="en-US" sz="1400" b="1" dirty="0">
+                <a:solidFill>
+                  <a:schemeClr val="dk1"/>
+                </a:solidFill>
+              </a:rPr>
+              <a:t>での配置配線</a:t>
+            </a:r>
+            <a:endParaRPr sz="1400" b="1" dirty="0">
+              <a:solidFill>
+                <a:schemeClr val="dk1"/>
+              </a:solidFill>
+            </a:endParaRPr>
+          </a:p>
+        </p:txBody>
+      </p:sp>
+      <p:sp>
+        <p:nvSpPr>
+          <p:cNvPr id="266" name="Google Shape;266;p38"/>
+          <p:cNvSpPr txBox="1">
+            <a:spLocks noGrp="1"/>
+          </p:cNvSpPr>
+          <p:nvPr>
+            <p:ph type="body" idx="1"/>
+          </p:nvPr>
+        </p:nvSpPr>
+        <p:spPr>
+          <a:xfrm>
+            <a:off x="321274" y="4779099"/>
+            <a:ext cx="5300297" cy="1533657"/>
+          </a:xfrm>
+          <a:prstGeom prst="rect">
+            <a:avLst/>
+          </a:prstGeom>
+        </p:spPr>
+        <p:txBody>
+          <a:bodyPr spcFirstLastPara="1" vert="horz" wrap="square" lIns="91433" tIns="45700" rIns="91433" bIns="45700" rtlCol="0" anchor="t" anchorCtr="0">
+            <a:normAutofit/>
+          </a:bodyPr>
+          <a:lstStyle/>
+          <a:p>
+            <a:pPr marL="0" indent="0">
+              <a:buNone/>
+            </a:pPr>
+            <a:r>
+              <a:rPr lang="ja" altLang="en-US" sz="1600" dirty="0">
+                <a:solidFill>
+                  <a:schemeClr val="dk1"/>
+                </a:solidFill>
+              </a:rPr>
+              <a:t>〇</a:t>
+            </a:r>
+            <a:r>
+              <a:rPr lang="en-US" altLang="ja" sz="1600" dirty="0">
+                <a:solidFill>
+                  <a:schemeClr val="dk1"/>
+                </a:solidFill>
+              </a:rPr>
+              <a:t>PA</a:t>
+            </a:r>
+            <a:r>
+              <a:rPr lang="ja" altLang="en-US" sz="1600" dirty="0">
+                <a:solidFill>
+                  <a:schemeClr val="dk1"/>
+                </a:solidFill>
+              </a:rPr>
+              <a:t>と配線構造の行</a:t>
+            </a:r>
+            <a:r>
+              <a:rPr lang="en-US" altLang="ja" sz="1600" dirty="0">
+                <a:solidFill>
+                  <a:schemeClr val="dk1"/>
+                </a:solidFill>
+              </a:rPr>
+              <a:t>(</a:t>
+            </a:r>
+            <a:r>
+              <a:rPr lang="ja" altLang="en-US" sz="1600" dirty="0">
+                <a:solidFill>
+                  <a:schemeClr val="dk1"/>
+                </a:solidFill>
+              </a:rPr>
+              <a:t>段</a:t>
+            </a:r>
+            <a:r>
+              <a:rPr lang="en-US" altLang="ja" sz="1600" dirty="0">
+                <a:solidFill>
+                  <a:schemeClr val="dk1"/>
+                </a:solidFill>
+              </a:rPr>
+              <a:t>)</a:t>
+            </a:r>
+            <a:r>
+              <a:rPr lang="ja" altLang="en-US" sz="1600" dirty="0">
+                <a:solidFill>
+                  <a:schemeClr val="dk1"/>
+                </a:solidFill>
+              </a:rPr>
+              <a:t>を一致</a:t>
+            </a:r>
+            <a:endParaRPr sz="1600" dirty="0">
+              <a:solidFill>
+                <a:schemeClr val="dk1"/>
+              </a:solidFill>
+            </a:endParaRPr>
+          </a:p>
+          <a:p>
+            <a:pPr marL="0" indent="0">
+              <a:spcBef>
+                <a:spcPts val="1600"/>
+              </a:spcBef>
+              <a:spcAft>
+                <a:spcPts val="1600"/>
+              </a:spcAft>
+              <a:buNone/>
+            </a:pPr>
+            <a:r>
+              <a:rPr lang="ja" altLang="en-US" sz="1600" dirty="0">
+                <a:solidFill>
+                  <a:schemeClr val="dk1"/>
+                </a:solidFill>
+              </a:rPr>
+              <a:t>〇列の決定のみで</a:t>
+            </a:r>
+            <a:r>
+              <a:rPr lang="en-US" altLang="ja" sz="1600" dirty="0">
+                <a:solidFill>
+                  <a:schemeClr val="dk1"/>
+                </a:solidFill>
+              </a:rPr>
+              <a:t>SAT</a:t>
+            </a:r>
+            <a:r>
+              <a:rPr lang="ja" altLang="en-US" sz="1600" dirty="0">
+                <a:solidFill>
+                  <a:schemeClr val="dk1"/>
+                </a:solidFill>
+              </a:rPr>
+              <a:t>を使用</a:t>
+            </a:r>
+            <a:endParaRPr sz="1600" dirty="0">
+              <a:solidFill>
+                <a:schemeClr val="dk1"/>
+              </a:solidFill>
+            </a:endParaRPr>
+          </a:p>
+        </p:txBody>
+      </p:sp>
+      <p:sp>
+        <p:nvSpPr>
+          <p:cNvPr id="267" name="Google Shape;267;p38"/>
           <p:cNvSpPr/>
           <p:nvPr/>
         </p:nvSpPr>
         <p:spPr>
-          <a:xfrm>
-            <a:off x="3542847" y="2402931"/>
-            <a:ext cx="767444" cy="615517"/>
-          </a:xfrm>
-          <a:prstGeom prst="ellipse">
-            <a:avLst/>
-          </a:prstGeom>
-          <a:solidFill>
-            <a:schemeClr val="bg1"/>
-          </a:solidFill>
-          <a:ln>
-            <a:solidFill>
-              <a:schemeClr val="tx1"/>
-            </a:solidFill>
-          </a:ln>
-        </p:spPr>
-        <p:style>
-          <a:lnRef idx="2">
-            <a:schemeClr val="accent1">
-              <a:shade val="50000"/>
-            </a:schemeClr>
-          </a:lnRef>
-          <a:fillRef idx="1">
-            <a:schemeClr val="accent1"/>
-          </a:fillRef>
-          <a:effectRef idx="0">
-            <a:schemeClr val="accent1"/>
-          </a:effectRef>
-          <a:fontRef idx="minor">
-            <a:schemeClr val="lt1"/>
-          </a:fontRef>
-        </p:style>
-        <p:txBody>
-          <a:bodyPr rtlCol="0" anchor="ctr"/>
-          <a:lstStyle/>
-          <a:p>
-            <a:pPr algn="ctr"/>
-            <a:r>
-              <a:rPr kumimoji="1" lang="en-US" altLang="ja-JP" dirty="0">
-                <a:solidFill>
-                  <a:schemeClr val="tx1"/>
-                </a:solidFill>
-                <a:latin typeface="メイリオ" panose="020B0604030504040204" pitchFamily="50" charset="-128"/>
-                <a:ea typeface="メイリオ" panose="020B0604030504040204" pitchFamily="50" charset="-128"/>
-              </a:rPr>
-              <a:t>PA</a:t>
-            </a:r>
-            <a:endParaRPr kumimoji="1" lang="ja-JP" altLang="en-US" dirty="0">
-              <a:solidFill>
-                <a:schemeClr val="tx1"/>
-              </a:solidFill>
-              <a:latin typeface="メイリオ" panose="020B0604030504040204" pitchFamily="50" charset="-128"/>
-              <a:ea typeface="メイリオ" panose="020B0604030504040204" pitchFamily="50" charset="-128"/>
-            </a:endParaRPr>
-          </a:p>
-        </p:txBody>
-      </p:sp>
-      <p:sp>
-        <p:nvSpPr>
-          <p:cNvPr id="13" name="右中かっこ 12">
-            <a:extLst>
-              <a:ext uri="{FF2B5EF4-FFF2-40B4-BE49-F238E27FC236}">
-                <a16:creationId xmlns:a16="http://schemas.microsoft.com/office/drawing/2014/main" id="{8A124A01-9D20-4B69-97FE-98A73D3C9B1A}"/>
-              </a:ext>
-            </a:extLst>
-          </p:cNvPr>
-          <p:cNvSpPr/>
-          <p:nvPr/>
-        </p:nvSpPr>
-        <p:spPr>
-          <a:xfrm rot="5400000">
-            <a:off x="1759586" y="2915087"/>
-            <a:ext cx="1030152" cy="3595914"/>
+          <a:xfrm rot="10800000">
+            <a:off x="2891775" y="1466988"/>
+            <a:ext cx="169600" cy="2744400"/>
           </a:xfrm>
           <a:prstGeom prst="rightBrace">
             <a:avLst>
-              <a:gd name="adj1" fmla="val 8333"/>
-              <a:gd name="adj2" fmla="val 49596"/>
+              <a:gd name="adj1" fmla="val 50000"/>
+              <a:gd name="adj2" fmla="val 50000"/>
             </a:avLst>
           </a:prstGeom>
-        </p:spPr>
-        <p:style>
-          <a:lnRef idx="1">
-            <a:schemeClr val="accent1"/>
-          </a:lnRef>
-          <a:fillRef idx="0">
-            <a:schemeClr val="accent1"/>
-          </a:fillRef>
-          <a:effectRef idx="0">
-            <a:schemeClr val="accent1"/>
-          </a:effectRef>
-          <a:fontRef idx="minor">
-            <a:schemeClr val="tx1"/>
-          </a:fontRef>
-        </p:style>
-        <p:txBody>
-          <a:bodyPr rtlCol="0" anchor="ctr"/>
+          <a:noFill/>
+          <a:ln w="7150" cap="flat" cmpd="sng">
+            <a:solidFill>
+              <a:schemeClr val="dk2"/>
+            </a:solidFill>
+            <a:prstDash val="solid"/>
+            <a:round/>
+            <a:headEnd type="none" w="sm" len="sm"/>
+            <a:tailEnd type="none" w="sm" len="sm"/>
+          </a:ln>
+        </p:spPr>
+        <p:txBody>
+          <a:bodyPr spcFirstLastPara="1" wrap="square" lIns="91433" tIns="91433" rIns="91433" bIns="91433" anchor="ctr" anchorCtr="0">
+            <a:noAutofit/>
+          </a:bodyPr>
           <a:lstStyle/>
           <a:p>
             <a:pPr algn="ctr"/>
-            <a:endParaRPr kumimoji="1" lang="ja-JP" altLang="en-US">
-              <a:latin typeface="メイリオ" panose="020B0604030504040204" pitchFamily="50" charset="-128"/>
-              <a:ea typeface="メイリオ" panose="020B0604030504040204" pitchFamily="50" charset="-128"/>
+            <a:endParaRPr sz="1467">
+              <a:latin typeface="Meiryo"/>
+              <a:ea typeface="Meiryo"/>
+              <a:cs typeface="Meiryo"/>
+              <a:sym typeface="Meiryo"/>
             </a:endParaRPr>
           </a:p>
         </p:txBody>
       </p:sp>
       <p:sp>
         <p:nvSpPr>
-          <p:cNvPr id="14" name="テキスト ボックス 13">
-            <a:extLst>
-              <a:ext uri="{FF2B5EF4-FFF2-40B4-BE49-F238E27FC236}">
-                <a16:creationId xmlns:a16="http://schemas.microsoft.com/office/drawing/2014/main" id="{84893D1D-63F0-4877-A926-826385D8BAEE}"/>
-              </a:ext>
-            </a:extLst>
-          </p:cNvPr>
+          <p:cNvPr id="268" name="Google Shape;268;p38"/>
           <p:cNvSpPr txBox="1"/>
           <p:nvPr/>
         </p:nvSpPr>
         <p:spPr>
           <a:xfrm>
-            <a:off x="2274662" y="5008464"/>
-            <a:ext cx="631372" cy="461665"/>
+            <a:off x="2376875" y="2568612"/>
+            <a:ext cx="417200" cy="534800"/>
           </a:xfrm>
           <a:prstGeom prst="rect">
             <a:avLst/>
           </a:prstGeom>
           <a:noFill/>
-        </p:spPr>
-        <p:txBody>
-          <a:bodyPr wrap="square" rtlCol="0">
-            <a:spAutoFit/>
+          <a:ln>
+            <a:noFill/>
+          </a:ln>
+        </p:spPr>
+        <p:txBody>
+          <a:bodyPr spcFirstLastPara="1" wrap="square" lIns="91433" tIns="91433" rIns="91433" bIns="91433" anchor="t" anchorCtr="0">
+            <a:noAutofit/>
           </a:bodyPr>
           <a:lstStyle/>
           <a:p>
             <a:r>
-              <a:rPr kumimoji="1" lang="en-US" altLang="ja-JP" sz="2400" dirty="0">
-                <a:latin typeface="メイリオ" panose="020B0604030504040204" pitchFamily="50" charset="-128"/>
-                <a:ea typeface="メイリオ" panose="020B0604030504040204" pitchFamily="50" charset="-128"/>
+              <a:rPr lang="ja" altLang="en-US" sz="2800">
+                <a:solidFill>
+                  <a:schemeClr val="dk1"/>
+                </a:solidFill>
+                <a:latin typeface="Meiryo"/>
+                <a:ea typeface="Meiryo"/>
+                <a:cs typeface="Meiryo"/>
+                <a:sym typeface="Meiryo"/>
               </a:rPr>
-              <a:t>N</a:t>
-            </a:r>
-            <a:endParaRPr kumimoji="1" lang="ja-JP" altLang="en-US" sz="2400" dirty="0">
-              <a:latin typeface="メイリオ" panose="020B0604030504040204" pitchFamily="50" charset="-128"/>
-              <a:ea typeface="メイリオ" panose="020B0604030504040204" pitchFamily="50" charset="-128"/>
+              <a:t>行</a:t>
+            </a:r>
+            <a:endParaRPr sz="2800">
+              <a:solidFill>
+                <a:schemeClr val="dk1"/>
+              </a:solidFill>
+              <a:latin typeface="Meiryo"/>
+              <a:ea typeface="Meiryo"/>
+              <a:cs typeface="Meiryo"/>
+              <a:sym typeface="Meiryo"/>
             </a:endParaRPr>
           </a:p>
         </p:txBody>
       </p:sp>
       <p:sp>
         <p:nvSpPr>
-          <p:cNvPr id="15" name="テキスト ボックス 14">
-            <a:extLst>
-              <a:ext uri="{FF2B5EF4-FFF2-40B4-BE49-F238E27FC236}">
-                <a16:creationId xmlns:a16="http://schemas.microsoft.com/office/drawing/2014/main" id="{7D02B0B2-DD15-49C5-A9F7-B1471279542E}"/>
-              </a:ext>
-            </a:extLst>
-          </p:cNvPr>
+          <p:cNvPr id="269" name="Google Shape;269;p38"/>
+          <p:cNvSpPr/>
+          <p:nvPr/>
+        </p:nvSpPr>
+        <p:spPr>
+          <a:xfrm rot="5400000">
+            <a:off x="4484451" y="2642537"/>
+            <a:ext cx="180400" cy="3114800"/>
+          </a:xfrm>
+          <a:prstGeom prst="rightBrace">
+            <a:avLst>
+              <a:gd name="adj1" fmla="val 50000"/>
+              <a:gd name="adj2" fmla="val 50000"/>
+            </a:avLst>
+          </a:prstGeom>
+          <a:noFill/>
+          <a:ln w="7150" cap="flat" cmpd="sng">
+            <a:solidFill>
+              <a:schemeClr val="dk2"/>
+            </a:solidFill>
+            <a:prstDash val="solid"/>
+            <a:round/>
+            <a:headEnd type="none" w="sm" len="sm"/>
+            <a:tailEnd type="none" w="sm" len="sm"/>
+          </a:ln>
+        </p:spPr>
+        <p:txBody>
+          <a:bodyPr spcFirstLastPara="1" wrap="square" lIns="91433" tIns="91433" rIns="91433" bIns="91433" anchor="ctr" anchorCtr="0">
+            <a:noAutofit/>
+          </a:bodyPr>
+          <a:lstStyle/>
+          <a:p>
+            <a:pPr algn="ctr"/>
+            <a:endParaRPr sz="1467">
+              <a:latin typeface="Meiryo"/>
+              <a:ea typeface="Meiryo"/>
+              <a:cs typeface="Meiryo"/>
+              <a:sym typeface="Meiryo"/>
+            </a:endParaRPr>
+          </a:p>
+        </p:txBody>
+      </p:sp>
+      <p:sp>
+        <p:nvSpPr>
+          <p:cNvPr id="270" name="Google Shape;270;p38"/>
           <p:cNvSpPr txBox="1"/>
           <p:nvPr/>
         </p:nvSpPr>
         <p:spPr>
           <a:xfrm>
-            <a:off x="1958976" y="1310456"/>
-            <a:ext cx="631372" cy="461665"/>
+            <a:off x="4366100" y="4352463"/>
+            <a:ext cx="417200" cy="534800"/>
           </a:xfrm>
           <a:prstGeom prst="rect">
             <a:avLst/>
           </a:prstGeom>
           <a:noFill/>
-        </p:spPr>
-        <p:txBody>
-          <a:bodyPr wrap="square" rtlCol="0">
-            <a:spAutoFit/>
+          <a:ln>
+            <a:noFill/>
+          </a:ln>
+        </p:spPr>
+        <p:txBody>
+          <a:bodyPr spcFirstLastPara="1" wrap="square" lIns="91433" tIns="91433" rIns="91433" bIns="91433" anchor="t" anchorCtr="0">
+            <a:noAutofit/>
           </a:bodyPr>
           <a:lstStyle/>
           <a:p>
             <a:r>
-              <a:rPr kumimoji="1" lang="en-US" altLang="ja-JP" sz="2400" dirty="0">
-                <a:latin typeface="メイリオ" panose="020B0604030504040204" pitchFamily="50" charset="-128"/>
-                <a:ea typeface="メイリオ" panose="020B0604030504040204" pitchFamily="50" charset="-128"/>
+              <a:rPr lang="ja" altLang="en-US" sz="2800">
+                <a:solidFill>
+                  <a:schemeClr val="dk1"/>
+                </a:solidFill>
+                <a:latin typeface="Meiryo"/>
+                <a:ea typeface="Meiryo"/>
+                <a:cs typeface="Meiryo"/>
+                <a:sym typeface="Meiryo"/>
               </a:rPr>
-              <a:t>2N</a:t>
-            </a:r>
-            <a:endParaRPr kumimoji="1" lang="ja-JP" altLang="en-US" sz="2400" dirty="0">
-              <a:latin typeface="メイリオ" panose="020B0604030504040204" pitchFamily="50" charset="-128"/>
-              <a:ea typeface="メイリオ" panose="020B0604030504040204" pitchFamily="50" charset="-128"/>
+              <a:t>列</a:t>
+            </a:r>
+            <a:endParaRPr sz="2800">
+              <a:solidFill>
+                <a:schemeClr val="dk1"/>
+              </a:solidFill>
+              <a:latin typeface="Meiryo"/>
+              <a:ea typeface="Meiryo"/>
+              <a:cs typeface="Meiryo"/>
+              <a:sym typeface="Meiryo"/>
             </a:endParaRPr>
           </a:p>
         </p:txBody>
       </p:sp>
       <p:sp>
         <p:nvSpPr>
-          <p:cNvPr id="16" name="右中かっこ 15">
-            <a:extLst>
-              <a:ext uri="{FF2B5EF4-FFF2-40B4-BE49-F238E27FC236}">
-                <a16:creationId xmlns:a16="http://schemas.microsoft.com/office/drawing/2014/main" id="{1F3BABE9-A5A9-4E66-81AA-955CC7C62572}"/>
-              </a:ext>
-            </a:extLst>
-          </p:cNvPr>
+          <p:cNvPr id="271" name="Google Shape;271;p38"/>
           <p:cNvSpPr/>
           <p:nvPr/>
         </p:nvSpPr>
         <p:spPr>
-          <a:xfrm rot="16200000">
-            <a:off x="1764122" y="230269"/>
-            <a:ext cx="1030152" cy="4062186"/>
-          </a:xfrm>
-          <a:prstGeom prst="rightBrace">
+          <a:xfrm>
+            <a:off x="6382300" y="1277800"/>
+            <a:ext cx="5810000" cy="4273200"/>
+          </a:xfrm>
+          <a:prstGeom prst="roundRect">
             <a:avLst>
-              <a:gd name="adj1" fmla="val 8333"/>
-              <a:gd name="adj2" fmla="val 49798"/>
+              <a:gd name="adj" fmla="val 16667"/>
             </a:avLst>
           </a:prstGeom>
-        </p:spPr>
-        <p:style>
-          <a:lnRef idx="1">
-            <a:schemeClr val="accent1"/>
-          </a:lnRef>
-          <a:fillRef idx="0">
-            <a:schemeClr val="accent1"/>
-          </a:fillRef>
-          <a:effectRef idx="0">
-            <a:schemeClr val="accent1"/>
-          </a:effectRef>
-          <a:fontRef idx="minor">
-            <a:schemeClr val="tx1"/>
-          </a:fontRef>
-        </p:style>
-        <p:txBody>
-          <a:bodyPr rtlCol="0" anchor="ctr"/>
-          <a:lstStyle/>
-          <a:p>
-            <a:pPr algn="ctr"/>
-            <a:endParaRPr kumimoji="1" lang="ja-JP" altLang="en-US" dirty="0">
-              <a:latin typeface="メイリオ" panose="020B0604030504040204" pitchFamily="50" charset="-128"/>
-              <a:ea typeface="メイリオ" panose="020B0604030504040204" pitchFamily="50" charset="-128"/>
+          <a:solidFill>
+            <a:schemeClr val="lt1"/>
+          </a:solidFill>
+          <a:ln w="28575" cap="flat" cmpd="sng">
+            <a:solidFill>
+              <a:srgbClr val="00B050"/>
+            </a:solidFill>
+            <a:prstDash val="solid"/>
+            <a:round/>
+            <a:headEnd type="none" w="sm" len="sm"/>
+            <a:tailEnd type="none" w="sm" len="sm"/>
+          </a:ln>
+        </p:spPr>
+        <p:txBody>
+          <a:bodyPr spcFirstLastPara="1" wrap="square" lIns="91433" tIns="91433" rIns="91433" bIns="91433" anchor="t" anchorCtr="0">
+            <a:noAutofit/>
+          </a:bodyPr>
+          <a:lstStyle/>
+          <a:p>
+            <a:r>
+              <a:rPr lang="ja" altLang="en-US" sz="2533" b="1">
+                <a:latin typeface="Meiryo"/>
+                <a:ea typeface="Meiryo"/>
+                <a:cs typeface="Meiryo"/>
+                <a:sym typeface="Meiryo"/>
+              </a:rPr>
+              <a:t>載せたい回路と配線構造の行</a:t>
+            </a:r>
+            <a:r>
+              <a:rPr lang="en-US" altLang="ja" sz="2533" b="1">
+                <a:latin typeface="Meiryo"/>
+                <a:ea typeface="Meiryo"/>
+                <a:cs typeface="Meiryo"/>
+                <a:sym typeface="Meiryo"/>
+              </a:rPr>
+              <a:t>(</a:t>
+            </a:r>
+            <a:r>
+              <a:rPr lang="ja" altLang="en-US" sz="2533" b="1">
+                <a:latin typeface="Meiryo"/>
+                <a:ea typeface="Meiryo"/>
+                <a:cs typeface="Meiryo"/>
+                <a:sym typeface="Meiryo"/>
+              </a:rPr>
+              <a:t>段</a:t>
+            </a:r>
+            <a:r>
+              <a:rPr lang="en-US" altLang="ja" sz="2533" b="1">
+                <a:latin typeface="Meiryo"/>
+                <a:ea typeface="Meiryo"/>
+                <a:cs typeface="Meiryo"/>
+                <a:sym typeface="Meiryo"/>
+              </a:rPr>
+              <a:t>)</a:t>
+            </a:r>
+            <a:endParaRPr sz="2533" b="1">
+              <a:latin typeface="Meiryo"/>
+              <a:ea typeface="Meiryo"/>
+              <a:cs typeface="Meiryo"/>
+              <a:sym typeface="Meiryo"/>
             </a:endParaRPr>
           </a:p>
-        </p:txBody>
-      </p:sp>
-      <p:sp>
-        <p:nvSpPr>
-          <p:cNvPr id="17" name="テキスト ボックス 16">
-            <a:extLst>
-              <a:ext uri="{FF2B5EF4-FFF2-40B4-BE49-F238E27FC236}">
-                <a16:creationId xmlns:a16="http://schemas.microsoft.com/office/drawing/2014/main" id="{73316D00-345F-40AD-90DD-DCED1CCF886E}"/>
-              </a:ext>
-            </a:extLst>
-          </p:cNvPr>
-          <p:cNvSpPr txBox="1"/>
+          <a:p>
+            <a:r>
+              <a:rPr lang="ja" altLang="en-US" sz="2533" b="1">
+                <a:latin typeface="Meiryo"/>
+                <a:ea typeface="Meiryo"/>
+                <a:cs typeface="Meiryo"/>
+                <a:sym typeface="Meiryo"/>
+              </a:rPr>
+              <a:t>固定する理由</a:t>
+            </a:r>
+            <a:endParaRPr sz="2533" b="1">
+              <a:latin typeface="Meiryo"/>
+              <a:ea typeface="Meiryo"/>
+              <a:cs typeface="Meiryo"/>
+              <a:sym typeface="Meiryo"/>
+            </a:endParaRPr>
+          </a:p>
+          <a:p>
+            <a:endParaRPr sz="1333">
+              <a:latin typeface="Meiryo"/>
+              <a:ea typeface="Meiryo"/>
+              <a:cs typeface="Meiryo"/>
+              <a:sym typeface="Meiryo"/>
+            </a:endParaRPr>
+          </a:p>
+          <a:p>
+            <a:r>
+              <a:rPr lang="ja" altLang="en-US" sz="2000">
+                <a:latin typeface="Meiryo"/>
+                <a:ea typeface="Meiryo"/>
+                <a:cs typeface="Meiryo"/>
+                <a:sym typeface="Meiryo"/>
+              </a:rPr>
+              <a:t>配線構造はネットリストの形状をもとに作成</a:t>
+            </a:r>
+            <a:endParaRPr sz="2000">
+              <a:latin typeface="Meiryo"/>
+              <a:ea typeface="Meiryo"/>
+              <a:cs typeface="Meiryo"/>
+              <a:sym typeface="Meiryo"/>
+            </a:endParaRPr>
+          </a:p>
+          <a:p>
+            <a:endParaRPr sz="667">
+              <a:latin typeface="Meiryo"/>
+              <a:ea typeface="Meiryo"/>
+              <a:cs typeface="Meiryo"/>
+              <a:sym typeface="Meiryo"/>
+            </a:endParaRPr>
+          </a:p>
+          <a:p>
+            <a:r>
+              <a:rPr lang="ja" altLang="en-US" sz="2000">
+                <a:latin typeface="Meiryo"/>
+                <a:ea typeface="Meiryo"/>
+                <a:cs typeface="Meiryo"/>
+                <a:sym typeface="Meiryo"/>
+              </a:rPr>
+              <a:t>→行固定により，ネットリストの形状に合わせた配置配線を行いたい</a:t>
+            </a:r>
+            <a:endParaRPr sz="2000">
+              <a:latin typeface="Meiryo"/>
+              <a:ea typeface="Meiryo"/>
+              <a:cs typeface="Meiryo"/>
+              <a:sym typeface="Meiryo"/>
+            </a:endParaRPr>
+          </a:p>
+          <a:p>
+            <a:endParaRPr sz="800">
+              <a:latin typeface="Meiryo"/>
+              <a:ea typeface="Meiryo"/>
+              <a:cs typeface="Meiryo"/>
+              <a:sym typeface="Meiryo"/>
+            </a:endParaRPr>
+          </a:p>
+          <a:p>
+            <a:r>
+              <a:rPr lang="ja" altLang="en-US" sz="2000">
+                <a:latin typeface="Meiryo"/>
+                <a:ea typeface="Meiryo"/>
+                <a:cs typeface="Meiryo"/>
+                <a:sym typeface="Meiryo"/>
+              </a:rPr>
+              <a:t>⇔段数無視では，統計をとって設計した構造の意図を無視することになるため</a:t>
+            </a:r>
+            <a:endParaRPr sz="2000">
+              <a:latin typeface="Meiryo"/>
+              <a:ea typeface="Meiryo"/>
+              <a:cs typeface="Meiryo"/>
+              <a:sym typeface="Meiryo"/>
+            </a:endParaRPr>
+          </a:p>
+          <a:p>
+            <a:endParaRPr sz="2000">
+              <a:latin typeface="Meiryo"/>
+              <a:ea typeface="Meiryo"/>
+              <a:cs typeface="Meiryo"/>
+              <a:sym typeface="Meiryo"/>
+            </a:endParaRPr>
+          </a:p>
+          <a:p>
+            <a:r>
+              <a:rPr lang="ja" altLang="en-US" sz="2000">
+                <a:latin typeface="Meiryo"/>
+                <a:ea typeface="Meiryo"/>
+                <a:cs typeface="Meiryo"/>
+                <a:sym typeface="Meiryo"/>
+              </a:rPr>
+              <a:t>・計算量の軽量化</a:t>
+            </a:r>
+            <a:endParaRPr sz="2000">
+              <a:latin typeface="Meiryo"/>
+              <a:ea typeface="Meiryo"/>
+              <a:cs typeface="Meiryo"/>
+              <a:sym typeface="Meiryo"/>
+            </a:endParaRPr>
+          </a:p>
+          <a:p>
+            <a:endParaRPr sz="2000">
+              <a:latin typeface="Meiryo"/>
+              <a:ea typeface="Meiryo"/>
+              <a:cs typeface="Meiryo"/>
+              <a:sym typeface="Meiryo"/>
+            </a:endParaRPr>
+          </a:p>
+          <a:p>
+            <a:endParaRPr sz="2000">
+              <a:latin typeface="Meiryo"/>
+              <a:ea typeface="Meiryo"/>
+              <a:cs typeface="Meiryo"/>
+              <a:sym typeface="Meiryo"/>
+            </a:endParaRPr>
+          </a:p>
+        </p:txBody>
+      </p:sp>
+      <p:pic>
+        <p:nvPicPr>
+          <p:cNvPr id="272" name="Google Shape;272;p38"/>
+          <p:cNvPicPr preferRelativeResize="0"/>
           <p:nvPr/>
-        </p:nvSpPr>
-        <p:spPr>
-          <a:xfrm>
-            <a:off x="5613401" y="2503154"/>
-            <a:ext cx="6578599" cy="523220"/>
+        </p:nvPicPr>
+        <p:blipFill>
+          <a:blip r:embed="rId3">
+            <a:alphaModFix/>
+          </a:blip>
+          <a:stretch>
+            <a:fillRect/>
+          </a:stretch>
+        </p:blipFill>
+        <p:spPr>
+          <a:xfrm>
+            <a:off x="3061375" y="1544288"/>
+            <a:ext cx="2979711" cy="2540075"/>
           </a:xfrm>
           <a:prstGeom prst="rect">
             <a:avLst/>
           </a:prstGeom>
           <a:noFill/>
-        </p:spPr>
-        <p:txBody>
-          <a:bodyPr wrap="square" rtlCol="0">
-            <a:spAutoFit/>
-          </a:bodyPr>
-          <a:lstStyle/>
-          <a:p>
-            <a:r>
-              <a:rPr kumimoji="1" lang="en-US" altLang="ja-JP" sz="2800" dirty="0"/>
-              <a:t>k</a:t>
-            </a:r>
-            <a:r>
-              <a:rPr kumimoji="1" lang="ja-JP" altLang="en-US" sz="2800" dirty="0"/>
-              <a:t>番目のセルが持つべき接続数</a:t>
-            </a:r>
-            <a:r>
-              <a:rPr kumimoji="1" lang="en-US" altLang="ja-JP" sz="2800" dirty="0"/>
-              <a:t>A</a:t>
-            </a:r>
-            <a:r>
-              <a:rPr kumimoji="1" lang="en-US" altLang="ja-JP" sz="1800" dirty="0"/>
-              <a:t>k</a:t>
-            </a:r>
-            <a:endParaRPr kumimoji="1" lang="ja-JP" altLang="en-US" sz="2800" dirty="0"/>
-          </a:p>
-        </p:txBody>
-      </p:sp>
-      <p:sp>
-        <p:nvSpPr>
-          <p:cNvPr id="18" name="テキスト ボックス 17">
-            <a:extLst>
-              <a:ext uri="{FF2B5EF4-FFF2-40B4-BE49-F238E27FC236}">
-                <a16:creationId xmlns:a16="http://schemas.microsoft.com/office/drawing/2014/main" id="{AAE55B65-E9E0-425B-ACCC-3C9A2BA33E15}"/>
-              </a:ext>
-            </a:extLst>
-          </p:cNvPr>
-          <p:cNvSpPr txBox="1"/>
+          <a:ln>
+            <a:noFill/>
+          </a:ln>
+        </p:spPr>
+      </p:pic>
+      <p:pic>
+        <p:nvPicPr>
+          <p:cNvPr id="273" name="Google Shape;273;p38"/>
+          <p:cNvPicPr preferRelativeResize="0"/>
           <p:nvPr/>
-        </p:nvSpPr>
-        <p:spPr>
-          <a:xfrm>
-            <a:off x="6594022" y="2976976"/>
-            <a:ext cx="3948248" cy="523220"/>
+        </p:nvPicPr>
+        <p:blipFill>
+          <a:blip r:embed="rId4">
+            <a:alphaModFix/>
+          </a:blip>
+          <a:stretch>
+            <a:fillRect/>
+          </a:stretch>
+        </p:blipFill>
+        <p:spPr>
+          <a:xfrm>
+            <a:off x="0" y="1542600"/>
+            <a:ext cx="2250688" cy="2540051"/>
           </a:xfrm>
           <a:prstGeom prst="rect">
             <a:avLst/>
           </a:prstGeom>
           <a:noFill/>
-        </p:spPr>
-        <p:txBody>
-          <a:bodyPr wrap="square" rtlCol="0">
-            <a:spAutoFit/>
-          </a:bodyPr>
-          <a:lstStyle/>
-          <a:p>
-            <a:r>
-              <a:rPr kumimoji="1" lang="en-US" altLang="ja-JP" sz="2800" dirty="0"/>
-              <a:t>A</a:t>
-            </a:r>
-            <a:r>
-              <a:rPr kumimoji="1" lang="en-US" altLang="ja-JP" sz="2000" dirty="0"/>
-              <a:t>k</a:t>
-            </a:r>
-            <a:r>
-              <a:rPr kumimoji="1" lang="en-US" altLang="ja-JP" sz="2800" dirty="0"/>
-              <a:t> = min(N,[2N/k])</a:t>
-            </a:r>
-            <a:endParaRPr kumimoji="1" lang="ja-JP" altLang="en-US" sz="2800" dirty="0"/>
-          </a:p>
-        </p:txBody>
-      </p:sp>
-      <p:sp>
-        <p:nvSpPr>
-          <p:cNvPr id="19" name="テキスト ボックス 18">
-            <a:extLst>
-              <a:ext uri="{FF2B5EF4-FFF2-40B4-BE49-F238E27FC236}">
-                <a16:creationId xmlns:a16="http://schemas.microsoft.com/office/drawing/2014/main" id="{CE87C848-2483-48CC-B729-5159D0AE26CE}"/>
-              </a:ext>
-            </a:extLst>
-          </p:cNvPr>
+          <a:ln>
+            <a:noFill/>
+          </a:ln>
+        </p:spPr>
+      </p:pic>
+      <p:cxnSp>
+        <p:nvCxnSpPr>
+          <p:cNvPr id="274" name="Google Shape;274;p38"/>
+          <p:cNvCxnSpPr/>
+          <p:nvPr/>
+        </p:nvCxnSpPr>
+        <p:spPr>
+          <a:xfrm>
+            <a:off x="703425" y="2104100"/>
+            <a:ext cx="2954400" cy="0"/>
+          </a:xfrm>
+          <a:prstGeom prst="straightConnector1">
+            <a:avLst/>
+          </a:prstGeom>
+          <a:noFill/>
+          <a:ln w="21425" cap="flat" cmpd="sng">
+            <a:solidFill>
+              <a:srgbClr val="FF0000"/>
+            </a:solidFill>
+            <a:prstDash val="dash"/>
+            <a:round/>
+            <a:headEnd type="none" w="med" len="med"/>
+            <a:tailEnd type="none" w="med" len="med"/>
+          </a:ln>
+        </p:spPr>
+      </p:cxnSp>
+      <p:cxnSp>
+        <p:nvCxnSpPr>
+          <p:cNvPr id="275" name="Google Shape;275;p38"/>
+          <p:cNvCxnSpPr/>
+          <p:nvPr/>
+        </p:nvCxnSpPr>
+        <p:spPr>
+          <a:xfrm rot="10800000" flipH="1">
+            <a:off x="715725" y="1542800"/>
+            <a:ext cx="2930000" cy="12400"/>
+          </a:xfrm>
+          <a:prstGeom prst="straightConnector1">
+            <a:avLst/>
+          </a:prstGeom>
+          <a:noFill/>
+          <a:ln w="21425" cap="flat" cmpd="sng">
+            <a:solidFill>
+              <a:srgbClr val="FF0000"/>
+            </a:solidFill>
+            <a:prstDash val="dash"/>
+            <a:round/>
+            <a:headEnd type="none" w="med" len="med"/>
+            <a:tailEnd type="none" w="med" len="med"/>
+          </a:ln>
+        </p:spPr>
+      </p:cxnSp>
+      <p:cxnSp>
+        <p:nvCxnSpPr>
+          <p:cNvPr id="276" name="Google Shape;276;p38"/>
+          <p:cNvCxnSpPr/>
+          <p:nvPr/>
+        </p:nvCxnSpPr>
+        <p:spPr>
+          <a:xfrm>
+            <a:off x="304051" y="2564225"/>
+            <a:ext cx="2757200" cy="4400"/>
+          </a:xfrm>
+          <a:prstGeom prst="straightConnector1">
+            <a:avLst/>
+          </a:prstGeom>
+          <a:noFill/>
+          <a:ln w="21425" cap="flat" cmpd="sng">
+            <a:solidFill>
+              <a:srgbClr val="FF00FF"/>
+            </a:solidFill>
+            <a:prstDash val="lgDash"/>
+            <a:round/>
+            <a:headEnd type="none" w="med" len="med"/>
+            <a:tailEnd type="none" w="med" len="med"/>
+          </a:ln>
+        </p:spPr>
+      </p:cxnSp>
+      <p:cxnSp>
+        <p:nvCxnSpPr>
+          <p:cNvPr id="277" name="Google Shape;277;p38"/>
+          <p:cNvCxnSpPr/>
+          <p:nvPr/>
+        </p:nvCxnSpPr>
+        <p:spPr>
+          <a:xfrm rot="10800000" flipH="1">
+            <a:off x="260151" y="3096825"/>
+            <a:ext cx="2861200" cy="6400"/>
+          </a:xfrm>
+          <a:prstGeom prst="straightConnector1">
+            <a:avLst/>
+          </a:prstGeom>
+          <a:noFill/>
+          <a:ln w="21425" cap="flat" cmpd="sng">
+            <a:solidFill>
+              <a:srgbClr val="FF00FF"/>
+            </a:solidFill>
+            <a:prstDash val="lgDash"/>
+            <a:round/>
+            <a:headEnd type="none" w="med" len="med"/>
+            <a:tailEnd type="none" w="med" len="med"/>
+          </a:ln>
+        </p:spPr>
+      </p:cxnSp>
+      <p:cxnSp>
+        <p:nvCxnSpPr>
+          <p:cNvPr id="278" name="Google Shape;278;p38"/>
+          <p:cNvCxnSpPr/>
+          <p:nvPr/>
+        </p:nvCxnSpPr>
+        <p:spPr>
+          <a:xfrm>
+            <a:off x="682475" y="3543651"/>
+            <a:ext cx="2922800" cy="13600"/>
+          </a:xfrm>
+          <a:prstGeom prst="straightConnector1">
+            <a:avLst/>
+          </a:prstGeom>
+          <a:noFill/>
+          <a:ln w="21425" cap="flat" cmpd="sng">
+            <a:solidFill>
+              <a:srgbClr val="00FF00"/>
+            </a:solidFill>
+            <a:prstDash val="lgDash"/>
+            <a:round/>
+            <a:headEnd type="none" w="med" len="med"/>
+            <a:tailEnd type="none" w="med" len="med"/>
+          </a:ln>
+        </p:spPr>
+      </p:cxnSp>
+      <p:cxnSp>
+        <p:nvCxnSpPr>
+          <p:cNvPr id="279" name="Google Shape;279;p38"/>
+          <p:cNvCxnSpPr/>
+          <p:nvPr/>
+        </p:nvCxnSpPr>
+        <p:spPr>
+          <a:xfrm rot="10800000" flipH="1">
+            <a:off x="638575" y="4081851"/>
+            <a:ext cx="2926400" cy="800"/>
+          </a:xfrm>
+          <a:prstGeom prst="straightConnector1">
+            <a:avLst/>
+          </a:prstGeom>
+          <a:noFill/>
+          <a:ln w="21425" cap="flat" cmpd="sng">
+            <a:solidFill>
+              <a:srgbClr val="00FF00"/>
+            </a:solidFill>
+            <a:prstDash val="lgDash"/>
+            <a:round/>
+            <a:headEnd type="none" w="med" len="med"/>
+            <a:tailEnd type="none" w="med" len="med"/>
+          </a:ln>
+        </p:spPr>
+      </p:cxnSp>
+      <p:sp>
+        <p:nvSpPr>
+          <p:cNvPr id="280" name="Google Shape;280;p38"/>
           <p:cNvSpPr txBox="1"/>
           <p:nvPr/>
         </p:nvSpPr>
         <p:spPr>
           <a:xfrm>
-            <a:off x="6174014" y="1549844"/>
-            <a:ext cx="4490357" cy="954107"/>
+            <a:off x="260151" y="6089583"/>
+            <a:ext cx="4472000" cy="678000"/>
           </a:xfrm>
           <a:prstGeom prst="rect">
             <a:avLst/>
           </a:prstGeom>
           <a:noFill/>
-          <a:ln w="19050">
-            <a:solidFill>
-              <a:schemeClr val="tx1"/>
-            </a:solidFill>
-            <a:prstDash val="dash"/>
+          <a:ln>
+            <a:noFill/>
           </a:ln>
         </p:spPr>
         <p:txBody>
-          <a:bodyPr wrap="square" rtlCol="0">
-            <a:spAutoFit/>
+          <a:bodyPr spcFirstLastPara="1" wrap="square" lIns="91433" tIns="91433" rIns="91433" bIns="91433" anchor="t" anchorCtr="0">
+            <a:noAutofit/>
           </a:bodyPr>
           <a:lstStyle/>
           <a:p>
             <a:r>
-              <a:rPr kumimoji="1" lang="en-US" altLang="ja-JP" sz="2800" dirty="0"/>
-              <a:t>N:</a:t>
-            </a:r>
-            <a:r>
-              <a:rPr kumimoji="1" lang="ja-JP" altLang="en-US" sz="2800" dirty="0"/>
-              <a:t>下のノード数</a:t>
-            </a:r>
-            <a:endParaRPr kumimoji="1" lang="en-US" altLang="ja-JP" sz="2800" dirty="0"/>
-          </a:p>
-          <a:p>
-            <a:r>
-              <a:rPr kumimoji="1" lang="en-US" altLang="ja-JP" sz="2800" dirty="0"/>
-              <a:t>k:</a:t>
-            </a:r>
-            <a:r>
-              <a:rPr kumimoji="1" lang="ja-JP" altLang="en-US" sz="2800" dirty="0"/>
-              <a:t>上のセルのインデックス</a:t>
-            </a:r>
-          </a:p>
-        </p:txBody>
-      </p:sp>
-      <p:cxnSp>
-        <p:nvCxnSpPr>
-          <p:cNvPr id="20" name="直線コネクタ 19">
-            <a:extLst>
-              <a:ext uri="{FF2B5EF4-FFF2-40B4-BE49-F238E27FC236}">
-                <a16:creationId xmlns:a16="http://schemas.microsoft.com/office/drawing/2014/main" id="{DADB52B6-59F2-48DD-B2D0-AD8C32E4A7D3}"/>
-              </a:ext>
-            </a:extLst>
-          </p:cNvPr>
-          <p:cNvCxnSpPr>
-            <a:cxnSpLocks/>
-          </p:cNvCxnSpPr>
-          <p:nvPr/>
-        </p:nvCxnSpPr>
-        <p:spPr>
-          <a:xfrm>
-            <a:off x="4593771" y="1052286"/>
-            <a:ext cx="0" cy="4761918"/>
-          </a:xfrm>
-          <a:prstGeom prst="line">
-            <a:avLst/>
-          </a:prstGeom>
-        </p:spPr>
-        <p:style>
-          <a:lnRef idx="1">
-            <a:schemeClr val="accent1"/>
-          </a:lnRef>
-          <a:fillRef idx="0">
-            <a:schemeClr val="accent1"/>
-          </a:fillRef>
-          <a:effectRef idx="0">
-            <a:schemeClr val="accent1"/>
-          </a:effectRef>
-          <a:fontRef idx="minor">
-            <a:schemeClr val="tx1"/>
-          </a:fontRef>
-        </p:style>
-      </p:cxnSp>
-      <p:cxnSp>
-        <p:nvCxnSpPr>
-          <p:cNvPr id="21" name="直線コネクタ 20">
-            <a:extLst>
-              <a:ext uri="{FF2B5EF4-FFF2-40B4-BE49-F238E27FC236}">
-                <a16:creationId xmlns:a16="http://schemas.microsoft.com/office/drawing/2014/main" id="{7C43B52B-803F-44B8-BECD-65856187070A}"/>
-              </a:ext>
-            </a:extLst>
-          </p:cNvPr>
-          <p:cNvCxnSpPr>
-            <a:cxnSpLocks/>
-          </p:cNvCxnSpPr>
-          <p:nvPr/>
-        </p:nvCxnSpPr>
-        <p:spPr>
-          <a:xfrm flipH="1">
-            <a:off x="4593771" y="3500196"/>
-            <a:ext cx="7503885" cy="0"/>
-          </a:xfrm>
-          <a:prstGeom prst="line">
-            <a:avLst/>
-          </a:prstGeom>
-        </p:spPr>
-        <p:style>
-          <a:lnRef idx="1">
-            <a:schemeClr val="accent1"/>
-          </a:lnRef>
-          <a:fillRef idx="0">
-            <a:schemeClr val="accent1"/>
-          </a:fillRef>
-          <a:effectRef idx="0">
-            <a:schemeClr val="accent1"/>
-          </a:effectRef>
-          <a:fontRef idx="minor">
-            <a:schemeClr val="tx1"/>
-          </a:fontRef>
-        </p:style>
-      </p:cxnSp>
-      <p:sp>
-        <p:nvSpPr>
-          <p:cNvPr id="22" name="テキスト ボックス 21">
-            <a:extLst>
-              <a:ext uri="{FF2B5EF4-FFF2-40B4-BE49-F238E27FC236}">
-                <a16:creationId xmlns:a16="http://schemas.microsoft.com/office/drawing/2014/main" id="{4F965C52-DD44-42A3-ABE1-EA4A2F19994E}"/>
-              </a:ext>
-            </a:extLst>
-          </p:cNvPr>
-          <p:cNvSpPr txBox="1"/>
-          <p:nvPr/>
-        </p:nvSpPr>
-        <p:spPr>
-          <a:xfrm>
-            <a:off x="7147379" y="1047628"/>
-            <a:ext cx="2086428" cy="523220"/>
-          </a:xfrm>
-          <a:prstGeom prst="rect">
-            <a:avLst/>
-          </a:prstGeom>
-          <a:noFill/>
-        </p:spPr>
-        <p:txBody>
-          <a:bodyPr wrap="square" rtlCol="0">
-            <a:spAutoFit/>
-          </a:bodyPr>
-          <a:lstStyle/>
-          <a:p>
-            <a:r>
-              <a:rPr kumimoji="1" lang="en-US" altLang="ja-JP" sz="2800" dirty="0"/>
-              <a:t>&lt;</a:t>
-            </a:r>
-            <a:r>
-              <a:rPr kumimoji="1" lang="ja-JP" altLang="en-US" sz="2800" dirty="0"/>
-              <a:t>接続本数</a:t>
-            </a:r>
-            <a:r>
-              <a:rPr kumimoji="1" lang="en-US" altLang="ja-JP" sz="2800" dirty="0"/>
-              <a:t>&gt;</a:t>
-            </a:r>
-            <a:endParaRPr kumimoji="1" lang="ja-JP" altLang="en-US" sz="2800" dirty="0"/>
-          </a:p>
-        </p:txBody>
-      </p:sp>
-      <p:sp>
-        <p:nvSpPr>
-          <p:cNvPr id="23" name="テキスト ボックス 22">
-            <a:extLst>
-              <a:ext uri="{FF2B5EF4-FFF2-40B4-BE49-F238E27FC236}">
-                <a16:creationId xmlns:a16="http://schemas.microsoft.com/office/drawing/2014/main" id="{FAECDEED-0D51-48A8-96E5-5C304EC2530D}"/>
-              </a:ext>
-            </a:extLst>
-          </p:cNvPr>
-          <p:cNvSpPr txBox="1"/>
-          <p:nvPr/>
-        </p:nvSpPr>
-        <p:spPr>
-          <a:xfrm>
-            <a:off x="7213599" y="3805011"/>
-            <a:ext cx="2471083" cy="523220"/>
-          </a:xfrm>
-          <a:prstGeom prst="rect">
-            <a:avLst/>
-          </a:prstGeom>
-          <a:noFill/>
-        </p:spPr>
-        <p:txBody>
-          <a:bodyPr wrap="square" rtlCol="0">
-            <a:spAutoFit/>
-          </a:bodyPr>
-          <a:lstStyle/>
-          <a:p>
-            <a:r>
-              <a:rPr kumimoji="1" lang="en-US" altLang="ja-JP" sz="2800" dirty="0"/>
-              <a:t>&lt;</a:t>
-            </a:r>
-            <a:r>
-              <a:rPr kumimoji="1" lang="ja-JP" altLang="en-US" sz="2800" dirty="0"/>
-              <a:t>接続方法</a:t>
-            </a:r>
-            <a:r>
-              <a:rPr kumimoji="1" lang="en-US" altLang="ja-JP" sz="2800" dirty="0"/>
-              <a:t>&gt;</a:t>
-            </a:r>
-            <a:endParaRPr kumimoji="1" lang="ja-JP" altLang="en-US" sz="2800" dirty="0"/>
-          </a:p>
-        </p:txBody>
-      </p:sp>
-      <p:sp>
-        <p:nvSpPr>
-          <p:cNvPr id="24" name="テキスト ボックス 23">
-            <a:extLst>
-              <a:ext uri="{FF2B5EF4-FFF2-40B4-BE49-F238E27FC236}">
-                <a16:creationId xmlns:a16="http://schemas.microsoft.com/office/drawing/2014/main" id="{DD6710E3-0E25-4B96-9A82-BE1D328ED2CD}"/>
-              </a:ext>
-            </a:extLst>
-          </p:cNvPr>
-          <p:cNvSpPr txBox="1"/>
-          <p:nvPr/>
-        </p:nvSpPr>
-        <p:spPr>
-          <a:xfrm>
-            <a:off x="6528709" y="4215065"/>
-            <a:ext cx="4135652" cy="523220"/>
-          </a:xfrm>
-          <a:prstGeom prst="rect">
-            <a:avLst/>
-          </a:prstGeom>
-          <a:noFill/>
-        </p:spPr>
-        <p:txBody>
-          <a:bodyPr wrap="square" rtlCol="0">
-            <a:spAutoFit/>
-          </a:bodyPr>
-          <a:lstStyle/>
-          <a:p>
-            <a:r>
-              <a:rPr kumimoji="1" lang="ja-JP" altLang="en-US" sz="2800" dirty="0"/>
-              <a:t>ラウンドロビン配置</a:t>
-            </a:r>
-          </a:p>
-        </p:txBody>
-      </p:sp>
-      <p:sp>
-        <p:nvSpPr>
-          <p:cNvPr id="25" name="テキスト ボックス 24">
-            <a:extLst>
-              <a:ext uri="{FF2B5EF4-FFF2-40B4-BE49-F238E27FC236}">
-                <a16:creationId xmlns:a16="http://schemas.microsoft.com/office/drawing/2014/main" id="{1ACB7206-E957-48ED-BF44-A490E3B876CF}"/>
-              </a:ext>
-            </a:extLst>
-          </p:cNvPr>
-          <p:cNvSpPr txBox="1"/>
-          <p:nvPr/>
-        </p:nvSpPr>
-        <p:spPr>
-          <a:xfrm>
-            <a:off x="5493204" y="4738285"/>
-            <a:ext cx="6222091" cy="954107"/>
-          </a:xfrm>
-          <a:prstGeom prst="rect">
-            <a:avLst/>
-          </a:prstGeom>
-          <a:noFill/>
-        </p:spPr>
-        <p:txBody>
-          <a:bodyPr wrap="square" rtlCol="0">
-            <a:spAutoFit/>
-          </a:bodyPr>
-          <a:lstStyle/>
-          <a:p>
-            <a:r>
-              <a:rPr kumimoji="1" lang="ja-JP" altLang="en-US" sz="2800" dirty="0"/>
-              <a:t>〇直前の接続の右隣ノードから配線</a:t>
-            </a:r>
-            <a:endParaRPr kumimoji="1" lang="en-US" altLang="ja-JP" sz="2800" dirty="0"/>
-          </a:p>
-          <a:p>
-            <a:r>
-              <a:rPr kumimoji="1" lang="ja-JP" altLang="en-US" sz="2800" dirty="0"/>
-              <a:t>〇右端まで行ったら左端に折り返す</a:t>
-            </a:r>
-          </a:p>
-        </p:txBody>
-      </p:sp>
-      <p:cxnSp>
-        <p:nvCxnSpPr>
-          <p:cNvPr id="26" name="直線コネクタ 25">
-            <a:extLst>
-              <a:ext uri="{FF2B5EF4-FFF2-40B4-BE49-F238E27FC236}">
-                <a16:creationId xmlns:a16="http://schemas.microsoft.com/office/drawing/2014/main" id="{2C444091-B08D-4AC0-A804-661ED5D5B735}"/>
-              </a:ext>
-            </a:extLst>
-          </p:cNvPr>
-          <p:cNvCxnSpPr>
-            <a:cxnSpLocks/>
-          </p:cNvCxnSpPr>
-          <p:nvPr/>
-        </p:nvCxnSpPr>
-        <p:spPr>
-          <a:xfrm flipH="1">
-            <a:off x="2" y="5814204"/>
-            <a:ext cx="12191998" cy="1"/>
-          </a:xfrm>
-          <a:prstGeom prst="line">
-            <a:avLst/>
-          </a:prstGeom>
-        </p:spPr>
-        <p:style>
-          <a:lnRef idx="1">
-            <a:schemeClr val="accent1"/>
-          </a:lnRef>
-          <a:fillRef idx="0">
-            <a:schemeClr val="accent1"/>
-          </a:fillRef>
-          <a:effectRef idx="0">
-            <a:schemeClr val="accent1"/>
-          </a:effectRef>
-          <a:fontRef idx="minor">
-            <a:schemeClr val="tx1"/>
-          </a:fontRef>
-        </p:style>
-      </p:cxnSp>
-      <p:sp>
-        <p:nvSpPr>
-          <p:cNvPr id="27" name="テキスト ボックス 26">
-            <a:extLst>
-              <a:ext uri="{FF2B5EF4-FFF2-40B4-BE49-F238E27FC236}">
-                <a16:creationId xmlns:a16="http://schemas.microsoft.com/office/drawing/2014/main" id="{ABA0A511-77D5-4FDE-B821-FAD50C2C9086}"/>
-              </a:ext>
-            </a:extLst>
-          </p:cNvPr>
-          <p:cNvSpPr txBox="1"/>
-          <p:nvPr/>
-        </p:nvSpPr>
-        <p:spPr>
-          <a:xfrm>
-            <a:off x="94344" y="6295952"/>
-            <a:ext cx="12028645" cy="523220"/>
-          </a:xfrm>
-          <a:prstGeom prst="rect">
-            <a:avLst/>
-          </a:prstGeom>
-          <a:noFill/>
-        </p:spPr>
-        <p:txBody>
-          <a:bodyPr wrap="square" rtlCol="0">
-            <a:spAutoFit/>
-          </a:bodyPr>
-          <a:lstStyle/>
-          <a:p>
-            <a:pPr algn="l"/>
-            <a:r>
-              <a:rPr kumimoji="1" lang="ja-JP" altLang="en-US" sz="2800" dirty="0">
-                <a:latin typeface="メイリオ" panose="020B0604030504040204" pitchFamily="50" charset="-128"/>
-                <a:ea typeface="メイリオ" panose="020B0604030504040204" pitchFamily="50" charset="-128"/>
+              <a:rPr lang="ja" altLang="en-US" sz="2400" b="1" dirty="0">
+                <a:solidFill>
+                  <a:schemeClr val="dk1"/>
+                </a:solidFill>
+                <a:latin typeface="Meiryo"/>
+                <a:ea typeface="Meiryo"/>
+                <a:cs typeface="Meiryo"/>
+                <a:sym typeface="Meiryo"/>
               </a:rPr>
-              <a:t>対象</a:t>
-            </a:r>
-            <a:r>
-              <a:rPr kumimoji="1" lang="en-US" altLang="ja-JP" sz="2800" dirty="0">
-                <a:latin typeface="メイリオ" panose="020B0604030504040204" pitchFamily="50" charset="-128"/>
-                <a:ea typeface="メイリオ" panose="020B0604030504040204" pitchFamily="50" charset="-128"/>
+              <a:t>深さの定義 </a:t>
+            </a:r>
+            <a:r>
+              <a:rPr lang="en-US" altLang="ja" sz="2400" dirty="0">
+                <a:solidFill>
+                  <a:schemeClr val="dk1"/>
+                </a:solidFill>
+                <a:latin typeface="Meiryo"/>
+                <a:ea typeface="Meiryo"/>
+                <a:cs typeface="Meiryo"/>
+                <a:sym typeface="Meiryo"/>
               </a:rPr>
-              <a:t>PA</a:t>
-            </a:r>
-            <a:r>
-              <a:rPr kumimoji="1" lang="ja-JP" altLang="en-US" sz="2800" dirty="0">
-                <a:latin typeface="メイリオ" panose="020B0604030504040204" pitchFamily="50" charset="-128"/>
-                <a:ea typeface="メイリオ" panose="020B0604030504040204" pitchFamily="50" charset="-128"/>
+              <a:t>-</a:t>
+            </a:r>
+            <a:r>
+              <a:rPr lang="ja" altLang="en-US" sz="2000" dirty="0">
+                <a:solidFill>
+                  <a:schemeClr val="dk1"/>
+                </a:solidFill>
+                <a:latin typeface="Meiryo"/>
+                <a:ea typeface="Meiryo"/>
+                <a:cs typeface="Meiryo"/>
+                <a:sym typeface="Meiryo"/>
               </a:rPr>
-              <a:t>の接続を必ず保証できる点</a:t>
-            </a:r>
-          </a:p>
-        </p:txBody>
-      </p:sp>
-      <p:sp>
-        <p:nvSpPr>
-          <p:cNvPr id="28" name="テキスト ボックス 27">
-            <a:extLst>
-              <a:ext uri="{FF2B5EF4-FFF2-40B4-BE49-F238E27FC236}">
-                <a16:creationId xmlns:a16="http://schemas.microsoft.com/office/drawing/2014/main" id="{538244E8-0FDF-488D-86BF-2CFA196EB9B1}"/>
-              </a:ext>
-            </a:extLst>
-          </p:cNvPr>
-          <p:cNvSpPr txBox="1"/>
-          <p:nvPr/>
-        </p:nvSpPr>
-        <p:spPr>
-          <a:xfrm>
-            <a:off x="69011" y="5850249"/>
-            <a:ext cx="12028645" cy="523220"/>
-          </a:xfrm>
-          <a:prstGeom prst="rect">
-            <a:avLst/>
-          </a:prstGeom>
-          <a:noFill/>
-        </p:spPr>
-        <p:txBody>
-          <a:bodyPr wrap="square" rtlCol="0">
-            <a:spAutoFit/>
-          </a:bodyPr>
-          <a:lstStyle/>
-          <a:p>
-            <a:pPr algn="l"/>
-            <a:r>
-              <a:rPr kumimoji="1" lang="ja-JP" altLang="en-US" sz="2800" b="1" dirty="0">
-                <a:latin typeface="メイリオ" panose="020B0604030504040204" pitchFamily="50" charset="-128"/>
-                <a:ea typeface="メイリオ" panose="020B0604030504040204" pitchFamily="50" charset="-128"/>
+              <a:t>最長の</a:t>
+            </a:r>
+            <a:r>
+              <a:rPr lang="en-US" altLang="ja" sz="2000" dirty="0">
+                <a:solidFill>
+                  <a:schemeClr val="dk1"/>
+                </a:solidFill>
+                <a:latin typeface="Meiryo"/>
+                <a:ea typeface="Meiryo"/>
+                <a:cs typeface="Meiryo"/>
+                <a:sym typeface="Meiryo"/>
               </a:rPr>
-              <a:t>被覆構造の価値</a:t>
-            </a:r>
-          </a:p>
-        </p:txBody>
-      </p:sp>
-      <p:sp>
-        <p:nvSpPr>
-          <p:cNvPr id="29" name="スライド番号プレースホルダー 27">
-            <a:extLst>
-              <a:ext uri="{FF2B5EF4-FFF2-40B4-BE49-F238E27FC236}">
-                <a16:creationId xmlns:a16="http://schemas.microsoft.com/office/drawing/2014/main" id="{C655DDB4-1153-4992-99DB-DB6A3B1B0E3D}"/>
-              </a:ext>
-            </a:extLst>
-          </p:cNvPr>
-          <p:cNvSpPr>
-            <a:spLocks noGrp="1"/>
-          </p:cNvSpPr>
-          <p:nvPr>
-            <p:ph type="sldNum" idx="12"/>
-          </p:nvPr>
-        </p:nvSpPr>
-        <p:spPr>
-          <a:xfrm>
-            <a:off x="9185910" y="6346276"/>
-            <a:ext cx="2743200" cy="365125"/>
-          </a:xfrm>
-        </p:spPr>
-        <p:txBody>
-          <a:bodyPr/>
-          <a:lstStyle/>
-          <a:p>
-            <a:fld id="{00000000-1234-1234-1234-123412341234}" type="slidenum">
-              <a:rPr lang="en-US" altLang="ja-JP" smtClean="0"/>
-              <a:pPr/>
-              <a:t>8</a:t>
-            </a:fld>
-            <a:endParaRPr lang="ja-JP" altLang="en-US" dirty="0"/>
-          </a:p>
-        </p:txBody>
-      </p:sp>
-      <p:sp>
-        <p:nvSpPr>
-          <p:cNvPr id="30" name="吹き出し: 角を丸めた四角形 29">
-            <a:extLst>
-              <a:ext uri="{FF2B5EF4-FFF2-40B4-BE49-F238E27FC236}">
-                <a16:creationId xmlns:a16="http://schemas.microsoft.com/office/drawing/2014/main" id="{6B73A2CA-65E9-4018-996F-867D227BBD41}"/>
-              </a:ext>
-            </a:extLst>
-          </p:cNvPr>
-          <p:cNvSpPr/>
-          <p:nvPr/>
-        </p:nvSpPr>
-        <p:spPr>
-          <a:xfrm>
-            <a:off x="10542270" y="834976"/>
-            <a:ext cx="1555386" cy="1546366"/>
-          </a:xfrm>
-          <a:prstGeom prst="wedgeRoundRectCallout">
-            <a:avLst>
-              <a:gd name="adj1" fmla="val -30956"/>
-              <a:gd name="adj2" fmla="val 62496"/>
-              <a:gd name="adj3" fmla="val 16667"/>
-            </a:avLst>
-          </a:prstGeom>
-          <a:noFill/>
-        </p:spPr>
-        <p:style>
-          <a:lnRef idx="2">
-            <a:schemeClr val="accent1">
-              <a:shade val="50000"/>
-            </a:schemeClr>
-          </a:lnRef>
-          <a:fillRef idx="1">
-            <a:schemeClr val="accent1"/>
-          </a:fillRef>
-          <a:effectRef idx="0">
-            <a:schemeClr val="accent1"/>
-          </a:effectRef>
-          <a:fontRef idx="minor">
-            <a:schemeClr val="lt1"/>
-          </a:fontRef>
-        </p:style>
-        <p:txBody>
-          <a:bodyPr rtlCol="0" anchor="ctr"/>
-          <a:lstStyle/>
-          <a:p>
-            <a:pPr algn="ctr"/>
-            <a:r>
-              <a:rPr kumimoji="1" lang="ja-JP" altLang="en-US" dirty="0">
+              <a:t>FF</a:t>
+            </a:r>
+            <a:r>
+              <a:rPr lang="ja" altLang="en-US" sz="2000" dirty="0">
                 <a:solidFill>
-                  <a:schemeClr val="tx1"/>
+                  <a:schemeClr val="dk1"/>
                 </a:solidFill>
+                <a:latin typeface="Meiryo"/>
+                <a:ea typeface="Meiryo"/>
+                <a:cs typeface="Meiryo"/>
+                <a:sym typeface="Meiryo"/>
               </a:rPr>
-              <a:t>出力側の本数</a:t>
-            </a:r>
-            <a:endParaRPr kumimoji="1" lang="en-US" altLang="ja-JP" dirty="0">
+              <a:t>距離</a:t>
+            </a:r>
+            <a:endParaRPr sz="2000" dirty="0">
               <a:solidFill>
-                <a:schemeClr val="tx1"/>
+                <a:schemeClr val="dk1"/>
               </a:solidFill>
+              <a:latin typeface="Meiryo"/>
+              <a:ea typeface="Meiryo"/>
+              <a:cs typeface="Meiryo"/>
+              <a:sym typeface="Meiryo"/>
             </a:endParaRPr>
           </a:p>
-          <a:p>
-            <a:pPr algn="ctr"/>
-            <a:r>
-              <a:rPr lang="ja-JP" altLang="en-US" dirty="0">
-                <a:solidFill>
-                  <a:schemeClr val="tx1"/>
-                </a:solidFill>
-              </a:rPr>
-              <a:t>≒</a:t>
-            </a:r>
-            <a:r>
-              <a:rPr lang="en-US" altLang="ja-JP" dirty="0">
-                <a:solidFill>
-                  <a:schemeClr val="tx1"/>
-                </a:solidFill>
-              </a:rPr>
-              <a:t>mux</a:t>
-            </a:r>
-            <a:r>
-              <a:rPr lang="ja-JP" altLang="en-US" dirty="0">
-                <a:solidFill>
-                  <a:schemeClr val="tx1"/>
-                </a:solidFill>
-              </a:rPr>
-              <a:t>の式</a:t>
-            </a:r>
-            <a:endParaRPr kumimoji="1" lang="ja-JP" altLang="en-US" dirty="0">
-              <a:solidFill>
-                <a:schemeClr val="tx1"/>
-              </a:solidFill>
-            </a:endParaRPr>
-          </a:p>
         </p:txBody>
       </p:sp>
     </p:spTree>
-    <p:extLst>
-      <p:ext uri="{BB962C8B-B14F-4D97-AF65-F5344CB8AC3E}">
-        <p14:creationId xmlns:p14="http://schemas.microsoft.com/office/powerpoint/2010/main" val="1746175547"/>
-      </p:ext>
-    </p:extLst>
   </p:cSld>
   <p:clrMapOvr>
     <a:masterClrMapping/>
@@ -13699,114 +15008,10 @@
       </p:grpSpPr>
       <p:sp>
         <p:nvSpPr>
-          <p:cNvPr id="15" name="正方形/長方形 14">
-            <a:extLst>
-              <a:ext uri="{FF2B5EF4-FFF2-40B4-BE49-F238E27FC236}">
-                <a16:creationId xmlns:a16="http://schemas.microsoft.com/office/drawing/2014/main" id="{6C1EFA3E-F928-4237-A749-0248C0F02996}"/>
-              </a:ext>
-            </a:extLst>
-          </p:cNvPr>
-          <p:cNvSpPr/>
-          <p:nvPr/>
-        </p:nvSpPr>
-        <p:spPr>
-          <a:xfrm>
-            <a:off x="211371" y="3411770"/>
-            <a:ext cx="6173525" cy="1296589"/>
-          </a:xfrm>
-          <a:prstGeom prst="rect">
-            <a:avLst/>
-          </a:prstGeom>
-          <a:solidFill>
-            <a:schemeClr val="accent4">
-              <a:lumMod val="20000"/>
-              <a:lumOff val="80000"/>
-            </a:schemeClr>
-          </a:solidFill>
-        </p:spPr>
-        <p:style>
-          <a:lnRef idx="2">
-            <a:schemeClr val="accent1">
-              <a:shade val="50000"/>
-            </a:schemeClr>
-          </a:lnRef>
-          <a:fillRef idx="1">
-            <a:schemeClr val="accent1"/>
-          </a:fillRef>
-          <a:effectRef idx="0">
-            <a:schemeClr val="accent1"/>
-          </a:effectRef>
-          <a:fontRef idx="minor">
-            <a:schemeClr val="lt1"/>
-          </a:fontRef>
-        </p:style>
-        <p:txBody>
-          <a:bodyPr rtlCol="0" anchor="ctr"/>
-          <a:lstStyle/>
-          <a:p>
-            <a:pPr algn="ctr"/>
-            <a:endParaRPr kumimoji="1" lang="ja-JP" altLang="en-US"/>
-          </a:p>
-        </p:txBody>
-      </p:sp>
-      <p:sp>
-        <p:nvSpPr>
-          <p:cNvPr id="14" name="正方形/長方形 13">
-            <a:extLst>
-              <a:ext uri="{FF2B5EF4-FFF2-40B4-BE49-F238E27FC236}">
-                <a16:creationId xmlns:a16="http://schemas.microsoft.com/office/drawing/2014/main" id="{7401D58F-7C9A-4F53-9291-7EAB451D6506}"/>
-              </a:ext>
-            </a:extLst>
-          </p:cNvPr>
-          <p:cNvSpPr/>
-          <p:nvPr/>
-        </p:nvSpPr>
-        <p:spPr>
-          <a:xfrm>
-            <a:off x="1168843" y="2036997"/>
-            <a:ext cx="4158532" cy="1392003"/>
-          </a:xfrm>
-          <a:prstGeom prst="rect">
-            <a:avLst/>
-          </a:prstGeom>
-          <a:solidFill>
-            <a:schemeClr val="accent1">
-              <a:lumMod val="20000"/>
-              <a:lumOff val="80000"/>
-            </a:schemeClr>
-          </a:solidFill>
-        </p:spPr>
-        <p:style>
-          <a:lnRef idx="2">
-            <a:schemeClr val="accent1">
-              <a:shade val="50000"/>
-            </a:schemeClr>
-          </a:lnRef>
-          <a:fillRef idx="1">
-            <a:schemeClr val="accent1"/>
-          </a:fillRef>
-          <a:effectRef idx="0">
-            <a:schemeClr val="accent1"/>
-          </a:effectRef>
-          <a:fontRef idx="minor">
-            <a:schemeClr val="lt1"/>
-          </a:fontRef>
-        </p:style>
-        <p:txBody>
-          <a:bodyPr rtlCol="0" anchor="ctr"/>
-          <a:lstStyle/>
-          <a:p>
-            <a:pPr algn="ctr"/>
-            <a:endParaRPr kumimoji="1" lang="ja-JP" altLang="en-US"/>
-          </a:p>
-        </p:txBody>
-      </p:sp>
-      <p:sp>
-        <p:nvSpPr>
           <p:cNvPr id="2" name="タイトル 1">
             <a:extLst>
               <a:ext uri="{FF2B5EF4-FFF2-40B4-BE49-F238E27FC236}">
-                <a16:creationId xmlns:a16="http://schemas.microsoft.com/office/drawing/2014/main" id="{FE0E71D8-EB1A-4D94-BAE4-93F0FB20C672}"/>
+                <a16:creationId xmlns:a16="http://schemas.microsoft.com/office/drawing/2014/main" id="{41C70D69-89E9-4063-977A-943456949739}"/>
               </a:ext>
             </a:extLst>
           </p:cNvPr>
@@ -13823,22 +15028,18 @@
           <a:lstStyle/>
           <a:p>
             <a:r>
-              <a:rPr kumimoji="1" lang="en-US" altLang="ja-JP" dirty="0" err="1"/>
-              <a:t>SoPA</a:t>
-            </a:r>
-            <a:r>
               <a:rPr kumimoji="1" lang="ja-JP" altLang="en-US" dirty="0"/>
-              <a:t>のアイデア</a:t>
-            </a:r>
-          </a:p>
-        </p:txBody>
-      </p:sp>
-      <p:sp>
-        <p:nvSpPr>
-          <p:cNvPr id="3" name="コンテンツ プレースホルダー 2">
-            <a:extLst>
-              <a:ext uri="{FF2B5EF4-FFF2-40B4-BE49-F238E27FC236}">
-                <a16:creationId xmlns:a16="http://schemas.microsoft.com/office/drawing/2014/main" id="{FB16959A-FEED-49BC-875B-5A71F087A2AE}"/>
+              <a:t>構造</a:t>
+            </a:r>
+          </a:p>
+        </p:txBody>
+      </p:sp>
+      <p:sp>
+        <p:nvSpPr>
+          <p:cNvPr id="3" name="テキスト プレースホルダー 2">
+            <a:extLst>
+              <a:ext uri="{FF2B5EF4-FFF2-40B4-BE49-F238E27FC236}">
+                <a16:creationId xmlns:a16="http://schemas.microsoft.com/office/drawing/2014/main" id="{5583F86D-0630-48A7-82BC-5F49E5B34F5E}"/>
               </a:ext>
             </a:extLst>
           </p:cNvPr>
@@ -13846,1218 +15047,22 @@
             <a:spLocks noGrp="1"/>
           </p:cNvSpPr>
           <p:nvPr>
-            <p:ph idx="1"/>
+            <p:ph type="body" idx="1"/>
           </p:nvPr>
         </p:nvSpPr>
-        <p:spPr>
-          <a:xfrm>
-            <a:off x="144780" y="1155065"/>
-            <a:ext cx="11849100" cy="626028"/>
-          </a:xfrm>
-        </p:spPr>
+        <p:spPr/>
         <p:txBody>
           <a:bodyPr/>
           <a:lstStyle/>
           <a:p>
-            <a:pPr marL="0" indent="0">
-              <a:buNone/>
-            </a:pPr>
-            <a:r>
-              <a:rPr lang="ja-JP" altLang="en-US" dirty="0"/>
-              <a:t>被覆構造を上下で重ねていく</a:t>
-            </a:r>
-            <a:endParaRPr kumimoji="1" lang="ja-JP" altLang="en-US" dirty="0"/>
-          </a:p>
-        </p:txBody>
-      </p:sp>
-      <p:sp>
-        <p:nvSpPr>
-          <p:cNvPr id="4" name="正方形/長方形 3">
-            <a:extLst>
-              <a:ext uri="{FF2B5EF4-FFF2-40B4-BE49-F238E27FC236}">
-                <a16:creationId xmlns:a16="http://schemas.microsoft.com/office/drawing/2014/main" id="{34A150F9-583E-4E28-94AB-32FBE5F27BA4}"/>
-              </a:ext>
-            </a:extLst>
-          </p:cNvPr>
-          <p:cNvSpPr/>
-          <p:nvPr/>
-        </p:nvSpPr>
-        <p:spPr>
-          <a:xfrm>
-            <a:off x="2305878" y="1876507"/>
-            <a:ext cx="556592" cy="524786"/>
-          </a:xfrm>
-          <a:prstGeom prst="rect">
-            <a:avLst/>
-          </a:prstGeom>
-          <a:solidFill>
-            <a:schemeClr val="bg1"/>
-          </a:solidFill>
-        </p:spPr>
-        <p:style>
-          <a:lnRef idx="2">
-            <a:schemeClr val="accent1">
-              <a:shade val="50000"/>
-            </a:schemeClr>
-          </a:lnRef>
-          <a:fillRef idx="1">
-            <a:schemeClr val="accent1"/>
-          </a:fillRef>
-          <a:effectRef idx="0">
-            <a:schemeClr val="accent1"/>
-          </a:effectRef>
-          <a:fontRef idx="minor">
-            <a:schemeClr val="lt1"/>
-          </a:fontRef>
-        </p:style>
-        <p:txBody>
-          <a:bodyPr rtlCol="0" anchor="ctr"/>
-          <a:lstStyle/>
-          <a:p>
-            <a:pPr algn="ctr"/>
             <a:endParaRPr kumimoji="1" lang="ja-JP" altLang="en-US"/>
-          </a:p>
-        </p:txBody>
-      </p:sp>
-      <p:sp>
-        <p:nvSpPr>
-          <p:cNvPr id="5" name="正方形/長方形 4">
-            <a:extLst>
-              <a:ext uri="{FF2B5EF4-FFF2-40B4-BE49-F238E27FC236}">
-                <a16:creationId xmlns:a16="http://schemas.microsoft.com/office/drawing/2014/main" id="{E3F629CD-8A52-44C3-9CF0-A505C6C51A39}"/>
-              </a:ext>
-            </a:extLst>
-          </p:cNvPr>
-          <p:cNvSpPr/>
-          <p:nvPr/>
-        </p:nvSpPr>
-        <p:spPr>
-          <a:xfrm>
-            <a:off x="3658925" y="1876507"/>
-            <a:ext cx="556592" cy="524786"/>
-          </a:xfrm>
-          <a:prstGeom prst="rect">
-            <a:avLst/>
-          </a:prstGeom>
-          <a:solidFill>
-            <a:schemeClr val="bg1"/>
-          </a:solidFill>
-        </p:spPr>
-        <p:style>
-          <a:lnRef idx="2">
-            <a:schemeClr val="accent1">
-              <a:shade val="50000"/>
-            </a:schemeClr>
-          </a:lnRef>
-          <a:fillRef idx="1">
-            <a:schemeClr val="accent1"/>
-          </a:fillRef>
-          <a:effectRef idx="0">
-            <a:schemeClr val="accent1"/>
-          </a:effectRef>
-          <a:fontRef idx="minor">
-            <a:schemeClr val="lt1"/>
-          </a:fontRef>
-        </p:style>
-        <p:txBody>
-          <a:bodyPr rtlCol="0" anchor="ctr"/>
-          <a:lstStyle/>
-          <a:p>
-            <a:pPr algn="ctr"/>
-            <a:endParaRPr kumimoji="1" lang="ja-JP" altLang="en-US"/>
-          </a:p>
-        </p:txBody>
-      </p:sp>
-      <p:sp>
-        <p:nvSpPr>
-          <p:cNvPr id="6" name="正方形/長方形 5">
-            <a:extLst>
-              <a:ext uri="{FF2B5EF4-FFF2-40B4-BE49-F238E27FC236}">
-                <a16:creationId xmlns:a16="http://schemas.microsoft.com/office/drawing/2014/main" id="{01982F06-8F96-49BE-B435-D1B0955399DE}"/>
-              </a:ext>
-            </a:extLst>
-          </p:cNvPr>
-          <p:cNvSpPr/>
-          <p:nvPr/>
-        </p:nvSpPr>
-        <p:spPr>
-          <a:xfrm>
-            <a:off x="1509423" y="3110285"/>
-            <a:ext cx="556592" cy="524786"/>
-          </a:xfrm>
-          <a:prstGeom prst="rect">
-            <a:avLst/>
-          </a:prstGeom>
-          <a:solidFill>
-            <a:schemeClr val="bg1"/>
-          </a:solidFill>
-        </p:spPr>
-        <p:style>
-          <a:lnRef idx="2">
-            <a:schemeClr val="accent1">
-              <a:shade val="50000"/>
-            </a:schemeClr>
-          </a:lnRef>
-          <a:fillRef idx="1">
-            <a:schemeClr val="accent1"/>
-          </a:fillRef>
-          <a:effectRef idx="0">
-            <a:schemeClr val="accent1"/>
-          </a:effectRef>
-          <a:fontRef idx="minor">
-            <a:schemeClr val="lt1"/>
-          </a:fontRef>
-        </p:style>
-        <p:txBody>
-          <a:bodyPr rtlCol="0" anchor="ctr"/>
-          <a:lstStyle/>
-          <a:p>
-            <a:pPr algn="ctr"/>
-            <a:endParaRPr kumimoji="1" lang="ja-JP" altLang="en-US"/>
-          </a:p>
-        </p:txBody>
-      </p:sp>
-      <p:sp>
-        <p:nvSpPr>
-          <p:cNvPr id="7" name="正方形/長方形 6">
-            <a:extLst>
-              <a:ext uri="{FF2B5EF4-FFF2-40B4-BE49-F238E27FC236}">
-                <a16:creationId xmlns:a16="http://schemas.microsoft.com/office/drawing/2014/main" id="{DE568A7E-8D3D-4D49-B4DC-9F6A3A38DF06}"/>
-              </a:ext>
-            </a:extLst>
-          </p:cNvPr>
-          <p:cNvSpPr/>
-          <p:nvPr/>
-        </p:nvSpPr>
-        <p:spPr>
-          <a:xfrm>
-            <a:off x="2981076" y="3110285"/>
-            <a:ext cx="556592" cy="524786"/>
-          </a:xfrm>
-          <a:prstGeom prst="rect">
-            <a:avLst/>
-          </a:prstGeom>
-          <a:solidFill>
-            <a:schemeClr val="bg1"/>
-          </a:solidFill>
-        </p:spPr>
-        <p:style>
-          <a:lnRef idx="2">
-            <a:schemeClr val="accent1">
-              <a:shade val="50000"/>
-            </a:schemeClr>
-          </a:lnRef>
-          <a:fillRef idx="1">
-            <a:schemeClr val="accent1"/>
-          </a:fillRef>
-          <a:effectRef idx="0">
-            <a:schemeClr val="accent1"/>
-          </a:effectRef>
-          <a:fontRef idx="minor">
-            <a:schemeClr val="lt1"/>
-          </a:fontRef>
-        </p:style>
-        <p:txBody>
-          <a:bodyPr rtlCol="0" anchor="ctr"/>
-          <a:lstStyle/>
-          <a:p>
-            <a:pPr algn="ctr"/>
-            <a:endParaRPr kumimoji="1" lang="ja-JP" altLang="en-US"/>
-          </a:p>
-        </p:txBody>
-      </p:sp>
-      <p:sp>
-        <p:nvSpPr>
-          <p:cNvPr id="8" name="正方形/長方形 7">
-            <a:extLst>
-              <a:ext uri="{FF2B5EF4-FFF2-40B4-BE49-F238E27FC236}">
-                <a16:creationId xmlns:a16="http://schemas.microsoft.com/office/drawing/2014/main" id="{FC20C732-B9B1-4C81-9F32-15CD1D56C1A3}"/>
-              </a:ext>
-            </a:extLst>
-          </p:cNvPr>
-          <p:cNvSpPr/>
-          <p:nvPr/>
-        </p:nvSpPr>
-        <p:spPr>
-          <a:xfrm>
-            <a:off x="4452730" y="3110285"/>
-            <a:ext cx="556592" cy="524786"/>
-          </a:xfrm>
-          <a:prstGeom prst="rect">
-            <a:avLst/>
-          </a:prstGeom>
-          <a:solidFill>
-            <a:schemeClr val="bg1"/>
-          </a:solidFill>
-        </p:spPr>
-        <p:style>
-          <a:lnRef idx="2">
-            <a:schemeClr val="accent1">
-              <a:shade val="50000"/>
-            </a:schemeClr>
-          </a:lnRef>
-          <a:fillRef idx="1">
-            <a:schemeClr val="accent1"/>
-          </a:fillRef>
-          <a:effectRef idx="0">
-            <a:schemeClr val="accent1"/>
-          </a:effectRef>
-          <a:fontRef idx="minor">
-            <a:schemeClr val="lt1"/>
-          </a:fontRef>
-        </p:style>
-        <p:txBody>
-          <a:bodyPr rtlCol="0" anchor="ctr"/>
-          <a:lstStyle/>
-          <a:p>
-            <a:pPr algn="ctr"/>
-            <a:endParaRPr kumimoji="1" lang="ja-JP" altLang="en-US"/>
-          </a:p>
-        </p:txBody>
-      </p:sp>
-      <p:sp>
-        <p:nvSpPr>
-          <p:cNvPr id="10" name="正方形/長方形 9">
-            <a:extLst>
-              <a:ext uri="{FF2B5EF4-FFF2-40B4-BE49-F238E27FC236}">
-                <a16:creationId xmlns:a16="http://schemas.microsoft.com/office/drawing/2014/main" id="{E0E1CA8D-3213-4655-9623-2FEF50A5EC6E}"/>
-              </a:ext>
-            </a:extLst>
-          </p:cNvPr>
-          <p:cNvSpPr/>
-          <p:nvPr/>
-        </p:nvSpPr>
-        <p:spPr>
-          <a:xfrm>
-            <a:off x="715618" y="4439477"/>
-            <a:ext cx="556592" cy="524786"/>
-          </a:xfrm>
-          <a:prstGeom prst="rect">
-            <a:avLst/>
-          </a:prstGeom>
-          <a:solidFill>
-            <a:schemeClr val="bg1"/>
-          </a:solidFill>
-        </p:spPr>
-        <p:style>
-          <a:lnRef idx="2">
-            <a:schemeClr val="accent1">
-              <a:shade val="50000"/>
-            </a:schemeClr>
-          </a:lnRef>
-          <a:fillRef idx="1">
-            <a:schemeClr val="accent1"/>
-          </a:fillRef>
-          <a:effectRef idx="0">
-            <a:schemeClr val="accent1"/>
-          </a:effectRef>
-          <a:fontRef idx="minor">
-            <a:schemeClr val="lt1"/>
-          </a:fontRef>
-        </p:style>
-        <p:txBody>
-          <a:bodyPr rtlCol="0" anchor="ctr"/>
-          <a:lstStyle/>
-          <a:p>
-            <a:pPr algn="ctr"/>
-            <a:endParaRPr kumimoji="1" lang="ja-JP" altLang="en-US"/>
-          </a:p>
-        </p:txBody>
-      </p:sp>
-      <p:sp>
-        <p:nvSpPr>
-          <p:cNvPr id="11" name="正方形/長方形 10">
-            <a:extLst>
-              <a:ext uri="{FF2B5EF4-FFF2-40B4-BE49-F238E27FC236}">
-                <a16:creationId xmlns:a16="http://schemas.microsoft.com/office/drawing/2014/main" id="{5090F0B9-23FA-477B-86F1-A9935B577960}"/>
-              </a:ext>
-            </a:extLst>
-          </p:cNvPr>
-          <p:cNvSpPr/>
-          <p:nvPr/>
-        </p:nvSpPr>
-        <p:spPr>
-          <a:xfrm>
-            <a:off x="2187271" y="4439477"/>
-            <a:ext cx="556592" cy="524786"/>
-          </a:xfrm>
-          <a:prstGeom prst="rect">
-            <a:avLst/>
-          </a:prstGeom>
-          <a:solidFill>
-            <a:schemeClr val="bg1"/>
-          </a:solidFill>
-        </p:spPr>
-        <p:style>
-          <a:lnRef idx="2">
-            <a:schemeClr val="accent1">
-              <a:shade val="50000"/>
-            </a:schemeClr>
-          </a:lnRef>
-          <a:fillRef idx="1">
-            <a:schemeClr val="accent1"/>
-          </a:fillRef>
-          <a:effectRef idx="0">
-            <a:schemeClr val="accent1"/>
-          </a:effectRef>
-          <a:fontRef idx="minor">
-            <a:schemeClr val="lt1"/>
-          </a:fontRef>
-        </p:style>
-        <p:txBody>
-          <a:bodyPr rtlCol="0" anchor="ctr"/>
-          <a:lstStyle/>
-          <a:p>
-            <a:pPr algn="ctr"/>
-            <a:endParaRPr kumimoji="1" lang="ja-JP" altLang="en-US"/>
-          </a:p>
-        </p:txBody>
-      </p:sp>
-      <p:sp>
-        <p:nvSpPr>
-          <p:cNvPr id="12" name="正方形/長方形 11">
-            <a:extLst>
-              <a:ext uri="{FF2B5EF4-FFF2-40B4-BE49-F238E27FC236}">
-                <a16:creationId xmlns:a16="http://schemas.microsoft.com/office/drawing/2014/main" id="{66F1F133-0327-4B35-A328-3BB0C1E82DA8}"/>
-              </a:ext>
-            </a:extLst>
-          </p:cNvPr>
-          <p:cNvSpPr/>
-          <p:nvPr/>
-        </p:nvSpPr>
-        <p:spPr>
-          <a:xfrm>
-            <a:off x="3658925" y="4439477"/>
-            <a:ext cx="556592" cy="524786"/>
-          </a:xfrm>
-          <a:prstGeom prst="rect">
-            <a:avLst/>
-          </a:prstGeom>
-          <a:solidFill>
-            <a:schemeClr val="bg1"/>
-          </a:solidFill>
-        </p:spPr>
-        <p:style>
-          <a:lnRef idx="2">
-            <a:schemeClr val="accent1">
-              <a:shade val="50000"/>
-            </a:schemeClr>
-          </a:lnRef>
-          <a:fillRef idx="1">
-            <a:schemeClr val="accent1"/>
-          </a:fillRef>
-          <a:effectRef idx="0">
-            <a:schemeClr val="accent1"/>
-          </a:effectRef>
-          <a:fontRef idx="minor">
-            <a:schemeClr val="lt1"/>
-          </a:fontRef>
-        </p:style>
-        <p:txBody>
-          <a:bodyPr rtlCol="0" anchor="ctr"/>
-          <a:lstStyle/>
-          <a:p>
-            <a:pPr algn="ctr"/>
-            <a:endParaRPr kumimoji="1" lang="ja-JP" altLang="en-US"/>
-          </a:p>
-        </p:txBody>
-      </p:sp>
-      <p:sp>
-        <p:nvSpPr>
-          <p:cNvPr id="13" name="正方形/長方形 12">
-            <a:extLst>
-              <a:ext uri="{FF2B5EF4-FFF2-40B4-BE49-F238E27FC236}">
-                <a16:creationId xmlns:a16="http://schemas.microsoft.com/office/drawing/2014/main" id="{A41593F4-686D-4574-8720-A7517EFAD40D}"/>
-              </a:ext>
-            </a:extLst>
-          </p:cNvPr>
-          <p:cNvSpPr/>
-          <p:nvPr/>
-        </p:nvSpPr>
-        <p:spPr>
-          <a:xfrm>
-            <a:off x="5130579" y="4439477"/>
-            <a:ext cx="556592" cy="524786"/>
-          </a:xfrm>
-          <a:prstGeom prst="rect">
-            <a:avLst/>
-          </a:prstGeom>
-          <a:solidFill>
-            <a:schemeClr val="bg1"/>
-          </a:solidFill>
-        </p:spPr>
-        <p:style>
-          <a:lnRef idx="2">
-            <a:schemeClr val="accent1">
-              <a:shade val="50000"/>
-            </a:schemeClr>
-          </a:lnRef>
-          <a:fillRef idx="1">
-            <a:schemeClr val="accent1"/>
-          </a:fillRef>
-          <a:effectRef idx="0">
-            <a:schemeClr val="accent1"/>
-          </a:effectRef>
-          <a:fontRef idx="minor">
-            <a:schemeClr val="lt1"/>
-          </a:fontRef>
-        </p:style>
-        <p:txBody>
-          <a:bodyPr rtlCol="0" anchor="ctr"/>
-          <a:lstStyle/>
-          <a:p>
-            <a:pPr algn="ctr"/>
-            <a:endParaRPr kumimoji="1" lang="ja-JP" altLang="en-US"/>
-          </a:p>
-        </p:txBody>
-      </p:sp>
-      <p:sp>
-        <p:nvSpPr>
-          <p:cNvPr id="16" name="テキスト ボックス 15">
-            <a:extLst>
-              <a:ext uri="{FF2B5EF4-FFF2-40B4-BE49-F238E27FC236}">
-                <a16:creationId xmlns:a16="http://schemas.microsoft.com/office/drawing/2014/main" id="{00692E82-3678-442E-B8B5-A0D5A58F9422}"/>
-              </a:ext>
-            </a:extLst>
-          </p:cNvPr>
-          <p:cNvSpPr txBox="1"/>
-          <p:nvPr/>
-        </p:nvSpPr>
-        <p:spPr>
-          <a:xfrm>
-            <a:off x="3076003" y="5390985"/>
-            <a:ext cx="461665" cy="948052"/>
-          </a:xfrm>
-          <a:prstGeom prst="rect">
-            <a:avLst/>
-          </a:prstGeom>
-          <a:noFill/>
-        </p:spPr>
-        <p:txBody>
-          <a:bodyPr vert="eaVert" wrap="square" rtlCol="0">
-            <a:spAutoFit/>
-          </a:bodyPr>
-          <a:lstStyle/>
-          <a:p>
-            <a:r>
-              <a:rPr kumimoji="1" lang="ja-JP" altLang="en-US" dirty="0"/>
-              <a:t>・・・</a:t>
-            </a:r>
-          </a:p>
-        </p:txBody>
-      </p:sp>
-      <p:cxnSp>
-        <p:nvCxnSpPr>
-          <p:cNvPr id="18" name="直線コネクタ 17">
-            <a:extLst>
-              <a:ext uri="{FF2B5EF4-FFF2-40B4-BE49-F238E27FC236}">
-                <a16:creationId xmlns:a16="http://schemas.microsoft.com/office/drawing/2014/main" id="{CEC13C25-F71F-4052-B9FC-92EBDE6F1A0D}"/>
-              </a:ext>
-            </a:extLst>
-          </p:cNvPr>
-          <p:cNvCxnSpPr>
-            <a:endCxn id="6" idx="0"/>
-          </p:cNvCxnSpPr>
-          <p:nvPr/>
-        </p:nvCxnSpPr>
-        <p:spPr>
-          <a:xfrm flipH="1">
-            <a:off x="1787719" y="2401293"/>
-            <a:ext cx="804406" cy="708992"/>
-          </a:xfrm>
-          <a:prstGeom prst="line">
-            <a:avLst/>
-          </a:prstGeom>
-        </p:spPr>
-        <p:style>
-          <a:lnRef idx="1">
-            <a:schemeClr val="accent1"/>
-          </a:lnRef>
-          <a:fillRef idx="0">
-            <a:schemeClr val="accent1"/>
-          </a:fillRef>
-          <a:effectRef idx="0">
-            <a:schemeClr val="accent1"/>
-          </a:effectRef>
-          <a:fontRef idx="minor">
-            <a:schemeClr val="tx1"/>
-          </a:fontRef>
-        </p:style>
-      </p:cxnSp>
-      <p:cxnSp>
-        <p:nvCxnSpPr>
-          <p:cNvPr id="20" name="直線コネクタ 19">
-            <a:extLst>
-              <a:ext uri="{FF2B5EF4-FFF2-40B4-BE49-F238E27FC236}">
-                <a16:creationId xmlns:a16="http://schemas.microsoft.com/office/drawing/2014/main" id="{00002174-0908-491F-B924-3A02FEF79B1D}"/>
-              </a:ext>
-            </a:extLst>
-          </p:cNvPr>
-          <p:cNvCxnSpPr>
-            <a:endCxn id="7" idx="0"/>
-          </p:cNvCxnSpPr>
-          <p:nvPr/>
-        </p:nvCxnSpPr>
-        <p:spPr>
-          <a:xfrm>
-            <a:off x="2608028" y="2401293"/>
-            <a:ext cx="651344" cy="708992"/>
-          </a:xfrm>
-          <a:prstGeom prst="line">
-            <a:avLst/>
-          </a:prstGeom>
-        </p:spPr>
-        <p:style>
-          <a:lnRef idx="1">
-            <a:schemeClr val="accent1"/>
-          </a:lnRef>
-          <a:fillRef idx="0">
-            <a:schemeClr val="accent1"/>
-          </a:fillRef>
-          <a:effectRef idx="0">
-            <a:schemeClr val="accent1"/>
-          </a:effectRef>
-          <a:fontRef idx="minor">
-            <a:schemeClr val="tx1"/>
-          </a:fontRef>
-        </p:style>
-      </p:cxnSp>
-      <p:cxnSp>
-        <p:nvCxnSpPr>
-          <p:cNvPr id="22" name="直線コネクタ 21">
-            <a:extLst>
-              <a:ext uri="{FF2B5EF4-FFF2-40B4-BE49-F238E27FC236}">
-                <a16:creationId xmlns:a16="http://schemas.microsoft.com/office/drawing/2014/main" id="{69701F18-9840-47CE-95C0-C50D478130B7}"/>
-              </a:ext>
-            </a:extLst>
-          </p:cNvPr>
-          <p:cNvCxnSpPr>
-            <a:stCxn id="4" idx="2"/>
-          </p:cNvCxnSpPr>
-          <p:nvPr/>
-        </p:nvCxnSpPr>
-        <p:spPr>
-          <a:xfrm>
-            <a:off x="2584174" y="2401293"/>
-            <a:ext cx="2170706" cy="682626"/>
-          </a:xfrm>
-          <a:prstGeom prst="line">
-            <a:avLst/>
-          </a:prstGeom>
-        </p:spPr>
-        <p:style>
-          <a:lnRef idx="1">
-            <a:schemeClr val="accent1"/>
-          </a:lnRef>
-          <a:fillRef idx="0">
-            <a:schemeClr val="accent1"/>
-          </a:fillRef>
-          <a:effectRef idx="0">
-            <a:schemeClr val="accent1"/>
-          </a:effectRef>
-          <a:fontRef idx="minor">
-            <a:schemeClr val="tx1"/>
-          </a:fontRef>
-        </p:style>
-      </p:cxnSp>
-      <p:cxnSp>
-        <p:nvCxnSpPr>
-          <p:cNvPr id="24" name="直線コネクタ 23">
-            <a:extLst>
-              <a:ext uri="{FF2B5EF4-FFF2-40B4-BE49-F238E27FC236}">
-                <a16:creationId xmlns:a16="http://schemas.microsoft.com/office/drawing/2014/main" id="{191F19FA-D66D-44B5-84B3-4DCE7F794F50}"/>
-              </a:ext>
-            </a:extLst>
-          </p:cNvPr>
-          <p:cNvCxnSpPr>
-            <a:cxnSpLocks/>
-            <a:stCxn id="5" idx="2"/>
-            <a:endCxn id="6" idx="0"/>
-          </p:cNvCxnSpPr>
-          <p:nvPr/>
-        </p:nvCxnSpPr>
-        <p:spPr>
-          <a:xfrm flipH="1">
-            <a:off x="1787719" y="2401293"/>
-            <a:ext cx="2149502" cy="708992"/>
-          </a:xfrm>
-          <a:prstGeom prst="line">
-            <a:avLst/>
-          </a:prstGeom>
-        </p:spPr>
-        <p:style>
-          <a:lnRef idx="1">
-            <a:schemeClr val="accent1"/>
-          </a:lnRef>
-          <a:fillRef idx="0">
-            <a:schemeClr val="accent1"/>
-          </a:fillRef>
-          <a:effectRef idx="0">
-            <a:schemeClr val="accent1"/>
-          </a:effectRef>
-          <a:fontRef idx="minor">
-            <a:schemeClr val="tx1"/>
-          </a:fontRef>
-        </p:style>
-      </p:cxnSp>
-      <p:cxnSp>
-        <p:nvCxnSpPr>
-          <p:cNvPr id="27" name="直線コネクタ 26">
-            <a:extLst>
-              <a:ext uri="{FF2B5EF4-FFF2-40B4-BE49-F238E27FC236}">
-                <a16:creationId xmlns:a16="http://schemas.microsoft.com/office/drawing/2014/main" id="{BC8509E3-626E-45C8-9C55-E851D89C76C2}"/>
-              </a:ext>
-            </a:extLst>
-          </p:cNvPr>
-          <p:cNvCxnSpPr>
-            <a:stCxn id="5" idx="2"/>
-          </p:cNvCxnSpPr>
-          <p:nvPr/>
-        </p:nvCxnSpPr>
-        <p:spPr>
-          <a:xfrm flipH="1">
-            <a:off x="3259372" y="2401293"/>
-            <a:ext cx="677849" cy="682626"/>
-          </a:xfrm>
-          <a:prstGeom prst="line">
-            <a:avLst/>
-          </a:prstGeom>
-        </p:spPr>
-        <p:style>
-          <a:lnRef idx="1">
-            <a:schemeClr val="accent1"/>
-          </a:lnRef>
-          <a:fillRef idx="0">
-            <a:schemeClr val="accent1"/>
-          </a:fillRef>
-          <a:effectRef idx="0">
-            <a:schemeClr val="accent1"/>
-          </a:effectRef>
-          <a:fontRef idx="minor">
-            <a:schemeClr val="tx1"/>
-          </a:fontRef>
-        </p:style>
-      </p:cxnSp>
-      <p:cxnSp>
-        <p:nvCxnSpPr>
-          <p:cNvPr id="29" name="直線コネクタ 28">
-            <a:extLst>
-              <a:ext uri="{FF2B5EF4-FFF2-40B4-BE49-F238E27FC236}">
-                <a16:creationId xmlns:a16="http://schemas.microsoft.com/office/drawing/2014/main" id="{39CE0193-5986-4374-A104-0653674ED7C1}"/>
-              </a:ext>
-            </a:extLst>
-          </p:cNvPr>
-          <p:cNvCxnSpPr/>
-          <p:nvPr/>
-        </p:nvCxnSpPr>
-        <p:spPr>
-          <a:xfrm>
-            <a:off x="3910716" y="2401293"/>
-            <a:ext cx="844164" cy="682626"/>
-          </a:xfrm>
-          <a:prstGeom prst="line">
-            <a:avLst/>
-          </a:prstGeom>
-        </p:spPr>
-        <p:style>
-          <a:lnRef idx="1">
-            <a:schemeClr val="accent1"/>
-          </a:lnRef>
-          <a:fillRef idx="0">
-            <a:schemeClr val="accent1"/>
-          </a:fillRef>
-          <a:effectRef idx="0">
-            <a:schemeClr val="accent1"/>
-          </a:effectRef>
-          <a:fontRef idx="minor">
-            <a:schemeClr val="tx1"/>
-          </a:fontRef>
-        </p:style>
-      </p:cxnSp>
-      <p:cxnSp>
-        <p:nvCxnSpPr>
-          <p:cNvPr id="31" name="直線コネクタ 30">
-            <a:extLst>
-              <a:ext uri="{FF2B5EF4-FFF2-40B4-BE49-F238E27FC236}">
-                <a16:creationId xmlns:a16="http://schemas.microsoft.com/office/drawing/2014/main" id="{B4E3BE8D-BB31-4503-826E-80D8337E042C}"/>
-              </a:ext>
-            </a:extLst>
-          </p:cNvPr>
-          <p:cNvCxnSpPr>
-            <a:stCxn id="6" idx="2"/>
-            <a:endCxn id="10" idx="0"/>
-          </p:cNvCxnSpPr>
-          <p:nvPr/>
-        </p:nvCxnSpPr>
-        <p:spPr>
-          <a:xfrm flipH="1">
-            <a:off x="993914" y="3635071"/>
-            <a:ext cx="793805" cy="804406"/>
-          </a:xfrm>
-          <a:prstGeom prst="line">
-            <a:avLst/>
-          </a:prstGeom>
-        </p:spPr>
-        <p:style>
-          <a:lnRef idx="1">
-            <a:schemeClr val="accent1"/>
-          </a:lnRef>
-          <a:fillRef idx="0">
-            <a:schemeClr val="accent1"/>
-          </a:fillRef>
-          <a:effectRef idx="0">
-            <a:schemeClr val="accent1"/>
-          </a:effectRef>
-          <a:fontRef idx="minor">
-            <a:schemeClr val="tx1"/>
-          </a:fontRef>
-        </p:style>
-      </p:cxnSp>
-      <p:cxnSp>
-        <p:nvCxnSpPr>
-          <p:cNvPr id="33" name="直線コネクタ 32">
-            <a:extLst>
-              <a:ext uri="{FF2B5EF4-FFF2-40B4-BE49-F238E27FC236}">
-                <a16:creationId xmlns:a16="http://schemas.microsoft.com/office/drawing/2014/main" id="{0D91A185-411C-4C88-85CC-37417C8CA6CA}"/>
-              </a:ext>
-            </a:extLst>
-          </p:cNvPr>
-          <p:cNvCxnSpPr>
-            <a:endCxn id="11" idx="0"/>
-          </p:cNvCxnSpPr>
-          <p:nvPr/>
-        </p:nvCxnSpPr>
-        <p:spPr>
-          <a:xfrm>
-            <a:off x="1787719" y="3635071"/>
-            <a:ext cx="677848" cy="804406"/>
-          </a:xfrm>
-          <a:prstGeom prst="line">
-            <a:avLst/>
-          </a:prstGeom>
-        </p:spPr>
-        <p:style>
-          <a:lnRef idx="1">
-            <a:schemeClr val="accent1"/>
-          </a:lnRef>
-          <a:fillRef idx="0">
-            <a:schemeClr val="accent1"/>
-          </a:fillRef>
-          <a:effectRef idx="0">
-            <a:schemeClr val="accent1"/>
-          </a:effectRef>
-          <a:fontRef idx="minor">
-            <a:schemeClr val="tx1"/>
-          </a:fontRef>
-        </p:style>
-      </p:cxnSp>
-      <p:cxnSp>
-        <p:nvCxnSpPr>
-          <p:cNvPr id="35" name="直線コネクタ 34">
-            <a:extLst>
-              <a:ext uri="{FF2B5EF4-FFF2-40B4-BE49-F238E27FC236}">
-                <a16:creationId xmlns:a16="http://schemas.microsoft.com/office/drawing/2014/main" id="{6673F9CD-7419-49BA-923F-67D775B42382}"/>
-              </a:ext>
-            </a:extLst>
-          </p:cNvPr>
-          <p:cNvCxnSpPr>
-            <a:cxnSpLocks/>
-            <a:endCxn id="12" idx="0"/>
-          </p:cNvCxnSpPr>
-          <p:nvPr/>
-        </p:nvCxnSpPr>
-        <p:spPr>
-          <a:xfrm>
-            <a:off x="1787718" y="3635071"/>
-            <a:ext cx="2149503" cy="804406"/>
-          </a:xfrm>
-          <a:prstGeom prst="line">
-            <a:avLst/>
-          </a:prstGeom>
-        </p:spPr>
-        <p:style>
-          <a:lnRef idx="1">
-            <a:schemeClr val="accent1"/>
-          </a:lnRef>
-          <a:fillRef idx="0">
-            <a:schemeClr val="accent1"/>
-          </a:fillRef>
-          <a:effectRef idx="0">
-            <a:schemeClr val="accent1"/>
-          </a:effectRef>
-          <a:fontRef idx="minor">
-            <a:schemeClr val="tx1"/>
-          </a:fontRef>
-        </p:style>
-      </p:cxnSp>
-      <p:cxnSp>
-        <p:nvCxnSpPr>
-          <p:cNvPr id="38" name="直線コネクタ 37">
-            <a:extLst>
-              <a:ext uri="{FF2B5EF4-FFF2-40B4-BE49-F238E27FC236}">
-                <a16:creationId xmlns:a16="http://schemas.microsoft.com/office/drawing/2014/main" id="{E1000655-A155-4DAA-BF41-9BF96E220661}"/>
-              </a:ext>
-            </a:extLst>
-          </p:cNvPr>
-          <p:cNvCxnSpPr>
-            <a:cxnSpLocks/>
-            <a:endCxn id="13" idx="0"/>
-          </p:cNvCxnSpPr>
-          <p:nvPr/>
-        </p:nvCxnSpPr>
-        <p:spPr>
-          <a:xfrm>
-            <a:off x="1787719" y="3635071"/>
-            <a:ext cx="3621156" cy="804406"/>
-          </a:xfrm>
-          <a:prstGeom prst="line">
-            <a:avLst/>
-          </a:prstGeom>
-        </p:spPr>
-        <p:style>
-          <a:lnRef idx="1">
-            <a:schemeClr val="accent1"/>
-          </a:lnRef>
-          <a:fillRef idx="0">
-            <a:schemeClr val="accent1"/>
-          </a:fillRef>
-          <a:effectRef idx="0">
-            <a:schemeClr val="accent1"/>
-          </a:effectRef>
-          <a:fontRef idx="minor">
-            <a:schemeClr val="tx1"/>
-          </a:fontRef>
-        </p:style>
-      </p:cxnSp>
-      <p:cxnSp>
-        <p:nvCxnSpPr>
-          <p:cNvPr id="42" name="直線コネクタ 41">
-            <a:extLst>
-              <a:ext uri="{FF2B5EF4-FFF2-40B4-BE49-F238E27FC236}">
-                <a16:creationId xmlns:a16="http://schemas.microsoft.com/office/drawing/2014/main" id="{3DE9CE51-EB1F-4FA2-8A54-1AADD284862F}"/>
-              </a:ext>
-            </a:extLst>
-          </p:cNvPr>
-          <p:cNvCxnSpPr>
-            <a:stCxn id="7" idx="2"/>
-            <a:endCxn id="11" idx="0"/>
-          </p:cNvCxnSpPr>
-          <p:nvPr/>
-        </p:nvCxnSpPr>
-        <p:spPr>
-          <a:xfrm flipH="1">
-            <a:off x="2465567" y="3635071"/>
-            <a:ext cx="793805" cy="804406"/>
-          </a:xfrm>
-          <a:prstGeom prst="line">
-            <a:avLst/>
-          </a:prstGeom>
-        </p:spPr>
-        <p:style>
-          <a:lnRef idx="1">
-            <a:schemeClr val="accent1"/>
-          </a:lnRef>
-          <a:fillRef idx="0">
-            <a:schemeClr val="accent1"/>
-          </a:fillRef>
-          <a:effectRef idx="0">
-            <a:schemeClr val="accent1"/>
-          </a:effectRef>
-          <a:fontRef idx="minor">
-            <a:schemeClr val="tx1"/>
-          </a:fontRef>
-        </p:style>
-      </p:cxnSp>
-      <p:cxnSp>
-        <p:nvCxnSpPr>
-          <p:cNvPr id="44" name="直線コネクタ 43">
-            <a:extLst>
-              <a:ext uri="{FF2B5EF4-FFF2-40B4-BE49-F238E27FC236}">
-                <a16:creationId xmlns:a16="http://schemas.microsoft.com/office/drawing/2014/main" id="{417FB06D-4ED4-4F93-B5A5-E5392291904F}"/>
-              </a:ext>
-            </a:extLst>
-          </p:cNvPr>
-          <p:cNvCxnSpPr/>
-          <p:nvPr/>
-        </p:nvCxnSpPr>
-        <p:spPr>
-          <a:xfrm flipH="1">
-            <a:off x="993914" y="3661437"/>
-            <a:ext cx="2265458" cy="751674"/>
-          </a:xfrm>
-          <a:prstGeom prst="line">
-            <a:avLst/>
-          </a:prstGeom>
-        </p:spPr>
-        <p:style>
-          <a:lnRef idx="1">
-            <a:schemeClr val="accent1"/>
-          </a:lnRef>
-          <a:fillRef idx="0">
-            <a:schemeClr val="accent1"/>
-          </a:fillRef>
-          <a:effectRef idx="0">
-            <a:schemeClr val="accent1"/>
-          </a:effectRef>
-          <a:fontRef idx="minor">
-            <a:schemeClr val="tx1"/>
-          </a:fontRef>
-        </p:style>
-      </p:cxnSp>
-      <p:cxnSp>
-        <p:nvCxnSpPr>
-          <p:cNvPr id="46" name="直線コネクタ 45">
-            <a:extLst>
-              <a:ext uri="{FF2B5EF4-FFF2-40B4-BE49-F238E27FC236}">
-                <a16:creationId xmlns:a16="http://schemas.microsoft.com/office/drawing/2014/main" id="{2305D643-DFDC-492E-8346-6D126EC14AAE}"/>
-              </a:ext>
-            </a:extLst>
-          </p:cNvPr>
-          <p:cNvCxnSpPr>
-            <a:stCxn id="7" idx="2"/>
-            <a:endCxn id="12" idx="0"/>
-          </p:cNvCxnSpPr>
-          <p:nvPr/>
-        </p:nvCxnSpPr>
-        <p:spPr>
-          <a:xfrm>
-            <a:off x="3259372" y="3635071"/>
-            <a:ext cx="677849" cy="804406"/>
-          </a:xfrm>
-          <a:prstGeom prst="line">
-            <a:avLst/>
-          </a:prstGeom>
-        </p:spPr>
-        <p:style>
-          <a:lnRef idx="1">
-            <a:schemeClr val="accent1"/>
-          </a:lnRef>
-          <a:fillRef idx="0">
-            <a:schemeClr val="accent1"/>
-          </a:fillRef>
-          <a:effectRef idx="0">
-            <a:schemeClr val="accent1"/>
-          </a:effectRef>
-          <a:fontRef idx="minor">
-            <a:schemeClr val="tx1"/>
-          </a:fontRef>
-        </p:style>
-      </p:cxnSp>
-      <p:cxnSp>
-        <p:nvCxnSpPr>
-          <p:cNvPr id="48" name="直線コネクタ 47">
-            <a:extLst>
-              <a:ext uri="{FF2B5EF4-FFF2-40B4-BE49-F238E27FC236}">
-                <a16:creationId xmlns:a16="http://schemas.microsoft.com/office/drawing/2014/main" id="{B7956FB6-8EEE-4AE3-8639-69C4DA3F15D5}"/>
-              </a:ext>
-            </a:extLst>
-          </p:cNvPr>
-          <p:cNvCxnSpPr>
-            <a:stCxn id="7" idx="2"/>
-            <a:endCxn id="13" idx="0"/>
-          </p:cNvCxnSpPr>
-          <p:nvPr/>
-        </p:nvCxnSpPr>
-        <p:spPr>
-          <a:xfrm>
-            <a:off x="3259372" y="3635071"/>
-            <a:ext cx="2149503" cy="804406"/>
-          </a:xfrm>
-          <a:prstGeom prst="line">
-            <a:avLst/>
-          </a:prstGeom>
-        </p:spPr>
-        <p:style>
-          <a:lnRef idx="1">
-            <a:schemeClr val="accent1"/>
-          </a:lnRef>
-          <a:fillRef idx="0">
-            <a:schemeClr val="accent1"/>
-          </a:fillRef>
-          <a:effectRef idx="0">
-            <a:schemeClr val="accent1"/>
-          </a:effectRef>
-          <a:fontRef idx="minor">
-            <a:schemeClr val="tx1"/>
-          </a:fontRef>
-        </p:style>
-      </p:cxnSp>
-      <p:cxnSp>
-        <p:nvCxnSpPr>
-          <p:cNvPr id="51" name="直線コネクタ 50">
-            <a:extLst>
-              <a:ext uri="{FF2B5EF4-FFF2-40B4-BE49-F238E27FC236}">
-                <a16:creationId xmlns:a16="http://schemas.microsoft.com/office/drawing/2014/main" id="{97C86CA6-516D-4065-879B-BE38D880B96E}"/>
-              </a:ext>
-            </a:extLst>
-          </p:cNvPr>
-          <p:cNvCxnSpPr>
-            <a:stCxn id="8" idx="2"/>
-            <a:endCxn id="11" idx="0"/>
-          </p:cNvCxnSpPr>
-          <p:nvPr/>
-        </p:nvCxnSpPr>
-        <p:spPr>
-          <a:xfrm flipH="1">
-            <a:off x="2465567" y="3635071"/>
-            <a:ext cx="2265459" cy="804406"/>
-          </a:xfrm>
-          <a:prstGeom prst="line">
-            <a:avLst/>
-          </a:prstGeom>
-        </p:spPr>
-        <p:style>
-          <a:lnRef idx="1">
-            <a:schemeClr val="accent1"/>
-          </a:lnRef>
-          <a:fillRef idx="0">
-            <a:schemeClr val="accent1"/>
-          </a:fillRef>
-          <a:effectRef idx="0">
-            <a:schemeClr val="accent1"/>
-          </a:effectRef>
-          <a:fontRef idx="minor">
-            <a:schemeClr val="tx1"/>
-          </a:fontRef>
-        </p:style>
-      </p:cxnSp>
-      <p:cxnSp>
-        <p:nvCxnSpPr>
-          <p:cNvPr id="53" name="直線コネクタ 52">
-            <a:extLst>
-              <a:ext uri="{FF2B5EF4-FFF2-40B4-BE49-F238E27FC236}">
-                <a16:creationId xmlns:a16="http://schemas.microsoft.com/office/drawing/2014/main" id="{5D4EBD54-3F29-45CD-B1EA-9BB85F9CB78A}"/>
-              </a:ext>
-            </a:extLst>
-          </p:cNvPr>
-          <p:cNvCxnSpPr>
-            <a:stCxn id="8" idx="2"/>
-            <a:endCxn id="10" idx="0"/>
-          </p:cNvCxnSpPr>
-          <p:nvPr/>
-        </p:nvCxnSpPr>
-        <p:spPr>
-          <a:xfrm flipH="1">
-            <a:off x="993914" y="3635071"/>
-            <a:ext cx="3737112" cy="804406"/>
-          </a:xfrm>
-          <a:prstGeom prst="line">
-            <a:avLst/>
-          </a:prstGeom>
-        </p:spPr>
-        <p:style>
-          <a:lnRef idx="1">
-            <a:schemeClr val="accent1"/>
-          </a:lnRef>
-          <a:fillRef idx="0">
-            <a:schemeClr val="accent1"/>
-          </a:fillRef>
-          <a:effectRef idx="0">
-            <a:schemeClr val="accent1"/>
-          </a:effectRef>
-          <a:fontRef idx="minor">
-            <a:schemeClr val="tx1"/>
-          </a:fontRef>
-        </p:style>
-      </p:cxnSp>
-      <p:sp>
-        <p:nvSpPr>
-          <p:cNvPr id="54" name="テキスト ボックス 53">
-            <a:extLst>
-              <a:ext uri="{FF2B5EF4-FFF2-40B4-BE49-F238E27FC236}">
-                <a16:creationId xmlns:a16="http://schemas.microsoft.com/office/drawing/2014/main" id="{B594D67B-7D33-467A-8261-BC43129870C3}"/>
-              </a:ext>
-            </a:extLst>
-          </p:cNvPr>
-          <p:cNvSpPr txBox="1"/>
-          <p:nvPr/>
-        </p:nvSpPr>
-        <p:spPr>
-          <a:xfrm>
-            <a:off x="6384896" y="2451521"/>
-            <a:ext cx="4071067" cy="369332"/>
-          </a:xfrm>
-          <a:prstGeom prst="rect">
-            <a:avLst/>
-          </a:prstGeom>
-          <a:noFill/>
-        </p:spPr>
-        <p:txBody>
-          <a:bodyPr wrap="square" rtlCol="0">
-            <a:spAutoFit/>
-          </a:bodyPr>
-          <a:lstStyle/>
-          <a:p>
-            <a:r>
-              <a:rPr kumimoji="1" lang="en-US" altLang="ja-JP" dirty="0"/>
-              <a:t>1</a:t>
-            </a:r>
-            <a:r>
-              <a:rPr kumimoji="1" lang="ja-JP" altLang="en-US" dirty="0"/>
-              <a:t>段目と</a:t>
-            </a:r>
-            <a:r>
-              <a:rPr kumimoji="1" lang="en-US" altLang="ja-JP" dirty="0"/>
-              <a:t>2</a:t>
-            </a:r>
-            <a:r>
-              <a:rPr kumimoji="1" lang="ja-JP" altLang="en-US" dirty="0"/>
-              <a:t>段目の間で被覆構造で配線</a:t>
-            </a:r>
-          </a:p>
-        </p:txBody>
-      </p:sp>
-      <p:sp>
-        <p:nvSpPr>
-          <p:cNvPr id="55" name="テキスト ボックス 54">
-            <a:extLst>
-              <a:ext uri="{FF2B5EF4-FFF2-40B4-BE49-F238E27FC236}">
-                <a16:creationId xmlns:a16="http://schemas.microsoft.com/office/drawing/2014/main" id="{6EF93462-9BD2-40EB-94C1-EEE10E4F27E5}"/>
-              </a:ext>
-            </a:extLst>
-          </p:cNvPr>
-          <p:cNvSpPr txBox="1"/>
-          <p:nvPr/>
-        </p:nvSpPr>
-        <p:spPr>
-          <a:xfrm>
-            <a:off x="7284718" y="3852482"/>
-            <a:ext cx="4071067" cy="369332"/>
-          </a:xfrm>
-          <a:prstGeom prst="rect">
-            <a:avLst/>
-          </a:prstGeom>
-          <a:noFill/>
-        </p:spPr>
-        <p:txBody>
-          <a:bodyPr wrap="square" rtlCol="0">
-            <a:spAutoFit/>
-          </a:bodyPr>
-          <a:lstStyle/>
-          <a:p>
-            <a:r>
-              <a:rPr kumimoji="1" lang="en-US" altLang="ja-JP" dirty="0"/>
-              <a:t>2</a:t>
-            </a:r>
-            <a:r>
-              <a:rPr kumimoji="1" lang="ja-JP" altLang="en-US" dirty="0"/>
-              <a:t>段目と</a:t>
-            </a:r>
-            <a:r>
-              <a:rPr lang="en-US" altLang="ja-JP" dirty="0"/>
-              <a:t>3</a:t>
-            </a:r>
-            <a:r>
-              <a:rPr kumimoji="1" lang="ja-JP" altLang="en-US" dirty="0"/>
-              <a:t>段目の間で被覆構造で配線</a:t>
-            </a:r>
           </a:p>
         </p:txBody>
       </p:sp>
     </p:spTree>
     <p:extLst>
       <p:ext uri="{BB962C8B-B14F-4D97-AF65-F5344CB8AC3E}">
-        <p14:creationId xmlns:p14="http://schemas.microsoft.com/office/powerpoint/2010/main" val="805764399"/>
+        <p14:creationId xmlns:p14="http://schemas.microsoft.com/office/powerpoint/2010/main" val="1318545586"/>
       </p:ext>
     </p:extLst>
   </p:cSld>
